--- a/deliverables/04_presentation/Bayan_Submission.pptx
+++ b/deliverables/04_presentation/Bayan_Submission.pptx
@@ -15,6 +15,7 @@
     <p:sldId id="260" r:id="rId24"/>
     <p:sldId id="261" r:id="rId25"/>
     <p:sldId id="262" r:id="rId26"/>
+    <p:sldId id="263" r:id="rId27"/>
   </p:sldIdLst>
   <p:sldSz cx="9902825" cy="6858000"/>
   <p:notesSz cx="6858000" cy="9144000"/>
@@ -1033,45 +1034,6 @@
               <a:t>Do people agree with the scorer? Six raters, two hundred ninety tasks: zero point eight five. One reader with dyslexia rated thirty outputs too: seventeen easier, four harder.</a:t>
             </a:r>
           </a:p>
-          <a:p/>
-          <a:p>
-            <a:r>
-              <a:t>[Sanad]</a:t>
-            </a:r>
-          </a:p>
-          <a:p/>
-          <a:p>
-            <a:r>
-              <a:t>▶ Step 1 (on arrival; Scatter: v0.3 in the app keeps the most meaning (82%) and cuts 5.2 words)</a:t>
-            </a:r>
-          </a:p>
-          <a:p>
-            <a:r>
-              <a:t>More simplification usually means less meaning. v0.3 breaks the pattern: in the app it keeps the most meaning, eighty-two percent, and still cuts five words off the longest clause.</a:t>
-            </a:r>
-          </a:p>
-          <a:p/>
-          <a:p>
-            <a:r>
-              <a:t>▶ Step 2 (step 2 (auto); In the app: v0.3 minus v0.2 behind the same checks: +3.4 words, harder words out, meaning kept as well (not significant))</a:t>
-            </a:r>
-          </a:p>
-          <a:p>
-            <a:r>
-              <a:t>Against v0.2 behind the same checks, it cuts three and a half more words off the longest clause, removes more hard words, and keeps the meaning as well. Not significantly different.</a:t>
-            </a:r>
-          </a:p>
-          <a:p/>
-          <a:p>
-            <a:r>
-              <a:t>▶ Step 3 (step 3 (auto); Blind rating, 18 sentences: v0.3 easier on 86% of changed outputs vs 60%; 8 of 8 votes)</a:t>
-            </a:r>
-          </a:p>
-          <a:p>
-            <a:r>
-              <a:t>People agree. In a blind rating, the team found v0.3's changed outputs easier eighty-six percent of the time, against sixty for v0.2, and the reader with dyslexia chose v0.3 in every comparison it was in.</a:t>
-            </a:r>
-          </a:p>
         </p:txBody>
       </p:sp>
       <p:sp>
@@ -1145,12 +1107,34 @@
           <a:p/>
           <a:p>
             <a:r>
-              <a:t>▶ Step 1 (on arrival; Heading 'What the app does' and the video recording under it)</a:t>
+              <a:t>▶ Step 1 (on arrival; Scatter: v0.3 in the app keeps the most meaning (82%) and cuts 5.2 words)</a:t>
             </a:r>
           </a:p>
           <a:p>
             <a:r>
-              <a:t>On a phone: select, tap tabseet, and it reads aloud. Scripture never reaches the model, and code checks that numbers survive.</a:t>
+              <a:t>More simplification usually means less meaning. v0.3 breaks the pattern: in the app it keeps the most meaning, eighty-two percent, and still cuts five words off the longest clause.</a:t>
+            </a:r>
+          </a:p>
+          <a:p/>
+          <a:p>
+            <a:r>
+              <a:t>▶ Step 2 (step 2 (auto); In the app: v0.3 minus v0.2 behind the same checks: +3.4 words, harder words out, meaning kept as well (not significant))</a:t>
+            </a:r>
+          </a:p>
+          <a:p>
+            <a:r>
+              <a:t>Against v0.2 behind the same checks, it cuts three and a half more words off the longest clause, removes more hard words, and keeps the meaning as well. Not significantly different.</a:t>
+            </a:r>
+          </a:p>
+          <a:p/>
+          <a:p>
+            <a:r>
+              <a:t>▶ Step 3 (step 3 (auto); Blind rating, 18 sentences: v0.3 easier on 86% of changed outputs vs 60%; 8 of 8 votes)</a:t>
+            </a:r>
+          </a:p>
+          <a:p>
+            <a:r>
+              <a:t>People agree. In a blind rating, the team found v0.3's changed outputs easier eighty-six percent of the time, against sixty for v0.2, and the reader with dyslexia chose v0.3 in every comparison it was in.</a:t>
             </a:r>
           </a:p>
         </p:txBody>
@@ -1176,6 +1160,87 @@
 </file>
 
 <file path=ppt/notesSlides/notesSlide7.xml><?xml version="1.0" encoding="utf-8"?>
+<p:notes xmlns:a="http://schemas.openxmlformats.org/drawingml/2006/main" xmlns:p="http://schemas.openxmlformats.org/presentationml/2006/main" xmlns:r="http://schemas.openxmlformats.org/officeDocument/2006/relationships">
+  <p:cSld>
+    <p:spTree>
+      <p:nvGrpSpPr>
+        <p:cNvPr id="1" name=""/>
+        <p:cNvGrpSpPr/>
+        <p:nvPr/>
+      </p:nvGrpSpPr>
+      <p:grpSpPr>
+        <a:xfrm>
+          <a:off x="0" y="0"/>
+          <a:ext cx="0" cy="0"/>
+          <a:chOff x="0" y="0"/>
+          <a:chExt cx="0" cy="0"/>
+        </a:xfrm>
+      </p:grpSpPr>
+      <p:sp>
+        <p:nvSpPr>
+          <p:cNvPr id="2" name="Slide Image Placeholder 1"/>
+          <p:cNvSpPr>
+            <a:spLocks noGrp="1"/>
+          </p:cNvSpPr>
+          <p:nvPr>
+            <p:ph type="sldImg" idx="2"/>
+          </p:nvPr>
+        </p:nvSpPr>
+        <p:spPr/>
+      </p:sp>
+      <p:sp>
+        <p:nvSpPr>
+          <p:cNvPr id="3" name="Notes Placeholder 2"/>
+          <p:cNvSpPr>
+            <a:spLocks noGrp="1"/>
+          </p:cNvSpPr>
+          <p:nvPr>
+            <p:ph type="body" idx="3" sz="quarter"/>
+          </p:nvPr>
+        </p:nvSpPr>
+        <p:spPr/>
+        <p:txBody>
+          <a:bodyPr/>
+          <a:lstStyle/>
+          <a:p>
+            <a:r>
+              <a:t>[Sanad]</a:t>
+            </a:r>
+          </a:p>
+          <a:p/>
+          <a:p>
+            <a:r>
+              <a:t>▶ Step 1 (on arrival; Heading 'What the app does' and the video recording under it)</a:t>
+            </a:r>
+          </a:p>
+          <a:p>
+            <a:r>
+              <a:t>On a phone: select, tap tabseet, and it reads aloud. Scripture never reaches the model, and code checks that numbers survive.</a:t>
+            </a:r>
+          </a:p>
+        </p:txBody>
+      </p:sp>
+      <p:sp>
+        <p:nvSpPr>
+          <p:cNvPr id="4" name="Slide Number Placeholder 3"/>
+          <p:cNvSpPr>
+            <a:spLocks noGrp="1"/>
+          </p:cNvSpPr>
+          <p:nvPr>
+            <p:ph type="sldNum" idx="5" sz="quarter"/>
+          </p:nvPr>
+        </p:nvSpPr>
+        <p:spPr/>
+      </p:sp>
+    </p:spTree>
+  </p:cSld>
+  <p:clrMapOvr>
+    <a:masterClrMapping/>
+  </p:clrMapOvr>
+</p:notes>
+</file>
+
+<file path=ppt/notesSlides/notesSlide8.xml><?xml version="1.0" encoding="utf-8"?>
 <p:notes xmlns:a="http://schemas.openxmlformats.org/drawingml/2006/main" xmlns:p="http://schemas.openxmlformats.org/presentationml/2006/main" xmlns:r="http://schemas.openxmlformats.org/officeDocument/2006/relationships">
   <p:cSld>
     <p:spTree>
@@ -9727,7 +9792,7 @@
                 <a:cs typeface="Readex Pro"/>
                 <a:ea typeface="Readex Pro"/>
               </a:rPr>
-              <a:t>1 / 7</a:t>
+              <a:t>1 / 8</a:t>
             </a:r>
           </a:p>
         </p:txBody>
@@ -10482,7 +10547,7 @@
                 <a:cs typeface="Readex Pro"/>
                 <a:ea typeface="Readex Pro"/>
               </a:rPr>
-              <a:t>2 / 7</a:t>
+              <a:t>2 / 8</a:t>
             </a:r>
           </a:p>
         </p:txBody>
@@ -12862,7 +12927,7 @@
                 <a:cs typeface="Readex Pro"/>
                 <a:ea typeface="Readex Pro"/>
               </a:rPr>
-              <a:t>3 / 7</a:t>
+              <a:t>3 / 8</a:t>
             </a:r>
           </a:p>
         </p:txBody>
@@ -15931,7 +15996,7 @@
                 <a:cs typeface="Readex Pro"/>
                 <a:ea typeface="Readex Pro"/>
               </a:rPr>
-              <a:t>4 / 7</a:t>
+              <a:t>4 / 8</a:t>
             </a:r>
           </a:p>
         </p:txBody>
@@ -18168,7 +18233,7 @@
                 <a:cs typeface="Readex Pro"/>
                 <a:ea typeface="Readex Pro"/>
               </a:rPr>
-              <a:t>5 / 7</a:t>
+              <a:t>5 / 8</a:t>
             </a:r>
           </a:p>
         </p:txBody>
@@ -18182,7 +18247,7 @@
         <p:spPr>
           <a:xfrm>
             <a:off x="594360" y="1417320"/>
-            <a:ext cx="5029200" cy="365760"/>
+            <a:ext cx="8714232" cy="320040"/>
           </a:xfrm>
           <a:prstGeom prst="rect">
             <a:avLst/>
@@ -18205,25 +18270,1149 @@
                 <a:cs typeface="Readex Pro"/>
                 <a:ea typeface="Readex Pro"/>
               </a:rPr>
-              <a:t>How do we know a simplification is good?</a:t>
+              <a:t>Copying is the baseline to beat</a:t>
             </a:r>
           </a:p>
         </p:txBody>
       </p:sp>
       <p:sp>
         <p:nvSpPr>
-          <p:cNvPr id="10" name="Rounded Rectangle 9"/>
+          <p:cNvPr id="10" name="TextBox 9"/>
+          <p:cNvSpPr txBox="1"/>
+          <p:nvPr/>
+        </p:nvSpPr>
+        <p:spPr>
+          <a:xfrm>
+            <a:off x="3703320" y="1581911"/>
+            <a:ext cx="1188720" cy="256032"/>
+          </a:xfrm>
+          <a:prstGeom prst="rect">
+            <a:avLst/>
+          </a:prstGeom>
+          <a:noFill/>
+        </p:spPr>
+        <p:txBody>
+          <a:bodyPr wrap="square" lIns="0" rIns="0" tIns="0" bIns="0" anchor="ctr">
+            <a:spAutoFit/>
+          </a:bodyPr>
+          <a:lstStyle/>
+          <a:p>
+            <a:pPr algn="ctr"/>
+            <a:r>
+              <a:rPr sz="1000" b="0">
+                <a:solidFill>
+                  <a:srgbClr val="6F6B5E"/>
+                </a:solidFill>
+                <a:latin typeface="Readex Pro"/>
+                <a:cs typeface="Readex Pro"/>
+                <a:ea typeface="Readex Pro"/>
+              </a:rPr>
+              <a:t>meaning kept</a:t>
+            </a:r>
+          </a:p>
+        </p:txBody>
+      </p:sp>
+      <p:sp>
+        <p:nvSpPr>
+          <p:cNvPr id="11" name="TextBox 10"/>
+          <p:cNvSpPr txBox="1"/>
+          <p:nvPr/>
+        </p:nvSpPr>
+        <p:spPr>
+          <a:xfrm>
+            <a:off x="5029200" y="1581911"/>
+            <a:ext cx="1554480" cy="256032"/>
+          </a:xfrm>
+          <a:prstGeom prst="rect">
+            <a:avLst/>
+          </a:prstGeom>
+          <a:noFill/>
+        </p:spPr>
+        <p:txBody>
+          <a:bodyPr wrap="square" lIns="0" rIns="0" tIns="0" bIns="0" anchor="ctr">
+            <a:spAutoFit/>
+          </a:bodyPr>
+          <a:lstStyle/>
+          <a:p>
+            <a:pPr algn="ctr">
+              <a:lnSpc>
+                <a:spcPct val="90000"/>
+              </a:lnSpc>
+            </a:pPr>
+            <a:r>
+              <a:rPr sz="1000" b="0">
+                <a:solidFill>
+                  <a:srgbClr val="6F6B5E"/>
+                </a:solidFill>
+                <a:latin typeface="Readex Pro"/>
+                <a:cs typeface="Readex Pro"/>
+                <a:ea typeface="Readex Pro"/>
+              </a:rPr>
+              <a:t>words cut from</a:t>
+            </a:r>
+          </a:p>
+          <a:p>
+            <a:pPr algn="ctr">
+              <a:lnSpc>
+                <a:spcPct val="90000"/>
+              </a:lnSpc>
+            </a:pPr>
+            <a:r>
+              <a:rPr sz="1000" b="0">
+                <a:solidFill>
+                  <a:srgbClr val="6F6B5E"/>
+                </a:solidFill>
+                <a:latin typeface="Readex Pro"/>
+                <a:cs typeface="Readex Pro"/>
+                <a:ea typeface="Readex Pro"/>
+              </a:rPr>
+              <a:t>longest clause</a:t>
+            </a:r>
+          </a:p>
+        </p:txBody>
+      </p:sp>
+      <p:sp>
+        <p:nvSpPr>
+          <p:cNvPr id="12" name="Rounded Rectangle 11"/>
           <p:cNvSpPr/>
           <p:nvPr/>
         </p:nvSpPr>
         <p:spPr>
           <a:xfrm>
-            <a:off x="594360" y="1965960"/>
-            <a:ext cx="2560320" cy="347472"/>
+            <a:off x="594360" y="1874519"/>
+            <a:ext cx="6126480" cy="329184"/>
           </a:xfrm>
           <a:prstGeom prst="roundRect">
             <a:avLst>
-              <a:gd name="adj" fmla="val 47368"/>
+              <a:gd name="adj" fmla="val 27777"/>
+            </a:avLst>
+          </a:prstGeom>
+          <a:solidFill>
+            <a:srgbClr val="EEDDC7"/>
+          </a:solidFill>
+          <a:ln w="15875">
+            <a:solidFill>
+              <a:srgbClr val="EEDDC7"/>
+            </a:solidFill>
+          </a:ln>
+          <a:effectLst/>
+        </p:spPr>
+        <p:style>
+          <a:lnRef idx="1">
+            <a:schemeClr val="accent1"/>
+          </a:lnRef>
+          <a:fillRef idx="3">
+            <a:schemeClr val="accent1"/>
+          </a:fillRef>
+          <a:effectRef idx="2">
+            <a:schemeClr val="accent1"/>
+          </a:effectRef>
+          <a:fontRef idx="minor">
+            <a:schemeClr val="lt1"/>
+          </a:fontRef>
+        </p:style>
+        <p:txBody>
+          <a:bodyPr rtlCol="0" anchor="ctr"/>
+          <a:lstStyle/>
+          <a:p>
+            <a:pPr algn="ctr"/>
+          </a:p>
+        </p:txBody>
+      </p:sp>
+      <p:sp>
+        <p:nvSpPr>
+          <p:cNvPr id="13" name="TextBox 12"/>
+          <p:cNvSpPr txBox="1"/>
+          <p:nvPr/>
+        </p:nvSpPr>
+        <p:spPr>
+          <a:xfrm>
+            <a:off x="731520" y="1911095"/>
+            <a:ext cx="2834640" cy="256032"/>
+          </a:xfrm>
+          <a:prstGeom prst="rect">
+            <a:avLst/>
+          </a:prstGeom>
+          <a:noFill/>
+        </p:spPr>
+        <p:txBody>
+          <a:bodyPr wrap="square" lIns="0" rIns="0" tIns="0" bIns="0" anchor="ctr">
+            <a:spAutoFit/>
+          </a:bodyPr>
+          <a:lstStyle/>
+          <a:p>
+            <a:pPr algn="l"/>
+            <a:r>
+              <a:rPr sz="1200" b="1">
+                <a:solidFill>
+                  <a:srgbClr val="282824"/>
+                </a:solidFill>
+                <a:latin typeface="Readex Pro"/>
+                <a:cs typeface="Readex Pro"/>
+                <a:ea typeface="Readex Pro"/>
+              </a:rPr>
+              <a:t>Copy the input</a:t>
+            </a:r>
+          </a:p>
+        </p:txBody>
+      </p:sp>
+      <p:sp>
+        <p:nvSpPr>
+          <p:cNvPr id="14" name="TextBox 13"/>
+          <p:cNvSpPr txBox="1"/>
+          <p:nvPr/>
+        </p:nvSpPr>
+        <p:spPr>
+          <a:xfrm>
+            <a:off x="3703320" y="1911095"/>
+            <a:ext cx="1188720" cy="256032"/>
+          </a:xfrm>
+          <a:prstGeom prst="rect">
+            <a:avLst/>
+          </a:prstGeom>
+          <a:noFill/>
+        </p:spPr>
+        <p:txBody>
+          <a:bodyPr wrap="square" lIns="0" rIns="0" tIns="0" bIns="0" anchor="ctr">
+            <a:spAutoFit/>
+          </a:bodyPr>
+          <a:lstStyle/>
+          <a:p>
+            <a:pPr algn="ctr"/>
+            <a:r>
+              <a:rPr sz="1200" b="1">
+                <a:solidFill>
+                  <a:srgbClr val="8A5E35"/>
+                </a:solidFill>
+                <a:latin typeface="Readex Pro"/>
+                <a:cs typeface="Readex Pro"/>
+                <a:ea typeface="Readex Pro"/>
+              </a:rPr>
+              <a:t>100%</a:t>
+            </a:r>
+          </a:p>
+        </p:txBody>
+      </p:sp>
+      <p:sp>
+        <p:nvSpPr>
+          <p:cNvPr id="15" name="TextBox 14"/>
+          <p:cNvSpPr txBox="1"/>
+          <p:nvPr/>
+        </p:nvSpPr>
+        <p:spPr>
+          <a:xfrm>
+            <a:off x="5029200" y="1911095"/>
+            <a:ext cx="1554480" cy="256032"/>
+          </a:xfrm>
+          <a:prstGeom prst="rect">
+            <a:avLst/>
+          </a:prstGeom>
+          <a:noFill/>
+        </p:spPr>
+        <p:txBody>
+          <a:bodyPr wrap="square" lIns="0" rIns="0" tIns="0" bIns="0" anchor="ctr">
+            <a:spAutoFit/>
+          </a:bodyPr>
+          <a:lstStyle/>
+          <a:p>
+            <a:pPr algn="ctr"/>
+            <a:r>
+              <a:rPr sz="1200" b="1">
+                <a:solidFill>
+                  <a:srgbClr val="B5533C"/>
+                </a:solidFill>
+                <a:latin typeface="Readex Pro"/>
+                <a:cs typeface="Readex Pro"/>
+                <a:ea typeface="Readex Pro"/>
+              </a:rPr>
+              <a:t>0</a:t>
+            </a:r>
+          </a:p>
+        </p:txBody>
+      </p:sp>
+      <p:sp>
+        <p:nvSpPr>
+          <p:cNvPr id="16" name="Rounded Rectangle 15"/>
+          <p:cNvSpPr/>
+          <p:nvPr/>
+        </p:nvSpPr>
+        <p:spPr>
+          <a:xfrm>
+            <a:off x="594360" y="2258568"/>
+            <a:ext cx="6126480" cy="329184"/>
+          </a:xfrm>
+          <a:prstGeom prst="roundRect">
+            <a:avLst>
+              <a:gd name="adj" fmla="val 27777"/>
+            </a:avLst>
+          </a:prstGeom>
+          <a:solidFill>
+            <a:srgbClr val="EFE9D9"/>
+          </a:solidFill>
+          <a:ln w="15875">
+            <a:solidFill>
+              <a:srgbClr val="E6DFCC"/>
+            </a:solidFill>
+          </a:ln>
+          <a:effectLst/>
+        </p:spPr>
+        <p:style>
+          <a:lnRef idx="1">
+            <a:schemeClr val="accent1"/>
+          </a:lnRef>
+          <a:fillRef idx="3">
+            <a:schemeClr val="accent1"/>
+          </a:fillRef>
+          <a:effectRef idx="2">
+            <a:schemeClr val="accent1"/>
+          </a:effectRef>
+          <a:fontRef idx="minor">
+            <a:schemeClr val="lt1"/>
+          </a:fontRef>
+        </p:style>
+        <p:txBody>
+          <a:bodyPr rtlCol="0" anchor="ctr"/>
+          <a:lstStyle/>
+          <a:p>
+            <a:pPr algn="ctr"/>
+          </a:p>
+        </p:txBody>
+      </p:sp>
+      <p:sp>
+        <p:nvSpPr>
+          <p:cNvPr id="17" name="TextBox 16"/>
+          <p:cNvSpPr txBox="1"/>
+          <p:nvPr/>
+        </p:nvSpPr>
+        <p:spPr>
+          <a:xfrm>
+            <a:off x="731520" y="2295144"/>
+            <a:ext cx="2834640" cy="256032"/>
+          </a:xfrm>
+          <a:prstGeom prst="rect">
+            <a:avLst/>
+          </a:prstGeom>
+          <a:noFill/>
+        </p:spPr>
+        <p:txBody>
+          <a:bodyPr wrap="square" lIns="0" rIns="0" tIns="0" bIns="0" anchor="ctr">
+            <a:spAutoFit/>
+          </a:bodyPr>
+          <a:lstStyle/>
+          <a:p>
+            <a:pPr algn="l"/>
+            <a:r>
+              <a:rPr sz="1200" b="0">
+                <a:solidFill>
+                  <a:srgbClr val="282824"/>
+                </a:solidFill>
+                <a:latin typeface="Readex Pro"/>
+                <a:cs typeface="Readex Pro"/>
+                <a:ea typeface="Readex Pro"/>
+              </a:rPr>
+              <a:t>v0.1</a:t>
+            </a:r>
+          </a:p>
+        </p:txBody>
+      </p:sp>
+      <p:sp>
+        <p:nvSpPr>
+          <p:cNvPr id="18" name="TextBox 17"/>
+          <p:cNvSpPr txBox="1"/>
+          <p:nvPr/>
+        </p:nvSpPr>
+        <p:spPr>
+          <a:xfrm>
+            <a:off x="3703320" y="2295144"/>
+            <a:ext cx="1188720" cy="256032"/>
+          </a:xfrm>
+          <a:prstGeom prst="rect">
+            <a:avLst/>
+          </a:prstGeom>
+          <a:noFill/>
+        </p:spPr>
+        <p:txBody>
+          <a:bodyPr wrap="square" lIns="0" rIns="0" tIns="0" bIns="0" anchor="ctr">
+            <a:spAutoFit/>
+          </a:bodyPr>
+          <a:lstStyle/>
+          <a:p>
+            <a:pPr algn="ctr"/>
+            <a:r>
+              <a:rPr sz="1200" b="1">
+                <a:solidFill>
+                  <a:srgbClr val="8A5E35"/>
+                </a:solidFill>
+                <a:latin typeface="Readex Pro"/>
+                <a:cs typeface="Readex Pro"/>
+                <a:ea typeface="Readex Pro"/>
+              </a:rPr>
+              <a:t>76%</a:t>
+            </a:r>
+          </a:p>
+        </p:txBody>
+      </p:sp>
+      <p:sp>
+        <p:nvSpPr>
+          <p:cNvPr id="19" name="TextBox 18"/>
+          <p:cNvSpPr txBox="1"/>
+          <p:nvPr/>
+        </p:nvSpPr>
+        <p:spPr>
+          <a:xfrm>
+            <a:off x="5029200" y="2295144"/>
+            <a:ext cx="1554480" cy="256032"/>
+          </a:xfrm>
+          <a:prstGeom prst="rect">
+            <a:avLst/>
+          </a:prstGeom>
+          <a:noFill/>
+        </p:spPr>
+        <p:txBody>
+          <a:bodyPr wrap="square" lIns="0" rIns="0" tIns="0" bIns="0" anchor="ctr">
+            <a:spAutoFit/>
+          </a:bodyPr>
+          <a:lstStyle/>
+          <a:p>
+            <a:pPr algn="ctr"/>
+            <a:r>
+              <a:rPr sz="1200" b="1">
+                <a:solidFill>
+                  <a:srgbClr val="B5533C"/>
+                </a:solidFill>
+                <a:latin typeface="Readex Pro"/>
+                <a:cs typeface="Readex Pro"/>
+                <a:ea typeface="Readex Pro"/>
+              </a:rPr>
+              <a:t>0</a:t>
+            </a:r>
+          </a:p>
+        </p:txBody>
+      </p:sp>
+      <p:sp>
+        <p:nvSpPr>
+          <p:cNvPr id="20" name="Rounded Rectangle 19"/>
+          <p:cNvSpPr/>
+          <p:nvPr/>
+        </p:nvSpPr>
+        <p:spPr>
+          <a:xfrm>
+            <a:off x="594360" y="2642615"/>
+            <a:ext cx="6126480" cy="329184"/>
+          </a:xfrm>
+          <a:prstGeom prst="roundRect">
+            <a:avLst>
+              <a:gd name="adj" fmla="val 27777"/>
+            </a:avLst>
+          </a:prstGeom>
+          <a:solidFill>
+            <a:srgbClr val="EFE9D9"/>
+          </a:solidFill>
+          <a:ln w="15875">
+            <a:solidFill>
+              <a:srgbClr val="E6DFCC"/>
+            </a:solidFill>
+          </a:ln>
+          <a:effectLst/>
+        </p:spPr>
+        <p:style>
+          <a:lnRef idx="1">
+            <a:schemeClr val="accent1"/>
+          </a:lnRef>
+          <a:fillRef idx="3">
+            <a:schemeClr val="accent1"/>
+          </a:fillRef>
+          <a:effectRef idx="2">
+            <a:schemeClr val="accent1"/>
+          </a:effectRef>
+          <a:fontRef idx="minor">
+            <a:schemeClr val="lt1"/>
+          </a:fontRef>
+        </p:style>
+        <p:txBody>
+          <a:bodyPr rtlCol="0" anchor="ctr"/>
+          <a:lstStyle/>
+          <a:p>
+            <a:pPr algn="ctr"/>
+          </a:p>
+        </p:txBody>
+      </p:sp>
+      <p:sp>
+        <p:nvSpPr>
+          <p:cNvPr id="21" name="TextBox 20"/>
+          <p:cNvSpPr txBox="1"/>
+          <p:nvPr/>
+        </p:nvSpPr>
+        <p:spPr>
+          <a:xfrm>
+            <a:off x="731520" y="2679191"/>
+            <a:ext cx="2834640" cy="256032"/>
+          </a:xfrm>
+          <a:prstGeom prst="rect">
+            <a:avLst/>
+          </a:prstGeom>
+          <a:noFill/>
+        </p:spPr>
+        <p:txBody>
+          <a:bodyPr wrap="square" lIns="0" rIns="0" tIns="0" bIns="0" anchor="ctr">
+            <a:spAutoFit/>
+          </a:bodyPr>
+          <a:lstStyle/>
+          <a:p>
+            <a:pPr algn="l"/>
+            <a:r>
+              <a:rPr sz="1200" b="0">
+                <a:solidFill>
+                  <a:srgbClr val="282824"/>
+                </a:solidFill>
+                <a:latin typeface="Readex Pro"/>
+                <a:cs typeface="Readex Pro"/>
+                <a:ea typeface="Readex Pro"/>
+              </a:rPr>
+              <a:t>v0.2 (AraT5v2)</a:t>
+            </a:r>
+          </a:p>
+        </p:txBody>
+      </p:sp>
+      <p:sp>
+        <p:nvSpPr>
+          <p:cNvPr id="22" name="TextBox 21"/>
+          <p:cNvSpPr txBox="1"/>
+          <p:nvPr/>
+        </p:nvSpPr>
+        <p:spPr>
+          <a:xfrm>
+            <a:off x="3703320" y="2679191"/>
+            <a:ext cx="1188720" cy="256032"/>
+          </a:xfrm>
+          <a:prstGeom prst="rect">
+            <a:avLst/>
+          </a:prstGeom>
+          <a:noFill/>
+        </p:spPr>
+        <p:txBody>
+          <a:bodyPr wrap="square" lIns="0" rIns="0" tIns="0" bIns="0" anchor="ctr">
+            <a:spAutoFit/>
+          </a:bodyPr>
+          <a:lstStyle/>
+          <a:p>
+            <a:pPr algn="ctr"/>
+            <a:r>
+              <a:rPr sz="1200" b="1">
+                <a:solidFill>
+                  <a:srgbClr val="8A5E35"/>
+                </a:solidFill>
+                <a:latin typeface="Readex Pro"/>
+                <a:cs typeface="Readex Pro"/>
+                <a:ea typeface="Readex Pro"/>
+              </a:rPr>
+              <a:t>68%</a:t>
+            </a:r>
+          </a:p>
+        </p:txBody>
+      </p:sp>
+      <p:sp>
+        <p:nvSpPr>
+          <p:cNvPr id="23" name="TextBox 22"/>
+          <p:cNvSpPr txBox="1"/>
+          <p:nvPr/>
+        </p:nvSpPr>
+        <p:spPr>
+          <a:xfrm>
+            <a:off x="5029200" y="2679191"/>
+            <a:ext cx="1554480" cy="256032"/>
+          </a:xfrm>
+          <a:prstGeom prst="rect">
+            <a:avLst/>
+          </a:prstGeom>
+          <a:noFill/>
+        </p:spPr>
+        <p:txBody>
+          <a:bodyPr wrap="square" lIns="0" rIns="0" tIns="0" bIns="0" anchor="ctr">
+            <a:spAutoFit/>
+          </a:bodyPr>
+          <a:lstStyle/>
+          <a:p>
+            <a:pPr algn="ctr"/>
+            <a:r>
+              <a:rPr sz="1200" b="1">
+                <a:solidFill>
+                  <a:srgbClr val="8A5E35"/>
+                </a:solidFill>
+                <a:latin typeface="Readex Pro"/>
+                <a:cs typeface="Readex Pro"/>
+                <a:ea typeface="Readex Pro"/>
+              </a:rPr>
+              <a:t>4.5</a:t>
+            </a:r>
+          </a:p>
+        </p:txBody>
+      </p:sp>
+      <p:sp>
+        <p:nvSpPr>
+          <p:cNvPr id="24" name="Rounded Rectangle 23"/>
+          <p:cNvSpPr/>
+          <p:nvPr/>
+        </p:nvSpPr>
+        <p:spPr>
+          <a:xfrm>
+            <a:off x="594360" y="3026663"/>
+            <a:ext cx="6126480" cy="329184"/>
+          </a:xfrm>
+          <a:prstGeom prst="roundRect">
+            <a:avLst>
+              <a:gd name="adj" fmla="val 27777"/>
+            </a:avLst>
+          </a:prstGeom>
+          <a:solidFill>
+            <a:srgbClr val="EFE9D9"/>
+          </a:solidFill>
+          <a:ln w="15875">
+            <a:solidFill>
+              <a:srgbClr val="E6DFCC"/>
+            </a:solidFill>
+          </a:ln>
+          <a:effectLst/>
+        </p:spPr>
+        <p:style>
+          <a:lnRef idx="1">
+            <a:schemeClr val="accent1"/>
+          </a:lnRef>
+          <a:fillRef idx="3">
+            <a:schemeClr val="accent1"/>
+          </a:fillRef>
+          <a:effectRef idx="2">
+            <a:schemeClr val="accent1"/>
+          </a:effectRef>
+          <a:fontRef idx="minor">
+            <a:schemeClr val="lt1"/>
+          </a:fontRef>
+        </p:style>
+        <p:txBody>
+          <a:bodyPr rtlCol="0" anchor="ctr"/>
+          <a:lstStyle/>
+          <a:p>
+            <a:pPr algn="ctr"/>
+          </a:p>
+        </p:txBody>
+      </p:sp>
+      <p:sp>
+        <p:nvSpPr>
+          <p:cNvPr id="25" name="TextBox 24"/>
+          <p:cNvSpPr txBox="1"/>
+          <p:nvPr/>
+        </p:nvSpPr>
+        <p:spPr>
+          <a:xfrm>
+            <a:off x="731520" y="3063239"/>
+            <a:ext cx="2834640" cy="256032"/>
+          </a:xfrm>
+          <a:prstGeom prst="rect">
+            <a:avLst/>
+          </a:prstGeom>
+          <a:noFill/>
+        </p:spPr>
+        <p:txBody>
+          <a:bodyPr wrap="square" lIns="0" rIns="0" tIns="0" bIns="0" anchor="ctr">
+            <a:spAutoFit/>
+          </a:bodyPr>
+          <a:lstStyle/>
+          <a:p>
+            <a:pPr algn="l"/>
+            <a:r>
+              <a:rPr sz="1200" b="0">
+                <a:solidFill>
+                  <a:srgbClr val="282824"/>
+                </a:solidFill>
+                <a:latin typeface="Readex Pro"/>
+                <a:cs typeface="Readex Pro"/>
+                <a:ea typeface="Readex Pro"/>
+              </a:rPr>
+              <a:t>v0.2-Fast (AraBART)</a:t>
+            </a:r>
+          </a:p>
+        </p:txBody>
+      </p:sp>
+      <p:sp>
+        <p:nvSpPr>
+          <p:cNvPr id="26" name="TextBox 25"/>
+          <p:cNvSpPr txBox="1"/>
+          <p:nvPr/>
+        </p:nvSpPr>
+        <p:spPr>
+          <a:xfrm>
+            <a:off x="3703320" y="3063239"/>
+            <a:ext cx="1188720" cy="256032"/>
+          </a:xfrm>
+          <a:prstGeom prst="rect">
+            <a:avLst/>
+          </a:prstGeom>
+          <a:noFill/>
+        </p:spPr>
+        <p:txBody>
+          <a:bodyPr wrap="square" lIns="0" rIns="0" tIns="0" bIns="0" anchor="ctr">
+            <a:spAutoFit/>
+          </a:bodyPr>
+          <a:lstStyle/>
+          <a:p>
+            <a:pPr algn="ctr"/>
+            <a:r>
+              <a:rPr sz="1200" b="1">
+                <a:solidFill>
+                  <a:srgbClr val="8A5E35"/>
+                </a:solidFill>
+                <a:latin typeface="Readex Pro"/>
+                <a:cs typeface="Readex Pro"/>
+                <a:ea typeface="Readex Pro"/>
+              </a:rPr>
+              <a:t>51%</a:t>
+            </a:r>
+          </a:p>
+        </p:txBody>
+      </p:sp>
+      <p:sp>
+        <p:nvSpPr>
+          <p:cNvPr id="27" name="TextBox 26"/>
+          <p:cNvSpPr txBox="1"/>
+          <p:nvPr/>
+        </p:nvSpPr>
+        <p:spPr>
+          <a:xfrm>
+            <a:off x="5029200" y="3063239"/>
+            <a:ext cx="1554480" cy="256032"/>
+          </a:xfrm>
+          <a:prstGeom prst="rect">
+            <a:avLst/>
+          </a:prstGeom>
+          <a:noFill/>
+        </p:spPr>
+        <p:txBody>
+          <a:bodyPr wrap="square" lIns="0" rIns="0" tIns="0" bIns="0" anchor="ctr">
+            <a:spAutoFit/>
+          </a:bodyPr>
+          <a:lstStyle/>
+          <a:p>
+            <a:pPr algn="ctr"/>
+            <a:r>
+              <a:rPr sz="1200" b="1">
+                <a:solidFill>
+                  <a:srgbClr val="8A5E35"/>
+                </a:solidFill>
+                <a:latin typeface="Readex Pro"/>
+                <a:cs typeface="Readex Pro"/>
+                <a:ea typeface="Readex Pro"/>
+              </a:rPr>
+              <a:t>4.9</a:t>
+            </a:r>
+          </a:p>
+        </p:txBody>
+      </p:sp>
+      <p:sp>
+        <p:nvSpPr>
+          <p:cNvPr id="28" name="Rounded Rectangle 27"/>
+          <p:cNvSpPr/>
+          <p:nvPr/>
+        </p:nvSpPr>
+        <p:spPr>
+          <a:xfrm>
+            <a:off x="594360" y="3410711"/>
+            <a:ext cx="6126480" cy="329184"/>
+          </a:xfrm>
+          <a:prstGeom prst="roundRect">
+            <a:avLst>
+              <a:gd name="adj" fmla="val 27777"/>
+            </a:avLst>
+          </a:prstGeom>
+          <a:solidFill>
+            <a:srgbClr val="EFE9D9"/>
+          </a:solidFill>
+          <a:ln w="15875">
+            <a:solidFill>
+              <a:srgbClr val="E6DFCC"/>
+            </a:solidFill>
+          </a:ln>
+          <a:effectLst/>
+        </p:spPr>
+        <p:style>
+          <a:lnRef idx="1">
+            <a:schemeClr val="accent1"/>
+          </a:lnRef>
+          <a:fillRef idx="3">
+            <a:schemeClr val="accent1"/>
+          </a:fillRef>
+          <a:effectRef idx="2">
+            <a:schemeClr val="accent1"/>
+          </a:effectRef>
+          <a:fontRef idx="minor">
+            <a:schemeClr val="lt1"/>
+          </a:fontRef>
+        </p:style>
+        <p:txBody>
+          <a:bodyPr rtlCol="0" anchor="ctr"/>
+          <a:lstStyle/>
+          <a:p>
+            <a:pPr algn="ctr"/>
+          </a:p>
+        </p:txBody>
+      </p:sp>
+      <p:sp>
+        <p:nvSpPr>
+          <p:cNvPr id="29" name="TextBox 28"/>
+          <p:cNvSpPr txBox="1"/>
+          <p:nvPr/>
+        </p:nvSpPr>
+        <p:spPr>
+          <a:xfrm>
+            <a:off x="731520" y="3447287"/>
+            <a:ext cx="2834640" cy="256032"/>
+          </a:xfrm>
+          <a:prstGeom prst="rect">
+            <a:avLst/>
+          </a:prstGeom>
+          <a:noFill/>
+        </p:spPr>
+        <p:txBody>
+          <a:bodyPr wrap="square" lIns="0" rIns="0" tIns="0" bIns="0" anchor="ctr">
+            <a:spAutoFit/>
+          </a:bodyPr>
+          <a:lstStyle/>
+          <a:p>
+            <a:pPr algn="l"/>
+            <a:r>
+              <a:rPr sz="1200" b="1">
+                <a:solidFill>
+                  <a:srgbClr val="282824"/>
+                </a:solidFill>
+                <a:latin typeface="Readex Pro"/>
+                <a:cs typeface="Readex Pro"/>
+                <a:ea typeface="Readex Pro"/>
+              </a:rPr>
+              <a:t>v0.3</a:t>
+            </a:r>
+          </a:p>
+        </p:txBody>
+      </p:sp>
+      <p:sp>
+        <p:nvSpPr>
+          <p:cNvPr id="30" name="TextBox 29"/>
+          <p:cNvSpPr txBox="1"/>
+          <p:nvPr/>
+        </p:nvSpPr>
+        <p:spPr>
+          <a:xfrm>
+            <a:off x="3703320" y="3447287"/>
+            <a:ext cx="1188720" cy="256032"/>
+          </a:xfrm>
+          <a:prstGeom prst="rect">
+            <a:avLst/>
+          </a:prstGeom>
+          <a:noFill/>
+        </p:spPr>
+        <p:txBody>
+          <a:bodyPr wrap="square" lIns="0" rIns="0" tIns="0" bIns="0" anchor="ctr">
+            <a:spAutoFit/>
+          </a:bodyPr>
+          <a:lstStyle/>
+          <a:p>
+            <a:pPr algn="ctr"/>
+            <a:r>
+              <a:rPr sz="1200" b="1">
+                <a:solidFill>
+                  <a:srgbClr val="8A5E35"/>
+                </a:solidFill>
+                <a:latin typeface="Readex Pro"/>
+                <a:cs typeface="Readex Pro"/>
+                <a:ea typeface="Readex Pro"/>
+              </a:rPr>
+              <a:t>69%</a:t>
+            </a:r>
+          </a:p>
+        </p:txBody>
+      </p:sp>
+      <p:sp>
+        <p:nvSpPr>
+          <p:cNvPr id="31" name="TextBox 30"/>
+          <p:cNvSpPr txBox="1"/>
+          <p:nvPr/>
+        </p:nvSpPr>
+        <p:spPr>
+          <a:xfrm>
+            <a:off x="5029200" y="3447287"/>
+            <a:ext cx="1554480" cy="256032"/>
+          </a:xfrm>
+          <a:prstGeom prst="rect">
+            <a:avLst/>
+          </a:prstGeom>
+          <a:noFill/>
+        </p:spPr>
+        <p:txBody>
+          <a:bodyPr wrap="square" lIns="0" rIns="0" tIns="0" bIns="0" anchor="ctr">
+            <a:spAutoFit/>
+          </a:bodyPr>
+          <a:lstStyle/>
+          <a:p>
+            <a:pPr algn="ctr"/>
+            <a:r>
+              <a:rPr sz="1200" b="1">
+                <a:solidFill>
+                  <a:srgbClr val="8A5E35"/>
+                </a:solidFill>
+                <a:latin typeface="Readex Pro"/>
+                <a:cs typeface="Readex Pro"/>
+                <a:ea typeface="Readex Pro"/>
+              </a:rPr>
+              <a:t>9.5</a:t>
+            </a:r>
+          </a:p>
+        </p:txBody>
+      </p:sp>
+      <p:sp>
+        <p:nvSpPr>
+          <p:cNvPr id="32" name="TextBox 31"/>
+          <p:cNvSpPr txBox="1"/>
+          <p:nvPr/>
+        </p:nvSpPr>
+        <p:spPr>
+          <a:xfrm>
+            <a:off x="594360" y="3904488"/>
+            <a:ext cx="6126480" cy="256032"/>
+          </a:xfrm>
+          <a:prstGeom prst="rect">
+            <a:avLst/>
+          </a:prstGeom>
+          <a:noFill/>
+        </p:spPr>
+        <p:txBody>
+          <a:bodyPr wrap="square" lIns="0" rIns="0" tIns="0" bIns="0" anchor="ctr">
+            <a:spAutoFit/>
+          </a:bodyPr>
+          <a:lstStyle/>
+          <a:p>
+            <a:pPr algn="l"/>
+            <a:r>
+              <a:rPr sz="950" b="0">
+                <a:solidFill>
+                  <a:srgbClr val="6F6B5E"/>
+                </a:solidFill>
+                <a:latin typeface="Readex Pro"/>
+                <a:cs typeface="Readex Pro"/>
+                <a:ea typeface="Readex Pro"/>
+              </a:rPr>
+              <a:t>test core items, as trained · words cut = longest clause, before minus after</a:t>
+            </a:r>
+          </a:p>
+        </p:txBody>
+      </p:sp>
+      <p:sp>
+        <p:nvSpPr>
+          <p:cNvPr id="33" name="Rounded Rectangle 32"/>
+          <p:cNvSpPr/>
+          <p:nvPr/>
+        </p:nvSpPr>
+        <p:spPr>
+          <a:xfrm>
+            <a:off x="6903720" y="1828800"/>
+            <a:ext cx="2377440" cy="1554480"/>
+          </a:xfrm>
+          <a:prstGeom prst="roundRect">
+            <a:avLst>
+              <a:gd name="adj" fmla="val 7058"/>
+            </a:avLst>
+          </a:prstGeom>
+          <a:solidFill>
+            <a:srgbClr val="EEDDC7"/>
+          </a:solidFill>
+          <a:ln w="15875">
+            <a:solidFill>
+              <a:srgbClr val="C6986B"/>
+            </a:solidFill>
+          </a:ln>
+          <a:effectLst/>
+        </p:spPr>
+        <p:style>
+          <a:lnRef idx="1">
+            <a:schemeClr val="accent1"/>
+          </a:lnRef>
+          <a:fillRef idx="3">
+            <a:schemeClr val="accent1"/>
+          </a:fillRef>
+          <a:effectRef idx="2">
+            <a:schemeClr val="accent1"/>
+          </a:effectRef>
+          <a:fontRef idx="minor">
+            <a:schemeClr val="lt1"/>
+          </a:fontRef>
+        </p:style>
+        <p:txBody>
+          <a:bodyPr rtlCol="0" anchor="ctr"/>
+          <a:lstStyle/>
+          <a:p>
+            <a:pPr algn="ctr"/>
+          </a:p>
+        </p:txBody>
+      </p:sp>
+      <p:sp>
+        <p:nvSpPr>
+          <p:cNvPr id="34" name="TextBox 33"/>
+          <p:cNvSpPr txBox="1"/>
+          <p:nvPr/>
+        </p:nvSpPr>
+        <p:spPr>
+          <a:xfrm>
+            <a:off x="6903720" y="1965960"/>
+            <a:ext cx="2377440" cy="502920"/>
+          </a:xfrm>
+          <a:prstGeom prst="rect">
+            <a:avLst/>
+          </a:prstGeom>
+          <a:noFill/>
+        </p:spPr>
+        <p:txBody>
+          <a:bodyPr wrap="square" lIns="0" rIns="0" tIns="0" bIns="0" anchor="ctr">
+            <a:spAutoFit/>
+          </a:bodyPr>
+          <a:lstStyle/>
+          <a:p>
+            <a:pPr algn="ctr"/>
+            <a:r>
+              <a:rPr sz="3600" b="1">
+                <a:solidFill>
+                  <a:srgbClr val="8A5E35"/>
+                </a:solidFill>
+                <a:latin typeface="Readex Pro"/>
+                <a:cs typeface="Readex Pro"/>
+                <a:ea typeface="Readex Pro"/>
+              </a:rPr>
+              <a:t>1,981</a:t>
+            </a:r>
+          </a:p>
+        </p:txBody>
+      </p:sp>
+      <p:sp>
+        <p:nvSpPr>
+          <p:cNvPr id="35" name="TextBox 34"/>
+          <p:cNvSpPr txBox="1"/>
+          <p:nvPr/>
+        </p:nvSpPr>
+        <p:spPr>
+          <a:xfrm>
+            <a:off x="6903720" y="2514600"/>
+            <a:ext cx="2377440" cy="274320"/>
+          </a:xfrm>
+          <a:prstGeom prst="rect">
+            <a:avLst/>
+          </a:prstGeom>
+          <a:noFill/>
+        </p:spPr>
+        <p:txBody>
+          <a:bodyPr wrap="square" lIns="0" rIns="0" tIns="0" bIns="0" anchor="ctr">
+            <a:spAutoFit/>
+          </a:bodyPr>
+          <a:lstStyle/>
+          <a:p>
+            <a:pPr algn="ctr"/>
+            <a:r>
+              <a:rPr sz="1200" b="0">
+                <a:solidFill>
+                  <a:srgbClr val="4A4842"/>
+                </a:solidFill>
+                <a:latin typeface="Readex Pro"/>
+                <a:cs typeface="Readex Pro"/>
+                <a:ea typeface="Readex Pro"/>
+              </a:rPr>
+              <a:t>items, split by document</a:t>
+            </a:r>
+          </a:p>
+        </p:txBody>
+      </p:sp>
+      <p:sp>
+        <p:nvSpPr>
+          <p:cNvPr id="36" name="TextBox 35"/>
+          <p:cNvSpPr txBox="1"/>
+          <p:nvPr/>
+        </p:nvSpPr>
+        <p:spPr>
+          <a:xfrm>
+            <a:off x="6903720" y="2788920"/>
+            <a:ext cx="2377440" cy="256032"/>
+          </a:xfrm>
+          <a:prstGeom prst="rect">
+            <a:avLst/>
+          </a:prstGeom>
+          <a:noFill/>
+        </p:spPr>
+        <p:txBody>
+          <a:bodyPr wrap="square" lIns="0" rIns="0" tIns="0" bIns="0" anchor="ctr">
+            <a:spAutoFit/>
+          </a:bodyPr>
+          <a:lstStyle/>
+          <a:p>
+            <a:pPr algn="ctr"/>
+            <a:r>
+              <a:rPr sz="1100" b="0">
+                <a:solidFill>
+                  <a:srgbClr val="6F6B5E"/>
+                </a:solidFill>
+                <a:latin typeface="Readex Pro"/>
+                <a:cs typeface="Readex Pro"/>
+                <a:ea typeface="Readex Pro"/>
+              </a:rPr>
+              <a:t>731 dev · 1,250 test</a:t>
+            </a:r>
+          </a:p>
+        </p:txBody>
+      </p:sp>
+      <p:sp>
+        <p:nvSpPr>
+          <p:cNvPr id="37" name="TextBox 36"/>
+          <p:cNvSpPr txBox="1"/>
+          <p:nvPr/>
+        </p:nvSpPr>
+        <p:spPr>
+          <a:xfrm>
+            <a:off x="6903720" y="3063240"/>
+            <a:ext cx="2377440" cy="274320"/>
+          </a:xfrm>
+          <a:prstGeom prst="rect">
+            <a:avLst/>
+          </a:prstGeom>
+          <a:noFill/>
+        </p:spPr>
+        <p:txBody>
+          <a:bodyPr wrap="square" lIns="0" rIns="0" tIns="0" bIns="0" anchor="ctr">
+            <a:spAutoFit/>
+          </a:bodyPr>
+          <a:lstStyle/>
+          <a:p>
+            <a:pPr algn="ctr"/>
+            <a:r>
+              <a:rPr sz="1300" b="1">
+                <a:solidFill>
+                  <a:srgbClr val="8A5E35"/>
+                </a:solidFill>
+                <a:latin typeface="Readex Pro"/>
+                <a:cs typeface="Readex Pro"/>
+                <a:ea typeface="Readex Pro"/>
+              </a:rPr>
+              <a:t>BayanBench v2</a:t>
+            </a:r>
+          </a:p>
+        </p:txBody>
+      </p:sp>
+      <p:sp>
+        <p:nvSpPr>
+          <p:cNvPr id="38" name="Rounded Rectangle 37"/>
+          <p:cNvSpPr/>
+          <p:nvPr/>
+        </p:nvSpPr>
+        <p:spPr>
+          <a:xfrm>
+            <a:off x="6903720" y="3611880"/>
+            <a:ext cx="2377440" cy="310896"/>
+          </a:xfrm>
+          <a:prstGeom prst="roundRect">
+            <a:avLst>
+              <a:gd name="adj" fmla="val 50000"/>
             </a:avLst>
           </a:prstGeom>
           <a:solidFill>
@@ -18254,7 +19443,7 @@
           <a:p>
             <a:pPr algn="ctr"/>
             <a:r>
-              <a:rPr sz="1300" b="1">
+              <a:rPr sz="1100" b="0">
                 <a:solidFill>
                   <a:srgbClr val="4A4842"/>
                 </a:solidFill>
@@ -18262,29 +19451,151 @@
                 <a:cs typeface="Readex Pro"/>
                 <a:ea typeface="Readex Pro"/>
               </a:rPr>
-              <a:t>copying the input</a:t>
+              <a:t>original + rewrite</a:t>
             </a:r>
           </a:p>
         </p:txBody>
       </p:sp>
       <p:sp>
         <p:nvSpPr>
-          <p:cNvPr id="11" name="Rounded Rectangle 10"/>
+          <p:cNvPr id="39" name="Rounded Rectangle 38"/>
           <p:cNvSpPr/>
           <p:nvPr/>
         </p:nvSpPr>
         <p:spPr>
           <a:xfrm>
-            <a:off x="594360" y="2377440"/>
-            <a:ext cx="2560320" cy="347472"/>
+            <a:off x="6903720" y="4023360"/>
+            <a:ext cx="2377440" cy="777240"/>
           </a:xfrm>
           <a:prstGeom prst="roundRect">
             <a:avLst>
-              <a:gd name="adj" fmla="val 47368"/>
+              <a:gd name="adj" fmla="val 14117"/>
             </a:avLst>
           </a:prstGeom>
           <a:solidFill>
             <a:srgbClr val="EEDDC7"/>
+          </a:solidFill>
+          <a:ln w="15875">
+            <a:solidFill>
+              <a:srgbClr val="C6986B"/>
+            </a:solidFill>
+          </a:ln>
+          <a:effectLst/>
+        </p:spPr>
+        <p:style>
+          <a:lnRef idx="1">
+            <a:schemeClr val="accent1"/>
+          </a:lnRef>
+          <a:fillRef idx="3">
+            <a:schemeClr val="accent1"/>
+          </a:fillRef>
+          <a:effectRef idx="2">
+            <a:schemeClr val="accent1"/>
+          </a:effectRef>
+          <a:fontRef idx="minor">
+            <a:schemeClr val="lt1"/>
+          </a:fontRef>
+        </p:style>
+        <p:txBody>
+          <a:bodyPr rtlCol="0" anchor="ctr"/>
+          <a:lstStyle/>
+          <a:p>
+            <a:pPr algn="ctr"/>
+          </a:p>
+        </p:txBody>
+      </p:sp>
+      <p:sp>
+        <p:nvSpPr>
+          <p:cNvPr id="40" name="TextBox 39"/>
+          <p:cNvSpPr txBox="1"/>
+          <p:nvPr/>
+        </p:nvSpPr>
+        <p:spPr>
+          <a:xfrm>
+            <a:off x="6903720" y="4114800"/>
+            <a:ext cx="2377440" cy="292608"/>
+          </a:xfrm>
+          <a:prstGeom prst="rect">
+            <a:avLst/>
+          </a:prstGeom>
+          <a:noFill/>
+        </p:spPr>
+        <p:txBody>
+          <a:bodyPr wrap="square" lIns="0" rIns="0" tIns="0" bIns="0" anchor="ctr">
+            <a:spAutoFit/>
+          </a:bodyPr>
+          <a:lstStyle/>
+          <a:p>
+            <a:pPr algn="ctr"/>
+            <a:r>
+              <a:rPr sz="1400" b="1">
+                <a:solidFill>
+                  <a:srgbClr val="8A5E35"/>
+                </a:solidFill>
+                <a:latin typeface="Readex Pro"/>
+                <a:cs typeface="Readex Pro"/>
+                <a:ea typeface="Readex Pro"/>
+              </a:rPr>
+              <a:t>Gemma 4 31B</a:t>
+            </a:r>
+          </a:p>
+        </p:txBody>
+      </p:sp>
+      <p:sp>
+        <p:nvSpPr>
+          <p:cNvPr id="41" name="TextBox 40"/>
+          <p:cNvSpPr txBox="1"/>
+          <p:nvPr/>
+        </p:nvSpPr>
+        <p:spPr>
+          <a:xfrm>
+            <a:off x="6903720" y="4434840"/>
+            <a:ext cx="2377440" cy="256032"/>
+          </a:xfrm>
+          <a:prstGeom prst="rect">
+            <a:avLst/>
+          </a:prstGeom>
+          <a:noFill/>
+        </p:spPr>
+        <p:txBody>
+          <a:bodyPr wrap="square" lIns="0" rIns="0" tIns="0" bIns="0" anchor="ctr">
+            <a:spAutoFit/>
+          </a:bodyPr>
+          <a:lstStyle/>
+          <a:p>
+            <a:pPr algn="ctr"/>
+            <a:r>
+              <a:rPr sz="950" b="0">
+                <a:solidFill>
+                  <a:srgbClr val="6F6B5E"/>
+                </a:solidFill>
+                <a:latin typeface="Readex Pro"/>
+                <a:cs typeface="Readex Pro"/>
+                <a:ea typeface="Readex Pro"/>
+              </a:rPr>
+              <a:t>open model · reruns anywhere</a:t>
+            </a:r>
+          </a:p>
+        </p:txBody>
+      </p:sp>
+      <p:sp>
+        <p:nvSpPr>
+          <p:cNvPr id="42" name="Rounded Rectangle 41"/>
+          <p:cNvSpPr/>
+          <p:nvPr/>
+        </p:nvSpPr>
+        <p:spPr>
+          <a:xfrm>
+            <a:off x="6903720" y="4937760"/>
+            <a:ext cx="2377440" cy="310896"/>
+          </a:xfrm>
+          <a:prstGeom prst="roundRect">
+            <a:avLst>
+              <a:gd name="adj" fmla="val 50000"/>
+            </a:avLst>
+          </a:prstGeom>
+          <a:solidFill>
+            <a:srgbClr val="EFE9D9"/>
           </a:solidFill>
           <a:ln>
             <a:noFill/>
@@ -18311,37 +19622,485 @@
           <a:p>
             <a:pPr algn="ctr"/>
             <a:r>
-              <a:rPr sz="1300" b="1">
-                <a:solidFill>
-                  <a:srgbClr val="8A5E35"/>
+              <a:rPr sz="1100" b="0">
+                <a:solidFill>
+                  <a:srgbClr val="4A4842"/>
                 </a:solidFill>
                 <a:latin typeface="Readex Pro"/>
                 <a:cs typeface="Readex Pro"/>
                 <a:ea typeface="Readex Pro"/>
               </a:rPr>
-              <a:t>100% of the meaning</a:t>
+              <a:t>7 yes/no → P(yes)</a:t>
             </a:r>
           </a:p>
         </p:txBody>
       </p:sp>
       <p:sp>
         <p:nvSpPr>
-          <p:cNvPr id="12" name="Rounded Rectangle 11"/>
+          <p:cNvPr id="43" name="Rounded Rectangle 42"/>
           <p:cNvSpPr/>
           <p:nvPr/>
         </p:nvSpPr>
         <p:spPr>
           <a:xfrm>
-            <a:off x="594360" y="2788920"/>
-            <a:ext cx="2560320" cy="347472"/>
+            <a:off x="594360" y="4160520"/>
+            <a:ext cx="2926080" cy="1417320"/>
           </a:xfrm>
           <a:prstGeom prst="roundRect">
             <a:avLst>
-              <a:gd name="adj" fmla="val 47368"/>
+              <a:gd name="adj" fmla="val 10322"/>
             </a:avLst>
           </a:prstGeom>
           <a:solidFill>
-            <a:srgbClr val="F3E2DA"/>
+            <a:srgbClr val="EFE9D9"/>
+          </a:solidFill>
+          <a:ln w="15875">
+            <a:solidFill>
+              <a:srgbClr val="E6DFCC"/>
+            </a:solidFill>
+          </a:ln>
+          <a:effectLst/>
+        </p:spPr>
+        <p:style>
+          <a:lnRef idx="1">
+            <a:schemeClr val="accent1"/>
+          </a:lnRef>
+          <a:fillRef idx="3">
+            <a:schemeClr val="accent1"/>
+          </a:fillRef>
+          <a:effectRef idx="2">
+            <a:schemeClr val="accent1"/>
+          </a:effectRef>
+          <a:fontRef idx="minor">
+            <a:schemeClr val="lt1"/>
+          </a:fontRef>
+        </p:style>
+        <p:txBody>
+          <a:bodyPr rtlCol="0" anchor="ctr"/>
+          <a:lstStyle/>
+          <a:p>
+            <a:pPr algn="ctr"/>
+          </a:p>
+        </p:txBody>
+      </p:sp>
+      <p:sp>
+        <p:nvSpPr>
+          <p:cNvPr id="44" name="TextBox 43"/>
+          <p:cNvSpPr txBox="1"/>
+          <p:nvPr/>
+        </p:nvSpPr>
+        <p:spPr>
+          <a:xfrm>
+            <a:off x="685800" y="4224528"/>
+            <a:ext cx="2743200" cy="274320"/>
+          </a:xfrm>
+          <a:prstGeom prst="rect">
+            <a:avLst/>
+          </a:prstGeom>
+          <a:noFill/>
+        </p:spPr>
+        <p:txBody>
+          <a:bodyPr wrap="square" lIns="0" rIns="0" tIns="0" bIns="0" anchor="ctr">
+            <a:spAutoFit/>
+          </a:bodyPr>
+          <a:lstStyle/>
+          <a:p>
+            <a:pPr algn="ctr"/>
+            <a:r>
+              <a:rPr sz="1200" b="1">
+                <a:solidFill>
+                  <a:srgbClr val="8A5E35"/>
+                </a:solidFill>
+                <a:latin typeface="Readex Pro"/>
+                <a:cs typeface="Readex Pro"/>
+                <a:ea typeface="Readex Pro"/>
+              </a:rPr>
+              <a:t>Meaning · 4 questions</a:t>
+            </a:r>
+          </a:p>
+        </p:txBody>
+      </p:sp>
+      <p:sp>
+        <p:nvSpPr>
+          <p:cNvPr id="45" name="TextBox 44"/>
+          <p:cNvSpPr txBox="1"/>
+          <p:nvPr/>
+        </p:nvSpPr>
+        <p:spPr>
+          <a:xfrm>
+            <a:off x="685800" y="4526280"/>
+            <a:ext cx="2743200" cy="960120"/>
+          </a:xfrm>
+          <a:prstGeom prst="rect">
+            <a:avLst/>
+          </a:prstGeom>
+          <a:noFill/>
+        </p:spPr>
+        <p:txBody>
+          <a:bodyPr wrap="square" lIns="0" rIns="0" tIns="0" bIns="0" anchor="ctr">
+            <a:spAutoFit/>
+          </a:bodyPr>
+          <a:lstStyle/>
+          <a:p>
+            <a:pPr algn="l">
+              <a:lnSpc>
+                <a:spcPct val="95000"/>
+              </a:lnSpc>
+            </a:pPr>
+            <a:r>
+              <a:rPr sz="1000" b="0">
+                <a:solidFill>
+                  <a:srgbClr val="4A4842"/>
+                </a:solidFill>
+                <a:latin typeface="Readex Pro"/>
+                <a:cs typeface="Readex Pro"/>
+                <a:ea typeface="Readex Pro"/>
+              </a:rPr>
+              <a:t>same meaning?  kept = yes ≥ 0.5</a:t>
+            </a:r>
+          </a:p>
+          <a:p>
+            <a:pPr algn="l">
+              <a:lnSpc>
+                <a:spcPct val="95000"/>
+              </a:lnSpc>
+            </a:pPr>
+            <a:r>
+              <a:rPr sz="1000" b="0">
+                <a:solidFill>
+                  <a:srgbClr val="4A4842"/>
+                </a:solidFill>
+                <a:latin typeface="Readex Pro"/>
+                <a:cs typeface="Readex Pro"/>
+                <a:ea typeface="Readex Pro"/>
+              </a:rPr>
+              <a:t>and every number kept</a:t>
+            </a:r>
+          </a:p>
+          <a:p>
+            <a:pPr algn="l">
+              <a:lnSpc>
+                <a:spcPct val="95000"/>
+              </a:lnSpc>
+            </a:pPr>
+            <a:r>
+              <a:rPr sz="1000" b="0">
+                <a:solidFill>
+                  <a:srgbClr val="4A4842"/>
+                </a:solidFill>
+                <a:latin typeface="Readex Pro"/>
+                <a:cs typeface="Readex Pro"/>
+                <a:ea typeface="Readex Pro"/>
+              </a:rPr>
+              <a:t>adds a fact?  drops a fact?</a:t>
+            </a:r>
+          </a:p>
+          <a:p>
+            <a:pPr algn="l">
+              <a:lnSpc>
+                <a:spcPct val="95000"/>
+              </a:lnSpc>
+            </a:pPr>
+            <a:r>
+              <a:rPr sz="1000" b="0">
+                <a:solidFill>
+                  <a:srgbClr val="4A4842"/>
+                </a:solidFill>
+                <a:latin typeface="Readex Pro"/>
+                <a:cs typeface="Readex Pro"/>
+                <a:ea typeface="Readex Pro"/>
+              </a:rPr>
+              <a:t>contradicts?</a:t>
+            </a:r>
+          </a:p>
+        </p:txBody>
+      </p:sp>
+      <p:sp>
+        <p:nvSpPr>
+          <p:cNvPr id="46" name="Rounded Rectangle 45"/>
+          <p:cNvSpPr/>
+          <p:nvPr/>
+        </p:nvSpPr>
+        <p:spPr>
+          <a:xfrm>
+            <a:off x="3749040" y="4160520"/>
+            <a:ext cx="2926080" cy="1417320"/>
+          </a:xfrm>
+          <a:prstGeom prst="roundRect">
+            <a:avLst>
+              <a:gd name="adj" fmla="val 10322"/>
+            </a:avLst>
+          </a:prstGeom>
+          <a:solidFill>
+            <a:srgbClr val="EFE9D9"/>
+          </a:solidFill>
+          <a:ln w="15875">
+            <a:solidFill>
+              <a:srgbClr val="E6DFCC"/>
+            </a:solidFill>
+          </a:ln>
+          <a:effectLst/>
+        </p:spPr>
+        <p:style>
+          <a:lnRef idx="1">
+            <a:schemeClr val="accent1"/>
+          </a:lnRef>
+          <a:fillRef idx="3">
+            <a:schemeClr val="accent1"/>
+          </a:fillRef>
+          <a:effectRef idx="2">
+            <a:schemeClr val="accent1"/>
+          </a:effectRef>
+          <a:fontRef idx="minor">
+            <a:schemeClr val="lt1"/>
+          </a:fontRef>
+        </p:style>
+        <p:txBody>
+          <a:bodyPr rtlCol="0" anchor="ctr"/>
+          <a:lstStyle/>
+          <a:p>
+            <a:pPr algn="ctr"/>
+          </a:p>
+        </p:txBody>
+      </p:sp>
+      <p:sp>
+        <p:nvSpPr>
+          <p:cNvPr id="47" name="TextBox 46"/>
+          <p:cNvSpPr txBox="1"/>
+          <p:nvPr/>
+        </p:nvSpPr>
+        <p:spPr>
+          <a:xfrm>
+            <a:off x="3840480" y="4224528"/>
+            <a:ext cx="2743200" cy="274320"/>
+          </a:xfrm>
+          <a:prstGeom prst="rect">
+            <a:avLst/>
+          </a:prstGeom>
+          <a:noFill/>
+        </p:spPr>
+        <p:txBody>
+          <a:bodyPr wrap="square" lIns="0" rIns="0" tIns="0" bIns="0" anchor="ctr">
+            <a:spAutoFit/>
+          </a:bodyPr>
+          <a:lstStyle/>
+          <a:p>
+            <a:pPr algn="ctr"/>
+            <a:r>
+              <a:rPr sz="1200" b="1">
+                <a:solidFill>
+                  <a:srgbClr val="6F6B5E"/>
+                </a:solidFill>
+                <a:latin typeface="Readex Pro"/>
+                <a:cs typeface="Readex Pro"/>
+                <a:ea typeface="Readex Pro"/>
+              </a:rPr>
+              <a:t>Quality · 3, diagnostic</a:t>
+            </a:r>
+          </a:p>
+        </p:txBody>
+      </p:sp>
+      <p:sp>
+        <p:nvSpPr>
+          <p:cNvPr id="48" name="TextBox 47"/>
+          <p:cNvSpPr txBox="1"/>
+          <p:nvPr/>
+        </p:nvSpPr>
+        <p:spPr>
+          <a:xfrm>
+            <a:off x="3840480" y="4526280"/>
+            <a:ext cx="2743200" cy="960120"/>
+          </a:xfrm>
+          <a:prstGeom prst="rect">
+            <a:avLst/>
+          </a:prstGeom>
+          <a:noFill/>
+        </p:spPr>
+        <p:txBody>
+          <a:bodyPr wrap="square" lIns="0" rIns="0" tIns="0" bIns="0" anchor="ctr">
+            <a:spAutoFit/>
+          </a:bodyPr>
+          <a:lstStyle/>
+          <a:p>
+            <a:pPr algn="l">
+              <a:lnSpc>
+                <a:spcPct val="95000"/>
+              </a:lnSpc>
+            </a:pPr>
+            <a:r>
+              <a:rPr sz="1000" b="0">
+                <a:solidFill>
+                  <a:srgbClr val="6F6B5E"/>
+                </a:solidFill>
+                <a:latin typeface="Readex Pro"/>
+                <a:cs typeface="Readex Pro"/>
+                <a:ea typeface="Readex Pro"/>
+              </a:rPr>
+              <a:t>Arabic correct?  coherent?</a:t>
+            </a:r>
+          </a:p>
+          <a:p>
+            <a:pPr algn="l">
+              <a:lnSpc>
+                <a:spcPct val="95000"/>
+              </a:lnSpc>
+            </a:pPr>
+            <a:r>
+              <a:rPr sz="1000" b="0">
+                <a:solidFill>
+                  <a:srgbClr val="6F6B5E"/>
+                </a:solidFill>
+                <a:latin typeface="Readex Pro"/>
+                <a:cs typeface="Readex Pro"/>
+                <a:ea typeface="Readex Pro"/>
+              </a:rPr>
+              <a:t>easier to read?</a:t>
+            </a:r>
+          </a:p>
+          <a:p>
+            <a:pPr algn="l">
+              <a:lnSpc>
+                <a:spcPct val="95000"/>
+              </a:lnSpc>
+            </a:pPr>
+            <a:r>
+              <a:rPr sz="1000" b="0">
+                <a:solidFill>
+                  <a:srgbClr val="6F6B5E"/>
+                </a:solidFill>
+                <a:latin typeface="Readex Pro"/>
+                <a:cs typeface="Readex Pro"/>
+                <a:ea typeface="Readex Pro"/>
+              </a:rPr>
+              <a:t>people barely agree: never</a:t>
+            </a:r>
+          </a:p>
+          <a:p>
+            <a:pPr algn="l">
+              <a:lnSpc>
+                <a:spcPct val="95000"/>
+              </a:lnSpc>
+            </a:pPr>
+            <a:r>
+              <a:rPr sz="1000" b="0">
+                <a:solidFill>
+                  <a:srgbClr val="6F6B5E"/>
+                </a:solidFill>
+                <a:latin typeface="Readex Pro"/>
+                <a:cs typeface="Readex Pro"/>
+                <a:ea typeface="Readex Pro"/>
+              </a:rPr>
+              <a:t>used to decide</a:t>
+            </a:r>
+          </a:p>
+        </p:txBody>
+      </p:sp>
+      <p:sp>
+        <p:nvSpPr>
+          <p:cNvPr id="49" name="TextBox 48"/>
+          <p:cNvSpPr txBox="1"/>
+          <p:nvPr/>
+        </p:nvSpPr>
+        <p:spPr>
+          <a:xfrm>
+            <a:off x="594360" y="5806440"/>
+            <a:ext cx="2194560" cy="365760"/>
+          </a:xfrm>
+          <a:prstGeom prst="rect">
+            <a:avLst/>
+          </a:prstGeom>
+          <a:noFill/>
+        </p:spPr>
+        <p:txBody>
+          <a:bodyPr wrap="square" lIns="0" rIns="0" tIns="0" bIns="0" anchor="ctr">
+            <a:spAutoFit/>
+          </a:bodyPr>
+          <a:lstStyle/>
+          <a:p>
+            <a:pPr algn="ctr"/>
+            <a:r>
+              <a:rPr sz="2200" b="1">
+                <a:solidFill>
+                  <a:srgbClr val="C6986B"/>
+                </a:solidFill>
+                <a:latin typeface="Readex Pro"/>
+                <a:cs typeface="Readex Pro"/>
+                <a:ea typeface="Readex Pro"/>
+              </a:rPr>
+              <a:t>AUC 0.85</a:t>
+            </a:r>
+          </a:p>
+        </p:txBody>
+      </p:sp>
+      <p:sp>
+        <p:nvSpPr>
+          <p:cNvPr id="50" name="TextBox 49"/>
+          <p:cNvSpPr txBox="1"/>
+          <p:nvPr/>
+        </p:nvSpPr>
+        <p:spPr>
+          <a:xfrm>
+            <a:off x="2880360" y="5806440"/>
+            <a:ext cx="3840480" cy="365760"/>
+          </a:xfrm>
+          <a:prstGeom prst="rect">
+            <a:avLst/>
+          </a:prstGeom>
+          <a:noFill/>
+        </p:spPr>
+        <p:txBody>
+          <a:bodyPr wrap="square" lIns="0" rIns="0" tIns="0" bIns="0" anchor="ctr">
+            <a:spAutoFit/>
+          </a:bodyPr>
+          <a:lstStyle/>
+          <a:p>
+            <a:pPr algn="l"/>
+            <a:r>
+              <a:rPr sz="1100" b="0">
+                <a:solidFill>
+                  <a:srgbClr val="4A4842"/>
+                </a:solidFill>
+                <a:latin typeface="Readex Pro"/>
+                <a:cs typeface="Readex Pro"/>
+                <a:ea typeface="Readex Pro"/>
+              </a:rPr>
+              <a:t>scorer vs 6 human raters</a:t>
+            </a:r>
+          </a:p>
+          <a:p>
+            <a:pPr algn="l"/>
+            <a:r>
+              <a:rPr sz="1100" b="0">
+                <a:solidFill>
+                  <a:srgbClr val="4A4842"/>
+                </a:solidFill>
+                <a:latin typeface="Readex Pro"/>
+                <a:cs typeface="Readex Pro"/>
+                <a:ea typeface="Readex Pro"/>
+              </a:rPr>
+              <a:t>290 tasks</a:t>
+            </a:r>
+          </a:p>
+        </p:txBody>
+      </p:sp>
+      <p:sp>
+        <p:nvSpPr>
+          <p:cNvPr id="51" name="Rounded Rectangle 50"/>
+          <p:cNvSpPr/>
+          <p:nvPr/>
+        </p:nvSpPr>
+        <p:spPr>
+          <a:xfrm>
+            <a:off x="6903720" y="5806440"/>
+            <a:ext cx="2377440" cy="365760"/>
+          </a:xfrm>
+          <a:prstGeom prst="roundRect">
+            <a:avLst>
+              <a:gd name="adj" fmla="val 44999"/>
+            </a:avLst>
+          </a:prstGeom>
+          <a:solidFill>
+            <a:srgbClr val="EFE9D9"/>
           </a:solidFill>
           <a:ln>
             <a:noFill/>
@@ -18368,844 +20127,15 @@
           <a:p>
             <a:pPr algn="ctr"/>
             <a:r>
-              <a:rPr sz="1300" b="1">
-                <a:solidFill>
-                  <a:srgbClr val="B5533C"/>
+              <a:rPr sz="1000" b="0">
+                <a:solidFill>
+                  <a:srgbClr val="4A4842"/>
                 </a:solidFill>
                 <a:latin typeface="Readex Pro"/>
                 <a:cs typeface="Readex Pro"/>
                 <a:ea typeface="Readex Pro"/>
               </a:rPr>
-              <a:t>0 simplification</a:t>
-            </a:r>
-          </a:p>
-        </p:txBody>
-      </p:sp>
-      <p:cxnSp>
-        <p:nvCxnSpPr>
-          <p:cNvPr id="13" name="Connector 12"/>
-          <p:cNvCxnSpPr/>
-          <p:nvPr/>
-        </p:nvCxnSpPr>
-        <p:spPr>
-          <a:xfrm>
-            <a:off x="5303520" y="4480560"/>
-            <a:ext cx="3931920" cy="0"/>
-          </a:xfrm>
-          <a:prstGeom prst="line">
-            <a:avLst/>
-          </a:prstGeom>
-          <a:ln w="19050">
-            <a:solidFill>
-              <a:srgbClr val="A29D8C"/>
-            </a:solidFill>
-          </a:ln>
-        </p:spPr>
-        <p:style>
-          <a:lnRef idx="2">
-            <a:schemeClr val="accent1"/>
-          </a:lnRef>
-          <a:fillRef idx="0">
-            <a:schemeClr val="accent1"/>
-          </a:fillRef>
-          <a:effectRef idx="1">
-            <a:schemeClr val="accent1"/>
-          </a:effectRef>
-          <a:fontRef idx="minor">
-            <a:schemeClr val="tx1"/>
-          </a:fontRef>
-        </p:style>
-      </p:cxnSp>
-      <p:cxnSp>
-        <p:nvCxnSpPr>
-          <p:cNvPr id="14" name="Connector 13"/>
-          <p:cNvCxnSpPr/>
-          <p:nvPr/>
-        </p:nvCxnSpPr>
-        <p:spPr>
-          <a:xfrm>
-            <a:off x="5303520" y="1554480"/>
-            <a:ext cx="0" cy="2926080"/>
-          </a:xfrm>
-          <a:prstGeom prst="line">
-            <a:avLst/>
-          </a:prstGeom>
-          <a:ln w="19050">
-            <a:solidFill>
-              <a:srgbClr val="A29D8C"/>
-            </a:solidFill>
-          </a:ln>
-        </p:spPr>
-        <p:style>
-          <a:lnRef idx="2">
-            <a:schemeClr val="accent1"/>
-          </a:lnRef>
-          <a:fillRef idx="0">
-            <a:schemeClr val="accent1"/>
-          </a:fillRef>
-          <a:effectRef idx="1">
-            <a:schemeClr val="accent1"/>
-          </a:effectRef>
-          <a:fontRef idx="minor">
-            <a:schemeClr val="tx1"/>
-          </a:fontRef>
-        </p:style>
-      </p:cxnSp>
-      <p:sp>
-        <p:nvSpPr>
-          <p:cNvPr id="15" name="TextBox 14"/>
-          <p:cNvSpPr txBox="1"/>
-          <p:nvPr/>
-        </p:nvSpPr>
-        <p:spPr>
-          <a:xfrm>
-            <a:off x="5303520" y="4590288"/>
-            <a:ext cx="3931920" cy="228600"/>
-          </a:xfrm>
-          <a:prstGeom prst="rect">
-            <a:avLst/>
-          </a:prstGeom>
-          <a:noFill/>
-        </p:spPr>
-        <p:txBody>
-          <a:bodyPr wrap="square" lIns="0" rIns="0" tIns="0" bIns="0" anchor="ctr">
-            <a:spAutoFit/>
-          </a:bodyPr>
-          <a:lstStyle/>
-          <a:p>
-            <a:pPr algn="ctr"/>
-            <a:r>
-              <a:rPr sz="1000" b="0">
-                <a:solidFill>
-                  <a:srgbClr val="6F6B5E"/>
-                </a:solidFill>
-                <a:latin typeface="Readex Pro"/>
-                <a:cs typeface="Readex Pro"/>
-                <a:ea typeface="Readex Pro"/>
-              </a:rPr>
-              <a:t>meaning kept (%)</a:t>
-            </a:r>
-          </a:p>
-        </p:txBody>
-      </p:sp>
-      <p:sp>
-        <p:nvSpPr>
-          <p:cNvPr id="16" name="TextBox 15"/>
-          <p:cNvSpPr txBox="1"/>
-          <p:nvPr/>
-        </p:nvSpPr>
-        <p:spPr>
-          <a:xfrm>
-            <a:off x="4526280" y="2880360"/>
-            <a:ext cx="1463040" cy="274320"/>
-          </a:xfrm>
-          <a:prstGeom prst="rect">
-            <a:avLst/>
-          </a:prstGeom>
-          <a:noFill/>
-        </p:spPr>
-        <p:txBody>
-          <a:bodyPr wrap="square" lIns="0" rIns="0" tIns="0" bIns="0" anchor="ctr">
-            <a:spAutoFit/>
-          </a:bodyPr>
-          <a:lstStyle/>
-          <a:p>
-            <a:pPr algn="ctr"/>
-            <a:r>
-              <a:rPr sz="1000" b="0">
-                <a:solidFill>
-                  <a:srgbClr val="6F6B5E"/>
-                </a:solidFill>
-                <a:latin typeface="Readex Pro"/>
-                <a:cs typeface="Readex Pro"/>
-                <a:ea typeface="Readex Pro"/>
-              </a:rPr>
-              <a:t>clause words</a:t>
-            </a:r>
-          </a:p>
-          <a:p>
-            <a:pPr algn="ctr"/>
-            <a:r>
-              <a:rPr sz="1000" b="0">
-                <a:solidFill>
-                  <a:srgbClr val="6F6B5E"/>
-                </a:solidFill>
-                <a:latin typeface="Readex Pro"/>
-                <a:cs typeface="Readex Pro"/>
-                <a:ea typeface="Readex Pro"/>
-              </a:rPr>
-              <a:t>shorter</a:t>
-            </a:r>
-          </a:p>
-        </p:txBody>
-      </p:sp>
-      <p:sp>
-        <p:nvSpPr>
-          <p:cNvPr id="17" name="Oval 16"/>
-          <p:cNvSpPr/>
-          <p:nvPr/>
-        </p:nvSpPr>
-        <p:spPr>
-          <a:xfrm>
-            <a:off x="8863148" y="4194048"/>
-            <a:ext cx="182880" cy="182880"/>
-          </a:xfrm>
-          <a:prstGeom prst="ellipse">
-            <a:avLst/>
-          </a:prstGeom>
-          <a:solidFill>
-            <a:srgbClr val="A29D8C"/>
-          </a:solidFill>
-          <a:ln>
-            <a:noFill/>
-          </a:ln>
-          <a:effectLst/>
-        </p:spPr>
-        <p:style>
-          <a:lnRef idx="1">
-            <a:schemeClr val="accent1"/>
-          </a:lnRef>
-          <a:fillRef idx="3">
-            <a:schemeClr val="accent1"/>
-          </a:fillRef>
-          <a:effectRef idx="2">
-            <a:schemeClr val="accent1"/>
-          </a:effectRef>
-          <a:fontRef idx="minor">
-            <a:schemeClr val="lt1"/>
-          </a:fontRef>
-        </p:style>
-        <p:txBody>
-          <a:bodyPr rtlCol="0" anchor="ctr"/>
-          <a:lstStyle/>
-          <a:p>
-            <a:pPr algn="ctr"/>
-          </a:p>
-        </p:txBody>
-      </p:sp>
-      <p:sp>
-        <p:nvSpPr>
-          <p:cNvPr id="18" name="Oval 17"/>
-          <p:cNvSpPr/>
-          <p:nvPr/>
-        </p:nvSpPr>
-        <p:spPr>
-          <a:xfrm>
-            <a:off x="7649870" y="3569817"/>
-            <a:ext cx="182880" cy="182880"/>
-          </a:xfrm>
-          <a:prstGeom prst="ellipse">
-            <a:avLst/>
-          </a:prstGeom>
-          <a:solidFill>
-            <a:srgbClr val="8A5E35"/>
-          </a:solidFill>
-          <a:ln>
-            <a:noFill/>
-          </a:ln>
-          <a:effectLst/>
-        </p:spPr>
-        <p:style>
-          <a:lnRef idx="1">
-            <a:schemeClr val="accent1"/>
-          </a:lnRef>
-          <a:fillRef idx="3">
-            <a:schemeClr val="accent1"/>
-          </a:fillRef>
-          <a:effectRef idx="2">
-            <a:schemeClr val="accent1"/>
-          </a:effectRef>
-          <a:fontRef idx="minor">
-            <a:schemeClr val="lt1"/>
-          </a:fontRef>
-        </p:style>
-        <p:txBody>
-          <a:bodyPr rtlCol="0" anchor="ctr"/>
-          <a:lstStyle/>
-          <a:p>
-            <a:pPr algn="ctr"/>
-          </a:p>
-        </p:txBody>
-      </p:sp>
-      <p:sp>
-        <p:nvSpPr>
-          <p:cNvPr id="19" name="TextBox 18"/>
-          <p:cNvSpPr txBox="1"/>
-          <p:nvPr/>
-        </p:nvSpPr>
-        <p:spPr>
-          <a:xfrm>
-            <a:off x="7101230" y="3798417"/>
-            <a:ext cx="1280160" cy="228600"/>
-          </a:xfrm>
-          <a:prstGeom prst="rect">
-            <a:avLst/>
-          </a:prstGeom>
-          <a:noFill/>
-        </p:spPr>
-        <p:txBody>
-          <a:bodyPr wrap="square" lIns="0" rIns="0" tIns="0" bIns="0" anchor="ctr">
-            <a:spAutoFit/>
-          </a:bodyPr>
-          <a:lstStyle/>
-          <a:p>
-            <a:pPr algn="ctr"/>
-            <a:r>
-              <a:rPr sz="950" b="0">
-                <a:solidFill>
-                  <a:srgbClr val="4A4842"/>
-                </a:solidFill>
-                <a:latin typeface="Readex Pro"/>
-                <a:cs typeface="Readex Pro"/>
-                <a:ea typeface="Readex Pro"/>
-              </a:rPr>
-              <a:t>app-arat5 (today)</a:t>
-            </a:r>
-          </a:p>
-        </p:txBody>
-      </p:sp>
-      <p:sp>
-        <p:nvSpPr>
-          <p:cNvPr id="20" name="Oval 19"/>
-          <p:cNvSpPr/>
-          <p:nvPr/>
-        </p:nvSpPr>
-        <p:spPr>
-          <a:xfrm>
-            <a:off x="7616168" y="2789529"/>
-            <a:ext cx="182880" cy="182880"/>
-          </a:xfrm>
-          <a:prstGeom prst="ellipse">
-            <a:avLst/>
-          </a:prstGeom>
-          <a:solidFill>
-            <a:srgbClr val="6F6B5E"/>
-          </a:solidFill>
-          <a:ln>
-            <a:noFill/>
-          </a:ln>
-          <a:effectLst/>
-        </p:spPr>
-        <p:style>
-          <a:lnRef idx="1">
-            <a:schemeClr val="accent1"/>
-          </a:lnRef>
-          <a:fillRef idx="3">
-            <a:schemeClr val="accent1"/>
-          </a:fillRef>
-          <a:effectRef idx="2">
-            <a:schemeClr val="accent1"/>
-          </a:effectRef>
-          <a:fontRef idx="minor">
-            <a:schemeClr val="lt1"/>
-          </a:fontRef>
-        </p:style>
-        <p:txBody>
-          <a:bodyPr rtlCol="0" anchor="ctr"/>
-          <a:lstStyle/>
-          <a:p>
-            <a:pPr algn="ctr"/>
-          </a:p>
-        </p:txBody>
-      </p:sp>
-      <p:sp>
-        <p:nvSpPr>
-          <p:cNvPr id="21" name="Oval 20"/>
-          <p:cNvSpPr/>
-          <p:nvPr/>
-        </p:nvSpPr>
-        <p:spPr>
-          <a:xfrm>
-            <a:off x="6756762" y="1970227"/>
-            <a:ext cx="182880" cy="182880"/>
-          </a:xfrm>
-          <a:prstGeom prst="ellipse">
-            <a:avLst/>
-          </a:prstGeom>
-          <a:solidFill>
-            <a:srgbClr val="6F6B5E"/>
-          </a:solidFill>
-          <a:ln>
-            <a:noFill/>
-          </a:ln>
-          <a:effectLst/>
-        </p:spPr>
-        <p:style>
-          <a:lnRef idx="1">
-            <a:schemeClr val="accent1"/>
-          </a:lnRef>
-          <a:fillRef idx="3">
-            <a:schemeClr val="accent1"/>
-          </a:fillRef>
-          <a:effectRef idx="2">
-            <a:schemeClr val="accent1"/>
-          </a:effectRef>
-          <a:fontRef idx="minor">
-            <a:schemeClr val="lt1"/>
-          </a:fontRef>
-        </p:style>
-        <p:txBody>
-          <a:bodyPr rtlCol="0" anchor="ctr"/>
-          <a:lstStyle/>
-          <a:p>
-            <a:pPr algn="ctr"/>
-          </a:p>
-        </p:txBody>
-      </p:sp>
-      <p:sp>
-        <p:nvSpPr>
-          <p:cNvPr id="22" name="Oval 21"/>
-          <p:cNvSpPr/>
-          <p:nvPr/>
-        </p:nvSpPr>
-        <p:spPr>
-          <a:xfrm>
-            <a:off x="6318634" y="2633472"/>
-            <a:ext cx="182880" cy="182880"/>
-          </a:xfrm>
-          <a:prstGeom prst="ellipse">
-            <a:avLst/>
-          </a:prstGeom>
-          <a:solidFill>
-            <a:srgbClr val="8A5E35"/>
-          </a:solidFill>
-          <a:ln>
-            <a:noFill/>
-          </a:ln>
-          <a:effectLst/>
-        </p:spPr>
-        <p:style>
-          <a:lnRef idx="1">
-            <a:schemeClr val="accent1"/>
-          </a:lnRef>
-          <a:fillRef idx="3">
-            <a:schemeClr val="accent1"/>
-          </a:fillRef>
-          <a:effectRef idx="2">
-            <a:schemeClr val="accent1"/>
-          </a:effectRef>
-          <a:fontRef idx="minor">
-            <a:schemeClr val="lt1"/>
-          </a:fontRef>
-        </p:style>
-        <p:txBody>
-          <a:bodyPr rtlCol="0" anchor="ctr"/>
-          <a:lstStyle/>
-          <a:p>
-            <a:pPr algn="ctr"/>
-          </a:p>
-        </p:txBody>
-      </p:sp>
-      <p:sp>
-        <p:nvSpPr>
-          <p:cNvPr id="23" name="TextBox 22"/>
-          <p:cNvSpPr txBox="1"/>
-          <p:nvPr/>
-        </p:nvSpPr>
-        <p:spPr>
-          <a:xfrm>
-            <a:off x="5769994" y="2404872"/>
-            <a:ext cx="1280160" cy="228600"/>
-          </a:xfrm>
-          <a:prstGeom prst="rect">
-            <a:avLst/>
-          </a:prstGeom>
-          <a:noFill/>
-        </p:spPr>
-        <p:txBody>
-          <a:bodyPr wrap="square" lIns="0" rIns="0" tIns="0" bIns="0" anchor="ctr">
-            <a:spAutoFit/>
-          </a:bodyPr>
-          <a:lstStyle/>
-          <a:p>
-            <a:pPr algn="ctr"/>
-            <a:r>
-              <a:rPr sz="950" b="0">
-                <a:solidFill>
-                  <a:srgbClr val="4A4842"/>
-                </a:solidFill>
-                <a:latin typeface="Readex Pro"/>
-                <a:cs typeface="Readex Pro"/>
-                <a:ea typeface="Readex Pro"/>
-              </a:rPr>
-              <a:t>app-arabart</a:t>
-            </a:r>
-          </a:p>
-        </p:txBody>
-      </p:sp>
-      <p:sp>
-        <p:nvSpPr>
-          <p:cNvPr id="24" name="Oval 23"/>
-          <p:cNvSpPr/>
-          <p:nvPr/>
-        </p:nvSpPr>
-        <p:spPr>
-          <a:xfrm>
-            <a:off x="6369187" y="2789529"/>
-            <a:ext cx="182880" cy="182880"/>
-          </a:xfrm>
-          <a:prstGeom prst="ellipse">
-            <a:avLst/>
-          </a:prstGeom>
-          <a:solidFill>
-            <a:srgbClr val="6F6B5E"/>
-          </a:solidFill>
-          <a:ln>
-            <a:noFill/>
-          </a:ln>
-          <a:effectLst/>
-        </p:spPr>
-        <p:style>
-          <a:lnRef idx="1">
-            <a:schemeClr val="accent1"/>
-          </a:lnRef>
-          <a:fillRef idx="3">
-            <a:schemeClr val="accent1"/>
-          </a:fillRef>
-          <a:effectRef idx="2">
-            <a:schemeClr val="accent1"/>
-          </a:effectRef>
-          <a:fontRef idx="minor">
-            <a:schemeClr val="lt1"/>
-          </a:fontRef>
-        </p:style>
-        <p:txBody>
-          <a:bodyPr rtlCol="0" anchor="ctr"/>
-          <a:lstStyle/>
-          <a:p>
-            <a:pPr algn="ctr"/>
-          </a:p>
-        </p:txBody>
-      </p:sp>
-      <p:sp>
-        <p:nvSpPr>
-          <p:cNvPr id="25" name="Oval 24"/>
-          <p:cNvSpPr/>
-          <p:nvPr/>
-        </p:nvSpPr>
-        <p:spPr>
-          <a:xfrm>
-            <a:off x="5599654" y="1853184"/>
-            <a:ext cx="182880" cy="182880"/>
-          </a:xfrm>
-          <a:prstGeom prst="ellipse">
-            <a:avLst/>
-          </a:prstGeom>
-          <a:solidFill>
-            <a:srgbClr val="6F6B5E"/>
-          </a:solidFill>
-          <a:ln>
-            <a:noFill/>
-          </a:ln>
-          <a:effectLst/>
-        </p:spPr>
-        <p:style>
-          <a:lnRef idx="1">
-            <a:schemeClr val="accent1"/>
-          </a:lnRef>
-          <a:fillRef idx="3">
-            <a:schemeClr val="accent1"/>
-          </a:fillRef>
-          <a:effectRef idx="2">
-            <a:schemeClr val="accent1"/>
-          </a:effectRef>
-          <a:fontRef idx="minor">
-            <a:schemeClr val="lt1"/>
-          </a:fontRef>
-        </p:style>
-        <p:txBody>
-          <a:bodyPr rtlCol="0" anchor="ctr"/>
-          <a:lstStyle/>
-          <a:p>
-            <a:pPr algn="ctr"/>
-          </a:p>
-        </p:txBody>
-      </p:sp>
-      <p:sp>
-        <p:nvSpPr>
-          <p:cNvPr id="26" name="Oval 25"/>
-          <p:cNvSpPr/>
-          <p:nvPr/>
-        </p:nvSpPr>
-        <p:spPr>
-          <a:xfrm>
-            <a:off x="7871677" y="2167737"/>
-            <a:ext cx="256032" cy="256032"/>
-          </a:xfrm>
-          <a:prstGeom prst="ellipse">
-            <a:avLst/>
-          </a:prstGeom>
-          <a:solidFill>
-            <a:srgbClr val="B5533C"/>
-          </a:solidFill>
-          <a:ln>
-            <a:noFill/>
-          </a:ln>
-          <a:effectLst/>
-        </p:spPr>
-        <p:style>
-          <a:lnRef idx="1">
-            <a:schemeClr val="accent1"/>
-          </a:lnRef>
-          <a:fillRef idx="3">
-            <a:schemeClr val="accent1"/>
-          </a:fillRef>
-          <a:effectRef idx="2">
-            <a:schemeClr val="accent1"/>
-          </a:effectRef>
-          <a:fontRef idx="minor">
-            <a:schemeClr val="lt1"/>
-          </a:fontRef>
-        </p:style>
-        <p:txBody>
-          <a:bodyPr rtlCol="0" anchor="ctr"/>
-          <a:lstStyle/>
-          <a:p>
-            <a:pPr algn="ctr"/>
-          </a:p>
-        </p:txBody>
-      </p:sp>
-      <p:sp>
-        <p:nvSpPr>
-          <p:cNvPr id="27" name="TextBox 26"/>
-          <p:cNvSpPr txBox="1"/>
-          <p:nvPr/>
-        </p:nvSpPr>
-        <p:spPr>
-          <a:xfrm>
-            <a:off x="7359613" y="1975713"/>
-            <a:ext cx="1280160" cy="228600"/>
-          </a:xfrm>
-          <a:prstGeom prst="rect">
-            <a:avLst/>
-          </a:prstGeom>
-          <a:noFill/>
-        </p:spPr>
-        <p:txBody>
-          <a:bodyPr wrap="square" lIns="0" rIns="0" tIns="0" bIns="0" anchor="ctr">
-            <a:spAutoFit/>
-          </a:bodyPr>
-          <a:lstStyle/>
-          <a:p>
-            <a:pPr algn="ctr"/>
-            <a:r>
-              <a:rPr sz="950" b="1">
-                <a:solidFill>
-                  <a:srgbClr val="B5533C"/>
-                </a:solidFill>
-                <a:latin typeface="Readex Pro"/>
-                <a:cs typeface="Readex Pro"/>
-                <a:ea typeface="Readex Pro"/>
-              </a:rPr>
-              <a:t>model 3 + net</a:t>
-            </a:r>
-          </a:p>
-        </p:txBody>
-      </p:sp>
-      <p:sp>
-        <p:nvSpPr>
-          <p:cNvPr id="28" name="Rounded Rectangle 27"/>
-          <p:cNvSpPr/>
-          <p:nvPr/>
-        </p:nvSpPr>
-        <p:spPr>
-          <a:xfrm>
-            <a:off x="594360" y="3429000"/>
-            <a:ext cx="4754880" cy="329184"/>
-          </a:xfrm>
-          <a:prstGeom prst="roundRect">
-            <a:avLst>
-              <a:gd name="adj" fmla="val 50000"/>
-            </a:avLst>
-          </a:prstGeom>
-          <a:solidFill>
-            <a:srgbClr val="EEDDC7"/>
-          </a:solidFill>
-          <a:ln>
-            <a:noFill/>
-          </a:ln>
-          <a:effectLst/>
-        </p:spPr>
-        <p:style>
-          <a:lnRef idx="1">
-            <a:schemeClr val="accent1"/>
-          </a:lnRef>
-          <a:fillRef idx="3">
-            <a:schemeClr val="accent1"/>
-          </a:fillRef>
-          <a:effectRef idx="2">
-            <a:schemeClr val="accent1"/>
-          </a:effectRef>
-          <a:fontRef idx="minor">
-            <a:schemeClr val="lt1"/>
-          </a:fontRef>
-        </p:style>
-        <p:txBody>
-          <a:bodyPr rtlCol="0" anchor="ctr" wrap="square" lIns="109728" rIns="109728" tIns="0" bIns="0"/>
-          <a:lstStyle/>
-          <a:p>
-            <a:pPr algn="ctr"/>
-            <a:r>
-              <a:rPr sz="1100" b="1">
-                <a:solidFill>
-                  <a:srgbClr val="8A5E35"/>
-                </a:solidFill>
-                <a:latin typeface="Readex Pro"/>
-                <a:cs typeface="Readex Pro"/>
-                <a:ea typeface="Readex Pro"/>
-              </a:rPr>
-              <a:t>frozen rule: meaning kept = same meaning AND every number kept</a:t>
-            </a:r>
-          </a:p>
-        </p:txBody>
-      </p:sp>
-      <p:sp>
-        <p:nvSpPr>
-          <p:cNvPr id="29" name="Rounded Rectangle 28"/>
-          <p:cNvSpPr/>
-          <p:nvPr/>
-        </p:nvSpPr>
-        <p:spPr>
-          <a:xfrm>
-            <a:off x="594360" y="3840480"/>
-            <a:ext cx="4754880" cy="329184"/>
-          </a:xfrm>
-          <a:prstGeom prst="roundRect">
-            <a:avLst>
-              <a:gd name="adj" fmla="val 50000"/>
-            </a:avLst>
-          </a:prstGeom>
-          <a:solidFill>
-            <a:srgbClr val="EFE9D9"/>
-          </a:solidFill>
-          <a:ln>
-            <a:noFill/>
-          </a:ln>
-          <a:effectLst/>
-        </p:spPr>
-        <p:style>
-          <a:lnRef idx="1">
-            <a:schemeClr val="accent1"/>
-          </a:lnRef>
-          <a:fillRef idx="3">
-            <a:schemeClr val="accent1"/>
-          </a:fillRef>
-          <a:effectRef idx="2">
-            <a:schemeClr val="accent1"/>
-          </a:effectRef>
-          <a:fontRef idx="minor">
-            <a:schemeClr val="lt1"/>
-          </a:fontRef>
-        </p:style>
-        <p:txBody>
-          <a:bodyPr rtlCol="0" anchor="ctr" wrap="square" lIns="109728" rIns="109728" tIns="0" bIns="0"/>
-          <a:lstStyle/>
-          <a:p>
-            <a:pPr algn="ctr"/>
-            <a:r>
-              <a:rPr sz="1100" b="1">
-                <a:solidFill>
-                  <a:srgbClr val="4A4842"/>
-                </a:solidFill>
-                <a:latin typeface="Readex Pro"/>
-                <a:cs typeface="Readex Pro"/>
-                <a:ea typeface="Readex Pro"/>
-              </a:rPr>
-              <a:t>scorer agrees with 6 human raters at AUC 0.85</a:t>
-            </a:r>
-          </a:p>
-        </p:txBody>
-      </p:sp>
-      <p:sp>
-        <p:nvSpPr>
-          <p:cNvPr id="30" name="Rounded Rectangle 29"/>
-          <p:cNvSpPr/>
-          <p:nvPr/>
-        </p:nvSpPr>
-        <p:spPr>
-          <a:xfrm>
-            <a:off x="594360" y="4251960"/>
-            <a:ext cx="4754880" cy="329184"/>
-          </a:xfrm>
-          <a:prstGeom prst="roundRect">
-            <a:avLst>
-              <a:gd name="adj" fmla="val 50000"/>
-            </a:avLst>
-          </a:prstGeom>
-          <a:solidFill>
-            <a:srgbClr val="F3E2DA"/>
-          </a:solidFill>
-          <a:ln>
-            <a:noFill/>
-          </a:ln>
-          <a:effectLst/>
-        </p:spPr>
-        <p:style>
-          <a:lnRef idx="1">
-            <a:schemeClr val="accent1"/>
-          </a:lnRef>
-          <a:fillRef idx="3">
-            <a:schemeClr val="accent1"/>
-          </a:fillRef>
-          <a:effectRef idx="2">
-            <a:schemeClr val="accent1"/>
-          </a:effectRef>
-          <a:fontRef idx="minor">
-            <a:schemeClr val="lt1"/>
-          </a:fontRef>
-        </p:style>
-        <p:txBody>
-          <a:bodyPr rtlCol="0" anchor="ctr" wrap="square" lIns="109728" rIns="109728" tIns="0" bIns="0"/>
-          <a:lstStyle/>
-          <a:p>
-            <a:pPr algn="ctr"/>
-            <a:r>
-              <a:rPr sz="1100" b="1">
-                <a:solidFill>
-                  <a:srgbClr val="B5533C"/>
-                </a:solidFill>
-                <a:latin typeface="Readex Pro"/>
-                <a:cs typeface="Readex Pro"/>
-                <a:ea typeface="Readex Pro"/>
-              </a:rPr>
-              <a:t>dropped the measures that scored 0.5 against people</a:t>
-            </a:r>
-          </a:p>
-        </p:txBody>
-      </p:sp>
-      <p:sp>
-        <p:nvSpPr>
-          <p:cNvPr id="31" name="TextBox 30"/>
-          <p:cNvSpPr txBox="1"/>
-          <p:nvPr/>
-        </p:nvSpPr>
-        <p:spPr>
-          <a:xfrm>
-            <a:off x="594360" y="4800600"/>
-            <a:ext cx="8714232" cy="320040"/>
-          </a:xfrm>
-          <a:prstGeom prst="rect">
-            <a:avLst/>
-          </a:prstGeom>
-          <a:noFill/>
-        </p:spPr>
-        <p:txBody>
-          <a:bodyPr wrap="square" lIns="0" rIns="0" tIns="0" bIns="0" anchor="ctr">
-            <a:spAutoFit/>
-          </a:bodyPr>
-          <a:lstStyle/>
-          <a:p>
-            <a:pPr algn="ctr"/>
-            <a:r>
-              <a:rPr sz="1500" b="1">
-                <a:solidFill>
-                  <a:srgbClr val="B5533C"/>
-                </a:solidFill>
-                <a:latin typeface="Readex Pro"/>
-                <a:cs typeface="Readex Pro"/>
-                <a:ea typeface="Readex Pro"/>
-              </a:rPr>
-              <a:t>Simplify most, keep meaning most</a:t>
+              <a:t>reader with dyslexia: 17 easier / 9 same / 4 harder</a:t>
             </a:r>
           </a:p>
         </p:txBody>
@@ -19276,7 +20206,7 @@
                               <p:par>
                                 <p:cTn id="10" presetID="10" presetClass="entr" presetSubtype="0" fill="hold" grpId="0" nodeType="withEffect">
                                   <p:stCondLst>
-                                    <p:cond delay="300"/>
+                                    <p:cond delay="200"/>
                                   </p:stCondLst>
                                   <p:childTnLst>
                                     <p:set>
@@ -19311,7 +20241,7 @@
                               <p:par>
                                 <p:cTn id="13" presetID="10" presetClass="entr" presetSubtype="0" fill="hold" grpId="0" nodeType="withEffect">
                                   <p:stCondLst>
-                                    <p:cond delay="500"/>
+                                    <p:cond delay="200"/>
                                   </p:stCondLst>
                                   <p:childTnLst>
                                     <p:set>
@@ -19346,7 +20276,7 @@
                               <p:par>
                                 <p:cTn id="16" presetID="10" presetClass="entr" presetSubtype="0" fill="hold" grpId="0" nodeType="withEffect">
                                   <p:stCondLst>
-                                    <p:cond delay="700"/>
+                                    <p:cond delay="400"/>
                                   </p:stCondLst>
                                   <p:childTnLst>
                                     <p:set>
@@ -19372,6 +20302,706 @@
                                         <p:cTn id="15" dur="500"/>
                                         <p:tgtEl>
                                           <p:spTgt spid="12"/>
+                                        </p:tgtEl>
+                                      </p:cBhvr>
+                                    </p:animEffect>
+                                  </p:childTnLst>
+                                </p:cTn>
+                              </p:par>
+                              <p:par>
+                                <p:cTn id="19" presetID="10" presetClass="entr" presetSubtype="0" fill="hold" grpId="0" nodeType="withEffect">
+                                  <p:stCondLst>
+                                    <p:cond delay="520"/>
+                                  </p:stCondLst>
+                                  <p:childTnLst>
+                                    <p:set>
+                                      <p:cBhvr>
+                                        <p:cTn id="17" dur="1" fill="hold">
+                                          <p:stCondLst>
+                                            <p:cond delay="0"/>
+                                          </p:stCondLst>
+                                        </p:cTn>
+                                        <p:tgtEl>
+                                          <p:spTgt spid="13"/>
+                                        </p:tgtEl>
+                                        <p:attrNameLst>
+                                          <p:attrName>style.visibility</p:attrName>
+                                        </p:attrNameLst>
+                                      </p:cBhvr>
+                                      <p:to>
+                                        <p:strVal val="visible"/>
+                                      </p:to>
+                                    </p:set>
+                                    <p:animEffect transition="in" filter="fade">
+                                      <p:cBhvr>
+                                        <p:cTn id="18" dur="500"/>
+                                        <p:tgtEl>
+                                          <p:spTgt spid="13"/>
+                                        </p:tgtEl>
+                                      </p:cBhvr>
+                                    </p:animEffect>
+                                  </p:childTnLst>
+                                </p:cTn>
+                              </p:par>
+                              <p:par>
+                                <p:cTn id="22" presetID="10" presetClass="entr" presetSubtype="0" fill="hold" grpId="0" nodeType="withEffect">
+                                  <p:stCondLst>
+                                    <p:cond delay="640"/>
+                                  </p:stCondLst>
+                                  <p:childTnLst>
+                                    <p:set>
+                                      <p:cBhvr>
+                                        <p:cTn id="20" dur="1" fill="hold">
+                                          <p:stCondLst>
+                                            <p:cond delay="0"/>
+                                          </p:stCondLst>
+                                        </p:cTn>
+                                        <p:tgtEl>
+                                          <p:spTgt spid="14"/>
+                                        </p:tgtEl>
+                                        <p:attrNameLst>
+                                          <p:attrName>style.visibility</p:attrName>
+                                        </p:attrNameLst>
+                                      </p:cBhvr>
+                                      <p:to>
+                                        <p:strVal val="visible"/>
+                                      </p:to>
+                                    </p:set>
+                                    <p:animEffect transition="in" filter="fade">
+                                      <p:cBhvr>
+                                        <p:cTn id="21" dur="500"/>
+                                        <p:tgtEl>
+                                          <p:spTgt spid="14"/>
+                                        </p:tgtEl>
+                                      </p:cBhvr>
+                                    </p:animEffect>
+                                  </p:childTnLst>
+                                </p:cTn>
+                              </p:par>
+                              <p:par>
+                                <p:cTn id="25" presetID="10" presetClass="entr" presetSubtype="0" fill="hold" grpId="0" nodeType="withEffect">
+                                  <p:stCondLst>
+                                    <p:cond delay="760"/>
+                                  </p:stCondLst>
+                                  <p:childTnLst>
+                                    <p:set>
+                                      <p:cBhvr>
+                                        <p:cTn id="23" dur="1" fill="hold">
+                                          <p:stCondLst>
+                                            <p:cond delay="0"/>
+                                          </p:stCondLst>
+                                        </p:cTn>
+                                        <p:tgtEl>
+                                          <p:spTgt spid="15"/>
+                                        </p:tgtEl>
+                                        <p:attrNameLst>
+                                          <p:attrName>style.visibility</p:attrName>
+                                        </p:attrNameLst>
+                                      </p:cBhvr>
+                                      <p:to>
+                                        <p:strVal val="visible"/>
+                                      </p:to>
+                                    </p:set>
+                                    <p:animEffect transition="in" filter="fade">
+                                      <p:cBhvr>
+                                        <p:cTn id="24" dur="500"/>
+                                        <p:tgtEl>
+                                          <p:spTgt spid="15"/>
+                                        </p:tgtEl>
+                                      </p:cBhvr>
+                                    </p:animEffect>
+                                  </p:childTnLst>
+                                </p:cTn>
+                              </p:par>
+                              <p:par>
+                                <p:cTn id="28" presetID="10" presetClass="entr" presetSubtype="0" fill="hold" grpId="0" nodeType="withEffect">
+                                  <p:stCondLst>
+                                    <p:cond delay="880"/>
+                                  </p:stCondLst>
+                                  <p:childTnLst>
+                                    <p:set>
+                                      <p:cBhvr>
+                                        <p:cTn id="26" dur="1" fill="hold">
+                                          <p:stCondLst>
+                                            <p:cond delay="0"/>
+                                          </p:stCondLst>
+                                        </p:cTn>
+                                        <p:tgtEl>
+                                          <p:spTgt spid="16"/>
+                                        </p:tgtEl>
+                                        <p:attrNameLst>
+                                          <p:attrName>style.visibility</p:attrName>
+                                        </p:attrNameLst>
+                                      </p:cBhvr>
+                                      <p:to>
+                                        <p:strVal val="visible"/>
+                                      </p:to>
+                                    </p:set>
+                                    <p:animEffect transition="in" filter="fade">
+                                      <p:cBhvr>
+                                        <p:cTn id="27" dur="500"/>
+                                        <p:tgtEl>
+                                          <p:spTgt spid="16"/>
+                                        </p:tgtEl>
+                                      </p:cBhvr>
+                                    </p:animEffect>
+                                  </p:childTnLst>
+                                </p:cTn>
+                              </p:par>
+                              <p:par>
+                                <p:cTn id="31" presetID="10" presetClass="entr" presetSubtype="0" fill="hold" grpId="0" nodeType="withEffect">
+                                  <p:stCondLst>
+                                    <p:cond delay="1000"/>
+                                  </p:stCondLst>
+                                  <p:childTnLst>
+                                    <p:set>
+                                      <p:cBhvr>
+                                        <p:cTn id="29" dur="1" fill="hold">
+                                          <p:stCondLst>
+                                            <p:cond delay="0"/>
+                                          </p:stCondLst>
+                                        </p:cTn>
+                                        <p:tgtEl>
+                                          <p:spTgt spid="17"/>
+                                        </p:tgtEl>
+                                        <p:attrNameLst>
+                                          <p:attrName>style.visibility</p:attrName>
+                                        </p:attrNameLst>
+                                      </p:cBhvr>
+                                      <p:to>
+                                        <p:strVal val="visible"/>
+                                      </p:to>
+                                    </p:set>
+                                    <p:animEffect transition="in" filter="fade">
+                                      <p:cBhvr>
+                                        <p:cTn id="30" dur="500"/>
+                                        <p:tgtEl>
+                                          <p:spTgt spid="17"/>
+                                        </p:tgtEl>
+                                      </p:cBhvr>
+                                    </p:animEffect>
+                                  </p:childTnLst>
+                                </p:cTn>
+                              </p:par>
+                              <p:par>
+                                <p:cTn id="34" presetID="10" presetClass="entr" presetSubtype="0" fill="hold" grpId="0" nodeType="withEffect">
+                                  <p:stCondLst>
+                                    <p:cond delay="1120"/>
+                                  </p:stCondLst>
+                                  <p:childTnLst>
+                                    <p:set>
+                                      <p:cBhvr>
+                                        <p:cTn id="32" dur="1" fill="hold">
+                                          <p:stCondLst>
+                                            <p:cond delay="0"/>
+                                          </p:stCondLst>
+                                        </p:cTn>
+                                        <p:tgtEl>
+                                          <p:spTgt spid="18"/>
+                                        </p:tgtEl>
+                                        <p:attrNameLst>
+                                          <p:attrName>style.visibility</p:attrName>
+                                        </p:attrNameLst>
+                                      </p:cBhvr>
+                                      <p:to>
+                                        <p:strVal val="visible"/>
+                                      </p:to>
+                                    </p:set>
+                                    <p:animEffect transition="in" filter="fade">
+                                      <p:cBhvr>
+                                        <p:cTn id="33" dur="500"/>
+                                        <p:tgtEl>
+                                          <p:spTgt spid="18"/>
+                                        </p:tgtEl>
+                                      </p:cBhvr>
+                                    </p:animEffect>
+                                  </p:childTnLst>
+                                </p:cTn>
+                              </p:par>
+                              <p:par>
+                                <p:cTn id="37" presetID="10" presetClass="entr" presetSubtype="0" fill="hold" grpId="0" nodeType="withEffect">
+                                  <p:stCondLst>
+                                    <p:cond delay="1240"/>
+                                  </p:stCondLst>
+                                  <p:childTnLst>
+                                    <p:set>
+                                      <p:cBhvr>
+                                        <p:cTn id="35" dur="1" fill="hold">
+                                          <p:stCondLst>
+                                            <p:cond delay="0"/>
+                                          </p:stCondLst>
+                                        </p:cTn>
+                                        <p:tgtEl>
+                                          <p:spTgt spid="19"/>
+                                        </p:tgtEl>
+                                        <p:attrNameLst>
+                                          <p:attrName>style.visibility</p:attrName>
+                                        </p:attrNameLst>
+                                      </p:cBhvr>
+                                      <p:to>
+                                        <p:strVal val="visible"/>
+                                      </p:to>
+                                    </p:set>
+                                    <p:animEffect transition="in" filter="fade">
+                                      <p:cBhvr>
+                                        <p:cTn id="36" dur="500"/>
+                                        <p:tgtEl>
+                                          <p:spTgt spid="19"/>
+                                        </p:tgtEl>
+                                      </p:cBhvr>
+                                    </p:animEffect>
+                                  </p:childTnLst>
+                                </p:cTn>
+                              </p:par>
+                              <p:par>
+                                <p:cTn id="40" presetID="10" presetClass="entr" presetSubtype="0" fill="hold" grpId="0" nodeType="withEffect">
+                                  <p:stCondLst>
+                                    <p:cond delay="1360"/>
+                                  </p:stCondLst>
+                                  <p:childTnLst>
+                                    <p:set>
+                                      <p:cBhvr>
+                                        <p:cTn id="38" dur="1" fill="hold">
+                                          <p:stCondLst>
+                                            <p:cond delay="0"/>
+                                          </p:stCondLst>
+                                        </p:cTn>
+                                        <p:tgtEl>
+                                          <p:spTgt spid="20"/>
+                                        </p:tgtEl>
+                                        <p:attrNameLst>
+                                          <p:attrName>style.visibility</p:attrName>
+                                        </p:attrNameLst>
+                                      </p:cBhvr>
+                                      <p:to>
+                                        <p:strVal val="visible"/>
+                                      </p:to>
+                                    </p:set>
+                                    <p:animEffect transition="in" filter="fade">
+                                      <p:cBhvr>
+                                        <p:cTn id="39" dur="500"/>
+                                        <p:tgtEl>
+                                          <p:spTgt spid="20"/>
+                                        </p:tgtEl>
+                                      </p:cBhvr>
+                                    </p:animEffect>
+                                  </p:childTnLst>
+                                </p:cTn>
+                              </p:par>
+                              <p:par>
+                                <p:cTn id="43" presetID="10" presetClass="entr" presetSubtype="0" fill="hold" grpId="0" nodeType="withEffect">
+                                  <p:stCondLst>
+                                    <p:cond delay="1480"/>
+                                  </p:stCondLst>
+                                  <p:childTnLst>
+                                    <p:set>
+                                      <p:cBhvr>
+                                        <p:cTn id="41" dur="1" fill="hold">
+                                          <p:stCondLst>
+                                            <p:cond delay="0"/>
+                                          </p:stCondLst>
+                                        </p:cTn>
+                                        <p:tgtEl>
+                                          <p:spTgt spid="21"/>
+                                        </p:tgtEl>
+                                        <p:attrNameLst>
+                                          <p:attrName>style.visibility</p:attrName>
+                                        </p:attrNameLst>
+                                      </p:cBhvr>
+                                      <p:to>
+                                        <p:strVal val="visible"/>
+                                      </p:to>
+                                    </p:set>
+                                    <p:animEffect transition="in" filter="fade">
+                                      <p:cBhvr>
+                                        <p:cTn id="42" dur="500"/>
+                                        <p:tgtEl>
+                                          <p:spTgt spid="21"/>
+                                        </p:tgtEl>
+                                      </p:cBhvr>
+                                    </p:animEffect>
+                                  </p:childTnLst>
+                                </p:cTn>
+                              </p:par>
+                              <p:par>
+                                <p:cTn id="46" presetID="10" presetClass="entr" presetSubtype="0" fill="hold" grpId="0" nodeType="withEffect">
+                                  <p:stCondLst>
+                                    <p:cond delay="1600"/>
+                                  </p:stCondLst>
+                                  <p:childTnLst>
+                                    <p:set>
+                                      <p:cBhvr>
+                                        <p:cTn id="44" dur="1" fill="hold">
+                                          <p:stCondLst>
+                                            <p:cond delay="0"/>
+                                          </p:stCondLst>
+                                        </p:cTn>
+                                        <p:tgtEl>
+                                          <p:spTgt spid="22"/>
+                                        </p:tgtEl>
+                                        <p:attrNameLst>
+                                          <p:attrName>style.visibility</p:attrName>
+                                        </p:attrNameLst>
+                                      </p:cBhvr>
+                                      <p:to>
+                                        <p:strVal val="visible"/>
+                                      </p:to>
+                                    </p:set>
+                                    <p:animEffect transition="in" filter="fade">
+                                      <p:cBhvr>
+                                        <p:cTn id="45" dur="500"/>
+                                        <p:tgtEl>
+                                          <p:spTgt spid="22"/>
+                                        </p:tgtEl>
+                                      </p:cBhvr>
+                                    </p:animEffect>
+                                  </p:childTnLst>
+                                </p:cTn>
+                              </p:par>
+                              <p:par>
+                                <p:cTn id="49" presetID="10" presetClass="entr" presetSubtype="0" fill="hold" grpId="0" nodeType="withEffect">
+                                  <p:stCondLst>
+                                    <p:cond delay="1720"/>
+                                  </p:stCondLst>
+                                  <p:childTnLst>
+                                    <p:set>
+                                      <p:cBhvr>
+                                        <p:cTn id="47" dur="1" fill="hold">
+                                          <p:stCondLst>
+                                            <p:cond delay="0"/>
+                                          </p:stCondLst>
+                                        </p:cTn>
+                                        <p:tgtEl>
+                                          <p:spTgt spid="23"/>
+                                        </p:tgtEl>
+                                        <p:attrNameLst>
+                                          <p:attrName>style.visibility</p:attrName>
+                                        </p:attrNameLst>
+                                      </p:cBhvr>
+                                      <p:to>
+                                        <p:strVal val="visible"/>
+                                      </p:to>
+                                    </p:set>
+                                    <p:animEffect transition="in" filter="fade">
+                                      <p:cBhvr>
+                                        <p:cTn id="48" dur="500"/>
+                                        <p:tgtEl>
+                                          <p:spTgt spid="23"/>
+                                        </p:tgtEl>
+                                      </p:cBhvr>
+                                    </p:animEffect>
+                                  </p:childTnLst>
+                                </p:cTn>
+                              </p:par>
+                              <p:par>
+                                <p:cTn id="52" presetID="10" presetClass="entr" presetSubtype="0" fill="hold" grpId="0" nodeType="withEffect">
+                                  <p:stCondLst>
+                                    <p:cond delay="1840"/>
+                                  </p:stCondLst>
+                                  <p:childTnLst>
+                                    <p:set>
+                                      <p:cBhvr>
+                                        <p:cTn id="50" dur="1" fill="hold">
+                                          <p:stCondLst>
+                                            <p:cond delay="0"/>
+                                          </p:stCondLst>
+                                        </p:cTn>
+                                        <p:tgtEl>
+                                          <p:spTgt spid="24"/>
+                                        </p:tgtEl>
+                                        <p:attrNameLst>
+                                          <p:attrName>style.visibility</p:attrName>
+                                        </p:attrNameLst>
+                                      </p:cBhvr>
+                                      <p:to>
+                                        <p:strVal val="visible"/>
+                                      </p:to>
+                                    </p:set>
+                                    <p:animEffect transition="in" filter="fade">
+                                      <p:cBhvr>
+                                        <p:cTn id="51" dur="500"/>
+                                        <p:tgtEl>
+                                          <p:spTgt spid="24"/>
+                                        </p:tgtEl>
+                                      </p:cBhvr>
+                                    </p:animEffect>
+                                  </p:childTnLst>
+                                </p:cTn>
+                              </p:par>
+                              <p:par>
+                                <p:cTn id="55" presetID="10" presetClass="entr" presetSubtype="0" fill="hold" grpId="0" nodeType="withEffect">
+                                  <p:stCondLst>
+                                    <p:cond delay="1960"/>
+                                  </p:stCondLst>
+                                  <p:childTnLst>
+                                    <p:set>
+                                      <p:cBhvr>
+                                        <p:cTn id="53" dur="1" fill="hold">
+                                          <p:stCondLst>
+                                            <p:cond delay="0"/>
+                                          </p:stCondLst>
+                                        </p:cTn>
+                                        <p:tgtEl>
+                                          <p:spTgt spid="25"/>
+                                        </p:tgtEl>
+                                        <p:attrNameLst>
+                                          <p:attrName>style.visibility</p:attrName>
+                                        </p:attrNameLst>
+                                      </p:cBhvr>
+                                      <p:to>
+                                        <p:strVal val="visible"/>
+                                      </p:to>
+                                    </p:set>
+                                    <p:animEffect transition="in" filter="fade">
+                                      <p:cBhvr>
+                                        <p:cTn id="54" dur="500"/>
+                                        <p:tgtEl>
+                                          <p:spTgt spid="25"/>
+                                        </p:tgtEl>
+                                      </p:cBhvr>
+                                    </p:animEffect>
+                                  </p:childTnLst>
+                                </p:cTn>
+                              </p:par>
+                              <p:par>
+                                <p:cTn id="58" presetID="10" presetClass="entr" presetSubtype="0" fill="hold" grpId="0" nodeType="withEffect">
+                                  <p:stCondLst>
+                                    <p:cond delay="2080"/>
+                                  </p:stCondLst>
+                                  <p:childTnLst>
+                                    <p:set>
+                                      <p:cBhvr>
+                                        <p:cTn id="56" dur="1" fill="hold">
+                                          <p:stCondLst>
+                                            <p:cond delay="0"/>
+                                          </p:stCondLst>
+                                        </p:cTn>
+                                        <p:tgtEl>
+                                          <p:spTgt spid="26"/>
+                                        </p:tgtEl>
+                                        <p:attrNameLst>
+                                          <p:attrName>style.visibility</p:attrName>
+                                        </p:attrNameLst>
+                                      </p:cBhvr>
+                                      <p:to>
+                                        <p:strVal val="visible"/>
+                                      </p:to>
+                                    </p:set>
+                                    <p:animEffect transition="in" filter="fade">
+                                      <p:cBhvr>
+                                        <p:cTn id="57" dur="500"/>
+                                        <p:tgtEl>
+                                          <p:spTgt spid="26"/>
+                                        </p:tgtEl>
+                                      </p:cBhvr>
+                                    </p:animEffect>
+                                  </p:childTnLst>
+                                </p:cTn>
+                              </p:par>
+                              <p:par>
+                                <p:cTn id="61" presetID="10" presetClass="entr" presetSubtype="0" fill="hold" grpId="0" nodeType="withEffect">
+                                  <p:stCondLst>
+                                    <p:cond delay="2200"/>
+                                  </p:stCondLst>
+                                  <p:childTnLst>
+                                    <p:set>
+                                      <p:cBhvr>
+                                        <p:cTn id="59" dur="1" fill="hold">
+                                          <p:stCondLst>
+                                            <p:cond delay="0"/>
+                                          </p:stCondLst>
+                                        </p:cTn>
+                                        <p:tgtEl>
+                                          <p:spTgt spid="27"/>
+                                        </p:tgtEl>
+                                        <p:attrNameLst>
+                                          <p:attrName>style.visibility</p:attrName>
+                                        </p:attrNameLst>
+                                      </p:cBhvr>
+                                      <p:to>
+                                        <p:strVal val="visible"/>
+                                      </p:to>
+                                    </p:set>
+                                    <p:animEffect transition="in" filter="fade">
+                                      <p:cBhvr>
+                                        <p:cTn id="60" dur="500"/>
+                                        <p:tgtEl>
+                                          <p:spTgt spid="27"/>
+                                        </p:tgtEl>
+                                      </p:cBhvr>
+                                    </p:animEffect>
+                                  </p:childTnLst>
+                                </p:cTn>
+                              </p:par>
+                              <p:par>
+                                <p:cTn id="64" presetID="10" presetClass="entr" presetSubtype="0" fill="hold" grpId="0" nodeType="withEffect">
+                                  <p:stCondLst>
+                                    <p:cond delay="2320"/>
+                                  </p:stCondLst>
+                                  <p:childTnLst>
+                                    <p:set>
+                                      <p:cBhvr>
+                                        <p:cTn id="62" dur="1" fill="hold">
+                                          <p:stCondLst>
+                                            <p:cond delay="0"/>
+                                          </p:stCondLst>
+                                        </p:cTn>
+                                        <p:tgtEl>
+                                          <p:spTgt spid="28"/>
+                                        </p:tgtEl>
+                                        <p:attrNameLst>
+                                          <p:attrName>style.visibility</p:attrName>
+                                        </p:attrNameLst>
+                                      </p:cBhvr>
+                                      <p:to>
+                                        <p:strVal val="visible"/>
+                                      </p:to>
+                                    </p:set>
+                                    <p:animEffect transition="in" filter="fade">
+                                      <p:cBhvr>
+                                        <p:cTn id="63" dur="500"/>
+                                        <p:tgtEl>
+                                          <p:spTgt spid="28"/>
+                                        </p:tgtEl>
+                                      </p:cBhvr>
+                                    </p:animEffect>
+                                  </p:childTnLst>
+                                </p:cTn>
+                              </p:par>
+                              <p:par>
+                                <p:cTn id="67" presetID="10" presetClass="entr" presetSubtype="0" fill="hold" grpId="0" nodeType="withEffect">
+                                  <p:stCondLst>
+                                    <p:cond delay="2440"/>
+                                  </p:stCondLst>
+                                  <p:childTnLst>
+                                    <p:set>
+                                      <p:cBhvr>
+                                        <p:cTn id="65" dur="1" fill="hold">
+                                          <p:stCondLst>
+                                            <p:cond delay="0"/>
+                                          </p:stCondLst>
+                                        </p:cTn>
+                                        <p:tgtEl>
+                                          <p:spTgt spid="29"/>
+                                        </p:tgtEl>
+                                        <p:attrNameLst>
+                                          <p:attrName>style.visibility</p:attrName>
+                                        </p:attrNameLst>
+                                      </p:cBhvr>
+                                      <p:to>
+                                        <p:strVal val="visible"/>
+                                      </p:to>
+                                    </p:set>
+                                    <p:animEffect transition="in" filter="fade">
+                                      <p:cBhvr>
+                                        <p:cTn id="66" dur="500"/>
+                                        <p:tgtEl>
+                                          <p:spTgt spid="29"/>
+                                        </p:tgtEl>
+                                      </p:cBhvr>
+                                    </p:animEffect>
+                                  </p:childTnLst>
+                                </p:cTn>
+                              </p:par>
+                              <p:par>
+                                <p:cTn id="70" presetID="10" presetClass="entr" presetSubtype="0" fill="hold" grpId="0" nodeType="withEffect">
+                                  <p:stCondLst>
+                                    <p:cond delay="2560"/>
+                                  </p:stCondLst>
+                                  <p:childTnLst>
+                                    <p:set>
+                                      <p:cBhvr>
+                                        <p:cTn id="68" dur="1" fill="hold">
+                                          <p:stCondLst>
+                                            <p:cond delay="0"/>
+                                          </p:stCondLst>
+                                        </p:cTn>
+                                        <p:tgtEl>
+                                          <p:spTgt spid="30"/>
+                                        </p:tgtEl>
+                                        <p:attrNameLst>
+                                          <p:attrName>style.visibility</p:attrName>
+                                        </p:attrNameLst>
+                                      </p:cBhvr>
+                                      <p:to>
+                                        <p:strVal val="visible"/>
+                                      </p:to>
+                                    </p:set>
+                                    <p:animEffect transition="in" filter="fade">
+                                      <p:cBhvr>
+                                        <p:cTn id="69" dur="500"/>
+                                        <p:tgtEl>
+                                          <p:spTgt spid="30"/>
+                                        </p:tgtEl>
+                                      </p:cBhvr>
+                                    </p:animEffect>
+                                  </p:childTnLst>
+                                </p:cTn>
+                              </p:par>
+                              <p:par>
+                                <p:cTn id="73" presetID="10" presetClass="entr" presetSubtype="0" fill="hold" grpId="0" nodeType="withEffect">
+                                  <p:stCondLst>
+                                    <p:cond delay="2680"/>
+                                  </p:stCondLst>
+                                  <p:childTnLst>
+                                    <p:set>
+                                      <p:cBhvr>
+                                        <p:cTn id="71" dur="1" fill="hold">
+                                          <p:stCondLst>
+                                            <p:cond delay="0"/>
+                                          </p:stCondLst>
+                                        </p:cTn>
+                                        <p:tgtEl>
+                                          <p:spTgt spid="31"/>
+                                        </p:tgtEl>
+                                        <p:attrNameLst>
+                                          <p:attrName>style.visibility</p:attrName>
+                                        </p:attrNameLst>
+                                      </p:cBhvr>
+                                      <p:to>
+                                        <p:strVal val="visible"/>
+                                      </p:to>
+                                    </p:set>
+                                    <p:animEffect transition="in" filter="fade">
+                                      <p:cBhvr>
+                                        <p:cTn id="72" dur="500"/>
+                                        <p:tgtEl>
+                                          <p:spTgt spid="31"/>
+                                        </p:tgtEl>
+                                      </p:cBhvr>
+                                    </p:animEffect>
+                                  </p:childTnLst>
+                                </p:cTn>
+                              </p:par>
+                              <p:par>
+                                <p:cTn id="76" presetID="10" presetClass="entr" presetSubtype="0" fill="hold" grpId="0" nodeType="withEffect">
+                                  <p:stCondLst>
+                                    <p:cond delay="1100"/>
+                                  </p:stCondLst>
+                                  <p:childTnLst>
+                                    <p:set>
+                                      <p:cBhvr>
+                                        <p:cTn id="74" dur="1" fill="hold">
+                                          <p:stCondLst>
+                                            <p:cond delay="0"/>
+                                          </p:stCondLst>
+                                        </p:cTn>
+                                        <p:tgtEl>
+                                          <p:spTgt spid="32"/>
+                                        </p:tgtEl>
+                                        <p:attrNameLst>
+                                          <p:attrName>style.visibility</p:attrName>
+                                        </p:attrNameLst>
+                                      </p:cBhvr>
+                                      <p:to>
+                                        <p:strVal val="visible"/>
+                                      </p:to>
+                                    </p:set>
+                                    <p:animEffect transition="in" filter="fade">
+                                      <p:cBhvr>
+                                        <p:cTn id="75" dur="500"/>
+                                        <p:tgtEl>
+                                          <p:spTgt spid="32"/>
                                         </p:tgtEl>
                                       </p:cBhvr>
                                     </p:animEffect>
@@ -19385,32 +21015,32 @@
                     </p:cTn>
                   </p:par>
                   <p:par>
-                    <p:cTn id="17" fill="hold">
+                    <p:cTn id="77" fill="hold">
                       <p:stCondLst>
                         <p:cond delay="indefinite"/>
                       </p:stCondLst>
                       <p:childTnLst>
                         <p:par>
-                          <p:cTn id="18" fill="hold">
+                          <p:cTn id="78" fill="hold">
                             <p:stCondLst>
                               <p:cond delay="0"/>
                             </p:stCondLst>
                             <p:childTnLst>
                               <p:par>
-                                <p:cTn id="21" presetID="10" presetClass="entr" presetSubtype="0" fill="hold" grpId="0" nodeType="clickEffect">
+                                <p:cTn id="81" presetID="10" presetClass="entr" presetSubtype="0" fill="hold" grpId="0" nodeType="clickEffect">
                                   <p:stCondLst>
                                     <p:cond delay="0"/>
                                   </p:stCondLst>
                                   <p:childTnLst>
                                     <p:set>
                                       <p:cBhvr>
-                                        <p:cTn id="19" dur="1" fill="hold">
+                                        <p:cTn id="79" dur="1" fill="hold">
                                           <p:stCondLst>
                                             <p:cond delay="0"/>
                                           </p:stCondLst>
                                         </p:cTn>
                                         <p:tgtEl>
-                                          <p:spTgt spid="13"/>
+                                          <p:spTgt spid="33"/>
                                         </p:tgtEl>
                                         <p:attrNameLst>
                                           <p:attrName>style.visibility</p:attrName>
@@ -19422,9 +21052,9 @@
                                     </p:set>
                                     <p:animEffect transition="in" filter="fade">
                                       <p:cBhvr>
-                                        <p:cTn id="20" dur="500"/>
-                                        <p:tgtEl>
-                                          <p:spTgt spid="13"/>
+                                        <p:cTn id="80" dur="500"/>
+                                        <p:tgtEl>
+                                          <p:spTgt spid="33"/>
                                         </p:tgtEl>
                                       </p:cBhvr>
                                     </p:animEffect>
@@ -19432,20 +21062,20 @@
                                 </p:cTn>
                               </p:par>
                               <p:par>
-                                <p:cTn id="24" presetID="10" presetClass="entr" presetSubtype="0" fill="hold" grpId="0" nodeType="withEffect">
+                                <p:cTn id="84" presetID="10" presetClass="entr" presetSubtype="0" fill="hold" grpId="0" nodeType="withEffect">
                                   <p:stCondLst>
-                                    <p:cond delay="0"/>
+                                    <p:cond delay="200"/>
                                   </p:stCondLst>
                                   <p:childTnLst>
                                     <p:set>
                                       <p:cBhvr>
-                                        <p:cTn id="22" dur="1" fill="hold">
+                                        <p:cTn id="82" dur="1" fill="hold">
                                           <p:stCondLst>
                                             <p:cond delay="0"/>
                                           </p:stCondLst>
                                         </p:cTn>
                                         <p:tgtEl>
-                                          <p:spTgt spid="14"/>
+                                          <p:spTgt spid="34"/>
                                         </p:tgtEl>
                                         <p:attrNameLst>
                                           <p:attrName>style.visibility</p:attrName>
@@ -19457,9 +21087,9 @@
                                     </p:set>
                                     <p:animEffect transition="in" filter="fade">
                                       <p:cBhvr>
-                                        <p:cTn id="23" dur="500"/>
-                                        <p:tgtEl>
-                                          <p:spTgt spid="14"/>
+                                        <p:cTn id="83" dur="500"/>
+                                        <p:tgtEl>
+                                          <p:spTgt spid="34"/>
                                         </p:tgtEl>
                                       </p:cBhvr>
                                     </p:animEffect>
@@ -19467,20 +21097,20 @@
                                 </p:cTn>
                               </p:par>
                               <p:par>
-                                <p:cTn id="27" presetID="10" presetClass="entr" presetSubtype="0" fill="hold" grpId="0" nodeType="withEffect">
+                                <p:cTn id="87" presetID="10" presetClass="entr" presetSubtype="0" fill="hold" grpId="0" nodeType="withEffect">
                                   <p:stCondLst>
-                                    <p:cond delay="200"/>
+                                    <p:cond delay="350"/>
                                   </p:stCondLst>
                                   <p:childTnLst>
                                     <p:set>
                                       <p:cBhvr>
-                                        <p:cTn id="25" dur="1" fill="hold">
+                                        <p:cTn id="85" dur="1" fill="hold">
                                           <p:stCondLst>
                                             <p:cond delay="0"/>
                                           </p:stCondLst>
                                         </p:cTn>
                                         <p:tgtEl>
-                                          <p:spTgt spid="15"/>
+                                          <p:spTgt spid="35"/>
                                         </p:tgtEl>
                                         <p:attrNameLst>
                                           <p:attrName>style.visibility</p:attrName>
@@ -19492,9 +21122,9 @@
                                     </p:set>
                                     <p:animEffect transition="in" filter="fade">
                                       <p:cBhvr>
-                                        <p:cTn id="26" dur="500"/>
-                                        <p:tgtEl>
-                                          <p:spTgt spid="15"/>
+                                        <p:cTn id="86" dur="500"/>
+                                        <p:tgtEl>
+                                          <p:spTgt spid="35"/>
                                         </p:tgtEl>
                                       </p:cBhvr>
                                     </p:animEffect>
@@ -19502,20 +21132,20 @@
                                 </p:cTn>
                               </p:par>
                               <p:par>
-                                <p:cTn id="30" presetID="10" presetClass="entr" presetSubtype="0" fill="hold" grpId="0" nodeType="withEffect">
+                                <p:cTn id="90" presetID="10" presetClass="entr" presetSubtype="0" fill="hold" grpId="0" nodeType="withEffect">
                                   <p:stCondLst>
-                                    <p:cond delay="200"/>
+                                    <p:cond delay="500"/>
                                   </p:stCondLst>
                                   <p:childTnLst>
                                     <p:set>
                                       <p:cBhvr>
-                                        <p:cTn id="28" dur="1" fill="hold">
+                                        <p:cTn id="88" dur="1" fill="hold">
                                           <p:stCondLst>
                                             <p:cond delay="0"/>
                                           </p:stCondLst>
                                         </p:cTn>
                                         <p:tgtEl>
-                                          <p:spTgt spid="16"/>
+                                          <p:spTgt spid="36"/>
                                         </p:tgtEl>
                                         <p:attrNameLst>
                                           <p:attrName>style.visibility</p:attrName>
@@ -19527,9 +21157,9 @@
                                     </p:set>
                                     <p:animEffect transition="in" filter="fade">
                                       <p:cBhvr>
-                                        <p:cTn id="29" dur="500"/>
-                                        <p:tgtEl>
-                                          <p:spTgt spid="16"/>
+                                        <p:cTn id="89" dur="500"/>
+                                        <p:tgtEl>
+                                          <p:spTgt spid="36"/>
                                         </p:tgtEl>
                                       </p:cBhvr>
                                     </p:animEffect>
@@ -19537,20 +21167,20 @@
                                 </p:cTn>
                               </p:par>
                               <p:par>
-                                <p:cTn id="33" presetID="10" presetClass="entr" presetSubtype="0" fill="hold" grpId="0" nodeType="withEffect">
+                                <p:cTn id="93" presetID="10" presetClass="entr" presetSubtype="0" fill="hold" grpId="0" nodeType="withEffect">
                                   <p:stCondLst>
-                                    <p:cond delay="500"/>
+                                    <p:cond delay="650"/>
                                   </p:stCondLst>
                                   <p:childTnLst>
                                     <p:set>
                                       <p:cBhvr>
-                                        <p:cTn id="31" dur="1" fill="hold">
+                                        <p:cTn id="91" dur="1" fill="hold">
                                           <p:stCondLst>
                                             <p:cond delay="0"/>
                                           </p:stCondLst>
                                         </p:cTn>
                                         <p:tgtEl>
-                                          <p:spTgt spid="17"/>
+                                          <p:spTgt spid="37"/>
                                         </p:tgtEl>
                                         <p:attrNameLst>
                                           <p:attrName>style.visibility</p:attrName>
@@ -19562,359 +21192,9 @@
                                     </p:set>
                                     <p:animEffect transition="in" filter="fade">
                                       <p:cBhvr>
-                                        <p:cTn id="32" dur="500"/>
-                                        <p:tgtEl>
-                                          <p:spTgt spid="17"/>
-                                        </p:tgtEl>
-                                      </p:cBhvr>
-                                    </p:animEffect>
-                                  </p:childTnLst>
-                                </p:cTn>
-                              </p:par>
-                              <p:par>
-                                <p:cTn id="36" presetID="10" presetClass="entr" presetSubtype="0" fill="hold" grpId="0" nodeType="withEffect">
-                                  <p:stCondLst>
-                                    <p:cond delay="650"/>
-                                  </p:stCondLst>
-                                  <p:childTnLst>
-                                    <p:set>
-                                      <p:cBhvr>
-                                        <p:cTn id="34" dur="1" fill="hold">
-                                          <p:stCondLst>
-                                            <p:cond delay="0"/>
-                                          </p:stCondLst>
-                                        </p:cTn>
-                                        <p:tgtEl>
-                                          <p:spTgt spid="18"/>
-                                        </p:tgtEl>
-                                        <p:attrNameLst>
-                                          <p:attrName>style.visibility</p:attrName>
-                                        </p:attrNameLst>
-                                      </p:cBhvr>
-                                      <p:to>
-                                        <p:strVal val="visible"/>
-                                      </p:to>
-                                    </p:set>
-                                    <p:animEffect transition="in" filter="fade">
-                                      <p:cBhvr>
-                                        <p:cTn id="35" dur="500"/>
-                                        <p:tgtEl>
-                                          <p:spTgt spid="18"/>
-                                        </p:tgtEl>
-                                      </p:cBhvr>
-                                    </p:animEffect>
-                                  </p:childTnLst>
-                                </p:cTn>
-                              </p:par>
-                              <p:par>
-                                <p:cTn id="39" presetID="10" presetClass="entr" presetSubtype="0" fill="hold" grpId="0" nodeType="withEffect">
-                                  <p:stCondLst>
-                                    <p:cond delay="800"/>
-                                  </p:stCondLst>
-                                  <p:childTnLst>
-                                    <p:set>
-                                      <p:cBhvr>
-                                        <p:cTn id="37" dur="1" fill="hold">
-                                          <p:stCondLst>
-                                            <p:cond delay="0"/>
-                                          </p:stCondLst>
-                                        </p:cTn>
-                                        <p:tgtEl>
-                                          <p:spTgt spid="19"/>
-                                        </p:tgtEl>
-                                        <p:attrNameLst>
-                                          <p:attrName>style.visibility</p:attrName>
-                                        </p:attrNameLst>
-                                      </p:cBhvr>
-                                      <p:to>
-                                        <p:strVal val="visible"/>
-                                      </p:to>
-                                    </p:set>
-                                    <p:animEffect transition="in" filter="fade">
-                                      <p:cBhvr>
-                                        <p:cTn id="38" dur="500"/>
-                                        <p:tgtEl>
-                                          <p:spTgt spid="19"/>
-                                        </p:tgtEl>
-                                      </p:cBhvr>
-                                    </p:animEffect>
-                                  </p:childTnLst>
-                                </p:cTn>
-                              </p:par>
-                              <p:par>
-                                <p:cTn id="42" presetID="10" presetClass="entr" presetSubtype="0" fill="hold" grpId="0" nodeType="withEffect">
-                                  <p:stCondLst>
-                                    <p:cond delay="950"/>
-                                  </p:stCondLst>
-                                  <p:childTnLst>
-                                    <p:set>
-                                      <p:cBhvr>
-                                        <p:cTn id="40" dur="1" fill="hold">
-                                          <p:stCondLst>
-                                            <p:cond delay="0"/>
-                                          </p:stCondLst>
-                                        </p:cTn>
-                                        <p:tgtEl>
-                                          <p:spTgt spid="20"/>
-                                        </p:tgtEl>
-                                        <p:attrNameLst>
-                                          <p:attrName>style.visibility</p:attrName>
-                                        </p:attrNameLst>
-                                      </p:cBhvr>
-                                      <p:to>
-                                        <p:strVal val="visible"/>
-                                      </p:to>
-                                    </p:set>
-                                    <p:animEffect transition="in" filter="fade">
-                                      <p:cBhvr>
-                                        <p:cTn id="41" dur="500"/>
-                                        <p:tgtEl>
-                                          <p:spTgt spid="20"/>
-                                        </p:tgtEl>
-                                      </p:cBhvr>
-                                    </p:animEffect>
-                                  </p:childTnLst>
-                                </p:cTn>
-                              </p:par>
-                              <p:par>
-                                <p:cTn id="45" presetID="10" presetClass="entr" presetSubtype="0" fill="hold" grpId="0" nodeType="withEffect">
-                                  <p:stCondLst>
-                                    <p:cond delay="1100"/>
-                                  </p:stCondLst>
-                                  <p:childTnLst>
-                                    <p:set>
-                                      <p:cBhvr>
-                                        <p:cTn id="43" dur="1" fill="hold">
-                                          <p:stCondLst>
-                                            <p:cond delay="0"/>
-                                          </p:stCondLst>
-                                        </p:cTn>
-                                        <p:tgtEl>
-                                          <p:spTgt spid="21"/>
-                                        </p:tgtEl>
-                                        <p:attrNameLst>
-                                          <p:attrName>style.visibility</p:attrName>
-                                        </p:attrNameLst>
-                                      </p:cBhvr>
-                                      <p:to>
-                                        <p:strVal val="visible"/>
-                                      </p:to>
-                                    </p:set>
-                                    <p:animEffect transition="in" filter="fade">
-                                      <p:cBhvr>
-                                        <p:cTn id="44" dur="500"/>
-                                        <p:tgtEl>
-                                          <p:spTgt spid="21"/>
-                                        </p:tgtEl>
-                                      </p:cBhvr>
-                                    </p:animEffect>
-                                  </p:childTnLst>
-                                </p:cTn>
-                              </p:par>
-                              <p:par>
-                                <p:cTn id="48" presetID="10" presetClass="entr" presetSubtype="0" fill="hold" grpId="0" nodeType="withEffect">
-                                  <p:stCondLst>
-                                    <p:cond delay="1250"/>
-                                  </p:stCondLst>
-                                  <p:childTnLst>
-                                    <p:set>
-                                      <p:cBhvr>
-                                        <p:cTn id="46" dur="1" fill="hold">
-                                          <p:stCondLst>
-                                            <p:cond delay="0"/>
-                                          </p:stCondLst>
-                                        </p:cTn>
-                                        <p:tgtEl>
-                                          <p:spTgt spid="22"/>
-                                        </p:tgtEl>
-                                        <p:attrNameLst>
-                                          <p:attrName>style.visibility</p:attrName>
-                                        </p:attrNameLst>
-                                      </p:cBhvr>
-                                      <p:to>
-                                        <p:strVal val="visible"/>
-                                      </p:to>
-                                    </p:set>
-                                    <p:animEffect transition="in" filter="fade">
-                                      <p:cBhvr>
-                                        <p:cTn id="47" dur="500"/>
-                                        <p:tgtEl>
-                                          <p:spTgt spid="22"/>
-                                        </p:tgtEl>
-                                      </p:cBhvr>
-                                    </p:animEffect>
-                                  </p:childTnLst>
-                                </p:cTn>
-                              </p:par>
-                              <p:par>
-                                <p:cTn id="51" presetID="10" presetClass="entr" presetSubtype="0" fill="hold" grpId="0" nodeType="withEffect">
-                                  <p:stCondLst>
-                                    <p:cond delay="1400"/>
-                                  </p:stCondLst>
-                                  <p:childTnLst>
-                                    <p:set>
-                                      <p:cBhvr>
-                                        <p:cTn id="49" dur="1" fill="hold">
-                                          <p:stCondLst>
-                                            <p:cond delay="0"/>
-                                          </p:stCondLst>
-                                        </p:cTn>
-                                        <p:tgtEl>
-                                          <p:spTgt spid="23"/>
-                                        </p:tgtEl>
-                                        <p:attrNameLst>
-                                          <p:attrName>style.visibility</p:attrName>
-                                        </p:attrNameLst>
-                                      </p:cBhvr>
-                                      <p:to>
-                                        <p:strVal val="visible"/>
-                                      </p:to>
-                                    </p:set>
-                                    <p:animEffect transition="in" filter="fade">
-                                      <p:cBhvr>
-                                        <p:cTn id="50" dur="500"/>
-                                        <p:tgtEl>
-                                          <p:spTgt spid="23"/>
-                                        </p:tgtEl>
-                                      </p:cBhvr>
-                                    </p:animEffect>
-                                  </p:childTnLst>
-                                </p:cTn>
-                              </p:par>
-                              <p:par>
-                                <p:cTn id="54" presetID="10" presetClass="entr" presetSubtype="0" fill="hold" grpId="0" nodeType="withEffect">
-                                  <p:stCondLst>
-                                    <p:cond delay="1550"/>
-                                  </p:stCondLst>
-                                  <p:childTnLst>
-                                    <p:set>
-                                      <p:cBhvr>
-                                        <p:cTn id="52" dur="1" fill="hold">
-                                          <p:stCondLst>
-                                            <p:cond delay="0"/>
-                                          </p:stCondLst>
-                                        </p:cTn>
-                                        <p:tgtEl>
-                                          <p:spTgt spid="24"/>
-                                        </p:tgtEl>
-                                        <p:attrNameLst>
-                                          <p:attrName>style.visibility</p:attrName>
-                                        </p:attrNameLst>
-                                      </p:cBhvr>
-                                      <p:to>
-                                        <p:strVal val="visible"/>
-                                      </p:to>
-                                    </p:set>
-                                    <p:animEffect transition="in" filter="fade">
-                                      <p:cBhvr>
-                                        <p:cTn id="53" dur="500"/>
-                                        <p:tgtEl>
-                                          <p:spTgt spid="24"/>
-                                        </p:tgtEl>
-                                      </p:cBhvr>
-                                    </p:animEffect>
-                                  </p:childTnLst>
-                                </p:cTn>
-                              </p:par>
-                              <p:par>
-                                <p:cTn id="57" presetID="10" presetClass="entr" presetSubtype="0" fill="hold" grpId="0" nodeType="withEffect">
-                                  <p:stCondLst>
-                                    <p:cond delay="1700"/>
-                                  </p:stCondLst>
-                                  <p:childTnLst>
-                                    <p:set>
-                                      <p:cBhvr>
-                                        <p:cTn id="55" dur="1" fill="hold">
-                                          <p:stCondLst>
-                                            <p:cond delay="0"/>
-                                          </p:stCondLst>
-                                        </p:cTn>
-                                        <p:tgtEl>
-                                          <p:spTgt spid="25"/>
-                                        </p:tgtEl>
-                                        <p:attrNameLst>
-                                          <p:attrName>style.visibility</p:attrName>
-                                        </p:attrNameLst>
-                                      </p:cBhvr>
-                                      <p:to>
-                                        <p:strVal val="visible"/>
-                                      </p:to>
-                                    </p:set>
-                                    <p:animEffect transition="in" filter="fade">
-                                      <p:cBhvr>
-                                        <p:cTn id="56" dur="500"/>
-                                        <p:tgtEl>
-                                          <p:spTgt spid="25"/>
-                                        </p:tgtEl>
-                                      </p:cBhvr>
-                                    </p:animEffect>
-                                  </p:childTnLst>
-                                </p:cTn>
-                              </p:par>
-                              <p:par>
-                                <p:cTn id="60" presetID="10" presetClass="entr" presetSubtype="0" fill="hold" grpId="0" nodeType="withEffect">
-                                  <p:stCondLst>
-                                    <p:cond delay="1850"/>
-                                  </p:stCondLst>
-                                  <p:childTnLst>
-                                    <p:set>
-                                      <p:cBhvr>
-                                        <p:cTn id="58" dur="1" fill="hold">
-                                          <p:stCondLst>
-                                            <p:cond delay="0"/>
-                                          </p:stCondLst>
-                                        </p:cTn>
-                                        <p:tgtEl>
-                                          <p:spTgt spid="26"/>
-                                        </p:tgtEl>
-                                        <p:attrNameLst>
-                                          <p:attrName>style.visibility</p:attrName>
-                                        </p:attrNameLst>
-                                      </p:cBhvr>
-                                      <p:to>
-                                        <p:strVal val="visible"/>
-                                      </p:to>
-                                    </p:set>
-                                    <p:animEffect transition="in" filter="fade">
-                                      <p:cBhvr>
-                                        <p:cTn id="59" dur="500"/>
-                                        <p:tgtEl>
-                                          <p:spTgt spid="26"/>
-                                        </p:tgtEl>
-                                      </p:cBhvr>
-                                    </p:animEffect>
-                                  </p:childTnLst>
-                                </p:cTn>
-                              </p:par>
-                              <p:par>
-                                <p:cTn id="63" presetID="10" presetClass="entr" presetSubtype="0" fill="hold" grpId="0" nodeType="withEffect">
-                                  <p:stCondLst>
-                                    <p:cond delay="2000"/>
-                                  </p:stCondLst>
-                                  <p:childTnLst>
-                                    <p:set>
-                                      <p:cBhvr>
-                                        <p:cTn id="61" dur="1" fill="hold">
-                                          <p:stCondLst>
-                                            <p:cond delay="0"/>
-                                          </p:stCondLst>
-                                        </p:cTn>
-                                        <p:tgtEl>
-                                          <p:spTgt spid="27"/>
-                                        </p:tgtEl>
-                                        <p:attrNameLst>
-                                          <p:attrName>style.visibility</p:attrName>
-                                        </p:attrNameLst>
-                                      </p:cBhvr>
-                                      <p:to>
-                                        <p:strVal val="visible"/>
-                                      </p:to>
-                                    </p:set>
-                                    <p:animEffect transition="in" filter="fade">
-                                      <p:cBhvr>
-                                        <p:cTn id="62" dur="500"/>
-                                        <p:tgtEl>
-                                          <p:spTgt spid="27"/>
+                                        <p:cTn id="92" dur="500"/>
+                                        <p:tgtEl>
+                                          <p:spTgt spid="37"/>
                                         </p:tgtEl>
                                       </p:cBhvr>
                                     </p:animEffect>
@@ -19928,32 +21208,32 @@
                     </p:cTn>
                   </p:par>
                   <p:par>
-                    <p:cTn id="64" fill="hold">
+                    <p:cTn id="94" fill="hold">
                       <p:stCondLst>
                         <p:cond delay="indefinite"/>
                       </p:stCondLst>
                       <p:childTnLst>
                         <p:par>
-                          <p:cTn id="65" fill="hold">
+                          <p:cTn id="95" fill="hold">
                             <p:stCondLst>
                               <p:cond delay="0"/>
                             </p:stCondLst>
                             <p:childTnLst>
                               <p:par>
-                                <p:cTn id="68" presetID="10" presetClass="entr" presetSubtype="0" fill="hold" grpId="0" nodeType="clickEffect">
+                                <p:cTn id="98" presetID="10" presetClass="entr" presetSubtype="0" fill="hold" grpId="0" nodeType="clickEffect">
                                   <p:stCondLst>
                                     <p:cond delay="0"/>
                                   </p:stCondLst>
                                   <p:childTnLst>
                                     <p:set>
                                       <p:cBhvr>
-                                        <p:cTn id="66" dur="1" fill="hold">
+                                        <p:cTn id="96" dur="1" fill="hold">
                                           <p:stCondLst>
                                             <p:cond delay="0"/>
                                           </p:stCondLst>
                                         </p:cTn>
                                         <p:tgtEl>
-                                          <p:spTgt spid="28"/>
+                                          <p:spTgt spid="38"/>
                                         </p:tgtEl>
                                         <p:attrNameLst>
                                           <p:attrName>style.visibility</p:attrName>
@@ -19965,9 +21245,9 @@
                                     </p:set>
                                     <p:animEffect transition="in" filter="fade">
                                       <p:cBhvr>
-                                        <p:cTn id="67" dur="500"/>
-                                        <p:tgtEl>
-                                          <p:spTgt spid="28"/>
+                                        <p:cTn id="97" dur="500"/>
+                                        <p:tgtEl>
+                                          <p:spTgt spid="38"/>
                                         </p:tgtEl>
                                       </p:cBhvr>
                                     </p:animEffect>
@@ -19975,20 +21255,55 @@
                                 </p:cTn>
                               </p:par>
                               <p:par>
-                                <p:cTn id="71" presetID="10" presetClass="entr" presetSubtype="0" fill="hold" grpId="0" nodeType="withEffect">
+                                <p:cTn id="101" presetID="10" presetClass="entr" presetSubtype="0" fill="hold" grpId="0" nodeType="withEffect">
+                                  <p:stCondLst>
+                                    <p:cond delay="200"/>
+                                  </p:stCondLst>
+                                  <p:childTnLst>
+                                    <p:set>
+                                      <p:cBhvr>
+                                        <p:cTn id="99" dur="1" fill="hold">
+                                          <p:stCondLst>
+                                            <p:cond delay="0"/>
+                                          </p:stCondLst>
+                                        </p:cTn>
+                                        <p:tgtEl>
+                                          <p:spTgt spid="39"/>
+                                        </p:tgtEl>
+                                        <p:attrNameLst>
+                                          <p:attrName>style.visibility</p:attrName>
+                                        </p:attrNameLst>
+                                      </p:cBhvr>
+                                      <p:to>
+                                        <p:strVal val="visible"/>
+                                      </p:to>
+                                    </p:set>
+                                    <p:animEffect transition="in" filter="fade">
+                                      <p:cBhvr>
+                                        <p:cTn id="100" dur="500"/>
+                                        <p:tgtEl>
+                                          <p:spTgt spid="39"/>
+                                        </p:tgtEl>
+                                      </p:cBhvr>
+                                    </p:animEffect>
+                                  </p:childTnLst>
+                                </p:cTn>
+                              </p:par>
+                              <p:par>
+                                <p:cTn id="104" presetID="10" presetClass="entr" presetSubtype="0" fill="hold" grpId="0" nodeType="withEffect">
                                   <p:stCondLst>
                                     <p:cond delay="300"/>
                                   </p:stCondLst>
                                   <p:childTnLst>
                                     <p:set>
                                       <p:cBhvr>
-                                        <p:cTn id="69" dur="1" fill="hold">
+                                        <p:cTn id="102" dur="1" fill="hold">
                                           <p:stCondLst>
                                             <p:cond delay="0"/>
                                           </p:stCondLst>
                                         </p:cTn>
                                         <p:tgtEl>
-                                          <p:spTgt spid="29"/>
+                                          <p:spTgt spid="40"/>
                                         </p:tgtEl>
                                         <p:attrNameLst>
                                           <p:attrName>style.visibility</p:attrName>
@@ -20000,9 +21315,9 @@
                                     </p:set>
                                     <p:animEffect transition="in" filter="fade">
                                       <p:cBhvr>
-                                        <p:cTn id="70" dur="500"/>
-                                        <p:tgtEl>
-                                          <p:spTgt spid="29"/>
+                                        <p:cTn id="103" dur="500"/>
+                                        <p:tgtEl>
+                                          <p:spTgt spid="40"/>
                                         </p:tgtEl>
                                       </p:cBhvr>
                                     </p:animEffect>
@@ -20010,20 +21325,20 @@
                                 </p:cTn>
                               </p:par>
                               <p:par>
-                                <p:cTn id="74" presetID="10" presetClass="entr" presetSubtype="0" fill="hold" grpId="0" nodeType="withEffect">
+                                <p:cTn id="107" presetID="10" presetClass="entr" presetSubtype="0" fill="hold" grpId="0" nodeType="withEffect">
                                   <p:stCondLst>
-                                    <p:cond delay="600"/>
+                                    <p:cond delay="400"/>
                                   </p:stCondLst>
                                   <p:childTnLst>
                                     <p:set>
                                       <p:cBhvr>
-                                        <p:cTn id="72" dur="1" fill="hold">
+                                        <p:cTn id="105" dur="1" fill="hold">
                                           <p:stCondLst>
                                             <p:cond delay="0"/>
                                           </p:stCondLst>
                                         </p:cTn>
                                         <p:tgtEl>
-                                          <p:spTgt spid="30"/>
+                                          <p:spTgt spid="41"/>
                                         </p:tgtEl>
                                         <p:attrNameLst>
                                           <p:attrName>style.visibility</p:attrName>
@@ -20035,9 +21350,254 @@
                                     </p:set>
                                     <p:animEffect transition="in" filter="fade">
                                       <p:cBhvr>
-                                        <p:cTn id="73" dur="500"/>
-                                        <p:tgtEl>
-                                          <p:spTgt spid="30"/>
+                                        <p:cTn id="106" dur="500"/>
+                                        <p:tgtEl>
+                                          <p:spTgt spid="41"/>
+                                        </p:tgtEl>
+                                      </p:cBhvr>
+                                    </p:animEffect>
+                                  </p:childTnLst>
+                                </p:cTn>
+                              </p:par>
+                              <p:par>
+                                <p:cTn id="110" presetID="10" presetClass="entr" presetSubtype="0" fill="hold" grpId="0" nodeType="withEffect">
+                                  <p:stCondLst>
+                                    <p:cond delay="500"/>
+                                  </p:stCondLst>
+                                  <p:childTnLst>
+                                    <p:set>
+                                      <p:cBhvr>
+                                        <p:cTn id="108" dur="1" fill="hold">
+                                          <p:stCondLst>
+                                            <p:cond delay="0"/>
+                                          </p:stCondLst>
+                                        </p:cTn>
+                                        <p:tgtEl>
+                                          <p:spTgt spid="42"/>
+                                        </p:tgtEl>
+                                        <p:attrNameLst>
+                                          <p:attrName>style.visibility</p:attrName>
+                                        </p:attrNameLst>
+                                      </p:cBhvr>
+                                      <p:to>
+                                        <p:strVal val="visible"/>
+                                      </p:to>
+                                    </p:set>
+                                    <p:animEffect transition="in" filter="fade">
+                                      <p:cBhvr>
+                                        <p:cTn id="109" dur="500"/>
+                                        <p:tgtEl>
+                                          <p:spTgt spid="42"/>
+                                        </p:tgtEl>
+                                      </p:cBhvr>
+                                    </p:animEffect>
+                                  </p:childTnLst>
+                                </p:cTn>
+                              </p:par>
+                              <p:par>
+                                <p:cTn id="113" presetID="10" presetClass="entr" presetSubtype="0" fill="hold" grpId="0" nodeType="withEffect">
+                                  <p:stCondLst>
+                                    <p:cond delay="700"/>
+                                  </p:stCondLst>
+                                  <p:childTnLst>
+                                    <p:set>
+                                      <p:cBhvr>
+                                        <p:cTn id="111" dur="1" fill="hold">
+                                          <p:stCondLst>
+                                            <p:cond delay="0"/>
+                                          </p:stCondLst>
+                                        </p:cTn>
+                                        <p:tgtEl>
+                                          <p:spTgt spid="43"/>
+                                        </p:tgtEl>
+                                        <p:attrNameLst>
+                                          <p:attrName>style.visibility</p:attrName>
+                                        </p:attrNameLst>
+                                      </p:cBhvr>
+                                      <p:to>
+                                        <p:strVal val="visible"/>
+                                      </p:to>
+                                    </p:set>
+                                    <p:animEffect transition="in" filter="fade">
+                                      <p:cBhvr>
+                                        <p:cTn id="112" dur="500"/>
+                                        <p:tgtEl>
+                                          <p:spTgt spid="43"/>
+                                        </p:tgtEl>
+                                      </p:cBhvr>
+                                    </p:animEffect>
+                                  </p:childTnLst>
+                                </p:cTn>
+                              </p:par>
+                              <p:par>
+                                <p:cTn id="116" presetID="10" presetClass="entr" presetSubtype="0" fill="hold" grpId="0" nodeType="withEffect">
+                                  <p:stCondLst>
+                                    <p:cond delay="800"/>
+                                  </p:stCondLst>
+                                  <p:childTnLst>
+                                    <p:set>
+                                      <p:cBhvr>
+                                        <p:cTn id="114" dur="1" fill="hold">
+                                          <p:stCondLst>
+                                            <p:cond delay="0"/>
+                                          </p:stCondLst>
+                                        </p:cTn>
+                                        <p:tgtEl>
+                                          <p:spTgt spid="44"/>
+                                        </p:tgtEl>
+                                        <p:attrNameLst>
+                                          <p:attrName>style.visibility</p:attrName>
+                                        </p:attrNameLst>
+                                      </p:cBhvr>
+                                      <p:to>
+                                        <p:strVal val="visible"/>
+                                      </p:to>
+                                    </p:set>
+                                    <p:animEffect transition="in" filter="fade">
+                                      <p:cBhvr>
+                                        <p:cTn id="115" dur="500"/>
+                                        <p:tgtEl>
+                                          <p:spTgt spid="44"/>
+                                        </p:tgtEl>
+                                      </p:cBhvr>
+                                    </p:animEffect>
+                                  </p:childTnLst>
+                                </p:cTn>
+                              </p:par>
+                              <p:par>
+                                <p:cTn id="119" presetID="10" presetClass="entr" presetSubtype="0" fill="hold" grpId="0" nodeType="withEffect">
+                                  <p:stCondLst>
+                                    <p:cond delay="900"/>
+                                  </p:stCondLst>
+                                  <p:childTnLst>
+                                    <p:set>
+                                      <p:cBhvr>
+                                        <p:cTn id="117" dur="1" fill="hold">
+                                          <p:stCondLst>
+                                            <p:cond delay="0"/>
+                                          </p:stCondLst>
+                                        </p:cTn>
+                                        <p:tgtEl>
+                                          <p:spTgt spid="45"/>
+                                        </p:tgtEl>
+                                        <p:attrNameLst>
+                                          <p:attrName>style.visibility</p:attrName>
+                                        </p:attrNameLst>
+                                      </p:cBhvr>
+                                      <p:to>
+                                        <p:strVal val="visible"/>
+                                      </p:to>
+                                    </p:set>
+                                    <p:animEffect transition="in" filter="fade">
+                                      <p:cBhvr>
+                                        <p:cTn id="118" dur="500"/>
+                                        <p:tgtEl>
+                                          <p:spTgt spid="45"/>
+                                        </p:tgtEl>
+                                      </p:cBhvr>
+                                    </p:animEffect>
+                                  </p:childTnLst>
+                                </p:cTn>
+                              </p:par>
+                              <p:par>
+                                <p:cTn id="122" presetID="10" presetClass="entr" presetSubtype="0" fill="hold" grpId="0" nodeType="withEffect">
+                                  <p:stCondLst>
+                                    <p:cond delay="1000"/>
+                                  </p:stCondLst>
+                                  <p:childTnLst>
+                                    <p:set>
+                                      <p:cBhvr>
+                                        <p:cTn id="120" dur="1" fill="hold">
+                                          <p:stCondLst>
+                                            <p:cond delay="0"/>
+                                          </p:stCondLst>
+                                        </p:cTn>
+                                        <p:tgtEl>
+                                          <p:spTgt spid="46"/>
+                                        </p:tgtEl>
+                                        <p:attrNameLst>
+                                          <p:attrName>style.visibility</p:attrName>
+                                        </p:attrNameLst>
+                                      </p:cBhvr>
+                                      <p:to>
+                                        <p:strVal val="visible"/>
+                                      </p:to>
+                                    </p:set>
+                                    <p:animEffect transition="in" filter="fade">
+                                      <p:cBhvr>
+                                        <p:cTn id="121" dur="500"/>
+                                        <p:tgtEl>
+                                          <p:spTgt spid="46"/>
+                                        </p:tgtEl>
+                                      </p:cBhvr>
+                                    </p:animEffect>
+                                  </p:childTnLst>
+                                </p:cTn>
+                              </p:par>
+                              <p:par>
+                                <p:cTn id="125" presetID="10" presetClass="entr" presetSubtype="0" fill="hold" grpId="0" nodeType="withEffect">
+                                  <p:stCondLst>
+                                    <p:cond delay="1100"/>
+                                  </p:stCondLst>
+                                  <p:childTnLst>
+                                    <p:set>
+                                      <p:cBhvr>
+                                        <p:cTn id="123" dur="1" fill="hold">
+                                          <p:stCondLst>
+                                            <p:cond delay="0"/>
+                                          </p:stCondLst>
+                                        </p:cTn>
+                                        <p:tgtEl>
+                                          <p:spTgt spid="47"/>
+                                        </p:tgtEl>
+                                        <p:attrNameLst>
+                                          <p:attrName>style.visibility</p:attrName>
+                                        </p:attrNameLst>
+                                      </p:cBhvr>
+                                      <p:to>
+                                        <p:strVal val="visible"/>
+                                      </p:to>
+                                    </p:set>
+                                    <p:animEffect transition="in" filter="fade">
+                                      <p:cBhvr>
+                                        <p:cTn id="124" dur="500"/>
+                                        <p:tgtEl>
+                                          <p:spTgt spid="47"/>
+                                        </p:tgtEl>
+                                      </p:cBhvr>
+                                    </p:animEffect>
+                                  </p:childTnLst>
+                                </p:cTn>
+                              </p:par>
+                              <p:par>
+                                <p:cTn id="128" presetID="10" presetClass="entr" presetSubtype="0" fill="hold" grpId="0" nodeType="withEffect">
+                                  <p:stCondLst>
+                                    <p:cond delay="1200"/>
+                                  </p:stCondLst>
+                                  <p:childTnLst>
+                                    <p:set>
+                                      <p:cBhvr>
+                                        <p:cTn id="126" dur="1" fill="hold">
+                                          <p:stCondLst>
+                                            <p:cond delay="0"/>
+                                          </p:stCondLst>
+                                        </p:cTn>
+                                        <p:tgtEl>
+                                          <p:spTgt spid="48"/>
+                                        </p:tgtEl>
+                                        <p:attrNameLst>
+                                          <p:attrName>style.visibility</p:attrName>
+                                        </p:attrNameLst>
+                                      </p:cBhvr>
+                                      <p:to>
+                                        <p:strVal val="visible"/>
+                                      </p:to>
+                                    </p:set>
+                                    <p:animEffect transition="in" filter="fade">
+                                      <p:cBhvr>
+                                        <p:cTn id="127" dur="500"/>
+                                        <p:tgtEl>
+                                          <p:spTgt spid="48"/>
                                         </p:tgtEl>
                                       </p:cBhvr>
                                     </p:animEffect>
@@ -20051,32 +21611,32 @@
                     </p:cTn>
                   </p:par>
                   <p:par>
-                    <p:cTn id="75" fill="hold">
+                    <p:cTn id="129" fill="hold">
                       <p:stCondLst>
                         <p:cond delay="indefinite"/>
                       </p:stCondLst>
                       <p:childTnLst>
                         <p:par>
-                          <p:cTn id="76" fill="hold">
+                          <p:cTn id="130" fill="hold">
                             <p:stCondLst>
                               <p:cond delay="0"/>
                             </p:stCondLst>
                             <p:childTnLst>
                               <p:par>
-                                <p:cTn id="79" presetID="10" presetClass="entr" presetSubtype="0" fill="hold" grpId="0" nodeType="clickEffect">
+                                <p:cTn id="133" presetID="10" presetClass="entr" presetSubtype="0" fill="hold" grpId="0" nodeType="clickEffect">
                                   <p:stCondLst>
                                     <p:cond delay="0"/>
                                   </p:stCondLst>
                                   <p:childTnLst>
                                     <p:set>
                                       <p:cBhvr>
-                                        <p:cTn id="77" dur="1" fill="hold">
+                                        <p:cTn id="131" dur="1" fill="hold">
                                           <p:stCondLst>
                                             <p:cond delay="0"/>
                                           </p:stCondLst>
                                         </p:cTn>
                                         <p:tgtEl>
-                                          <p:spTgt spid="31"/>
+                                          <p:spTgt spid="49"/>
                                         </p:tgtEl>
                                         <p:attrNameLst>
                                           <p:attrName>style.visibility</p:attrName>
@@ -20088,9 +21648,79 @@
                                     </p:set>
                                     <p:animEffect transition="in" filter="fade">
                                       <p:cBhvr>
-                                        <p:cTn id="78" dur="500"/>
-                                        <p:tgtEl>
-                                          <p:spTgt spid="31"/>
+                                        <p:cTn id="132" dur="500"/>
+                                        <p:tgtEl>
+                                          <p:spTgt spid="49"/>
+                                        </p:tgtEl>
+                                      </p:cBhvr>
+                                    </p:animEffect>
+                                  </p:childTnLst>
+                                </p:cTn>
+                              </p:par>
+                              <p:par>
+                                <p:cTn id="136" presetID="10" presetClass="entr" presetSubtype="0" fill="hold" grpId="0" nodeType="withEffect">
+                                  <p:stCondLst>
+                                    <p:cond delay="250"/>
+                                  </p:stCondLst>
+                                  <p:childTnLst>
+                                    <p:set>
+                                      <p:cBhvr>
+                                        <p:cTn id="134" dur="1" fill="hold">
+                                          <p:stCondLst>
+                                            <p:cond delay="0"/>
+                                          </p:stCondLst>
+                                        </p:cTn>
+                                        <p:tgtEl>
+                                          <p:spTgt spid="50"/>
+                                        </p:tgtEl>
+                                        <p:attrNameLst>
+                                          <p:attrName>style.visibility</p:attrName>
+                                        </p:attrNameLst>
+                                      </p:cBhvr>
+                                      <p:to>
+                                        <p:strVal val="visible"/>
+                                      </p:to>
+                                    </p:set>
+                                    <p:animEffect transition="in" filter="fade">
+                                      <p:cBhvr>
+                                        <p:cTn id="135" dur="500"/>
+                                        <p:tgtEl>
+                                          <p:spTgt spid="50"/>
+                                        </p:tgtEl>
+                                      </p:cBhvr>
+                                    </p:animEffect>
+                                  </p:childTnLst>
+                                </p:cTn>
+                              </p:par>
+                              <p:par>
+                                <p:cTn id="139" presetID="10" presetClass="entr" presetSubtype="0" fill="hold" grpId="0" nodeType="withEffect">
+                                  <p:stCondLst>
+                                    <p:cond delay="500"/>
+                                  </p:stCondLst>
+                                  <p:childTnLst>
+                                    <p:set>
+                                      <p:cBhvr>
+                                        <p:cTn id="137" dur="1" fill="hold">
+                                          <p:stCondLst>
+                                            <p:cond delay="0"/>
+                                          </p:stCondLst>
+                                        </p:cTn>
+                                        <p:tgtEl>
+                                          <p:spTgt spid="51"/>
+                                        </p:tgtEl>
+                                        <p:attrNameLst>
+                                          <p:attrName>style.visibility</p:attrName>
+                                        </p:attrNameLst>
+                                      </p:cBhvr>
+                                      <p:to>
+                                        <p:strVal val="visible"/>
+                                      </p:to>
+                                    </p:set>
+                                    <p:animEffect transition="in" filter="fade">
+                                      <p:cBhvr>
+                                        <p:cTn id="138" dur="500"/>
+                                        <p:tgtEl>
+                                          <p:spTgt spid="51"/>
                                         </p:tgtEl>
                                       </p:cBhvr>
                                     </p:animEffect>
@@ -20129,6 +21759,8 @@
       <p:bldP spid="10" grpId="0" animBg="1"/>
       <p:bldP spid="11" grpId="0" animBg="1"/>
       <p:bldP spid="12" grpId="0" animBg="1"/>
+      <p:bldP spid="13" grpId="0" animBg="1"/>
+      <p:bldP spid="14" grpId="0" animBg="1"/>
       <p:bldP spid="15" grpId="0" animBg="1"/>
       <p:bldP spid="16" grpId="0" animBg="1"/>
       <p:bldP spid="17" grpId="0" animBg="1"/>
@@ -20146,6 +21778,26 @@
       <p:bldP spid="29" grpId="0" animBg="1"/>
       <p:bldP spid="30" grpId="0" animBg="1"/>
       <p:bldP spid="31" grpId="0" animBg="1"/>
+      <p:bldP spid="32" grpId="0" animBg="1"/>
+      <p:bldP spid="33" grpId="0" animBg="1"/>
+      <p:bldP spid="34" grpId="0" animBg="1"/>
+      <p:bldP spid="35" grpId="0" animBg="1"/>
+      <p:bldP spid="36" grpId="0" animBg="1"/>
+      <p:bldP spid="37" grpId="0" animBg="1"/>
+      <p:bldP spid="38" grpId="0" animBg="1"/>
+      <p:bldP spid="39" grpId="0" animBg="1"/>
+      <p:bldP spid="40" grpId="0" animBg="1"/>
+      <p:bldP spid="41" grpId="0" animBg="1"/>
+      <p:bldP spid="42" grpId="0" animBg="1"/>
+      <p:bldP spid="43" grpId="0" animBg="1"/>
+      <p:bldP spid="44" grpId="0" animBg="1"/>
+      <p:bldP spid="45" grpId="0" animBg="1"/>
+      <p:bldP spid="46" grpId="0" animBg="1"/>
+      <p:bldP spid="47" grpId="0" animBg="1"/>
+      <p:bldP spid="48" grpId="0" animBg="1"/>
+      <p:bldP spid="49" grpId="0" animBg="1"/>
+      <p:bldP spid="50" grpId="0" animBg="1"/>
+      <p:bldP spid="51" grpId="0" animBg="1"/>
     </p:bldLst>
   </p:timing>
 </p:sld>
@@ -20281,7 +21933,2463 @@
                 <a:cs typeface="Readex Pro"/>
                 <a:ea typeface="Readex Pro"/>
               </a:rPr>
-              <a:t>05 · ON A PHONE</a:t>
+              <a:t>05 · RESULTS</a:t>
+            </a:r>
+          </a:p>
+        </p:txBody>
+      </p:sp>
+      <p:sp>
+        <p:nvSpPr>
+          <p:cNvPr id="5" name="TextBox 4"/>
+          <p:cNvSpPr txBox="1"/>
+          <p:nvPr/>
+        </p:nvSpPr>
+        <p:spPr>
+          <a:xfrm>
+            <a:off x="594360" y="822960"/>
+            <a:ext cx="8714232" cy="548640"/>
+          </a:xfrm>
+          <a:prstGeom prst="rect">
+            <a:avLst/>
+          </a:prstGeom>
+          <a:noFill/>
+        </p:spPr>
+        <p:txBody>
+          <a:bodyPr wrap="square" lIns="0" rIns="0" tIns="0" bIns="0" anchor="ctr">
+            <a:spAutoFit/>
+          </a:bodyPr>
+          <a:lstStyle/>
+          <a:p>
+            <a:pPr algn="l"/>
+            <a:r>
+              <a:rPr sz="2800" b="1">
+                <a:solidFill>
+                  <a:srgbClr val="282824"/>
+                </a:solidFill>
+                <a:latin typeface="Readex Pro"/>
+                <a:cs typeface="Readex Pro"/>
+                <a:ea typeface="Readex Pro"/>
+              </a:rPr>
+              <a:t>v0.3 is our best model</a:t>
+            </a:r>
+          </a:p>
+        </p:txBody>
+      </p:sp>
+      <p:pic>
+        <p:nvPicPr>
+          <p:cNvPr id="6" name="Samsung logo" descr="Samsung"/>
+          <p:cNvPicPr>
+            <a:picLocks noChangeAspect="1"/>
+          </p:cNvPicPr>
+          <p:nvPr/>
+        </p:nvPicPr>
+        <p:blipFill>
+          <a:blip r:embed="rId2"/>
+          <a:stretch>
+            <a:fillRect/>
+          </a:stretch>
+        </p:blipFill>
+        <p:spPr>
+          <a:xfrm>
+            <a:off x="594360" y="6327648"/>
+            <a:ext cx="1051560" cy="161677"/>
+          </a:xfrm>
+          <a:prstGeom prst="rect">
+            <a:avLst/>
+          </a:prstGeom>
+        </p:spPr>
+      </p:pic>
+      <p:sp>
+        <p:nvSpPr>
+          <p:cNvPr id="7" name="TextBox 6"/>
+          <p:cNvSpPr txBox="1"/>
+          <p:nvPr/>
+        </p:nvSpPr>
+        <p:spPr>
+          <a:xfrm>
+            <a:off x="1828800" y="6281928"/>
+            <a:ext cx="4114800" cy="274320"/>
+          </a:xfrm>
+          <a:prstGeom prst="rect">
+            <a:avLst/>
+          </a:prstGeom>
+          <a:noFill/>
+        </p:spPr>
+        <p:txBody>
+          <a:bodyPr wrap="square" lIns="0" rIns="0" tIns="0" bIns="0" anchor="ctr">
+            <a:spAutoFit/>
+          </a:bodyPr>
+          <a:lstStyle/>
+          <a:p>
+            <a:pPr algn="l"/>
+            <a:r>
+              <a:rPr sz="1000" b="0">
+                <a:solidFill>
+                  <a:srgbClr val="6F6B5E"/>
+                </a:solidFill>
+                <a:latin typeface="Readex Pro"/>
+                <a:cs typeface="Readex Pro"/>
+                <a:ea typeface="Readex Pro"/>
+              </a:rPr>
+              <a:t>Samsung Innovation Campus  ·  AI Course</a:t>
+            </a:r>
+          </a:p>
+        </p:txBody>
+      </p:sp>
+      <p:sp>
+        <p:nvSpPr>
+          <p:cNvPr id="8" name="TextBox 7"/>
+          <p:cNvSpPr txBox="1"/>
+          <p:nvPr/>
+        </p:nvSpPr>
+        <p:spPr>
+          <a:xfrm>
+            <a:off x="8394192" y="6281928"/>
+            <a:ext cx="914400" cy="274320"/>
+          </a:xfrm>
+          <a:prstGeom prst="rect">
+            <a:avLst/>
+          </a:prstGeom>
+          <a:noFill/>
+        </p:spPr>
+        <p:txBody>
+          <a:bodyPr wrap="square" lIns="0" rIns="0" tIns="0" bIns="0" anchor="ctr">
+            <a:spAutoFit/>
+          </a:bodyPr>
+          <a:lstStyle/>
+          <a:p>
+            <a:pPr algn="r"/>
+            <a:r>
+              <a:rPr sz="1000" b="0">
+                <a:solidFill>
+                  <a:srgbClr val="6F6B5E"/>
+                </a:solidFill>
+                <a:latin typeface="Readex Pro"/>
+                <a:cs typeface="Readex Pro"/>
+                <a:ea typeface="Readex Pro"/>
+              </a:rPr>
+              <a:t>6 / 8</a:t>
+            </a:r>
+          </a:p>
+        </p:txBody>
+      </p:sp>
+      <p:cxnSp>
+        <p:nvCxnSpPr>
+          <p:cNvPr id="9" name="Connector 8"/>
+          <p:cNvCxnSpPr/>
+          <p:nvPr/>
+        </p:nvCxnSpPr>
+        <p:spPr>
+          <a:xfrm>
+            <a:off x="822960" y="4892040"/>
+            <a:ext cx="4572000" cy="0"/>
+          </a:xfrm>
+          <a:prstGeom prst="line">
+            <a:avLst/>
+          </a:prstGeom>
+          <a:ln w="19050">
+            <a:solidFill>
+              <a:srgbClr val="A29D8C"/>
+            </a:solidFill>
+          </a:ln>
+        </p:spPr>
+        <p:style>
+          <a:lnRef idx="2">
+            <a:schemeClr val="accent1"/>
+          </a:lnRef>
+          <a:fillRef idx="0">
+            <a:schemeClr val="accent1"/>
+          </a:fillRef>
+          <a:effectRef idx="1">
+            <a:schemeClr val="accent1"/>
+          </a:effectRef>
+          <a:fontRef idx="minor">
+            <a:schemeClr val="tx1"/>
+          </a:fontRef>
+        </p:style>
+      </p:cxnSp>
+      <p:cxnSp>
+        <p:nvCxnSpPr>
+          <p:cNvPr id="10" name="Connector 9"/>
+          <p:cNvCxnSpPr/>
+          <p:nvPr/>
+        </p:nvCxnSpPr>
+        <p:spPr>
+          <a:xfrm>
+            <a:off x="822960" y="1508760"/>
+            <a:ext cx="0" cy="3383280"/>
+          </a:xfrm>
+          <a:prstGeom prst="line">
+            <a:avLst/>
+          </a:prstGeom>
+          <a:ln w="19050">
+            <a:solidFill>
+              <a:srgbClr val="A29D8C"/>
+            </a:solidFill>
+          </a:ln>
+        </p:spPr>
+        <p:style>
+          <a:lnRef idx="2">
+            <a:schemeClr val="accent1"/>
+          </a:lnRef>
+          <a:fillRef idx="0">
+            <a:schemeClr val="accent1"/>
+          </a:fillRef>
+          <a:effectRef idx="1">
+            <a:schemeClr val="accent1"/>
+          </a:effectRef>
+          <a:fontRef idx="minor">
+            <a:schemeClr val="tx1"/>
+          </a:fontRef>
+        </p:style>
+      </p:cxnSp>
+      <p:sp>
+        <p:nvSpPr>
+          <p:cNvPr id="11" name="TextBox 10"/>
+          <p:cNvSpPr txBox="1"/>
+          <p:nvPr/>
+        </p:nvSpPr>
+        <p:spPr>
+          <a:xfrm>
+            <a:off x="822960" y="5001768"/>
+            <a:ext cx="4572000" cy="228600"/>
+          </a:xfrm>
+          <a:prstGeom prst="rect">
+            <a:avLst/>
+          </a:prstGeom>
+          <a:noFill/>
+        </p:spPr>
+        <p:txBody>
+          <a:bodyPr wrap="square" lIns="0" rIns="0" tIns="0" bIns="0" anchor="ctr">
+            <a:spAutoFit/>
+          </a:bodyPr>
+          <a:lstStyle/>
+          <a:p>
+            <a:pPr algn="ctr"/>
+            <a:r>
+              <a:rPr sz="1100" b="0">
+                <a:solidFill>
+                  <a:srgbClr val="6F6B5E"/>
+                </a:solidFill>
+                <a:latin typeface="Readex Pro"/>
+                <a:cs typeface="Readex Pro"/>
+                <a:ea typeface="Readex Pro"/>
+              </a:rPr>
+              <a:t>meaning kept (%)  →</a:t>
+            </a:r>
+          </a:p>
+        </p:txBody>
+      </p:sp>
+      <p:sp>
+        <p:nvSpPr>
+          <p:cNvPr id="12" name="TextBox 11"/>
+          <p:cNvSpPr txBox="1"/>
+          <p:nvPr/>
+        </p:nvSpPr>
+        <p:spPr>
+          <a:xfrm>
+            <a:off x="182880" y="3017520"/>
+            <a:ext cx="1280160" cy="365760"/>
+          </a:xfrm>
+          <a:prstGeom prst="rect">
+            <a:avLst/>
+          </a:prstGeom>
+          <a:noFill/>
+        </p:spPr>
+        <p:txBody>
+          <a:bodyPr wrap="square" lIns="0" rIns="0" tIns="0" bIns="0" anchor="ctr">
+            <a:spAutoFit/>
+          </a:bodyPr>
+          <a:lstStyle/>
+          <a:p>
+            <a:pPr algn="ctr"/>
+            <a:r>
+              <a:rPr sz="1100" b="0">
+                <a:solidFill>
+                  <a:srgbClr val="6F6B5E"/>
+                </a:solidFill>
+                <a:latin typeface="Readex Pro"/>
+                <a:cs typeface="Readex Pro"/>
+                <a:ea typeface="Readex Pro"/>
+              </a:rPr>
+              <a:t>clause words</a:t>
+            </a:r>
+          </a:p>
+          <a:p>
+            <a:pPr algn="ctr"/>
+            <a:r>
+              <a:rPr sz="1100" b="0">
+                <a:solidFill>
+                  <a:srgbClr val="6F6B5E"/>
+                </a:solidFill>
+                <a:latin typeface="Readex Pro"/>
+                <a:cs typeface="Readex Pro"/>
+                <a:ea typeface="Readex Pro"/>
+              </a:rPr>
+              <a:t>shorter  →</a:t>
+            </a:r>
+          </a:p>
+        </p:txBody>
+      </p:sp>
+      <p:sp>
+        <p:nvSpPr>
+          <p:cNvPr id="13" name="Oval 12"/>
+          <p:cNvSpPr/>
+          <p:nvPr/>
+        </p:nvSpPr>
+        <p:spPr>
+          <a:xfrm>
+            <a:off x="4967804" y="4565903"/>
+            <a:ext cx="201168" cy="201168"/>
+          </a:xfrm>
+          <a:prstGeom prst="ellipse">
+            <a:avLst/>
+          </a:prstGeom>
+          <a:solidFill>
+            <a:srgbClr val="A29D8C"/>
+          </a:solidFill>
+          <a:ln>
+            <a:noFill/>
+          </a:ln>
+          <a:effectLst/>
+        </p:spPr>
+        <p:style>
+          <a:lnRef idx="1">
+            <a:schemeClr val="accent1"/>
+          </a:lnRef>
+          <a:fillRef idx="3">
+            <a:schemeClr val="accent1"/>
+          </a:fillRef>
+          <a:effectRef idx="2">
+            <a:schemeClr val="accent1"/>
+          </a:effectRef>
+          <a:fontRef idx="minor">
+            <a:schemeClr val="lt1"/>
+          </a:fontRef>
+        </p:style>
+        <p:txBody>
+          <a:bodyPr rtlCol="0" anchor="ctr"/>
+          <a:lstStyle/>
+          <a:p>
+            <a:pPr algn="ctr"/>
+          </a:p>
+        </p:txBody>
+      </p:sp>
+      <p:sp>
+        <p:nvSpPr>
+          <p:cNvPr id="14" name="Oval 13"/>
+          <p:cNvSpPr/>
+          <p:nvPr/>
+        </p:nvSpPr>
+        <p:spPr>
+          <a:xfrm>
+            <a:off x="3557016" y="3844137"/>
+            <a:ext cx="201168" cy="201168"/>
+          </a:xfrm>
+          <a:prstGeom prst="ellipse">
+            <a:avLst/>
+          </a:prstGeom>
+          <a:solidFill>
+            <a:srgbClr val="8A5E35"/>
+          </a:solidFill>
+          <a:ln>
+            <a:noFill/>
+          </a:ln>
+          <a:effectLst/>
+        </p:spPr>
+        <p:style>
+          <a:lnRef idx="1">
+            <a:schemeClr val="accent1"/>
+          </a:lnRef>
+          <a:fillRef idx="3">
+            <a:schemeClr val="accent1"/>
+          </a:fillRef>
+          <a:effectRef idx="2">
+            <a:schemeClr val="accent1"/>
+          </a:effectRef>
+          <a:fontRef idx="minor">
+            <a:schemeClr val="lt1"/>
+          </a:fontRef>
+        </p:style>
+        <p:txBody>
+          <a:bodyPr rtlCol="0" anchor="ctr"/>
+          <a:lstStyle/>
+          <a:p>
+            <a:pPr algn="ctr"/>
+          </a:p>
+        </p:txBody>
+      </p:sp>
+      <p:sp>
+        <p:nvSpPr>
+          <p:cNvPr id="15" name="TextBox 14"/>
+          <p:cNvSpPr txBox="1"/>
+          <p:nvPr/>
+        </p:nvSpPr>
+        <p:spPr>
+          <a:xfrm>
+            <a:off x="2240280" y="4091025"/>
+            <a:ext cx="1371600" cy="228600"/>
+          </a:xfrm>
+          <a:prstGeom prst="rect">
+            <a:avLst/>
+          </a:prstGeom>
+          <a:noFill/>
+        </p:spPr>
+        <p:txBody>
+          <a:bodyPr wrap="square" lIns="0" rIns="0" tIns="0" bIns="0" anchor="ctr">
+            <a:spAutoFit/>
+          </a:bodyPr>
+          <a:lstStyle/>
+          <a:p>
+            <a:pPr algn="ctr"/>
+            <a:r>
+              <a:rPr sz="1000" b="0">
+                <a:solidFill>
+                  <a:srgbClr val="4A4842"/>
+                </a:solidFill>
+                <a:latin typeface="Readex Pro"/>
+                <a:cs typeface="Readex Pro"/>
+                <a:ea typeface="Readex Pro"/>
+              </a:rPr>
+              <a:t>app-arat5 (today)</a:t>
+            </a:r>
+          </a:p>
+        </p:txBody>
+      </p:sp>
+      <p:sp>
+        <p:nvSpPr>
+          <p:cNvPr id="16" name="Oval 15"/>
+          <p:cNvSpPr/>
+          <p:nvPr/>
+        </p:nvSpPr>
+        <p:spPr>
+          <a:xfrm>
+            <a:off x="3517827" y="2941929"/>
+            <a:ext cx="201168" cy="201168"/>
+          </a:xfrm>
+          <a:prstGeom prst="ellipse">
+            <a:avLst/>
+          </a:prstGeom>
+          <a:solidFill>
+            <a:srgbClr val="6F6B5E"/>
+          </a:solidFill>
+          <a:ln>
+            <a:noFill/>
+          </a:ln>
+          <a:effectLst/>
+        </p:spPr>
+        <p:style>
+          <a:lnRef idx="1">
+            <a:schemeClr val="accent1"/>
+          </a:lnRef>
+          <a:fillRef idx="3">
+            <a:schemeClr val="accent1"/>
+          </a:fillRef>
+          <a:effectRef idx="2">
+            <a:schemeClr val="accent1"/>
+          </a:effectRef>
+          <a:fontRef idx="minor">
+            <a:schemeClr val="lt1"/>
+          </a:fontRef>
+        </p:style>
+        <p:txBody>
+          <a:bodyPr rtlCol="0" anchor="ctr"/>
+          <a:lstStyle/>
+          <a:p>
+            <a:pPr algn="ctr"/>
+          </a:p>
+        </p:txBody>
+      </p:sp>
+      <p:sp>
+        <p:nvSpPr>
+          <p:cNvPr id="17" name="Oval 16"/>
+          <p:cNvSpPr/>
+          <p:nvPr/>
+        </p:nvSpPr>
+        <p:spPr>
+          <a:xfrm>
+            <a:off x="2518518" y="1994611"/>
+            <a:ext cx="201168" cy="201168"/>
+          </a:xfrm>
+          <a:prstGeom prst="ellipse">
+            <a:avLst/>
+          </a:prstGeom>
+          <a:solidFill>
+            <a:srgbClr val="6F6B5E"/>
+          </a:solidFill>
+          <a:ln>
+            <a:noFill/>
+          </a:ln>
+          <a:effectLst/>
+        </p:spPr>
+        <p:style>
+          <a:lnRef idx="1">
+            <a:schemeClr val="accent1"/>
+          </a:lnRef>
+          <a:fillRef idx="3">
+            <a:schemeClr val="accent1"/>
+          </a:fillRef>
+          <a:effectRef idx="2">
+            <a:schemeClr val="accent1"/>
+          </a:effectRef>
+          <a:fontRef idx="minor">
+            <a:schemeClr val="lt1"/>
+          </a:fontRef>
+        </p:style>
+        <p:txBody>
+          <a:bodyPr rtlCol="0" anchor="ctr"/>
+          <a:lstStyle/>
+          <a:p>
+            <a:pPr algn="ctr"/>
+          </a:p>
+        </p:txBody>
+      </p:sp>
+      <p:sp>
+        <p:nvSpPr>
+          <p:cNvPr id="18" name="Oval 17"/>
+          <p:cNvSpPr/>
+          <p:nvPr/>
+        </p:nvSpPr>
+        <p:spPr>
+          <a:xfrm>
+            <a:off x="2009067" y="2761487"/>
+            <a:ext cx="201168" cy="201168"/>
+          </a:xfrm>
+          <a:prstGeom prst="ellipse">
+            <a:avLst/>
+          </a:prstGeom>
+          <a:solidFill>
+            <a:srgbClr val="8A5E35"/>
+          </a:solidFill>
+          <a:ln>
+            <a:noFill/>
+          </a:ln>
+          <a:effectLst/>
+        </p:spPr>
+        <p:style>
+          <a:lnRef idx="1">
+            <a:schemeClr val="accent1"/>
+          </a:lnRef>
+          <a:fillRef idx="3">
+            <a:schemeClr val="accent1"/>
+          </a:fillRef>
+          <a:effectRef idx="2">
+            <a:schemeClr val="accent1"/>
+          </a:effectRef>
+          <a:fontRef idx="minor">
+            <a:schemeClr val="lt1"/>
+          </a:fontRef>
+        </p:style>
+        <p:txBody>
+          <a:bodyPr rtlCol="0" anchor="ctr"/>
+          <a:lstStyle/>
+          <a:p>
+            <a:pPr algn="ctr"/>
+          </a:p>
+        </p:txBody>
+      </p:sp>
+      <p:sp>
+        <p:nvSpPr>
+          <p:cNvPr id="19" name="TextBox 18"/>
+          <p:cNvSpPr txBox="1"/>
+          <p:nvPr/>
+        </p:nvSpPr>
+        <p:spPr>
+          <a:xfrm>
+            <a:off x="692331" y="2569463"/>
+            <a:ext cx="1371600" cy="228600"/>
+          </a:xfrm>
+          <a:prstGeom prst="rect">
+            <a:avLst/>
+          </a:prstGeom>
+          <a:noFill/>
+        </p:spPr>
+        <p:txBody>
+          <a:bodyPr wrap="square" lIns="0" rIns="0" tIns="0" bIns="0" anchor="ctr">
+            <a:spAutoFit/>
+          </a:bodyPr>
+          <a:lstStyle/>
+          <a:p>
+            <a:pPr algn="ctr"/>
+            <a:r>
+              <a:rPr sz="1000" b="0">
+                <a:solidFill>
+                  <a:srgbClr val="4A4842"/>
+                </a:solidFill>
+                <a:latin typeface="Readex Pro"/>
+                <a:cs typeface="Readex Pro"/>
+                <a:ea typeface="Readex Pro"/>
+              </a:rPr>
+              <a:t>app-arabart</a:t>
+            </a:r>
+          </a:p>
+        </p:txBody>
+      </p:sp>
+      <p:sp>
+        <p:nvSpPr>
+          <p:cNvPr id="20" name="Oval 19"/>
+          <p:cNvSpPr/>
+          <p:nvPr/>
+        </p:nvSpPr>
+        <p:spPr>
+          <a:xfrm>
+            <a:off x="2067850" y="2941929"/>
+            <a:ext cx="201168" cy="201168"/>
+          </a:xfrm>
+          <a:prstGeom prst="ellipse">
+            <a:avLst/>
+          </a:prstGeom>
+          <a:solidFill>
+            <a:srgbClr val="6F6B5E"/>
+          </a:solidFill>
+          <a:ln>
+            <a:noFill/>
+          </a:ln>
+          <a:effectLst/>
+        </p:spPr>
+        <p:style>
+          <a:lnRef idx="1">
+            <a:schemeClr val="accent1"/>
+          </a:lnRef>
+          <a:fillRef idx="3">
+            <a:schemeClr val="accent1"/>
+          </a:fillRef>
+          <a:effectRef idx="2">
+            <a:schemeClr val="accent1"/>
+          </a:effectRef>
+          <a:fontRef idx="minor">
+            <a:schemeClr val="lt1"/>
+          </a:fontRef>
+        </p:style>
+        <p:txBody>
+          <a:bodyPr rtlCol="0" anchor="ctr"/>
+          <a:lstStyle/>
+          <a:p>
+            <a:pPr algn="ctr"/>
+          </a:p>
+        </p:txBody>
+      </p:sp>
+      <p:sp>
+        <p:nvSpPr>
+          <p:cNvPr id="21" name="Oval 20"/>
+          <p:cNvSpPr/>
+          <p:nvPr/>
+        </p:nvSpPr>
+        <p:spPr>
+          <a:xfrm>
+            <a:off x="1173044" y="1859279"/>
+            <a:ext cx="201168" cy="201168"/>
+          </a:xfrm>
+          <a:prstGeom prst="ellipse">
+            <a:avLst/>
+          </a:prstGeom>
+          <a:solidFill>
+            <a:srgbClr val="6F6B5E"/>
+          </a:solidFill>
+          <a:ln>
+            <a:noFill/>
+          </a:ln>
+          <a:effectLst/>
+        </p:spPr>
+        <p:style>
+          <a:lnRef idx="1">
+            <a:schemeClr val="accent1"/>
+          </a:lnRef>
+          <a:fillRef idx="3">
+            <a:schemeClr val="accent1"/>
+          </a:fillRef>
+          <a:effectRef idx="2">
+            <a:schemeClr val="accent1"/>
+          </a:effectRef>
+          <a:fontRef idx="minor">
+            <a:schemeClr val="lt1"/>
+          </a:fontRef>
+        </p:style>
+        <p:txBody>
+          <a:bodyPr rtlCol="0" anchor="ctr"/>
+          <a:lstStyle/>
+          <a:p>
+            <a:pPr algn="ctr"/>
+          </a:p>
+        </p:txBody>
+      </p:sp>
+      <p:sp>
+        <p:nvSpPr>
+          <p:cNvPr id="22" name="Oval 21"/>
+          <p:cNvSpPr/>
+          <p:nvPr/>
+        </p:nvSpPr>
+        <p:spPr>
+          <a:xfrm>
+            <a:off x="3820885" y="2228697"/>
+            <a:ext cx="274320" cy="274320"/>
+          </a:xfrm>
+          <a:prstGeom prst="ellipse">
+            <a:avLst/>
+          </a:prstGeom>
+          <a:solidFill>
+            <a:srgbClr val="B5533C"/>
+          </a:solidFill>
+          <a:ln>
+            <a:noFill/>
+          </a:ln>
+          <a:effectLst/>
+        </p:spPr>
+        <p:style>
+          <a:lnRef idx="1">
+            <a:schemeClr val="accent1"/>
+          </a:lnRef>
+          <a:fillRef idx="3">
+            <a:schemeClr val="accent1"/>
+          </a:fillRef>
+          <a:effectRef idx="2">
+            <a:schemeClr val="accent1"/>
+          </a:effectRef>
+          <a:fontRef idx="minor">
+            <a:schemeClr val="lt1"/>
+          </a:fontRef>
+        </p:style>
+        <p:txBody>
+          <a:bodyPr rtlCol="0" anchor="ctr"/>
+          <a:lstStyle/>
+          <a:p>
+            <a:pPr algn="ctr"/>
+          </a:p>
+        </p:txBody>
+      </p:sp>
+      <p:sp>
+        <p:nvSpPr>
+          <p:cNvPr id="23" name="TextBox 22"/>
+          <p:cNvSpPr txBox="1"/>
+          <p:nvPr/>
+        </p:nvSpPr>
+        <p:spPr>
+          <a:xfrm>
+            <a:off x="2540725" y="2073249"/>
+            <a:ext cx="1371600" cy="228600"/>
+          </a:xfrm>
+          <a:prstGeom prst="rect">
+            <a:avLst/>
+          </a:prstGeom>
+          <a:noFill/>
+        </p:spPr>
+        <p:txBody>
+          <a:bodyPr wrap="square" lIns="0" rIns="0" tIns="0" bIns="0" anchor="ctr">
+            <a:spAutoFit/>
+          </a:bodyPr>
+          <a:lstStyle/>
+          <a:p>
+            <a:pPr algn="ctr"/>
+            <a:r>
+              <a:rPr sz="1000" b="1">
+                <a:solidFill>
+                  <a:srgbClr val="B5533C"/>
+                </a:solidFill>
+                <a:latin typeface="Readex Pro"/>
+                <a:cs typeface="Readex Pro"/>
+                <a:ea typeface="Readex Pro"/>
+              </a:rPr>
+              <a:t>model 3 + net</a:t>
+            </a:r>
+          </a:p>
+        </p:txBody>
+      </p:sp>
+      <p:sp>
+        <p:nvSpPr>
+          <p:cNvPr id="24" name="TextBox 23"/>
+          <p:cNvSpPr txBox="1"/>
+          <p:nvPr/>
+        </p:nvSpPr>
+        <p:spPr>
+          <a:xfrm>
+            <a:off x="822960" y="5276088"/>
+            <a:ext cx="4572000" cy="228600"/>
+          </a:xfrm>
+          <a:prstGeom prst="rect">
+            <a:avLst/>
+          </a:prstGeom>
+          <a:noFill/>
+        </p:spPr>
+        <p:txBody>
+          <a:bodyPr wrap="square" lIns="0" rIns="0" tIns="0" bIns="0" anchor="ctr">
+            <a:spAutoFit/>
+          </a:bodyPr>
+          <a:lstStyle/>
+          <a:p>
+            <a:pPr algn="l"/>
+            <a:r>
+              <a:rPr sz="950" b="0">
+                <a:solidFill>
+                  <a:srgbClr val="6F6B5E"/>
+                </a:solidFill>
+                <a:latin typeface="Readex Pro"/>
+                <a:cs typeface="Readex Pro"/>
+                <a:ea typeface="Readex Pro"/>
+              </a:rPr>
+              <a:t>BayanBench v2 · test core · as trained</a:t>
+            </a:r>
+          </a:p>
+        </p:txBody>
+      </p:sp>
+      <p:sp>
+        <p:nvSpPr>
+          <p:cNvPr id="25" name="Rounded Rectangle 24"/>
+          <p:cNvSpPr/>
+          <p:nvPr/>
+        </p:nvSpPr>
+        <p:spPr>
+          <a:xfrm>
+            <a:off x="5806440" y="1508760"/>
+            <a:ext cx="3520440" cy="502920"/>
+          </a:xfrm>
+          <a:prstGeom prst="roundRect">
+            <a:avLst>
+              <a:gd name="adj" fmla="val 32727"/>
+            </a:avLst>
+          </a:prstGeom>
+          <a:solidFill>
+            <a:srgbClr val="EFE9D9"/>
+          </a:solidFill>
+          <a:ln>
+            <a:noFill/>
+          </a:ln>
+          <a:effectLst/>
+        </p:spPr>
+        <p:style>
+          <a:lnRef idx="1">
+            <a:schemeClr val="accent1"/>
+          </a:lnRef>
+          <a:fillRef idx="3">
+            <a:schemeClr val="accent1"/>
+          </a:fillRef>
+          <a:effectRef idx="2">
+            <a:schemeClr val="accent1"/>
+          </a:effectRef>
+          <a:fontRef idx="minor">
+            <a:schemeClr val="lt1"/>
+          </a:fontRef>
+        </p:style>
+        <p:txBody>
+          <a:bodyPr rtlCol="0" anchor="ctr" wrap="square" lIns="109728" rIns="109728" tIns="0" bIns="0"/>
+          <a:lstStyle/>
+          <a:p>
+            <a:pPr algn="ctr"/>
+            <a:r>
+              <a:rPr sz="1100" b="0">
+                <a:solidFill>
+                  <a:srgbClr val="4A4842"/>
+                </a:solidFill>
+                <a:latin typeface="Readex Pro"/>
+                <a:cs typeface="Readex Pro"/>
+                <a:ea typeface="Readex Pro"/>
+              </a:rPr>
+              <a:t>the more it simplifies,</a:t>
+            </a:r>
+          </a:p>
+          <a:p>
+            <a:pPr algn="ctr"/>
+            <a:r>
+              <a:rPr sz="1100" b="0">
+                <a:solidFill>
+                  <a:srgbClr val="4A4842"/>
+                </a:solidFill>
+                <a:latin typeface="Readex Pro"/>
+                <a:cs typeface="Readex Pro"/>
+                <a:ea typeface="Readex Pro"/>
+              </a:rPr>
+              <a:t>the less meaning it keeps</a:t>
+            </a:r>
+          </a:p>
+        </p:txBody>
+      </p:sp>
+      <p:sp>
+        <p:nvSpPr>
+          <p:cNvPr id="26" name="Rounded Rectangle 25"/>
+          <p:cNvSpPr/>
+          <p:nvPr/>
+        </p:nvSpPr>
+        <p:spPr>
+          <a:xfrm>
+            <a:off x="5806440" y="2148840"/>
+            <a:ext cx="3520440" cy="502920"/>
+          </a:xfrm>
+          <a:prstGeom prst="roundRect">
+            <a:avLst>
+              <a:gd name="adj" fmla="val 32727"/>
+            </a:avLst>
+          </a:prstGeom>
+          <a:solidFill>
+            <a:srgbClr val="C6986B"/>
+          </a:solidFill>
+          <a:ln>
+            <a:noFill/>
+          </a:ln>
+          <a:effectLst/>
+        </p:spPr>
+        <p:style>
+          <a:lnRef idx="1">
+            <a:schemeClr val="accent1"/>
+          </a:lnRef>
+          <a:fillRef idx="3">
+            <a:schemeClr val="accent1"/>
+          </a:fillRef>
+          <a:effectRef idx="2">
+            <a:schemeClr val="accent1"/>
+          </a:effectRef>
+          <a:fontRef idx="minor">
+            <a:schemeClr val="lt1"/>
+          </a:fontRef>
+        </p:style>
+        <p:txBody>
+          <a:bodyPr rtlCol="0" anchor="ctr" wrap="square" lIns="109728" rIns="109728" tIns="0" bIns="0"/>
+          <a:lstStyle/>
+          <a:p>
+            <a:pPr algn="ctr"/>
+            <a:r>
+              <a:rPr sz="1200" b="1">
+                <a:solidFill>
+                  <a:srgbClr val="1A1A14"/>
+                </a:solidFill>
+                <a:latin typeface="Readex Pro"/>
+                <a:cs typeface="Readex Pro"/>
+                <a:ea typeface="Readex Pro"/>
+              </a:rPr>
+              <a:t>v0.3 keeps 82% meaning</a:t>
+            </a:r>
+          </a:p>
+          <a:p>
+            <a:pPr algn="ctr"/>
+            <a:r>
+              <a:rPr sz="1200" b="1">
+                <a:solidFill>
+                  <a:srgbClr val="1A1A14"/>
+                </a:solidFill>
+                <a:latin typeface="Readex Pro"/>
+                <a:cs typeface="Readex Pro"/>
+                <a:ea typeface="Readex Pro"/>
+              </a:rPr>
+              <a:t>and cuts 5.2 words</a:t>
+            </a:r>
+          </a:p>
+        </p:txBody>
+      </p:sp>
+      <p:sp>
+        <p:nvSpPr>
+          <p:cNvPr id="27" name="Rounded Rectangle 26"/>
+          <p:cNvSpPr/>
+          <p:nvPr/>
+        </p:nvSpPr>
+        <p:spPr>
+          <a:xfrm>
+            <a:off x="5806440" y="2788920"/>
+            <a:ext cx="3520440" cy="502920"/>
+          </a:xfrm>
+          <a:prstGeom prst="roundRect">
+            <a:avLst>
+              <a:gd name="adj" fmla="val 32727"/>
+            </a:avLst>
+          </a:prstGeom>
+          <a:solidFill>
+            <a:srgbClr val="EFE9D9"/>
+          </a:solidFill>
+          <a:ln>
+            <a:noFill/>
+          </a:ln>
+          <a:effectLst/>
+        </p:spPr>
+        <p:style>
+          <a:lnRef idx="1">
+            <a:schemeClr val="accent1"/>
+          </a:lnRef>
+          <a:fillRef idx="3">
+            <a:schemeClr val="accent1"/>
+          </a:fillRef>
+          <a:effectRef idx="2">
+            <a:schemeClr val="accent1"/>
+          </a:effectRef>
+          <a:fontRef idx="minor">
+            <a:schemeClr val="lt1"/>
+          </a:fontRef>
+        </p:style>
+        <p:txBody>
+          <a:bodyPr rtlCol="0" anchor="ctr" wrap="square" lIns="109728" rIns="109728" tIns="0" bIns="0"/>
+          <a:lstStyle/>
+          <a:p>
+            <a:pPr algn="ctr"/>
+            <a:r>
+              <a:rPr sz="1100" b="0">
+                <a:solidFill>
+                  <a:srgbClr val="4A4842"/>
+                </a:solidFill>
+                <a:latin typeface="Readex Pro"/>
+                <a:cs typeface="Readex Pro"/>
+                <a:ea typeface="Readex Pro"/>
+              </a:rPr>
+              <a:t>the app's large model,</a:t>
+            </a:r>
+          </a:p>
+          <a:p>
+            <a:pPr algn="ctr"/>
+            <a:r>
+              <a:rPr sz="1100" b="0">
+                <a:solidFill>
+                  <a:srgbClr val="4A4842"/>
+                </a:solidFill>
+                <a:latin typeface="Readex Pro"/>
+                <a:cs typeface="Readex Pro"/>
+                <a:ea typeface="Readex Pro"/>
+              </a:rPr>
+              <a:t>four beams + safety net</a:t>
+            </a:r>
+          </a:p>
+        </p:txBody>
+      </p:sp>
+      <p:sp>
+        <p:nvSpPr>
+          <p:cNvPr id="28" name="TextBox 27"/>
+          <p:cNvSpPr txBox="1"/>
+          <p:nvPr/>
+        </p:nvSpPr>
+        <p:spPr>
+          <a:xfrm>
+            <a:off x="594360" y="5074920"/>
+            <a:ext cx="8714232" cy="256032"/>
+          </a:xfrm>
+          <a:prstGeom prst="rect">
+            <a:avLst/>
+          </a:prstGeom>
+          <a:noFill/>
+        </p:spPr>
+        <p:txBody>
+          <a:bodyPr wrap="square" lIns="0" rIns="0" tIns="0" bIns="0" anchor="ctr">
+            <a:spAutoFit/>
+          </a:bodyPr>
+          <a:lstStyle/>
+          <a:p>
+            <a:pPr algn="l"/>
+            <a:r>
+              <a:rPr sz="1100" b="0">
+                <a:solidFill>
+                  <a:srgbClr val="6F6B5E"/>
+                </a:solidFill>
+                <a:latin typeface="Readex Pro"/>
+                <a:cs typeface="Readex Pro"/>
+                <a:ea typeface="Readex Pro"/>
+              </a:rPr>
+              <a:t>In the app: v0.3 minus v0.2, same text step · 95% intervals</a:t>
+            </a:r>
+          </a:p>
+        </p:txBody>
+      </p:sp>
+      <p:sp>
+        <p:nvSpPr>
+          <p:cNvPr id="29" name="Rounded Rectangle 28"/>
+          <p:cNvSpPr/>
+          <p:nvPr/>
+        </p:nvSpPr>
+        <p:spPr>
+          <a:xfrm>
+            <a:off x="594360" y="5394960"/>
+            <a:ext cx="6217920" cy="256032"/>
+          </a:xfrm>
+          <a:prstGeom prst="roundRect">
+            <a:avLst>
+              <a:gd name="adj" fmla="val 50000"/>
+            </a:avLst>
+          </a:prstGeom>
+          <a:solidFill>
+            <a:srgbClr val="EEDDC7"/>
+          </a:solidFill>
+          <a:ln>
+            <a:noFill/>
+          </a:ln>
+          <a:effectLst/>
+        </p:spPr>
+        <p:style>
+          <a:lnRef idx="1">
+            <a:schemeClr val="accent1"/>
+          </a:lnRef>
+          <a:fillRef idx="3">
+            <a:schemeClr val="accent1"/>
+          </a:fillRef>
+          <a:effectRef idx="2">
+            <a:schemeClr val="accent1"/>
+          </a:effectRef>
+          <a:fontRef idx="minor">
+            <a:schemeClr val="lt1"/>
+          </a:fontRef>
+        </p:style>
+        <p:txBody>
+          <a:bodyPr rtlCol="0" anchor="ctr" wrap="square" lIns="109728" rIns="109728" tIns="0" bIns="0"/>
+          <a:lstStyle/>
+          <a:p>
+            <a:pPr algn="ctr"/>
+            <a:r>
+              <a:rPr sz="1050" b="0">
+                <a:solidFill>
+                  <a:srgbClr val="8A5E35"/>
+                </a:solidFill>
+                <a:latin typeface="Readex Pro"/>
+                <a:cs typeface="Readex Pro"/>
+                <a:ea typeface="Readex Pro"/>
+              </a:rPr>
+              <a:t>+3.4 words cut from the longest clause</a:t>
+            </a:r>
+          </a:p>
+        </p:txBody>
+      </p:sp>
+      <p:sp>
+        <p:nvSpPr>
+          <p:cNvPr id="30" name="Rounded Rectangle 29"/>
+          <p:cNvSpPr/>
+          <p:nvPr/>
+        </p:nvSpPr>
+        <p:spPr>
+          <a:xfrm>
+            <a:off x="594360" y="5687568"/>
+            <a:ext cx="6217920" cy="256032"/>
+          </a:xfrm>
+          <a:prstGeom prst="roundRect">
+            <a:avLst>
+              <a:gd name="adj" fmla="val 50000"/>
+            </a:avLst>
+          </a:prstGeom>
+          <a:solidFill>
+            <a:srgbClr val="EEDDC7"/>
+          </a:solidFill>
+          <a:ln>
+            <a:noFill/>
+          </a:ln>
+          <a:effectLst/>
+        </p:spPr>
+        <p:style>
+          <a:lnRef idx="1">
+            <a:schemeClr val="accent1"/>
+          </a:lnRef>
+          <a:fillRef idx="3">
+            <a:schemeClr val="accent1"/>
+          </a:fillRef>
+          <a:effectRef idx="2">
+            <a:schemeClr val="accent1"/>
+          </a:effectRef>
+          <a:fontRef idx="minor">
+            <a:schemeClr val="lt1"/>
+          </a:fontRef>
+        </p:style>
+        <p:txBody>
+          <a:bodyPr rtlCol="0" anchor="ctr" wrap="square" lIns="109728" rIns="109728" tIns="0" bIns="0"/>
+          <a:lstStyle/>
+          <a:p>
+            <a:pPr algn="ctr"/>
+            <a:r>
+              <a:rPr sz="1050" b="0">
+                <a:solidFill>
+                  <a:srgbClr val="8A5E35"/>
+                </a:solidFill>
+                <a:latin typeface="Readex Pro"/>
+                <a:cs typeface="Readex Pro"/>
+                <a:ea typeface="Readex Pro"/>
+              </a:rPr>
+              <a:t>+0.24 hard words removed</a:t>
+            </a:r>
+          </a:p>
+        </p:txBody>
+      </p:sp>
+      <p:sp>
+        <p:nvSpPr>
+          <p:cNvPr id="31" name="Rounded Rectangle 30"/>
+          <p:cNvSpPr/>
+          <p:nvPr/>
+        </p:nvSpPr>
+        <p:spPr>
+          <a:xfrm>
+            <a:off x="594360" y="5980176"/>
+            <a:ext cx="6217920" cy="256032"/>
+          </a:xfrm>
+          <a:prstGeom prst="roundRect">
+            <a:avLst>
+              <a:gd name="adj" fmla="val 50000"/>
+            </a:avLst>
+          </a:prstGeom>
+          <a:solidFill>
+            <a:srgbClr val="EEDDC7"/>
+          </a:solidFill>
+          <a:ln>
+            <a:noFill/>
+          </a:ln>
+          <a:effectLst/>
+        </p:spPr>
+        <p:style>
+          <a:lnRef idx="1">
+            <a:schemeClr val="accent1"/>
+          </a:lnRef>
+          <a:fillRef idx="3">
+            <a:schemeClr val="accent1"/>
+          </a:fillRef>
+          <a:effectRef idx="2">
+            <a:schemeClr val="accent1"/>
+          </a:effectRef>
+          <a:fontRef idx="minor">
+            <a:schemeClr val="lt1"/>
+          </a:fontRef>
+        </p:style>
+        <p:txBody>
+          <a:bodyPr rtlCol="0" anchor="ctr" wrap="square" lIns="109728" rIns="109728" tIns="0" bIns="0"/>
+          <a:lstStyle/>
+          <a:p>
+            <a:pPr algn="ctr"/>
+            <a:r>
+              <a:rPr sz="1050" b="0">
+                <a:solidFill>
+                  <a:srgbClr val="8A5E35"/>
+                </a:solidFill>
+                <a:latin typeface="Readex Pro"/>
+                <a:cs typeface="Readex Pro"/>
+                <a:ea typeface="Readex Pro"/>
+              </a:rPr>
+              <a:t>-3 points meaning kept · not significant</a:t>
+            </a:r>
+          </a:p>
+        </p:txBody>
+      </p:sp>
+      <p:sp>
+        <p:nvSpPr>
+          <p:cNvPr id="32" name="Rounded Rectangle 31"/>
+          <p:cNvSpPr/>
+          <p:nvPr/>
+        </p:nvSpPr>
+        <p:spPr>
+          <a:xfrm>
+            <a:off x="594360" y="6272784"/>
+            <a:ext cx="6217920" cy="256032"/>
+          </a:xfrm>
+          <a:prstGeom prst="roundRect">
+            <a:avLst>
+              <a:gd name="adj" fmla="val 50000"/>
+            </a:avLst>
+          </a:prstGeom>
+          <a:solidFill>
+            <a:srgbClr val="EEDDC7"/>
+          </a:solidFill>
+          <a:ln>
+            <a:noFill/>
+          </a:ln>
+          <a:effectLst/>
+        </p:spPr>
+        <p:style>
+          <a:lnRef idx="1">
+            <a:schemeClr val="accent1"/>
+          </a:lnRef>
+          <a:fillRef idx="3">
+            <a:schemeClr val="accent1"/>
+          </a:fillRef>
+          <a:effectRef idx="2">
+            <a:schemeClr val="accent1"/>
+          </a:effectRef>
+          <a:fontRef idx="minor">
+            <a:schemeClr val="lt1"/>
+          </a:fontRef>
+        </p:style>
+        <p:txBody>
+          <a:bodyPr rtlCol="0" anchor="ctr" wrap="square" lIns="109728" rIns="109728" tIns="0" bIns="0"/>
+          <a:lstStyle/>
+          <a:p>
+            <a:pPr algn="ctr"/>
+            <a:r>
+              <a:rPr sz="1050" b="0">
+                <a:solidFill>
+                  <a:srgbClr val="8A5E35"/>
+                </a:solidFill>
+                <a:latin typeface="Readex Pro"/>
+                <a:cs typeface="Readex Pro"/>
+                <a:ea typeface="Readex Pro"/>
+              </a:rPr>
+              <a:t>+18 points more easy text unchanged · every number kept</a:t>
+            </a:r>
+          </a:p>
+        </p:txBody>
+      </p:sp>
+      <p:sp>
+        <p:nvSpPr>
+          <p:cNvPr id="33" name="TextBox 32"/>
+          <p:cNvSpPr txBox="1"/>
+          <p:nvPr/>
+        </p:nvSpPr>
+        <p:spPr>
+          <a:xfrm>
+            <a:off x="594360" y="5989320"/>
+            <a:ext cx="8714232" cy="256032"/>
+          </a:xfrm>
+          <a:prstGeom prst="rect">
+            <a:avLst/>
+          </a:prstGeom>
+          <a:noFill/>
+        </p:spPr>
+        <p:txBody>
+          <a:bodyPr wrap="square" lIns="0" rIns="0" tIns="0" bIns="0" anchor="ctr">
+            <a:spAutoFit/>
+          </a:bodyPr>
+          <a:lstStyle/>
+          <a:p>
+            <a:pPr algn="ctr"/>
+            <a:r>
+              <a:rPr sz="1100" b="1">
+                <a:solidFill>
+                  <a:srgbClr val="282824"/>
+                </a:solidFill>
+                <a:latin typeface="Readex Pro"/>
+                <a:cs typeface="Readex Pro"/>
+                <a:ea typeface="Readex Pro"/>
+              </a:rPr>
+              <a:t>Blind rating, 18 sentences: v0.3 easier on 86% of changed outputs (v0.2 60%) · 8 of 8 votes</a:t>
+            </a:r>
+          </a:p>
+        </p:txBody>
+      </p:sp>
+    </p:spTree>
+  </p:cSld>
+  <p:clrMapOvr>
+    <a:masterClrMapping/>
+  </p:clrMapOvr>
+  <p:timing>
+    <p:tnLst>
+      <p:par>
+        <p:cTn id="1" dur="indefinite" restart="never" nodeType="tmRoot">
+          <p:childTnLst>
+            <p:seq concurrent="1" nextAc="seek">
+              <p:cTn id="2" dur="indefinite" nodeType="mainSeq">
+                <p:childTnLst>
+                  <p:par>
+                    <p:cTn id="3" fill="hold">
+                      <p:stCondLst>
+                        <p:cond delay="indefinite"/>
+                        <p:cond evt="onBegin" delay="0">
+                          <p:tn val="2"/>
+                        </p:cond>
+                      </p:stCondLst>
+                      <p:childTnLst>
+                        <p:par>
+                          <p:cTn id="4" fill="hold">
+                            <p:stCondLst>
+                              <p:cond delay="0"/>
+                            </p:stCondLst>
+                            <p:childTnLst>
+                              <p:par>
+                                <p:cTn id="7" presetID="10" presetClass="entr" presetSubtype="0" fill="hold" grpId="0" nodeType="afterEffect">
+                                  <p:stCondLst>
+                                    <p:cond delay="0"/>
+                                  </p:stCondLst>
+                                  <p:childTnLst>
+                                    <p:set>
+                                      <p:cBhvr>
+                                        <p:cTn id="5" dur="1" fill="hold">
+                                          <p:stCondLst>
+                                            <p:cond delay="0"/>
+                                          </p:stCondLst>
+                                        </p:cTn>
+                                        <p:tgtEl>
+                                          <p:spTgt spid="9"/>
+                                        </p:tgtEl>
+                                        <p:attrNameLst>
+                                          <p:attrName>style.visibility</p:attrName>
+                                        </p:attrNameLst>
+                                      </p:cBhvr>
+                                      <p:to>
+                                        <p:strVal val="visible"/>
+                                      </p:to>
+                                    </p:set>
+                                    <p:animEffect transition="in" filter="fade">
+                                      <p:cBhvr>
+                                        <p:cTn id="6" dur="500"/>
+                                        <p:tgtEl>
+                                          <p:spTgt spid="9"/>
+                                        </p:tgtEl>
+                                      </p:cBhvr>
+                                    </p:animEffect>
+                                  </p:childTnLst>
+                                </p:cTn>
+                              </p:par>
+                              <p:par>
+                                <p:cTn id="10" presetID="10" presetClass="entr" presetSubtype="0" fill="hold" grpId="0" nodeType="withEffect">
+                                  <p:stCondLst>
+                                    <p:cond delay="0"/>
+                                  </p:stCondLst>
+                                  <p:childTnLst>
+                                    <p:set>
+                                      <p:cBhvr>
+                                        <p:cTn id="8" dur="1" fill="hold">
+                                          <p:stCondLst>
+                                            <p:cond delay="0"/>
+                                          </p:stCondLst>
+                                        </p:cTn>
+                                        <p:tgtEl>
+                                          <p:spTgt spid="10"/>
+                                        </p:tgtEl>
+                                        <p:attrNameLst>
+                                          <p:attrName>style.visibility</p:attrName>
+                                        </p:attrNameLst>
+                                      </p:cBhvr>
+                                      <p:to>
+                                        <p:strVal val="visible"/>
+                                      </p:to>
+                                    </p:set>
+                                    <p:animEffect transition="in" filter="fade">
+                                      <p:cBhvr>
+                                        <p:cTn id="9" dur="500"/>
+                                        <p:tgtEl>
+                                          <p:spTgt spid="10"/>
+                                        </p:tgtEl>
+                                      </p:cBhvr>
+                                    </p:animEffect>
+                                  </p:childTnLst>
+                                </p:cTn>
+                              </p:par>
+                              <p:par>
+                                <p:cTn id="13" presetID="10" presetClass="entr" presetSubtype="0" fill="hold" grpId="0" nodeType="withEffect">
+                                  <p:stCondLst>
+                                    <p:cond delay="200"/>
+                                  </p:stCondLst>
+                                  <p:childTnLst>
+                                    <p:set>
+                                      <p:cBhvr>
+                                        <p:cTn id="11" dur="1" fill="hold">
+                                          <p:stCondLst>
+                                            <p:cond delay="0"/>
+                                          </p:stCondLst>
+                                        </p:cTn>
+                                        <p:tgtEl>
+                                          <p:spTgt spid="11"/>
+                                        </p:tgtEl>
+                                        <p:attrNameLst>
+                                          <p:attrName>style.visibility</p:attrName>
+                                        </p:attrNameLst>
+                                      </p:cBhvr>
+                                      <p:to>
+                                        <p:strVal val="visible"/>
+                                      </p:to>
+                                    </p:set>
+                                    <p:animEffect transition="in" filter="fade">
+                                      <p:cBhvr>
+                                        <p:cTn id="12" dur="500"/>
+                                        <p:tgtEl>
+                                          <p:spTgt spid="11"/>
+                                        </p:tgtEl>
+                                      </p:cBhvr>
+                                    </p:animEffect>
+                                  </p:childTnLst>
+                                </p:cTn>
+                              </p:par>
+                              <p:par>
+                                <p:cTn id="16" presetID="10" presetClass="entr" presetSubtype="0" fill="hold" grpId="0" nodeType="withEffect">
+                                  <p:stCondLst>
+                                    <p:cond delay="200"/>
+                                  </p:stCondLst>
+                                  <p:childTnLst>
+                                    <p:set>
+                                      <p:cBhvr>
+                                        <p:cTn id="14" dur="1" fill="hold">
+                                          <p:stCondLst>
+                                            <p:cond delay="0"/>
+                                          </p:stCondLst>
+                                        </p:cTn>
+                                        <p:tgtEl>
+                                          <p:spTgt spid="12"/>
+                                        </p:tgtEl>
+                                        <p:attrNameLst>
+                                          <p:attrName>style.visibility</p:attrName>
+                                        </p:attrNameLst>
+                                      </p:cBhvr>
+                                      <p:to>
+                                        <p:strVal val="visible"/>
+                                      </p:to>
+                                    </p:set>
+                                    <p:animEffect transition="in" filter="fade">
+                                      <p:cBhvr>
+                                        <p:cTn id="15" dur="500"/>
+                                        <p:tgtEl>
+                                          <p:spTgt spid="12"/>
+                                        </p:tgtEl>
+                                      </p:cBhvr>
+                                    </p:animEffect>
+                                  </p:childTnLst>
+                                </p:cTn>
+                              </p:par>
+                              <p:par>
+                                <p:cTn id="19" presetID="10" presetClass="entr" presetSubtype="0" fill="hold" grpId="0" nodeType="withEffect">
+                                  <p:stCondLst>
+                                    <p:cond delay="500"/>
+                                  </p:stCondLst>
+                                  <p:childTnLst>
+                                    <p:set>
+                                      <p:cBhvr>
+                                        <p:cTn id="17" dur="1" fill="hold">
+                                          <p:stCondLst>
+                                            <p:cond delay="0"/>
+                                          </p:stCondLst>
+                                        </p:cTn>
+                                        <p:tgtEl>
+                                          <p:spTgt spid="13"/>
+                                        </p:tgtEl>
+                                        <p:attrNameLst>
+                                          <p:attrName>style.visibility</p:attrName>
+                                        </p:attrNameLst>
+                                      </p:cBhvr>
+                                      <p:to>
+                                        <p:strVal val="visible"/>
+                                      </p:to>
+                                    </p:set>
+                                    <p:animEffect transition="in" filter="fade">
+                                      <p:cBhvr>
+                                        <p:cTn id="18" dur="500"/>
+                                        <p:tgtEl>
+                                          <p:spTgt spid="13"/>
+                                        </p:tgtEl>
+                                      </p:cBhvr>
+                                    </p:animEffect>
+                                  </p:childTnLst>
+                                </p:cTn>
+                              </p:par>
+                              <p:par>
+                                <p:cTn id="22" presetID="10" presetClass="entr" presetSubtype="0" fill="hold" grpId="0" nodeType="withEffect">
+                                  <p:stCondLst>
+                                    <p:cond delay="650"/>
+                                  </p:stCondLst>
+                                  <p:childTnLst>
+                                    <p:set>
+                                      <p:cBhvr>
+                                        <p:cTn id="20" dur="1" fill="hold">
+                                          <p:stCondLst>
+                                            <p:cond delay="0"/>
+                                          </p:stCondLst>
+                                        </p:cTn>
+                                        <p:tgtEl>
+                                          <p:spTgt spid="14"/>
+                                        </p:tgtEl>
+                                        <p:attrNameLst>
+                                          <p:attrName>style.visibility</p:attrName>
+                                        </p:attrNameLst>
+                                      </p:cBhvr>
+                                      <p:to>
+                                        <p:strVal val="visible"/>
+                                      </p:to>
+                                    </p:set>
+                                    <p:animEffect transition="in" filter="fade">
+                                      <p:cBhvr>
+                                        <p:cTn id="21" dur="500"/>
+                                        <p:tgtEl>
+                                          <p:spTgt spid="14"/>
+                                        </p:tgtEl>
+                                      </p:cBhvr>
+                                    </p:animEffect>
+                                  </p:childTnLst>
+                                </p:cTn>
+                              </p:par>
+                              <p:par>
+                                <p:cTn id="25" presetID="10" presetClass="entr" presetSubtype="0" fill="hold" grpId="0" nodeType="withEffect">
+                                  <p:stCondLst>
+                                    <p:cond delay="800"/>
+                                  </p:stCondLst>
+                                  <p:childTnLst>
+                                    <p:set>
+                                      <p:cBhvr>
+                                        <p:cTn id="23" dur="1" fill="hold">
+                                          <p:stCondLst>
+                                            <p:cond delay="0"/>
+                                          </p:stCondLst>
+                                        </p:cTn>
+                                        <p:tgtEl>
+                                          <p:spTgt spid="15"/>
+                                        </p:tgtEl>
+                                        <p:attrNameLst>
+                                          <p:attrName>style.visibility</p:attrName>
+                                        </p:attrNameLst>
+                                      </p:cBhvr>
+                                      <p:to>
+                                        <p:strVal val="visible"/>
+                                      </p:to>
+                                    </p:set>
+                                    <p:animEffect transition="in" filter="fade">
+                                      <p:cBhvr>
+                                        <p:cTn id="24" dur="500"/>
+                                        <p:tgtEl>
+                                          <p:spTgt spid="15"/>
+                                        </p:tgtEl>
+                                      </p:cBhvr>
+                                    </p:animEffect>
+                                  </p:childTnLst>
+                                </p:cTn>
+                              </p:par>
+                              <p:par>
+                                <p:cTn id="28" presetID="10" presetClass="entr" presetSubtype="0" fill="hold" grpId="0" nodeType="withEffect">
+                                  <p:stCondLst>
+                                    <p:cond delay="950"/>
+                                  </p:stCondLst>
+                                  <p:childTnLst>
+                                    <p:set>
+                                      <p:cBhvr>
+                                        <p:cTn id="26" dur="1" fill="hold">
+                                          <p:stCondLst>
+                                            <p:cond delay="0"/>
+                                          </p:stCondLst>
+                                        </p:cTn>
+                                        <p:tgtEl>
+                                          <p:spTgt spid="16"/>
+                                        </p:tgtEl>
+                                        <p:attrNameLst>
+                                          <p:attrName>style.visibility</p:attrName>
+                                        </p:attrNameLst>
+                                      </p:cBhvr>
+                                      <p:to>
+                                        <p:strVal val="visible"/>
+                                      </p:to>
+                                    </p:set>
+                                    <p:animEffect transition="in" filter="fade">
+                                      <p:cBhvr>
+                                        <p:cTn id="27" dur="500"/>
+                                        <p:tgtEl>
+                                          <p:spTgt spid="16"/>
+                                        </p:tgtEl>
+                                      </p:cBhvr>
+                                    </p:animEffect>
+                                  </p:childTnLst>
+                                </p:cTn>
+                              </p:par>
+                              <p:par>
+                                <p:cTn id="31" presetID="10" presetClass="entr" presetSubtype="0" fill="hold" grpId="0" nodeType="withEffect">
+                                  <p:stCondLst>
+                                    <p:cond delay="1100"/>
+                                  </p:stCondLst>
+                                  <p:childTnLst>
+                                    <p:set>
+                                      <p:cBhvr>
+                                        <p:cTn id="29" dur="1" fill="hold">
+                                          <p:stCondLst>
+                                            <p:cond delay="0"/>
+                                          </p:stCondLst>
+                                        </p:cTn>
+                                        <p:tgtEl>
+                                          <p:spTgt spid="17"/>
+                                        </p:tgtEl>
+                                        <p:attrNameLst>
+                                          <p:attrName>style.visibility</p:attrName>
+                                        </p:attrNameLst>
+                                      </p:cBhvr>
+                                      <p:to>
+                                        <p:strVal val="visible"/>
+                                      </p:to>
+                                    </p:set>
+                                    <p:animEffect transition="in" filter="fade">
+                                      <p:cBhvr>
+                                        <p:cTn id="30" dur="500"/>
+                                        <p:tgtEl>
+                                          <p:spTgt spid="17"/>
+                                        </p:tgtEl>
+                                      </p:cBhvr>
+                                    </p:animEffect>
+                                  </p:childTnLst>
+                                </p:cTn>
+                              </p:par>
+                              <p:par>
+                                <p:cTn id="34" presetID="10" presetClass="entr" presetSubtype="0" fill="hold" grpId="0" nodeType="withEffect">
+                                  <p:stCondLst>
+                                    <p:cond delay="1250"/>
+                                  </p:stCondLst>
+                                  <p:childTnLst>
+                                    <p:set>
+                                      <p:cBhvr>
+                                        <p:cTn id="32" dur="1" fill="hold">
+                                          <p:stCondLst>
+                                            <p:cond delay="0"/>
+                                          </p:stCondLst>
+                                        </p:cTn>
+                                        <p:tgtEl>
+                                          <p:spTgt spid="18"/>
+                                        </p:tgtEl>
+                                        <p:attrNameLst>
+                                          <p:attrName>style.visibility</p:attrName>
+                                        </p:attrNameLst>
+                                      </p:cBhvr>
+                                      <p:to>
+                                        <p:strVal val="visible"/>
+                                      </p:to>
+                                    </p:set>
+                                    <p:animEffect transition="in" filter="fade">
+                                      <p:cBhvr>
+                                        <p:cTn id="33" dur="500"/>
+                                        <p:tgtEl>
+                                          <p:spTgt spid="18"/>
+                                        </p:tgtEl>
+                                      </p:cBhvr>
+                                    </p:animEffect>
+                                  </p:childTnLst>
+                                </p:cTn>
+                              </p:par>
+                              <p:par>
+                                <p:cTn id="37" presetID="10" presetClass="entr" presetSubtype="0" fill="hold" grpId="0" nodeType="withEffect">
+                                  <p:stCondLst>
+                                    <p:cond delay="1400"/>
+                                  </p:stCondLst>
+                                  <p:childTnLst>
+                                    <p:set>
+                                      <p:cBhvr>
+                                        <p:cTn id="35" dur="1" fill="hold">
+                                          <p:stCondLst>
+                                            <p:cond delay="0"/>
+                                          </p:stCondLst>
+                                        </p:cTn>
+                                        <p:tgtEl>
+                                          <p:spTgt spid="19"/>
+                                        </p:tgtEl>
+                                        <p:attrNameLst>
+                                          <p:attrName>style.visibility</p:attrName>
+                                        </p:attrNameLst>
+                                      </p:cBhvr>
+                                      <p:to>
+                                        <p:strVal val="visible"/>
+                                      </p:to>
+                                    </p:set>
+                                    <p:animEffect transition="in" filter="fade">
+                                      <p:cBhvr>
+                                        <p:cTn id="36" dur="500"/>
+                                        <p:tgtEl>
+                                          <p:spTgt spid="19"/>
+                                        </p:tgtEl>
+                                      </p:cBhvr>
+                                    </p:animEffect>
+                                  </p:childTnLst>
+                                </p:cTn>
+                              </p:par>
+                              <p:par>
+                                <p:cTn id="40" presetID="10" presetClass="entr" presetSubtype="0" fill="hold" grpId="0" nodeType="withEffect">
+                                  <p:stCondLst>
+                                    <p:cond delay="1550"/>
+                                  </p:stCondLst>
+                                  <p:childTnLst>
+                                    <p:set>
+                                      <p:cBhvr>
+                                        <p:cTn id="38" dur="1" fill="hold">
+                                          <p:stCondLst>
+                                            <p:cond delay="0"/>
+                                          </p:stCondLst>
+                                        </p:cTn>
+                                        <p:tgtEl>
+                                          <p:spTgt spid="20"/>
+                                        </p:tgtEl>
+                                        <p:attrNameLst>
+                                          <p:attrName>style.visibility</p:attrName>
+                                        </p:attrNameLst>
+                                      </p:cBhvr>
+                                      <p:to>
+                                        <p:strVal val="visible"/>
+                                      </p:to>
+                                    </p:set>
+                                    <p:animEffect transition="in" filter="fade">
+                                      <p:cBhvr>
+                                        <p:cTn id="39" dur="500"/>
+                                        <p:tgtEl>
+                                          <p:spTgt spid="20"/>
+                                        </p:tgtEl>
+                                      </p:cBhvr>
+                                    </p:animEffect>
+                                  </p:childTnLst>
+                                </p:cTn>
+                              </p:par>
+                              <p:par>
+                                <p:cTn id="43" presetID="10" presetClass="entr" presetSubtype="0" fill="hold" grpId="0" nodeType="withEffect">
+                                  <p:stCondLst>
+                                    <p:cond delay="1700"/>
+                                  </p:stCondLst>
+                                  <p:childTnLst>
+                                    <p:set>
+                                      <p:cBhvr>
+                                        <p:cTn id="41" dur="1" fill="hold">
+                                          <p:stCondLst>
+                                            <p:cond delay="0"/>
+                                          </p:stCondLst>
+                                        </p:cTn>
+                                        <p:tgtEl>
+                                          <p:spTgt spid="21"/>
+                                        </p:tgtEl>
+                                        <p:attrNameLst>
+                                          <p:attrName>style.visibility</p:attrName>
+                                        </p:attrNameLst>
+                                      </p:cBhvr>
+                                      <p:to>
+                                        <p:strVal val="visible"/>
+                                      </p:to>
+                                    </p:set>
+                                    <p:animEffect transition="in" filter="fade">
+                                      <p:cBhvr>
+                                        <p:cTn id="42" dur="500"/>
+                                        <p:tgtEl>
+                                          <p:spTgt spid="21"/>
+                                        </p:tgtEl>
+                                      </p:cBhvr>
+                                    </p:animEffect>
+                                  </p:childTnLst>
+                                </p:cTn>
+                              </p:par>
+                              <p:par>
+                                <p:cTn id="46" presetID="10" presetClass="entr" presetSubtype="0" fill="hold" grpId="0" nodeType="withEffect">
+                                  <p:stCondLst>
+                                    <p:cond delay="1850"/>
+                                  </p:stCondLst>
+                                  <p:childTnLst>
+                                    <p:set>
+                                      <p:cBhvr>
+                                        <p:cTn id="44" dur="1" fill="hold">
+                                          <p:stCondLst>
+                                            <p:cond delay="0"/>
+                                          </p:stCondLst>
+                                        </p:cTn>
+                                        <p:tgtEl>
+                                          <p:spTgt spid="22"/>
+                                        </p:tgtEl>
+                                        <p:attrNameLst>
+                                          <p:attrName>style.visibility</p:attrName>
+                                        </p:attrNameLst>
+                                      </p:cBhvr>
+                                      <p:to>
+                                        <p:strVal val="visible"/>
+                                      </p:to>
+                                    </p:set>
+                                    <p:animEffect transition="in" filter="fade">
+                                      <p:cBhvr>
+                                        <p:cTn id="45" dur="500"/>
+                                        <p:tgtEl>
+                                          <p:spTgt spid="22"/>
+                                        </p:tgtEl>
+                                      </p:cBhvr>
+                                    </p:animEffect>
+                                  </p:childTnLst>
+                                </p:cTn>
+                              </p:par>
+                              <p:par>
+                                <p:cTn id="49" presetID="10" presetClass="entr" presetSubtype="0" fill="hold" grpId="0" nodeType="withEffect">
+                                  <p:stCondLst>
+                                    <p:cond delay="2000"/>
+                                  </p:stCondLst>
+                                  <p:childTnLst>
+                                    <p:set>
+                                      <p:cBhvr>
+                                        <p:cTn id="47" dur="1" fill="hold">
+                                          <p:stCondLst>
+                                            <p:cond delay="0"/>
+                                          </p:stCondLst>
+                                        </p:cTn>
+                                        <p:tgtEl>
+                                          <p:spTgt spid="23"/>
+                                        </p:tgtEl>
+                                        <p:attrNameLst>
+                                          <p:attrName>style.visibility</p:attrName>
+                                        </p:attrNameLst>
+                                      </p:cBhvr>
+                                      <p:to>
+                                        <p:strVal val="visible"/>
+                                      </p:to>
+                                    </p:set>
+                                    <p:animEffect transition="in" filter="fade">
+                                      <p:cBhvr>
+                                        <p:cTn id="48" dur="500"/>
+                                        <p:tgtEl>
+                                          <p:spTgt spid="23"/>
+                                        </p:tgtEl>
+                                      </p:cBhvr>
+                                    </p:animEffect>
+                                  </p:childTnLst>
+                                </p:cTn>
+                              </p:par>
+                              <p:par>
+                                <p:cTn id="52" presetID="10" presetClass="entr" presetSubtype="0" fill="hold" grpId="0" nodeType="withEffect">
+                                  <p:stCondLst>
+                                    <p:cond delay="1400"/>
+                                  </p:stCondLst>
+                                  <p:childTnLst>
+                                    <p:set>
+                                      <p:cBhvr>
+                                        <p:cTn id="50" dur="1" fill="hold">
+                                          <p:stCondLst>
+                                            <p:cond delay="0"/>
+                                          </p:stCondLst>
+                                        </p:cTn>
+                                        <p:tgtEl>
+                                          <p:spTgt spid="24"/>
+                                        </p:tgtEl>
+                                        <p:attrNameLst>
+                                          <p:attrName>style.visibility</p:attrName>
+                                        </p:attrNameLst>
+                                      </p:cBhvr>
+                                      <p:to>
+                                        <p:strVal val="visible"/>
+                                      </p:to>
+                                    </p:set>
+                                    <p:animEffect transition="in" filter="fade">
+                                      <p:cBhvr>
+                                        <p:cTn id="51" dur="500"/>
+                                        <p:tgtEl>
+                                          <p:spTgt spid="24"/>
+                                        </p:tgtEl>
+                                      </p:cBhvr>
+                                    </p:animEffect>
+                                  </p:childTnLst>
+                                </p:cTn>
+                              </p:par>
+                            </p:childTnLst>
+                          </p:cTn>
+                        </p:par>
+                      </p:childTnLst>
+                    </p:cTn>
+                  </p:par>
+                  <p:par>
+                    <p:cTn id="53" fill="hold">
+                      <p:stCondLst>
+                        <p:cond delay="indefinite"/>
+                      </p:stCondLst>
+                      <p:childTnLst>
+                        <p:par>
+                          <p:cTn id="54" fill="hold">
+                            <p:stCondLst>
+                              <p:cond delay="0"/>
+                            </p:stCondLst>
+                            <p:childTnLst>
+                              <p:par>
+                                <p:cTn id="57" presetID="10" presetClass="entr" presetSubtype="0" fill="hold" grpId="0" nodeType="clickEffect">
+                                  <p:stCondLst>
+                                    <p:cond delay="0"/>
+                                  </p:stCondLst>
+                                  <p:childTnLst>
+                                    <p:set>
+                                      <p:cBhvr>
+                                        <p:cTn id="55" dur="1" fill="hold">
+                                          <p:stCondLst>
+                                            <p:cond delay="0"/>
+                                          </p:stCondLst>
+                                        </p:cTn>
+                                        <p:tgtEl>
+                                          <p:spTgt spid="25"/>
+                                        </p:tgtEl>
+                                        <p:attrNameLst>
+                                          <p:attrName>style.visibility</p:attrName>
+                                        </p:attrNameLst>
+                                      </p:cBhvr>
+                                      <p:to>
+                                        <p:strVal val="visible"/>
+                                      </p:to>
+                                    </p:set>
+                                    <p:animEffect transition="in" filter="fade">
+                                      <p:cBhvr>
+                                        <p:cTn id="56" dur="500"/>
+                                        <p:tgtEl>
+                                          <p:spTgt spid="25"/>
+                                        </p:tgtEl>
+                                      </p:cBhvr>
+                                    </p:animEffect>
+                                  </p:childTnLst>
+                                </p:cTn>
+                              </p:par>
+                              <p:par>
+                                <p:cTn id="60" presetID="10" presetClass="entr" presetSubtype="0" fill="hold" grpId="0" nodeType="withEffect">
+                                  <p:stCondLst>
+                                    <p:cond delay="200"/>
+                                  </p:stCondLst>
+                                  <p:childTnLst>
+                                    <p:set>
+                                      <p:cBhvr>
+                                        <p:cTn id="58" dur="1" fill="hold">
+                                          <p:stCondLst>
+                                            <p:cond delay="0"/>
+                                          </p:stCondLst>
+                                        </p:cTn>
+                                        <p:tgtEl>
+                                          <p:spTgt spid="26"/>
+                                        </p:tgtEl>
+                                        <p:attrNameLst>
+                                          <p:attrName>style.visibility</p:attrName>
+                                        </p:attrNameLst>
+                                      </p:cBhvr>
+                                      <p:to>
+                                        <p:strVal val="visible"/>
+                                      </p:to>
+                                    </p:set>
+                                    <p:animEffect transition="in" filter="fade">
+                                      <p:cBhvr>
+                                        <p:cTn id="59" dur="500"/>
+                                        <p:tgtEl>
+                                          <p:spTgt spid="26"/>
+                                        </p:tgtEl>
+                                      </p:cBhvr>
+                                    </p:animEffect>
+                                  </p:childTnLst>
+                                </p:cTn>
+                              </p:par>
+                              <p:par>
+                                <p:cTn id="63" presetID="10" presetClass="entr" presetSubtype="0" fill="hold" grpId="0" nodeType="withEffect">
+                                  <p:stCondLst>
+                                    <p:cond delay="400"/>
+                                  </p:stCondLst>
+                                  <p:childTnLst>
+                                    <p:set>
+                                      <p:cBhvr>
+                                        <p:cTn id="61" dur="1" fill="hold">
+                                          <p:stCondLst>
+                                            <p:cond delay="0"/>
+                                          </p:stCondLst>
+                                        </p:cTn>
+                                        <p:tgtEl>
+                                          <p:spTgt spid="27"/>
+                                        </p:tgtEl>
+                                        <p:attrNameLst>
+                                          <p:attrName>style.visibility</p:attrName>
+                                        </p:attrNameLst>
+                                      </p:cBhvr>
+                                      <p:to>
+                                        <p:strVal val="visible"/>
+                                      </p:to>
+                                    </p:set>
+                                    <p:animEffect transition="in" filter="fade">
+                                      <p:cBhvr>
+                                        <p:cTn id="62" dur="500"/>
+                                        <p:tgtEl>
+                                          <p:spTgt spid="27"/>
+                                        </p:tgtEl>
+                                      </p:cBhvr>
+                                    </p:animEffect>
+                                  </p:childTnLst>
+                                </p:cTn>
+                              </p:par>
+                            </p:childTnLst>
+                          </p:cTn>
+                        </p:par>
+                      </p:childTnLst>
+                    </p:cTn>
+                  </p:par>
+                  <p:par>
+                    <p:cTn id="64" fill="hold">
+                      <p:stCondLst>
+                        <p:cond delay="indefinite"/>
+                      </p:stCondLst>
+                      <p:childTnLst>
+                        <p:par>
+                          <p:cTn id="65" fill="hold">
+                            <p:stCondLst>
+                              <p:cond delay="0"/>
+                            </p:stCondLst>
+                            <p:childTnLst>
+                              <p:par>
+                                <p:cTn id="68" presetID="10" presetClass="entr" presetSubtype="0" fill="hold" grpId="0" nodeType="clickEffect">
+                                  <p:stCondLst>
+                                    <p:cond delay="0"/>
+                                  </p:stCondLst>
+                                  <p:childTnLst>
+                                    <p:set>
+                                      <p:cBhvr>
+                                        <p:cTn id="66" dur="1" fill="hold">
+                                          <p:stCondLst>
+                                            <p:cond delay="0"/>
+                                          </p:stCondLst>
+                                        </p:cTn>
+                                        <p:tgtEl>
+                                          <p:spTgt spid="28"/>
+                                        </p:tgtEl>
+                                        <p:attrNameLst>
+                                          <p:attrName>style.visibility</p:attrName>
+                                        </p:attrNameLst>
+                                      </p:cBhvr>
+                                      <p:to>
+                                        <p:strVal val="visible"/>
+                                      </p:to>
+                                    </p:set>
+                                    <p:animEffect transition="in" filter="fade">
+                                      <p:cBhvr>
+                                        <p:cTn id="67" dur="500"/>
+                                        <p:tgtEl>
+                                          <p:spTgt spid="28"/>
+                                        </p:tgtEl>
+                                      </p:cBhvr>
+                                    </p:animEffect>
+                                  </p:childTnLst>
+                                </p:cTn>
+                              </p:par>
+                              <p:par>
+                                <p:cTn id="71" presetID="10" presetClass="entr" presetSubtype="0" fill="hold" grpId="0" nodeType="withEffect">
+                                  <p:stCondLst>
+                                    <p:cond delay="250"/>
+                                  </p:stCondLst>
+                                  <p:childTnLst>
+                                    <p:set>
+                                      <p:cBhvr>
+                                        <p:cTn id="69" dur="1" fill="hold">
+                                          <p:stCondLst>
+                                            <p:cond delay="0"/>
+                                          </p:stCondLst>
+                                        </p:cTn>
+                                        <p:tgtEl>
+                                          <p:spTgt spid="29"/>
+                                        </p:tgtEl>
+                                        <p:attrNameLst>
+                                          <p:attrName>style.visibility</p:attrName>
+                                        </p:attrNameLst>
+                                      </p:cBhvr>
+                                      <p:to>
+                                        <p:strVal val="visible"/>
+                                      </p:to>
+                                    </p:set>
+                                    <p:animEffect transition="in" filter="fade">
+                                      <p:cBhvr>
+                                        <p:cTn id="70" dur="500"/>
+                                        <p:tgtEl>
+                                          <p:spTgt spid="29"/>
+                                        </p:tgtEl>
+                                      </p:cBhvr>
+                                    </p:animEffect>
+                                  </p:childTnLst>
+                                </p:cTn>
+                              </p:par>
+                              <p:par>
+                                <p:cTn id="74" presetID="10" presetClass="entr" presetSubtype="0" fill="hold" grpId="0" nodeType="withEffect">
+                                  <p:stCondLst>
+                                    <p:cond delay="430"/>
+                                  </p:stCondLst>
+                                  <p:childTnLst>
+                                    <p:set>
+                                      <p:cBhvr>
+                                        <p:cTn id="72" dur="1" fill="hold">
+                                          <p:stCondLst>
+                                            <p:cond delay="0"/>
+                                          </p:stCondLst>
+                                        </p:cTn>
+                                        <p:tgtEl>
+                                          <p:spTgt spid="30"/>
+                                        </p:tgtEl>
+                                        <p:attrNameLst>
+                                          <p:attrName>style.visibility</p:attrName>
+                                        </p:attrNameLst>
+                                      </p:cBhvr>
+                                      <p:to>
+                                        <p:strVal val="visible"/>
+                                      </p:to>
+                                    </p:set>
+                                    <p:animEffect transition="in" filter="fade">
+                                      <p:cBhvr>
+                                        <p:cTn id="73" dur="500"/>
+                                        <p:tgtEl>
+                                          <p:spTgt spid="30"/>
+                                        </p:tgtEl>
+                                      </p:cBhvr>
+                                    </p:animEffect>
+                                  </p:childTnLst>
+                                </p:cTn>
+                              </p:par>
+                              <p:par>
+                                <p:cTn id="77" presetID="10" presetClass="entr" presetSubtype="0" fill="hold" grpId="0" nodeType="withEffect">
+                                  <p:stCondLst>
+                                    <p:cond delay="610"/>
+                                  </p:stCondLst>
+                                  <p:childTnLst>
+                                    <p:set>
+                                      <p:cBhvr>
+                                        <p:cTn id="75" dur="1" fill="hold">
+                                          <p:stCondLst>
+                                            <p:cond delay="0"/>
+                                          </p:stCondLst>
+                                        </p:cTn>
+                                        <p:tgtEl>
+                                          <p:spTgt spid="31"/>
+                                        </p:tgtEl>
+                                        <p:attrNameLst>
+                                          <p:attrName>style.visibility</p:attrName>
+                                        </p:attrNameLst>
+                                      </p:cBhvr>
+                                      <p:to>
+                                        <p:strVal val="visible"/>
+                                      </p:to>
+                                    </p:set>
+                                    <p:animEffect transition="in" filter="fade">
+                                      <p:cBhvr>
+                                        <p:cTn id="76" dur="500"/>
+                                        <p:tgtEl>
+                                          <p:spTgt spid="31"/>
+                                        </p:tgtEl>
+                                      </p:cBhvr>
+                                    </p:animEffect>
+                                  </p:childTnLst>
+                                </p:cTn>
+                              </p:par>
+                              <p:par>
+                                <p:cTn id="80" presetID="10" presetClass="entr" presetSubtype="0" fill="hold" grpId="0" nodeType="withEffect">
+                                  <p:stCondLst>
+                                    <p:cond delay="790"/>
+                                  </p:stCondLst>
+                                  <p:childTnLst>
+                                    <p:set>
+                                      <p:cBhvr>
+                                        <p:cTn id="78" dur="1" fill="hold">
+                                          <p:stCondLst>
+                                            <p:cond delay="0"/>
+                                          </p:stCondLst>
+                                        </p:cTn>
+                                        <p:tgtEl>
+                                          <p:spTgt spid="32"/>
+                                        </p:tgtEl>
+                                        <p:attrNameLst>
+                                          <p:attrName>style.visibility</p:attrName>
+                                        </p:attrNameLst>
+                                      </p:cBhvr>
+                                      <p:to>
+                                        <p:strVal val="visible"/>
+                                      </p:to>
+                                    </p:set>
+                                    <p:animEffect transition="in" filter="fade">
+                                      <p:cBhvr>
+                                        <p:cTn id="79" dur="500"/>
+                                        <p:tgtEl>
+                                          <p:spTgt spid="32"/>
+                                        </p:tgtEl>
+                                      </p:cBhvr>
+                                    </p:animEffect>
+                                  </p:childTnLst>
+                                </p:cTn>
+                              </p:par>
+                            </p:childTnLst>
+                          </p:cTn>
+                        </p:par>
+                      </p:childTnLst>
+                    </p:cTn>
+                  </p:par>
+                  <p:par>
+                    <p:cTn id="81" fill="hold">
+                      <p:stCondLst>
+                        <p:cond delay="indefinite"/>
+                      </p:stCondLst>
+                      <p:childTnLst>
+                        <p:par>
+                          <p:cTn id="82" fill="hold">
+                            <p:stCondLst>
+                              <p:cond delay="0"/>
+                            </p:stCondLst>
+                            <p:childTnLst>
+                              <p:par>
+                                <p:cTn id="85" presetID="10" presetClass="entr" presetSubtype="0" fill="hold" grpId="0" nodeType="clickEffect">
+                                  <p:stCondLst>
+                                    <p:cond delay="0"/>
+                                  </p:stCondLst>
+                                  <p:childTnLst>
+                                    <p:set>
+                                      <p:cBhvr>
+                                        <p:cTn id="83" dur="1" fill="hold">
+                                          <p:stCondLst>
+                                            <p:cond delay="0"/>
+                                          </p:stCondLst>
+                                        </p:cTn>
+                                        <p:tgtEl>
+                                          <p:spTgt spid="33"/>
+                                        </p:tgtEl>
+                                        <p:attrNameLst>
+                                          <p:attrName>style.visibility</p:attrName>
+                                        </p:attrNameLst>
+                                      </p:cBhvr>
+                                      <p:to>
+                                        <p:strVal val="visible"/>
+                                      </p:to>
+                                    </p:set>
+                                    <p:animEffect transition="in" filter="fade">
+                                      <p:cBhvr>
+                                        <p:cTn id="84" dur="500"/>
+                                        <p:tgtEl>
+                                          <p:spTgt spid="33"/>
+                                        </p:tgtEl>
+                                      </p:cBhvr>
+                                    </p:animEffect>
+                                  </p:childTnLst>
+                                </p:cTn>
+                              </p:par>
+                            </p:childTnLst>
+                          </p:cTn>
+                        </p:par>
+                      </p:childTnLst>
+                    </p:cTn>
+                  </p:par>
+                </p:childTnLst>
+              </p:cTn>
+              <p:prevCondLst>
+                <p:cond evt="onPrev" delay="0">
+                  <p:tgtEl>
+                    <p:sldTgt/>
+                  </p:tgtEl>
+                </p:cond>
+              </p:prevCondLst>
+              <p:nextCondLst>
+                <p:cond evt="onNext" delay="0">
+                  <p:tgtEl>
+                    <p:sldTgt/>
+                  </p:tgtEl>
+                </p:cond>
+              </p:nextCondLst>
+            </p:seq>
+          </p:childTnLst>
+        </p:cTn>
+      </p:par>
+    </p:tnLst>
+    <p:bldLst>
+      <p:bldP spid="11" grpId="0" animBg="1"/>
+      <p:bldP spid="12" grpId="0" animBg="1"/>
+      <p:bldP spid="13" grpId="0" animBg="1"/>
+      <p:bldP spid="14" grpId="0" animBg="1"/>
+      <p:bldP spid="15" grpId="0" animBg="1"/>
+      <p:bldP spid="16" grpId="0" animBg="1"/>
+      <p:bldP spid="17" grpId="0" animBg="1"/>
+      <p:bldP spid="18" grpId="0" animBg="1"/>
+      <p:bldP spid="19" grpId="0" animBg="1"/>
+      <p:bldP spid="20" grpId="0" animBg="1"/>
+      <p:bldP spid="21" grpId="0" animBg="1"/>
+      <p:bldP spid="22" grpId="0" animBg="1"/>
+      <p:bldP spid="23" grpId="0" animBg="1"/>
+      <p:bldP spid="24" grpId="0" animBg="1"/>
+      <p:bldP spid="25" grpId="0" animBg="1"/>
+      <p:bldP spid="26" grpId="0" animBg="1"/>
+      <p:bldP spid="27" grpId="0" animBg="1"/>
+      <p:bldP spid="28" grpId="0" animBg="1"/>
+      <p:bldP spid="29" grpId="0" animBg="1"/>
+      <p:bldP spid="30" grpId="0" animBg="1"/>
+      <p:bldP spid="31" grpId="0" animBg="1"/>
+      <p:bldP spid="32" grpId="0" animBg="1"/>
+      <p:bldP spid="33" grpId="0" animBg="1"/>
+    </p:bldLst>
+  </p:timing>
+</p:sld>
+</file>
+
+<file path=ppt/slides/slide7.xml><?xml version="1.0" encoding="utf-8"?>
+<p:sld xmlns:a="http://schemas.openxmlformats.org/drawingml/2006/main" xmlns:p="http://schemas.openxmlformats.org/presentationml/2006/main" xmlns:r="http://schemas.openxmlformats.org/officeDocument/2006/relationships">
+  <p:cSld>
+    <p:spTree>
+      <p:nvGrpSpPr>
+        <p:cNvPr id="1" name=""/>
+        <p:cNvGrpSpPr/>
+        <p:nvPr/>
+      </p:nvGrpSpPr>
+      <p:grpSpPr/>
+      <p:sp>
+        <p:nvSpPr>
+          <p:cNvPr id="2" name="Background"/>
+          <p:cNvSpPr/>
+          <p:nvPr/>
+        </p:nvSpPr>
+        <p:spPr>
+          <a:xfrm>
+            <a:off x="0" y="0"/>
+            <a:ext cx="9902952" cy="6858000"/>
+          </a:xfrm>
+          <a:prstGeom prst="rect">
+            <a:avLst/>
+          </a:prstGeom>
+          <a:solidFill>
+            <a:srgbClr val="F6F2E6"/>
+          </a:solidFill>
+          <a:ln>
+            <a:noFill/>
+          </a:ln>
+          <a:effectLst/>
+        </p:spPr>
+        <p:style>
+          <a:lnRef idx="1">
+            <a:schemeClr val="accent1"/>
+          </a:lnRef>
+          <a:fillRef idx="3">
+            <a:schemeClr val="accent1"/>
+          </a:fillRef>
+          <a:effectRef idx="2">
+            <a:schemeClr val="accent1"/>
+          </a:effectRef>
+          <a:fontRef idx="minor">
+            <a:schemeClr val="lt1"/>
+          </a:fontRef>
+        </p:style>
+        <p:txBody>
+          <a:bodyPr rtlCol="0" anchor="ctr"/>
+          <a:lstStyle/>
+          <a:p>
+            <a:pPr algn="ctr"/>
+          </a:p>
+        </p:txBody>
+      </p:sp>
+      <p:sp>
+        <p:nvSpPr>
+          <p:cNvPr id="3" name="Rectangle 2"/>
+          <p:cNvSpPr/>
+          <p:nvPr/>
+        </p:nvSpPr>
+        <p:spPr>
+          <a:xfrm>
+            <a:off x="594360" y="502920"/>
+            <a:ext cx="54864" cy="219456"/>
+          </a:xfrm>
+          <a:prstGeom prst="rect">
+            <a:avLst/>
+          </a:prstGeom>
+          <a:solidFill>
+            <a:srgbClr val="C6986B"/>
+          </a:solidFill>
+          <a:ln>
+            <a:noFill/>
+          </a:ln>
+          <a:effectLst/>
+        </p:spPr>
+        <p:style>
+          <a:lnRef idx="1">
+            <a:schemeClr val="accent1"/>
+          </a:lnRef>
+          <a:fillRef idx="3">
+            <a:schemeClr val="accent1"/>
+          </a:fillRef>
+          <a:effectRef idx="2">
+            <a:schemeClr val="accent1"/>
+          </a:effectRef>
+          <a:fontRef idx="minor">
+            <a:schemeClr val="lt1"/>
+          </a:fontRef>
+        </p:style>
+        <p:txBody>
+          <a:bodyPr rtlCol="0" anchor="ctr"/>
+          <a:lstStyle/>
+          <a:p>
+            <a:pPr algn="ctr"/>
+          </a:p>
+        </p:txBody>
+      </p:sp>
+      <p:sp>
+        <p:nvSpPr>
+          <p:cNvPr id="4" name="TextBox 3"/>
+          <p:cNvSpPr txBox="1"/>
+          <p:nvPr/>
+        </p:nvSpPr>
+        <p:spPr>
+          <a:xfrm>
+            <a:off x="740664" y="457200"/>
+            <a:ext cx="4572000" cy="310896"/>
+          </a:xfrm>
+          <a:prstGeom prst="rect">
+            <a:avLst/>
+          </a:prstGeom>
+          <a:noFill/>
+        </p:spPr>
+        <p:txBody>
+          <a:bodyPr wrap="square" lIns="0" rIns="0" tIns="0" bIns="0" anchor="ctr">
+            <a:spAutoFit/>
+          </a:bodyPr>
+          <a:lstStyle/>
+          <a:p>
+            <a:pPr algn="l"/>
+            <a:r>
+              <a:rPr sz="1100" b="1">
+                <a:solidFill>
+                  <a:srgbClr val="C6986B"/>
+                </a:solidFill>
+                <a:latin typeface="Readex Pro"/>
+                <a:cs typeface="Readex Pro"/>
+                <a:ea typeface="Readex Pro"/>
+              </a:rPr>
+              <a:t>06 · ON A PHONE</a:t>
             </a:r>
           </a:p>
         </p:txBody>
@@ -20379,7 +24487,7 @@
                 <a:cs typeface="Readex Pro"/>
                 <a:ea typeface="Readex Pro"/>
               </a:rPr>
-              <a:t>6 / 7</a:t>
+              <a:t>7 / 8</a:t>
             </a:r>
           </a:p>
         </p:txBody>
@@ -21449,7 +25557,7 @@
 </p:sld>
 </file>
 
-<file path=ppt/slides/slide7.xml><?xml version="1.0" encoding="utf-8"?>
+<file path=ppt/slides/slide8.xml><?xml version="1.0" encoding="utf-8"?>
 <p:sld xmlns:a="http://schemas.openxmlformats.org/drawingml/2006/main" xmlns:p="http://schemas.openxmlformats.org/presentationml/2006/main" xmlns:r="http://schemas.openxmlformats.org/officeDocument/2006/relationships">
   <p:cSld>
     <p:spTree>
@@ -21596,7 +25704,7 @@
                 <a:cs typeface="Readex Pro"/>
                 <a:ea typeface="Readex Pro"/>
               </a:rPr>
-              <a:t>7 / 7</a:t>
+              <a:t>8 / 8</a:t>
             </a:r>
           </a:p>
         </p:txBody>

--- a/deliverables/04_presentation/Bayan_Submission.pptx
+++ b/deliverables/04_presentation/Bayan_Submission.pptx
@@ -12576,11 +12576,11 @@
         <p:spPr>
           <a:xfrm>
             <a:off x="2075688" y="5513832"/>
-            <a:ext cx="1375155" cy="325120"/>
+            <a:ext cx="1375155" cy="330708"/>
           </a:xfrm>
           <a:prstGeom prst="roundRect">
             <a:avLst>
-              <a:gd name="adj" fmla="val 25312"/>
+              <a:gd name="adj" fmla="val 24884"/>
             </a:avLst>
           </a:prstGeom>
           <a:solidFill>
@@ -12635,11 +12635,11 @@
         <p:spPr>
           <a:xfrm>
             <a:off x="3661155" y="5513832"/>
-            <a:ext cx="2026158" cy="325120"/>
+            <a:ext cx="2026158" cy="330708"/>
           </a:xfrm>
           <a:prstGeom prst="roundRect">
             <a:avLst>
-              <a:gd name="adj" fmla="val 25312"/>
+              <a:gd name="adj" fmla="val 24884"/>
             </a:avLst>
           </a:prstGeom>
           <a:solidFill>
@@ -12694,11 +12694,11 @@
         <p:spPr>
           <a:xfrm>
             <a:off x="5897626" y="5513832"/>
-            <a:ext cx="1552574" cy="325120"/>
+            <a:ext cx="1552574" cy="330708"/>
           </a:xfrm>
           <a:prstGeom prst="roundRect">
             <a:avLst>
-              <a:gd name="adj" fmla="val 25312"/>
+              <a:gd name="adj" fmla="val 24884"/>
             </a:avLst>
           </a:prstGeom>
           <a:solidFill>
@@ -14469,12 +14469,12 @@
         </p:nvSpPr>
         <p:spPr>
           <a:xfrm>
-            <a:off x="1112520" y="1600200"/>
-            <a:ext cx="1981199" cy="357631"/>
+            <a:off x="909828" y="1675637"/>
+            <a:ext cx="2212848" cy="397764"/>
           </a:xfrm>
           <a:prstGeom prst="roundRect">
             <a:avLst>
-              <a:gd name="adj" fmla="val 23011"/>
+              <a:gd name="adj" fmla="val 20689"/>
             </a:avLst>
           </a:prstGeom>
           <a:solidFill>
@@ -14507,7 +14507,7 @@
           <a:p>
             <a:pPr algn="ctr"/>
             <a:r>
-              <a:rPr sz="1300" b="0">
+              <a:rPr sz="1500" b="0">
                 <a:solidFill>
                   <a:srgbClr val="4A4842"/>
                 </a:solidFill>
@@ -14528,12 +14528,12 @@
         </p:nvSpPr>
         <p:spPr>
           <a:xfrm>
-            <a:off x="3520440" y="1508760"/>
-            <a:ext cx="2514600" cy="960120"/>
+            <a:off x="3625596" y="1440179"/>
+            <a:ext cx="2651760" cy="868680"/>
           </a:xfrm>
           <a:prstGeom prst="roundRect">
             <a:avLst>
-              <a:gd name="adj" fmla="val 9523"/>
+              <a:gd name="adj" fmla="val 12631"/>
             </a:avLst>
           </a:prstGeom>
           <a:solidFill>
@@ -14576,8 +14576,8 @@
         </p:nvSpPr>
         <p:spPr>
           <a:xfrm>
-            <a:off x="3520440" y="1627632"/>
-            <a:ext cx="2514600" cy="320040"/>
+            <a:off x="3625596" y="1568195"/>
+            <a:ext cx="2651760" cy="310896"/>
           </a:xfrm>
           <a:prstGeom prst="rect">
             <a:avLst/>
@@ -14592,7 +14592,7 @@
           <a:p>
             <a:pPr algn="ctr"/>
             <a:r>
-              <a:rPr sz="1600" b="1">
+              <a:rPr sz="1800" b="1">
                 <a:solidFill>
                   <a:srgbClr val="8A5E35"/>
                 </a:solidFill>
@@ -14613,8 +14613,8 @@
         </p:nvSpPr>
         <p:spPr>
           <a:xfrm>
-            <a:off x="3520440" y="1993392"/>
-            <a:ext cx="2514600" cy="256032"/>
+            <a:off x="3625596" y="1915667"/>
+            <a:ext cx="2651760" cy="256032"/>
           </a:xfrm>
           <a:prstGeom prst="rect">
             <a:avLst/>
@@ -14650,12 +14650,12 @@
         </p:nvSpPr>
         <p:spPr>
           <a:xfrm>
-            <a:off x="6797802" y="1600200"/>
-            <a:ext cx="2040636" cy="357631"/>
+            <a:off x="6780275" y="1675637"/>
+            <a:ext cx="3277743" cy="397764"/>
           </a:xfrm>
           <a:prstGeom prst="roundRect">
             <a:avLst>
-              <a:gd name="adj" fmla="val 23011"/>
+              <a:gd name="adj" fmla="val 20689"/>
             </a:avLst>
           </a:prstGeom>
           <a:solidFill>
@@ -14688,7 +14688,7 @@
           <a:p>
             <a:pPr algn="ctr"/>
             <a:r>
-              <a:rPr sz="1300" b="0">
+              <a:rPr sz="1500" b="0">
                 <a:solidFill>
                   <a:srgbClr val="4A4842"/>
                 </a:solidFill>
@@ -14696,7 +14696,7 @@
                 <a:cs typeface="Readex Pro"/>
                 <a:ea typeface="Readex Pro"/>
               </a:rPr>
-              <a:t>7 yes/no → P(yes)</a:t>
+              <a:t>7 yes/no questions → P(yes)</a:t>
             </a:r>
           </a:p>
         </p:txBody>
@@ -14709,8 +14709,8 @@
         </p:nvCxnSpPr>
         <p:spPr>
           <a:xfrm>
-            <a:off x="3063240" y="2011680"/>
-            <a:ext cx="411480" cy="0"/>
+            <a:off x="3195828" y="1874519"/>
+            <a:ext cx="356616" cy="0"/>
           </a:xfrm>
           <a:prstGeom prst="line">
             <a:avLst/>
@@ -14745,8 +14745,8 @@
         </p:nvCxnSpPr>
         <p:spPr>
           <a:xfrm>
-            <a:off x="6080760" y="2011680"/>
-            <a:ext cx="457200" cy="0"/>
+            <a:off x="6350508" y="1874519"/>
+            <a:ext cx="356615" cy="0"/>
           </a:xfrm>
           <a:prstGeom prst="line">
             <a:avLst/>
@@ -14781,12 +14781,12 @@
         </p:nvSpPr>
         <p:spPr>
           <a:xfrm>
-            <a:off x="566928" y="2880360"/>
-            <a:ext cx="4434840" cy="2606040"/>
+            <a:off x="566928" y="2926080"/>
+            <a:ext cx="4434840" cy="3063240"/>
           </a:xfrm>
           <a:prstGeom prst="roundRect">
             <a:avLst>
-              <a:gd name="adj" fmla="val 5614"/>
+              <a:gd name="adj" fmla="val 4776"/>
             </a:avLst>
           </a:prstGeom>
           <a:solidFill>
@@ -14829,8 +14829,8 @@
         </p:nvSpPr>
         <p:spPr>
           <a:xfrm>
-            <a:off x="566928" y="3035808"/>
-            <a:ext cx="4434840" cy="320040"/>
+            <a:off x="566928" y="3090672"/>
+            <a:ext cx="4434840" cy="347472"/>
           </a:xfrm>
           <a:prstGeom prst="rect">
             <a:avLst/>
@@ -14845,7 +14845,7 @@
           <a:p>
             <a:pPr algn="ctr"/>
             <a:r>
-              <a:rPr sz="1500" b="1">
+              <a:rPr sz="1600" b="1">
                 <a:solidFill>
                   <a:srgbClr val="8A5E35"/>
                 </a:solidFill>
@@ -14866,12 +14866,12 @@
         </p:nvSpPr>
         <p:spPr>
           <a:xfrm>
-            <a:off x="1297146" y="3520440"/>
-            <a:ext cx="2974403" cy="520192"/>
+            <a:off x="795528" y="3584448"/>
+            <a:ext cx="3977639" cy="442468"/>
           </a:xfrm>
           <a:prstGeom prst="roundRect">
             <a:avLst>
-              <a:gd name="adj" fmla="val 15820"/>
+              <a:gd name="adj" fmla="val 18599"/>
             </a:avLst>
           </a:prstGeom>
           <a:solidFill>
@@ -14904,7 +14904,7 @@
           <a:p>
             <a:pPr algn="ctr"/>
             <a:r>
-              <a:rPr sz="1150" b="1">
+              <a:rPr sz="1000" b="1">
                 <a:solidFill>
                   <a:srgbClr val="1A1A14"/>
                 </a:solidFill>
@@ -14912,21 +14912,7 @@
                 <a:cs typeface="Readex Pro"/>
                 <a:ea typeface="Readex Pro"/>
               </a:rPr>
-              <a:t>same meaning?  kept = yes ≥ 0.5</a:t>
-            </a:r>
-          </a:p>
-          <a:p>
-            <a:pPr algn="ctr"/>
-            <a:r>
-              <a:rPr sz="1150" b="1">
-                <a:solidFill>
-                  <a:srgbClr val="1A1A14"/>
-                </a:solidFill>
-                <a:latin typeface="Readex Pro"/>
-                <a:cs typeface="Readex Pro"/>
-                <a:ea typeface="Readex Pro"/>
-              </a:rPr>
-              <a:t>and every number kept</a:t>
+              <a:t>same meaning?  kept = yes ≥ 0.5 and every number kept</a:t>
             </a:r>
           </a:p>
         </p:txBody>
@@ -14939,12 +14925,12 @@
         </p:nvSpPr>
         <p:spPr>
           <a:xfrm>
-            <a:off x="2064639" y="3904488"/>
-            <a:ext cx="1439417" cy="333248"/>
+            <a:off x="1988058" y="4173220"/>
+            <a:ext cx="1592579" cy="514858"/>
           </a:xfrm>
           <a:prstGeom prst="roundRect">
             <a:avLst>
-              <a:gd name="adj" fmla="val 24695"/>
+              <a:gd name="adj" fmla="val 15984"/>
             </a:avLst>
           </a:prstGeom>
           <a:solidFill>
@@ -14977,7 +14963,7 @@
           <a:p>
             <a:pPr algn="ctr"/>
             <a:r>
-              <a:rPr sz="1150" b="0">
+              <a:rPr sz="1300" b="0">
                 <a:solidFill>
                   <a:srgbClr val="4A4842"/>
                 </a:solidFill>
@@ -14998,12 +14984,12 @@
         </p:nvSpPr>
         <p:spPr>
           <a:xfrm>
-            <a:off x="2024475" y="4288536"/>
-            <a:ext cx="1519745" cy="333248"/>
+            <a:off x="1942655" y="4834382"/>
+            <a:ext cx="1683384" cy="514858"/>
           </a:xfrm>
           <a:prstGeom prst="roundRect">
             <a:avLst>
-              <a:gd name="adj" fmla="val 24695"/>
+              <a:gd name="adj" fmla="val 15984"/>
             </a:avLst>
           </a:prstGeom>
           <a:solidFill>
@@ -15036,7 +15022,7 @@
           <a:p>
             <a:pPr algn="ctr"/>
             <a:r>
-              <a:rPr sz="1150" b="0">
+              <a:rPr sz="1300" b="0">
                 <a:solidFill>
                   <a:srgbClr val="4A4842"/>
                 </a:solidFill>
@@ -15057,12 +15043,12 @@
         </p:nvSpPr>
         <p:spPr>
           <a:xfrm>
-            <a:off x="2084355" y="4672584"/>
-            <a:ext cx="1399984" cy="333248"/>
+            <a:off x="2010346" y="5495544"/>
+            <a:ext cx="1548003" cy="514858"/>
           </a:xfrm>
           <a:prstGeom prst="roundRect">
             <a:avLst>
-              <a:gd name="adj" fmla="val 24695"/>
+              <a:gd name="adj" fmla="val 15984"/>
             </a:avLst>
           </a:prstGeom>
           <a:solidFill>
@@ -15095,7 +15081,7 @@
           <a:p>
             <a:pPr algn="ctr"/>
             <a:r>
-              <a:rPr sz="1150" b="0">
+              <a:rPr sz="1300" b="0">
                 <a:solidFill>
                   <a:srgbClr val="4A4842"/>
                 </a:solidFill>
@@ -15116,12 +15102,12 @@
         </p:nvSpPr>
         <p:spPr>
           <a:xfrm>
-            <a:off x="5321807" y="2880360"/>
-            <a:ext cx="4434840" cy="2606040"/>
+            <a:off x="5321807" y="2926080"/>
+            <a:ext cx="4434840" cy="3063240"/>
           </a:xfrm>
           <a:prstGeom prst="roundRect">
             <a:avLst>
-              <a:gd name="adj" fmla="val 5614"/>
+              <a:gd name="adj" fmla="val 4776"/>
             </a:avLst>
           </a:prstGeom>
           <a:solidFill>
@@ -15164,8 +15150,8 @@
         </p:nvSpPr>
         <p:spPr>
           <a:xfrm>
-            <a:off x="5321807" y="3035808"/>
-            <a:ext cx="4434840" cy="320040"/>
+            <a:off x="5321807" y="3090672"/>
+            <a:ext cx="4434840" cy="347472"/>
           </a:xfrm>
           <a:prstGeom prst="rect">
             <a:avLst/>
@@ -15180,7 +15166,7 @@
           <a:p>
             <a:pPr algn="ctr"/>
             <a:r>
-              <a:rPr sz="1500" b="1">
+              <a:rPr sz="1600" b="1">
                 <a:solidFill>
                   <a:srgbClr val="8A5E35"/>
                 </a:solidFill>
@@ -15201,12 +15187,12 @@
         </p:nvSpPr>
         <p:spPr>
           <a:xfrm>
-            <a:off x="6709251" y="3520440"/>
-            <a:ext cx="1659953" cy="333248"/>
+            <a:off x="6618287" y="3584448"/>
+            <a:ext cx="1841881" cy="514858"/>
           </a:xfrm>
           <a:prstGeom prst="roundRect">
             <a:avLst>
-              <a:gd name="adj" fmla="val 24695"/>
+              <a:gd name="adj" fmla="val 15984"/>
             </a:avLst>
           </a:prstGeom>
           <a:solidFill>
@@ -15239,7 +15225,7 @@
           <a:p>
             <a:pPr algn="ctr"/>
             <a:r>
-              <a:rPr sz="1150" b="0">
+              <a:rPr sz="1300" b="0">
                 <a:solidFill>
                   <a:srgbClr val="4A4842"/>
                 </a:solidFill>
@@ -15260,12 +15246,12 @@
         </p:nvSpPr>
         <p:spPr>
           <a:xfrm>
-            <a:off x="6940010" y="3904488"/>
-            <a:ext cx="1198435" cy="333248"/>
+            <a:off x="6879145" y="4245610"/>
+            <a:ext cx="1320165" cy="514858"/>
           </a:xfrm>
           <a:prstGeom prst="roundRect">
             <a:avLst>
-              <a:gd name="adj" fmla="val 24695"/>
+              <a:gd name="adj" fmla="val 15984"/>
             </a:avLst>
           </a:prstGeom>
           <a:solidFill>
@@ -15298,7 +15284,7 @@
           <a:p>
             <a:pPr algn="ctr"/>
             <a:r>
-              <a:rPr sz="1150" b="0">
+              <a:rPr sz="1300" b="0">
                 <a:solidFill>
                   <a:srgbClr val="4A4842"/>
                 </a:solidFill>
@@ -15319,12 +15305,12 @@
         </p:nvSpPr>
         <p:spPr>
           <a:xfrm>
-            <a:off x="6718744" y="4288536"/>
-            <a:ext cx="1640966" cy="333248"/>
+            <a:off x="6629019" y="4906772"/>
+            <a:ext cx="1820417" cy="514858"/>
           </a:xfrm>
           <a:prstGeom prst="roundRect">
             <a:avLst>
-              <a:gd name="adj" fmla="val 24695"/>
+              <a:gd name="adj" fmla="val 15984"/>
             </a:avLst>
           </a:prstGeom>
           <a:solidFill>
@@ -15357,7 +15343,7 @@
           <a:p>
             <a:pPr algn="ctr"/>
             <a:r>
-              <a:rPr sz="1150" b="0">
+              <a:rPr sz="1300" b="0">
                 <a:solidFill>
                   <a:srgbClr val="4A4842"/>
                 </a:solidFill>
@@ -15378,8 +15364,8 @@
         </p:nvSpPr>
         <p:spPr>
           <a:xfrm>
-            <a:off x="5504688" y="5047488"/>
-            <a:ext cx="4069079" cy="365760"/>
+            <a:off x="5504688" y="5550408"/>
+            <a:ext cx="4069079" cy="347472"/>
           </a:xfrm>
           <a:prstGeom prst="rect">
             <a:avLst/>
@@ -15394,7 +15380,44 @@
           <a:p>
             <a:pPr algn="ctr"/>
             <a:r>
-              <a:rPr sz="1000" b="0">
+              <a:rPr sz="1050" b="0">
+                <a:solidFill>
+                  <a:srgbClr val="6F6B5E"/>
+                </a:solidFill>
+                <a:latin typeface="Readex Pro"/>
+                <a:cs typeface="Readex Pro"/>
+                <a:ea typeface="Readex Pro"/>
+              </a:rPr>
+              <a:t>people barely agree on these: never used to decide</a:t>
+            </a:r>
+          </a:p>
+        </p:txBody>
+      </p:sp>
+      <p:sp>
+        <p:nvSpPr>
+          <p:cNvPr id="28" name="TextBox 27"/>
+          <p:cNvSpPr txBox="1"/>
+          <p:nvPr/>
+        </p:nvSpPr>
+        <p:spPr>
+          <a:xfrm>
+            <a:off x="5504688" y="5550408"/>
+            <a:ext cx="4069079" cy="347472"/>
+          </a:xfrm>
+          <a:prstGeom prst="rect">
+            <a:avLst/>
+          </a:prstGeom>
+          <a:noFill/>
+        </p:spPr>
+        <p:txBody>
+          <a:bodyPr wrap="square" lIns="0" rIns="0" tIns="0" bIns="0" anchor="ctr">
+            <a:spAutoFit/>
+          </a:bodyPr>
+          <a:lstStyle/>
+          <a:p>
+            <a:pPr algn="ctr"/>
+            <a:r>
+              <a:rPr sz="1050" b="0">
                 <a:solidFill>
                   <a:srgbClr val="6F6B5E"/>
                 </a:solidFill>
@@ -16677,11 +16700,11 @@
         <p:spPr>
           <a:xfrm>
             <a:off x="566928" y="3657600"/>
-            <a:ext cx="3045968" cy="333248"/>
+            <a:ext cx="3045968" cy="339090"/>
           </a:xfrm>
           <a:prstGeom prst="roundRect">
             <a:avLst>
-              <a:gd name="adj" fmla="val 24695"/>
+              <a:gd name="adj" fmla="val 24269"/>
             </a:avLst>
           </a:prstGeom>
           <a:solidFill>
@@ -16736,11 +16759,11 @@
         <p:spPr>
           <a:xfrm>
             <a:off x="566928" y="4160520"/>
-            <a:ext cx="3250438" cy="333248"/>
+            <a:ext cx="3250438" cy="339090"/>
           </a:xfrm>
           <a:prstGeom prst="roundRect">
             <a:avLst>
-              <a:gd name="adj" fmla="val 24695"/>
+              <a:gd name="adj" fmla="val 24269"/>
             </a:avLst>
           </a:prstGeom>
           <a:solidFill>
@@ -16795,11 +16818,11 @@
         <p:spPr>
           <a:xfrm>
             <a:off x="566928" y="4663440"/>
-            <a:ext cx="2604897" cy="333248"/>
+            <a:ext cx="2604897" cy="339090"/>
           </a:xfrm>
           <a:prstGeom prst="roundRect">
             <a:avLst>
-              <a:gd name="adj" fmla="val 24695"/>
+              <a:gd name="adj" fmla="val 24269"/>
             </a:avLst>
           </a:prstGeom>
           <a:solidFill>
@@ -17518,13 +17541,13 @@
         </p:nvCxnSpPr>
         <p:spPr>
           <a:xfrm>
-            <a:off x="1069848" y="5212080"/>
-            <a:ext cx="4892040" cy="0"/>
+            <a:off x="2148840" y="5120640"/>
+            <a:ext cx="4617720" cy="0"/>
           </a:xfrm>
           <a:prstGeom prst="line">
             <a:avLst/>
           </a:prstGeom>
-          <a:ln w="19050">
+          <a:ln w="22225">
             <a:solidFill>
               <a:srgbClr val="A29D8C"/>
             </a:solidFill>
@@ -17553,13 +17576,13 @@
         </p:nvCxnSpPr>
         <p:spPr>
           <a:xfrm>
-            <a:off x="1069848" y="1691640"/>
-            <a:ext cx="0" cy="3520440"/>
+            <a:off x="2148840" y="1874519"/>
+            <a:ext cx="0" cy="3246121"/>
           </a:xfrm>
           <a:prstGeom prst="line">
             <a:avLst/>
           </a:prstGeom>
-          <a:ln w="19050">
+          <a:ln w="22225">
             <a:solidFill>
               <a:srgbClr val="A29D8C"/>
             </a:solidFill>
@@ -17588,8 +17611,8 @@
         </p:nvSpPr>
         <p:spPr>
           <a:xfrm>
-            <a:off x="1069848" y="5303520"/>
-            <a:ext cx="4892040" cy="237744"/>
+            <a:off x="2148840" y="5230368"/>
+            <a:ext cx="4617720" cy="256032"/>
           </a:xfrm>
           <a:prstGeom prst="rect">
             <a:avLst/>
@@ -17604,7 +17627,7 @@
           <a:p>
             <a:pPr algn="ctr"/>
             <a:r>
-              <a:rPr sz="1100" b="0">
+              <a:rPr sz="1150" b="0">
                 <a:solidFill>
                   <a:srgbClr val="6F6B5E"/>
                 </a:solidFill>
@@ -17624,9 +17647,9 @@
           <p:nvPr/>
         </p:nvSpPr>
         <p:spPr>
-          <a:xfrm>
-            <a:off x="521207" y="3131820"/>
-            <a:ext cx="960120" cy="640080"/>
+          <a:xfrm rot="16200000">
+            <a:off x="1673352" y="3369563"/>
+            <a:ext cx="3291840" cy="256032"/>
           </a:xfrm>
           <a:prstGeom prst="rect">
             <a:avLst/>
@@ -17641,7 +17664,7 @@
           <a:p>
             <a:pPr algn="ctr"/>
             <a:r>
-              <a:rPr sz="1100" b="0">
+              <a:rPr sz="1150" b="0">
                 <a:solidFill>
                   <a:srgbClr val="6F6B5E"/>
                 </a:solidFill>
@@ -17649,21 +17672,7 @@
                 <a:cs typeface="Readex Pro"/>
                 <a:ea typeface="Readex Pro"/>
               </a:rPr>
-              <a:t>clause words</a:t>
-            </a:r>
-          </a:p>
-          <a:p>
-            <a:pPr algn="ctr"/>
-            <a:r>
-              <a:rPr sz="1100" b="0">
-                <a:solidFill>
-                  <a:srgbClr val="6F6B5E"/>
-                </a:solidFill>
-                <a:latin typeface="Readex Pro"/>
-                <a:cs typeface="Readex Pro"/>
-                <a:ea typeface="Readex Pro"/>
-              </a:rPr>
-              <a:t>shorter  →</a:t>
+              <a:t>simplification: words cut from the longest clause  →</a:t>
             </a:r>
           </a:p>
         </p:txBody>
@@ -17676,8 +17685,8 @@
         </p:nvSpPr>
         <p:spPr>
           <a:xfrm>
-            <a:off x="5535167" y="4853902"/>
-            <a:ext cx="201168" cy="201168"/>
+            <a:off x="6353555" y="4777963"/>
+            <a:ext cx="210312" cy="210312"/>
           </a:xfrm>
           <a:prstGeom prst="ellipse">
             <a:avLst/>
@@ -17720,8 +17729,8 @@
         </p:nvSpPr>
         <p:spPr>
           <a:xfrm>
-            <a:off x="4767072" y="4570438"/>
-            <a:ext cx="1737360" cy="237744"/>
+            <a:off x="5836920" y="4467067"/>
+            <a:ext cx="1243584" cy="237744"/>
           </a:xfrm>
           <a:prstGeom prst="rect">
             <a:avLst/>
@@ -17734,9 +17743,9 @@
           </a:bodyPr>
           <a:lstStyle/>
           <a:p>
-            <a:pPr algn="ctr"/>
-            <a:r>
-              <a:rPr sz="1100" b="0">
+            <a:pPr algn="l"/>
+            <a:r>
+              <a:rPr sz="1200" b="0">
                 <a:solidFill>
                   <a:srgbClr val="4A4842"/>
                 </a:solidFill>
@@ -17744,7 +17753,7 @@
                 <a:cs typeface="Readex Pro"/>
                 <a:ea typeface="Readex Pro"/>
               </a:rPr>
-              <a:t>copy</a:t>
+              <a:t>Copy the input</a:t>
             </a:r>
           </a:p>
         </p:txBody>
@@ -17757,8 +17766,538 @@
         </p:nvSpPr>
         <p:spPr>
           <a:xfrm>
-            <a:off x="4126260" y="4166987"/>
-            <a:ext cx="201168" cy="201168"/>
+            <a:off x="4875885" y="4777963"/>
+            <a:ext cx="210312" cy="210312"/>
+          </a:xfrm>
+          <a:prstGeom prst="ellipse">
+            <a:avLst/>
+          </a:prstGeom>
+          <a:solidFill>
+            <a:srgbClr val="6F6B5E"/>
+          </a:solidFill>
+          <a:ln>
+            <a:noFill/>
+          </a:ln>
+          <a:effectLst/>
+        </p:spPr>
+        <p:style>
+          <a:lnRef idx="1">
+            <a:schemeClr val="accent1"/>
+          </a:lnRef>
+          <a:fillRef idx="3">
+            <a:schemeClr val="accent1"/>
+          </a:fillRef>
+          <a:effectRef idx="2">
+            <a:schemeClr val="accent1"/>
+          </a:effectRef>
+          <a:fontRef idx="minor">
+            <a:schemeClr val="lt1"/>
+          </a:fontRef>
+        </p:style>
+        <p:txBody>
+          <a:bodyPr rtlCol="0" anchor="ctr"/>
+          <a:lstStyle/>
+          <a:p>
+            <a:pPr algn="ctr"/>
+          </a:p>
+        </p:txBody>
+      </p:sp>
+      <p:sp>
+        <p:nvSpPr>
+          <p:cNvPr id="16" name="TextBox 15"/>
+          <p:cNvSpPr txBox="1"/>
+          <p:nvPr/>
+        </p:nvSpPr>
+        <p:spPr>
+          <a:xfrm>
+            <a:off x="4788255" y="4467067"/>
+            <a:ext cx="385572" cy="237744"/>
+          </a:xfrm>
+          <a:prstGeom prst="rect">
+            <a:avLst/>
+          </a:prstGeom>
+          <a:noFill/>
+        </p:spPr>
+        <p:txBody>
+          <a:bodyPr wrap="square" lIns="0" rIns="0" tIns="0" bIns="0" anchor="ctr">
+            <a:spAutoFit/>
+          </a:bodyPr>
+          <a:lstStyle/>
+          <a:p>
+            <a:pPr algn="l"/>
+            <a:r>
+              <a:rPr sz="1200" b="0">
+                <a:solidFill>
+                  <a:srgbClr val="4A4842"/>
+                </a:solidFill>
+                <a:latin typeface="Readex Pro"/>
+                <a:cs typeface="Readex Pro"/>
+                <a:ea typeface="Readex Pro"/>
+              </a:rPr>
+              <a:t>v0.1</a:t>
+            </a:r>
+          </a:p>
+        </p:txBody>
+      </p:sp>
+      <p:sp>
+        <p:nvSpPr>
+          <p:cNvPr id="17" name="Oval 16"/>
+          <p:cNvSpPr/>
+          <p:nvPr/>
+        </p:nvSpPr>
+        <p:spPr>
+          <a:xfrm>
+            <a:off x="5035966" y="4025813"/>
+            <a:ext cx="210312" cy="210312"/>
+          </a:xfrm>
+          <a:prstGeom prst="ellipse">
+            <a:avLst/>
+          </a:prstGeom>
+          <a:solidFill>
+            <a:srgbClr val="6F6B5E"/>
+          </a:solidFill>
+          <a:ln>
+            <a:noFill/>
+          </a:ln>
+          <a:effectLst/>
+        </p:spPr>
+        <p:style>
+          <a:lnRef idx="1">
+            <a:schemeClr val="accent1"/>
+          </a:lnRef>
+          <a:fillRef idx="3">
+            <a:schemeClr val="accent1"/>
+          </a:fillRef>
+          <a:effectRef idx="2">
+            <a:schemeClr val="accent1"/>
+          </a:effectRef>
+          <a:fontRef idx="minor">
+            <a:schemeClr val="lt1"/>
+          </a:fontRef>
+        </p:style>
+        <p:txBody>
+          <a:bodyPr rtlCol="0" anchor="ctr"/>
+          <a:lstStyle/>
+          <a:p>
+            <a:pPr algn="ctr"/>
+          </a:p>
+        </p:txBody>
+      </p:sp>
+      <p:sp>
+        <p:nvSpPr>
+          <p:cNvPr id="18" name="TextBox 17"/>
+          <p:cNvSpPr txBox="1"/>
+          <p:nvPr/>
+        </p:nvSpPr>
+        <p:spPr>
+          <a:xfrm>
+            <a:off x="4507900" y="3714917"/>
+            <a:ext cx="1266443" cy="237744"/>
+          </a:xfrm>
+          <a:prstGeom prst="rect">
+            <a:avLst/>
+          </a:prstGeom>
+          <a:noFill/>
+        </p:spPr>
+        <p:txBody>
+          <a:bodyPr wrap="square" lIns="0" rIns="0" tIns="0" bIns="0" anchor="ctr">
+            <a:spAutoFit/>
+          </a:bodyPr>
+          <a:lstStyle/>
+          <a:p>
+            <a:pPr algn="l"/>
+            <a:r>
+              <a:rPr sz="1200" b="0">
+                <a:solidFill>
+                  <a:srgbClr val="4A4842"/>
+                </a:solidFill>
+                <a:latin typeface="Readex Pro"/>
+                <a:cs typeface="Readex Pro"/>
+                <a:ea typeface="Readex Pro"/>
+              </a:rPr>
+              <a:t>v0.2 in the app</a:t>
+            </a:r>
+          </a:p>
+        </p:txBody>
+      </p:sp>
+      <p:sp>
+        <p:nvSpPr>
+          <p:cNvPr id="19" name="Oval 18"/>
+          <p:cNvSpPr/>
+          <p:nvPr/>
+        </p:nvSpPr>
+        <p:spPr>
+          <a:xfrm>
+            <a:off x="4401799" y="2996555"/>
+            <a:ext cx="210312" cy="210312"/>
+          </a:xfrm>
+          <a:prstGeom prst="ellipse">
+            <a:avLst/>
+          </a:prstGeom>
+          <a:solidFill>
+            <a:srgbClr val="6F6B5E"/>
+          </a:solidFill>
+          <a:ln>
+            <a:noFill/>
+          </a:ln>
+          <a:effectLst/>
+        </p:spPr>
+        <p:style>
+          <a:lnRef idx="1">
+            <a:schemeClr val="accent1"/>
+          </a:lnRef>
+          <a:fillRef idx="3">
+            <a:schemeClr val="accent1"/>
+          </a:fillRef>
+          <a:effectRef idx="2">
+            <a:schemeClr val="accent1"/>
+          </a:effectRef>
+          <a:fontRef idx="minor">
+            <a:schemeClr val="lt1"/>
+          </a:fontRef>
+        </p:style>
+        <p:txBody>
+          <a:bodyPr rtlCol="0" anchor="ctr"/>
+          <a:lstStyle/>
+          <a:p>
+            <a:pPr algn="ctr"/>
+          </a:p>
+        </p:txBody>
+      </p:sp>
+      <p:sp>
+        <p:nvSpPr>
+          <p:cNvPr id="20" name="TextBox 19"/>
+          <p:cNvSpPr txBox="1"/>
+          <p:nvPr/>
+        </p:nvSpPr>
+        <p:spPr>
+          <a:xfrm>
+            <a:off x="3257783" y="2982839"/>
+            <a:ext cx="1052576" cy="237744"/>
+          </a:xfrm>
+          <a:prstGeom prst="rect">
+            <a:avLst/>
+          </a:prstGeom>
+          <a:noFill/>
+        </p:spPr>
+        <p:txBody>
+          <a:bodyPr wrap="square" lIns="0" rIns="0" tIns="0" bIns="0" anchor="ctr">
+            <a:spAutoFit/>
+          </a:bodyPr>
+          <a:lstStyle/>
+          <a:p>
+            <a:pPr algn="l"/>
+            <a:r>
+              <a:rPr sz="1100" b="0">
+                <a:solidFill>
+                  <a:srgbClr val="4A4842"/>
+                </a:solidFill>
+                <a:latin typeface="Readex Pro"/>
+                <a:cs typeface="Readex Pro"/>
+                <a:ea typeface="Readex Pro"/>
+              </a:rPr>
+              <a:t>v0.2 (no tag)</a:t>
+            </a:r>
+          </a:p>
+        </p:txBody>
+      </p:sp>
+      <p:sp>
+        <p:nvSpPr>
+          <p:cNvPr id="21" name="Oval 20"/>
+          <p:cNvSpPr/>
+          <p:nvPr/>
+        </p:nvSpPr>
+        <p:spPr>
+          <a:xfrm>
+            <a:off x="3859987" y="2283992"/>
+            <a:ext cx="210312" cy="210312"/>
+          </a:xfrm>
+          <a:prstGeom prst="ellipse">
+            <a:avLst/>
+          </a:prstGeom>
+          <a:solidFill>
+            <a:srgbClr val="6F6B5E"/>
+          </a:solidFill>
+          <a:ln>
+            <a:noFill/>
+          </a:ln>
+          <a:effectLst/>
+        </p:spPr>
+        <p:style>
+          <a:lnRef idx="1">
+            <a:schemeClr val="accent1"/>
+          </a:lnRef>
+          <a:fillRef idx="3">
+            <a:schemeClr val="accent1"/>
+          </a:fillRef>
+          <a:effectRef idx="2">
+            <a:schemeClr val="accent1"/>
+          </a:effectRef>
+          <a:fontRef idx="minor">
+            <a:schemeClr val="lt1"/>
+          </a:fontRef>
+        </p:style>
+        <p:txBody>
+          <a:bodyPr rtlCol="0" anchor="ctr"/>
+          <a:lstStyle/>
+          <a:p>
+            <a:pPr algn="ctr"/>
+          </a:p>
+        </p:txBody>
+      </p:sp>
+      <p:sp>
+        <p:nvSpPr>
+          <p:cNvPr id="22" name="TextBox 21"/>
+          <p:cNvSpPr txBox="1"/>
+          <p:nvPr/>
+        </p:nvSpPr>
+        <p:spPr>
+          <a:xfrm>
+            <a:off x="3554107" y="2567456"/>
+            <a:ext cx="822070" cy="237744"/>
+          </a:xfrm>
+          <a:prstGeom prst="rect">
+            <a:avLst/>
+          </a:prstGeom>
+          <a:noFill/>
+        </p:spPr>
+        <p:txBody>
+          <a:bodyPr wrap="square" lIns="0" rIns="0" tIns="0" bIns="0" anchor="ctr">
+            <a:spAutoFit/>
+          </a:bodyPr>
+          <a:lstStyle/>
+          <a:p>
+            <a:pPr algn="l"/>
+            <a:r>
+              <a:rPr sz="1100" b="0">
+                <a:solidFill>
+                  <a:srgbClr val="4A4842"/>
+                </a:solidFill>
+                <a:latin typeface="Readex Pro"/>
+                <a:cs typeface="Readex Pro"/>
+                <a:ea typeface="Readex Pro"/>
+              </a:rPr>
+              <a:t>v0.2 + tag</a:t>
+            </a:r>
+          </a:p>
+        </p:txBody>
+      </p:sp>
+      <p:sp>
+        <p:nvSpPr>
+          <p:cNvPr id="23" name="Oval 22"/>
+          <p:cNvSpPr/>
+          <p:nvPr/>
+        </p:nvSpPr>
+        <p:spPr>
+          <a:xfrm>
+            <a:off x="3361273" y="2838208"/>
+            <a:ext cx="210312" cy="210312"/>
+          </a:xfrm>
+          <a:prstGeom prst="ellipse">
+            <a:avLst/>
+          </a:prstGeom>
+          <a:solidFill>
+            <a:srgbClr val="6F6B5E"/>
+          </a:solidFill>
+          <a:ln>
+            <a:noFill/>
+          </a:ln>
+          <a:effectLst/>
+        </p:spPr>
+        <p:style>
+          <a:lnRef idx="1">
+            <a:schemeClr val="accent1"/>
+          </a:lnRef>
+          <a:fillRef idx="3">
+            <a:schemeClr val="accent1"/>
+          </a:fillRef>
+          <a:effectRef idx="2">
+            <a:schemeClr val="accent1"/>
+          </a:effectRef>
+          <a:fontRef idx="minor">
+            <a:schemeClr val="lt1"/>
+          </a:fontRef>
+        </p:style>
+        <p:txBody>
+          <a:bodyPr rtlCol="0" anchor="ctr"/>
+          <a:lstStyle/>
+          <a:p>
+            <a:pPr algn="ctr"/>
+          </a:p>
+        </p:txBody>
+      </p:sp>
+      <p:sp>
+        <p:nvSpPr>
+          <p:cNvPr id="24" name="TextBox 23"/>
+          <p:cNvSpPr txBox="1"/>
+          <p:nvPr/>
+        </p:nvSpPr>
+        <p:spPr>
+          <a:xfrm>
+            <a:off x="2738973" y="3121672"/>
+            <a:ext cx="1454912" cy="237744"/>
+          </a:xfrm>
+          <a:prstGeom prst="rect">
+            <a:avLst/>
+          </a:prstGeom>
+          <a:noFill/>
+        </p:spPr>
+        <p:txBody>
+          <a:bodyPr wrap="square" lIns="0" rIns="0" tIns="0" bIns="0" anchor="ctr">
+            <a:spAutoFit/>
+          </a:bodyPr>
+          <a:lstStyle/>
+          <a:p>
+            <a:pPr algn="l"/>
+            <a:r>
+              <a:rPr sz="1100" b="0">
+                <a:solidFill>
+                  <a:srgbClr val="4A4842"/>
+                </a:solidFill>
+                <a:latin typeface="Readex Pro"/>
+                <a:cs typeface="Readex Pro"/>
+                <a:ea typeface="Readex Pro"/>
+              </a:rPr>
+              <a:t>v0.2-Fast (no tag)</a:t>
+            </a:r>
+          </a:p>
+        </p:txBody>
+      </p:sp>
+      <p:sp>
+        <p:nvSpPr>
+          <p:cNvPr id="25" name="Oval 24"/>
+          <p:cNvSpPr/>
+          <p:nvPr/>
+        </p:nvSpPr>
+        <p:spPr>
+          <a:xfrm>
+            <a:off x="2665536" y="2125645"/>
+            <a:ext cx="210312" cy="210312"/>
+          </a:xfrm>
+          <a:prstGeom prst="ellipse">
+            <a:avLst/>
+          </a:prstGeom>
+          <a:solidFill>
+            <a:srgbClr val="6F6B5E"/>
+          </a:solidFill>
+          <a:ln>
+            <a:noFill/>
+          </a:ln>
+          <a:effectLst/>
+        </p:spPr>
+        <p:style>
+          <a:lnRef idx="1">
+            <a:schemeClr val="accent1"/>
+          </a:lnRef>
+          <a:fillRef idx="3">
+            <a:schemeClr val="accent1"/>
+          </a:fillRef>
+          <a:effectRef idx="2">
+            <a:schemeClr val="accent1"/>
+          </a:effectRef>
+          <a:fontRef idx="minor">
+            <a:schemeClr val="lt1"/>
+          </a:fontRef>
+        </p:style>
+        <p:txBody>
+          <a:bodyPr rtlCol="0" anchor="ctr"/>
+          <a:lstStyle/>
+          <a:p>
+            <a:pPr algn="ctr"/>
+          </a:p>
+        </p:txBody>
+      </p:sp>
+      <p:sp>
+        <p:nvSpPr>
+          <p:cNvPr id="26" name="TextBox 25"/>
+          <p:cNvSpPr txBox="1"/>
+          <p:nvPr/>
+        </p:nvSpPr>
+        <p:spPr>
+          <a:xfrm>
+            <a:off x="2985576" y="2111929"/>
+            <a:ext cx="1224407" cy="237744"/>
+          </a:xfrm>
+          <a:prstGeom prst="rect">
+            <a:avLst/>
+          </a:prstGeom>
+          <a:noFill/>
+        </p:spPr>
+        <p:txBody>
+          <a:bodyPr wrap="square" lIns="0" rIns="0" tIns="0" bIns="0" anchor="ctr">
+            <a:spAutoFit/>
+          </a:bodyPr>
+          <a:lstStyle/>
+          <a:p>
+            <a:pPr algn="l"/>
+            <a:r>
+              <a:rPr sz="1100" b="0">
+                <a:solidFill>
+                  <a:srgbClr val="4A4842"/>
+                </a:solidFill>
+                <a:latin typeface="Readex Pro"/>
+                <a:cs typeface="Readex Pro"/>
+                <a:ea typeface="Readex Pro"/>
+              </a:rPr>
+              <a:t>v0.2-Fast + tag</a:t>
+            </a:r>
+          </a:p>
+        </p:txBody>
+      </p:sp>
+      <p:sp>
+        <p:nvSpPr>
+          <p:cNvPr id="27" name="Oval 26"/>
+          <p:cNvSpPr/>
+          <p:nvPr/>
+        </p:nvSpPr>
+        <p:spPr>
+          <a:xfrm>
+            <a:off x="5094427" y="2568571"/>
+            <a:ext cx="512064" cy="512064"/>
+          </a:xfrm>
+          <a:prstGeom prst="ellipse">
+            <a:avLst/>
+          </a:prstGeom>
+          <a:noFill/>
+          <a:ln w="22225">
+            <a:solidFill>
+              <a:srgbClr val="C6986B"/>
+            </a:solidFill>
+          </a:ln>
+          <a:effectLst/>
+        </p:spPr>
+        <p:style>
+          <a:lnRef idx="1">
+            <a:schemeClr val="accent1"/>
+          </a:lnRef>
+          <a:fillRef idx="3">
+            <a:schemeClr val="accent1"/>
+          </a:fillRef>
+          <a:effectRef idx="2">
+            <a:schemeClr val="accent1"/>
+          </a:effectRef>
+          <a:fontRef idx="minor">
+            <a:schemeClr val="lt1"/>
+          </a:fontRef>
+        </p:style>
+        <p:txBody>
+          <a:bodyPr rtlCol="0" anchor="ctr"/>
+          <a:lstStyle/>
+          <a:p>
+            <a:pPr algn="ctr"/>
+          </a:p>
+        </p:txBody>
+      </p:sp>
+      <p:sp>
+        <p:nvSpPr>
+          <p:cNvPr id="28" name="Oval 27"/>
+          <p:cNvSpPr/>
+          <p:nvPr/>
+        </p:nvSpPr>
+        <p:spPr>
+          <a:xfrm>
+            <a:off x="5204155" y="2678299"/>
+            <a:ext cx="292608" cy="292608"/>
           </a:xfrm>
           <a:prstGeom prst="ellipse">
             <a:avLst/>
@@ -17795,14 +18334,14 @@
       </p:sp>
       <p:sp>
         <p:nvSpPr>
-          <p:cNvPr id="16" name="TextBox 15"/>
+          <p:cNvPr id="29" name="TextBox 28"/>
           <p:cNvSpPr txBox="1"/>
           <p:nvPr/>
         </p:nvSpPr>
         <p:spPr>
           <a:xfrm>
-            <a:off x="3358164" y="3883523"/>
-            <a:ext cx="1737360" cy="237744"/>
+            <a:off x="5606491" y="2705731"/>
+            <a:ext cx="1364361" cy="237744"/>
           </a:xfrm>
           <a:prstGeom prst="rect">
             <a:avLst/>
@@ -17815,412 +18354,30 @@
           </a:bodyPr>
           <a:lstStyle/>
           <a:p>
-            <a:pPr algn="ctr"/>
-            <a:r>
-              <a:rPr sz="1100" b="0">
-                <a:solidFill>
-                  <a:srgbClr val="4A4842"/>
-                </a:solidFill>
-                <a:latin typeface="Readex Pro"/>
-                <a:cs typeface="Readex Pro"/>
-                <a:ea typeface="Readex Pro"/>
-              </a:rPr>
-              <a:t>app-arat5 (today)</a:t>
-            </a:r>
-          </a:p>
-        </p:txBody>
-      </p:sp>
-      <p:sp>
-        <p:nvSpPr>
-          <p:cNvPr id="17" name="Oval 16"/>
+            <a:pPr algn="l"/>
+            <a:r>
+              <a:rPr sz="1300" b="1">
+                <a:solidFill>
+                  <a:srgbClr val="B5533C"/>
+                </a:solidFill>
+                <a:latin typeface="Readex Pro"/>
+                <a:cs typeface="Readex Pro"/>
+                <a:ea typeface="Readex Pro"/>
+              </a:rPr>
+              <a:t>v0.3 in the app</a:t>
+            </a:r>
+          </a:p>
+        </p:txBody>
+      </p:sp>
+      <p:sp>
+        <p:nvSpPr>
+          <p:cNvPr id="30" name="Rectangle 29"/>
           <p:cNvSpPr/>
           <p:nvPr/>
         </p:nvSpPr>
         <p:spPr>
           <a:xfrm>
-            <a:off x="4087124" y="3308343"/>
-            <a:ext cx="201168" cy="201168"/>
-          </a:xfrm>
-          <a:prstGeom prst="ellipse">
-            <a:avLst/>
-          </a:prstGeom>
-          <a:solidFill>
-            <a:srgbClr val="6F6B5E"/>
-          </a:solidFill>
-          <a:ln>
-            <a:noFill/>
-          </a:ln>
-          <a:effectLst/>
-        </p:spPr>
-        <p:style>
-          <a:lnRef idx="1">
-            <a:schemeClr val="accent1"/>
-          </a:lnRef>
-          <a:fillRef idx="3">
-            <a:schemeClr val="accent1"/>
-          </a:fillRef>
-          <a:effectRef idx="2">
-            <a:schemeClr val="accent1"/>
-          </a:effectRef>
-          <a:fontRef idx="minor">
-            <a:schemeClr val="lt1"/>
-          </a:fontRef>
-        </p:style>
-        <p:txBody>
-          <a:bodyPr rtlCol="0" anchor="ctr"/>
-          <a:lstStyle/>
-          <a:p>
-            <a:pPr algn="ctr"/>
-          </a:p>
-        </p:txBody>
-      </p:sp>
-      <p:sp>
-        <p:nvSpPr>
-          <p:cNvPr id="18" name="Oval 17"/>
-          <p:cNvSpPr/>
-          <p:nvPr/>
-        </p:nvSpPr>
-        <p:spPr>
-          <a:xfrm>
-            <a:off x="3089148" y="2406767"/>
-            <a:ext cx="201168" cy="201168"/>
-          </a:xfrm>
-          <a:prstGeom prst="ellipse">
-            <a:avLst/>
-          </a:prstGeom>
-          <a:solidFill>
-            <a:srgbClr val="6F6B5E"/>
-          </a:solidFill>
-          <a:ln>
-            <a:noFill/>
-          </a:ln>
-          <a:effectLst/>
-        </p:spPr>
-        <p:style>
-          <a:lnRef idx="1">
-            <a:schemeClr val="accent1"/>
-          </a:lnRef>
-          <a:fillRef idx="3">
-            <a:schemeClr val="accent1"/>
-          </a:fillRef>
-          <a:effectRef idx="2">
-            <a:schemeClr val="accent1"/>
-          </a:effectRef>
-          <a:fontRef idx="minor">
-            <a:schemeClr val="lt1"/>
-          </a:fontRef>
-        </p:style>
-        <p:txBody>
-          <a:bodyPr rtlCol="0" anchor="ctr"/>
-          <a:lstStyle/>
-          <a:p>
-            <a:pPr algn="ctr"/>
-          </a:p>
-        </p:txBody>
-      </p:sp>
-      <p:sp>
-        <p:nvSpPr>
-          <p:cNvPr id="19" name="Oval 18"/>
-          <p:cNvSpPr/>
-          <p:nvPr/>
-        </p:nvSpPr>
-        <p:spPr>
-          <a:xfrm>
-            <a:off x="2580375" y="3136615"/>
-            <a:ext cx="201168" cy="201168"/>
-          </a:xfrm>
-          <a:prstGeom prst="ellipse">
-            <a:avLst/>
-          </a:prstGeom>
-          <a:solidFill>
-            <a:srgbClr val="8A5E35"/>
-          </a:solidFill>
-          <a:ln>
-            <a:noFill/>
-          </a:ln>
-          <a:effectLst/>
-        </p:spPr>
-        <p:style>
-          <a:lnRef idx="1">
-            <a:schemeClr val="accent1"/>
-          </a:lnRef>
-          <a:fillRef idx="3">
-            <a:schemeClr val="accent1"/>
-          </a:fillRef>
-          <a:effectRef idx="2">
-            <a:schemeClr val="accent1"/>
-          </a:effectRef>
-          <a:fontRef idx="minor">
-            <a:schemeClr val="lt1"/>
-          </a:fontRef>
-        </p:style>
-        <p:txBody>
-          <a:bodyPr rtlCol="0" anchor="ctr"/>
-          <a:lstStyle/>
-          <a:p>
-            <a:pPr algn="ctr"/>
-          </a:p>
-        </p:txBody>
-      </p:sp>
-      <p:sp>
-        <p:nvSpPr>
-          <p:cNvPr id="20" name="TextBox 19"/>
-          <p:cNvSpPr txBox="1"/>
-          <p:nvPr/>
-        </p:nvSpPr>
-        <p:spPr>
-          <a:xfrm>
-            <a:off x="1812279" y="2853151"/>
-            <a:ext cx="1737360" cy="237744"/>
-          </a:xfrm>
-          <a:prstGeom prst="rect">
-            <a:avLst/>
-          </a:prstGeom>
-          <a:noFill/>
-        </p:spPr>
-        <p:txBody>
-          <a:bodyPr wrap="square" lIns="0" rIns="0" tIns="0" bIns="0" anchor="ctr">
-            <a:spAutoFit/>
-          </a:bodyPr>
-          <a:lstStyle/>
-          <a:p>
-            <a:pPr algn="ctr"/>
-            <a:r>
-              <a:rPr sz="1100" b="0">
-                <a:solidFill>
-                  <a:srgbClr val="4A4842"/>
-                </a:solidFill>
-                <a:latin typeface="Readex Pro"/>
-                <a:cs typeface="Readex Pro"/>
-                <a:ea typeface="Readex Pro"/>
-              </a:rPr>
-              <a:t>app-arabart</a:t>
-            </a:r>
-          </a:p>
-        </p:txBody>
-      </p:sp>
-      <p:sp>
-        <p:nvSpPr>
-          <p:cNvPr id="21" name="Oval 20"/>
-          <p:cNvSpPr/>
-          <p:nvPr/>
-        </p:nvSpPr>
-        <p:spPr>
-          <a:xfrm>
-            <a:off x="2639080" y="3308343"/>
-            <a:ext cx="201168" cy="201168"/>
-          </a:xfrm>
-          <a:prstGeom prst="ellipse">
-            <a:avLst/>
-          </a:prstGeom>
-          <a:solidFill>
-            <a:srgbClr val="6F6B5E"/>
-          </a:solidFill>
-          <a:ln>
-            <a:noFill/>
-          </a:ln>
-          <a:effectLst/>
-        </p:spPr>
-        <p:style>
-          <a:lnRef idx="1">
-            <a:schemeClr val="accent1"/>
-          </a:lnRef>
-          <a:fillRef idx="3">
-            <a:schemeClr val="accent1"/>
-          </a:fillRef>
-          <a:effectRef idx="2">
-            <a:schemeClr val="accent1"/>
-          </a:effectRef>
-          <a:fontRef idx="minor">
-            <a:schemeClr val="lt1"/>
-          </a:fontRef>
-        </p:style>
-        <p:txBody>
-          <a:bodyPr rtlCol="0" anchor="ctr"/>
-          <a:lstStyle/>
-          <a:p>
-            <a:pPr algn="ctr"/>
-          </a:p>
-        </p:txBody>
-      </p:sp>
-      <p:sp>
-        <p:nvSpPr>
-          <p:cNvPr id="22" name="Oval 21"/>
-          <p:cNvSpPr/>
-          <p:nvPr/>
-        </p:nvSpPr>
-        <p:spPr>
-          <a:xfrm>
-            <a:off x="1745467" y="2277971"/>
-            <a:ext cx="201168" cy="201168"/>
-          </a:xfrm>
-          <a:prstGeom prst="ellipse">
-            <a:avLst/>
-          </a:prstGeom>
-          <a:solidFill>
-            <a:srgbClr val="6F6B5E"/>
-          </a:solidFill>
-          <a:ln>
-            <a:noFill/>
-          </a:ln>
-          <a:effectLst/>
-        </p:spPr>
-        <p:style>
-          <a:lnRef idx="1">
-            <a:schemeClr val="accent1"/>
-          </a:lnRef>
-          <a:fillRef idx="3">
-            <a:schemeClr val="accent1"/>
-          </a:fillRef>
-          <a:effectRef idx="2">
-            <a:schemeClr val="accent1"/>
-          </a:effectRef>
-          <a:fontRef idx="minor">
-            <a:schemeClr val="lt1"/>
-          </a:fontRef>
-        </p:style>
-        <p:txBody>
-          <a:bodyPr rtlCol="0" anchor="ctr"/>
-          <a:lstStyle/>
-          <a:p>
-            <a:pPr algn="ctr"/>
-          </a:p>
-        </p:txBody>
-      </p:sp>
-      <p:sp>
-        <p:nvSpPr>
-          <p:cNvPr id="23" name="Oval 22"/>
-          <p:cNvSpPr/>
-          <p:nvPr/>
-        </p:nvSpPr>
-        <p:spPr>
-          <a:xfrm>
-            <a:off x="4307433" y="2545488"/>
-            <a:ext cx="438912" cy="438912"/>
-          </a:xfrm>
-          <a:prstGeom prst="ellipse">
-            <a:avLst/>
-          </a:prstGeom>
-          <a:noFill/>
-          <a:ln w="19050">
-            <a:solidFill>
-              <a:srgbClr val="C6986B"/>
-            </a:solidFill>
-          </a:ln>
-          <a:effectLst/>
-        </p:spPr>
-        <p:style>
-          <a:lnRef idx="1">
-            <a:schemeClr val="accent1"/>
-          </a:lnRef>
-          <a:fillRef idx="3">
-            <a:schemeClr val="accent1"/>
-          </a:fillRef>
-          <a:effectRef idx="2">
-            <a:schemeClr val="accent1"/>
-          </a:effectRef>
-          <a:fontRef idx="minor">
-            <a:schemeClr val="lt1"/>
-          </a:fontRef>
-        </p:style>
-        <p:txBody>
-          <a:bodyPr rtlCol="0" anchor="ctr"/>
-          <a:lstStyle/>
-          <a:p>
-            <a:pPr algn="ctr"/>
-          </a:p>
-        </p:txBody>
-      </p:sp>
-      <p:sp>
-        <p:nvSpPr>
-          <p:cNvPr id="24" name="Oval 23"/>
-          <p:cNvSpPr/>
-          <p:nvPr/>
-        </p:nvSpPr>
-        <p:spPr>
-          <a:xfrm>
-            <a:off x="4398873" y="2636928"/>
-            <a:ext cx="256032" cy="256032"/>
-          </a:xfrm>
-          <a:prstGeom prst="ellipse">
-            <a:avLst/>
-          </a:prstGeom>
-          <a:solidFill>
-            <a:srgbClr val="B5533C"/>
-          </a:solidFill>
-          <a:ln>
-            <a:noFill/>
-          </a:ln>
-          <a:effectLst/>
-        </p:spPr>
-        <p:style>
-          <a:lnRef idx="1">
-            <a:schemeClr val="accent1"/>
-          </a:lnRef>
-          <a:fillRef idx="3">
-            <a:schemeClr val="accent1"/>
-          </a:fillRef>
-          <a:effectRef idx="2">
-            <a:schemeClr val="accent1"/>
-          </a:effectRef>
-          <a:fontRef idx="minor">
-            <a:schemeClr val="lt1"/>
-          </a:fontRef>
-        </p:style>
-        <p:txBody>
-          <a:bodyPr rtlCol="0" anchor="ctr"/>
-          <a:lstStyle/>
-          <a:p>
-            <a:pPr algn="ctr"/>
-          </a:p>
-        </p:txBody>
-      </p:sp>
-      <p:sp>
-        <p:nvSpPr>
-          <p:cNvPr id="25" name="TextBox 24"/>
-          <p:cNvSpPr txBox="1"/>
-          <p:nvPr/>
-        </p:nvSpPr>
-        <p:spPr>
-          <a:xfrm>
-            <a:off x="4709769" y="2618640"/>
-            <a:ext cx="1554480" cy="256032"/>
-          </a:xfrm>
-          <a:prstGeom prst="rect">
-            <a:avLst/>
-          </a:prstGeom>
-          <a:noFill/>
-        </p:spPr>
-        <p:txBody>
-          <a:bodyPr wrap="square" lIns="0" rIns="0" tIns="0" bIns="0" anchor="ctr">
-            <a:spAutoFit/>
-          </a:bodyPr>
-          <a:lstStyle/>
-          <a:p>
-            <a:pPr algn="l"/>
-            <a:r>
-              <a:rPr sz="1100" b="1">
-                <a:solidFill>
-                  <a:srgbClr val="B5533C"/>
-                </a:solidFill>
-                <a:latin typeface="Readex Pro"/>
-                <a:cs typeface="Readex Pro"/>
-                <a:ea typeface="Readex Pro"/>
-              </a:rPr>
-              <a:t>model 3 + net</a:t>
-            </a:r>
-          </a:p>
-        </p:txBody>
-      </p:sp>
-      <p:sp>
-        <p:nvSpPr>
-          <p:cNvPr id="26" name="Rectangle 25"/>
-          <p:cNvSpPr/>
-          <p:nvPr/>
-        </p:nvSpPr>
-        <p:spPr>
-          <a:xfrm>
-            <a:off x="1207007" y="5650992"/>
+            <a:off x="2240280" y="5605272"/>
             <a:ext cx="45720" cy="146304"/>
           </a:xfrm>
           <a:prstGeom prst="rect">
@@ -18258,13 +18415,13 @@
       </p:sp>
       <p:sp>
         <p:nvSpPr>
-          <p:cNvPr id="27" name="TextBox 26"/>
+          <p:cNvPr id="31" name="TextBox 30"/>
           <p:cNvSpPr txBox="1"/>
           <p:nvPr/>
         </p:nvSpPr>
         <p:spPr>
           <a:xfrm>
-            <a:off x="1316736" y="5623560"/>
+            <a:off x="2350008" y="5577840"/>
             <a:ext cx="5943600" cy="201168"/>
           </a:xfrm>
           <a:prstGeom prst="rect">
@@ -18295,18 +18452,178 @@
       </p:sp>
       <p:sp>
         <p:nvSpPr>
-          <p:cNvPr id="28" name="Rounded Rectangle 27"/>
+          <p:cNvPr id="32" name="Rounded Rectangle 31"/>
           <p:cNvSpPr/>
           <p:nvPr/>
         </p:nvSpPr>
         <p:spPr>
           <a:xfrm>
-            <a:off x="6464807" y="1874519"/>
-            <a:ext cx="2661412" cy="568960"/>
+            <a:off x="7178040" y="1874519"/>
+            <a:ext cx="2157984" cy="635508"/>
           </a:xfrm>
           <a:prstGeom prst="roundRect">
             <a:avLst>
-              <a:gd name="adj" fmla="val 14464"/>
+              <a:gd name="adj" fmla="val 14388"/>
+            </a:avLst>
+          </a:prstGeom>
+          <a:solidFill>
+            <a:srgbClr val="EEDDC7"/>
+          </a:solidFill>
+          <a:ln w="15875">
+            <a:solidFill>
+              <a:srgbClr val="EEDDC7"/>
+            </a:solidFill>
+          </a:ln>
+          <a:effectLst/>
+        </p:spPr>
+        <p:style>
+          <a:lnRef idx="1">
+            <a:schemeClr val="accent1"/>
+          </a:lnRef>
+          <a:fillRef idx="3">
+            <a:schemeClr val="accent1"/>
+          </a:fillRef>
+          <a:effectRef idx="2">
+            <a:schemeClr val="accent1"/>
+          </a:effectRef>
+          <a:fontRef idx="minor">
+            <a:schemeClr val="lt1"/>
+          </a:fontRef>
+        </p:style>
+        <p:txBody>
+          <a:bodyPr rtlCol="0" anchor="ctr" wrap="square" lIns="109728" rIns="109728" tIns="0" bIns="0"/>
+          <a:lstStyle/>
+          <a:p>
+            <a:pPr algn="ctr"/>
+            <a:r>
+              <a:rPr sz="1350" b="1">
+                <a:solidFill>
+                  <a:srgbClr val="8A5E35"/>
+                </a:solidFill>
+                <a:latin typeface="Readex Pro"/>
+                <a:cs typeface="Readex Pro"/>
+                <a:ea typeface="Readex Pro"/>
+              </a:rPr>
+              <a:t>the more it simplifies,</a:t>
+            </a:r>
+          </a:p>
+          <a:p>
+            <a:pPr algn="ctr"/>
+            <a:r>
+              <a:rPr sz="1350" b="1">
+                <a:solidFill>
+                  <a:srgbClr val="8A5E35"/>
+                </a:solidFill>
+                <a:latin typeface="Readex Pro"/>
+                <a:cs typeface="Readex Pro"/>
+                <a:ea typeface="Readex Pro"/>
+              </a:rPr>
+              <a:t>the less meaning it keeps, obviously</a:t>
+            </a:r>
+          </a:p>
+        </p:txBody>
+      </p:sp>
+      <p:sp>
+        <p:nvSpPr>
+          <p:cNvPr id="33" name="Rounded Rectangle 32"/>
+          <p:cNvSpPr/>
+          <p:nvPr/>
+        </p:nvSpPr>
+        <p:spPr>
+          <a:xfrm>
+            <a:off x="7178040" y="2711196"/>
+            <a:ext cx="2157984" cy="861822"/>
+          </a:xfrm>
+          <a:prstGeom prst="roundRect">
+            <a:avLst>
+              <a:gd name="adj" fmla="val 10610"/>
+            </a:avLst>
+          </a:prstGeom>
+          <a:solidFill>
+            <a:srgbClr val="C6986B"/>
+          </a:solidFill>
+          <a:ln w="15875">
+            <a:solidFill>
+              <a:srgbClr val="C6986B"/>
+            </a:solidFill>
+          </a:ln>
+          <a:effectLst/>
+        </p:spPr>
+        <p:style>
+          <a:lnRef idx="1">
+            <a:schemeClr val="accent1"/>
+          </a:lnRef>
+          <a:fillRef idx="3">
+            <a:schemeClr val="accent1"/>
+          </a:fillRef>
+          <a:effectRef idx="2">
+            <a:schemeClr val="accent1"/>
+          </a:effectRef>
+          <a:fontRef idx="minor">
+            <a:schemeClr val="lt1"/>
+          </a:fontRef>
+        </p:style>
+        <p:txBody>
+          <a:bodyPr rtlCol="0" anchor="ctr" wrap="square" lIns="109728" rIns="109728" tIns="0" bIns="0"/>
+          <a:lstStyle/>
+          <a:p>
+            <a:pPr algn="ctr"/>
+            <a:r>
+              <a:rPr sz="1350" b="1">
+                <a:solidFill>
+                  <a:srgbClr val="1A1A14"/>
+                </a:solidFill>
+                <a:latin typeface="Readex Pro"/>
+                <a:cs typeface="Readex Pro"/>
+                <a:ea typeface="Readex Pro"/>
+              </a:rPr>
+              <a:t>v0.3 keeps the most meaning (82%)</a:t>
+            </a:r>
+          </a:p>
+          <a:p>
+            <a:pPr algn="ctr"/>
+            <a:r>
+              <a:rPr sz="1350" b="1">
+                <a:solidFill>
+                  <a:srgbClr val="1A1A14"/>
+                </a:solidFill>
+                <a:latin typeface="Readex Pro"/>
+                <a:cs typeface="Readex Pro"/>
+                <a:ea typeface="Readex Pro"/>
+              </a:rPr>
+              <a:t>and still cuts 5.2 words off</a:t>
+            </a:r>
+          </a:p>
+          <a:p>
+            <a:pPr algn="ctr"/>
+            <a:r>
+              <a:rPr sz="1350" b="1">
+                <a:solidFill>
+                  <a:srgbClr val="1A1A14"/>
+                </a:solidFill>
+                <a:latin typeface="Readex Pro"/>
+                <a:cs typeface="Readex Pro"/>
+                <a:ea typeface="Readex Pro"/>
+              </a:rPr>
+              <a:t>the longest clause</a:t>
+            </a:r>
+          </a:p>
+        </p:txBody>
+      </p:sp>
+      <p:sp>
+        <p:nvSpPr>
+          <p:cNvPr id="34" name="Rounded Rectangle 33"/>
+          <p:cNvSpPr/>
+          <p:nvPr/>
+        </p:nvSpPr>
+        <p:spPr>
+          <a:xfrm>
+            <a:off x="7178040" y="3774185"/>
+            <a:ext cx="2157984" cy="601980"/>
+          </a:xfrm>
+          <a:prstGeom prst="roundRect">
+            <a:avLst>
+              <a:gd name="adj" fmla="val 15189"/>
             </a:avLst>
           </a:prstGeom>
           <a:solidFill>
@@ -18339,7 +18656,7 @@
           <a:p>
             <a:pPr algn="ctr"/>
             <a:r>
-              <a:rPr sz="1300" b="0">
+              <a:rPr sz="1250" b="0">
                 <a:solidFill>
                   <a:srgbClr val="4A4842"/>
                 </a:solidFill>
@@ -18347,13 +18664,13 @@
                 <a:cs typeface="Readex Pro"/>
                 <a:ea typeface="Readex Pro"/>
               </a:rPr>
-              <a:t>the more it simplifies,</a:t>
+              <a:t>v0.3 is the app's large model,</a:t>
             </a:r>
           </a:p>
           <a:p>
             <a:pPr algn="ctr"/>
             <a:r>
-              <a:rPr sz="1300" b="0">
+              <a:rPr sz="1250" b="0">
                 <a:solidFill>
                   <a:srgbClr val="4A4842"/>
                 </a:solidFill>
@@ -18361,153 +18678,7 @@
                 <a:cs typeface="Readex Pro"/>
                 <a:ea typeface="Readex Pro"/>
               </a:rPr>
-              <a:t>the less meaning it keeps</a:t>
-            </a:r>
-          </a:p>
-        </p:txBody>
-      </p:sp>
-      <p:sp>
-        <p:nvSpPr>
-          <p:cNvPr id="29" name="Rounded Rectangle 28"/>
-          <p:cNvSpPr/>
-          <p:nvPr/>
-        </p:nvSpPr>
-        <p:spPr>
-          <a:xfrm>
-            <a:off x="6464807" y="2788920"/>
-            <a:ext cx="2871216" cy="487680"/>
-          </a:xfrm>
-          <a:prstGeom prst="roundRect">
-            <a:avLst>
-              <a:gd name="adj" fmla="val 16875"/>
-            </a:avLst>
-          </a:prstGeom>
-          <a:solidFill>
-            <a:srgbClr val="C6986B"/>
-          </a:solidFill>
-          <a:ln w="15875">
-            <a:solidFill>
-              <a:srgbClr val="C6986B"/>
-            </a:solidFill>
-          </a:ln>
-          <a:effectLst/>
-        </p:spPr>
-        <p:style>
-          <a:lnRef idx="1">
-            <a:schemeClr val="accent1"/>
-          </a:lnRef>
-          <a:fillRef idx="3">
-            <a:schemeClr val="accent1"/>
-          </a:fillRef>
-          <a:effectRef idx="2">
-            <a:schemeClr val="accent1"/>
-          </a:effectRef>
-          <a:fontRef idx="minor">
-            <a:schemeClr val="lt1"/>
-          </a:fontRef>
-        </p:style>
-        <p:txBody>
-          <a:bodyPr rtlCol="0" anchor="ctr" wrap="square" lIns="109728" rIns="109728" tIns="0" bIns="0"/>
-          <a:lstStyle/>
-          <a:p>
-            <a:pPr algn="ctr"/>
-            <a:r>
-              <a:rPr sz="1050" b="1">
-                <a:solidFill>
-                  <a:srgbClr val="1A1A14"/>
-                </a:solidFill>
-                <a:latin typeface="Readex Pro"/>
-                <a:cs typeface="Readex Pro"/>
-                <a:ea typeface="Readex Pro"/>
-              </a:rPr>
-              <a:t>v0.3 keeps the most meaning (82%)</a:t>
-            </a:r>
-          </a:p>
-          <a:p>
-            <a:pPr algn="ctr"/>
-            <a:r>
-              <a:rPr sz="1050" b="1">
-                <a:solidFill>
-                  <a:srgbClr val="1A1A14"/>
-                </a:solidFill>
-                <a:latin typeface="Readex Pro"/>
-                <a:cs typeface="Readex Pro"/>
-                <a:ea typeface="Readex Pro"/>
-              </a:rPr>
-              <a:t>and still cuts 5.2 words</a:t>
-            </a:r>
-          </a:p>
-        </p:txBody>
-      </p:sp>
-      <p:sp>
-        <p:nvSpPr>
-          <p:cNvPr id="30" name="Rounded Rectangle 29"/>
-          <p:cNvSpPr/>
-          <p:nvPr/>
-        </p:nvSpPr>
-        <p:spPr>
-          <a:xfrm>
-            <a:off x="6464807" y="3794760"/>
-            <a:ext cx="2449068" cy="536448"/>
-          </a:xfrm>
-          <a:prstGeom prst="roundRect">
-            <a:avLst>
-              <a:gd name="adj" fmla="val 15340"/>
-            </a:avLst>
-          </a:prstGeom>
-          <a:solidFill>
-            <a:srgbClr val="EFE9D9"/>
-          </a:solidFill>
-          <a:ln w="15875">
-            <a:solidFill>
-              <a:srgbClr val="EFE9D9"/>
-            </a:solidFill>
-          </a:ln>
-          <a:effectLst/>
-        </p:spPr>
-        <p:style>
-          <a:lnRef idx="1">
-            <a:schemeClr val="accent1"/>
-          </a:lnRef>
-          <a:fillRef idx="3">
-            <a:schemeClr val="accent1"/>
-          </a:fillRef>
-          <a:effectRef idx="2">
-            <a:schemeClr val="accent1"/>
-          </a:effectRef>
-          <a:fontRef idx="minor">
-            <a:schemeClr val="lt1"/>
-          </a:fontRef>
-        </p:style>
-        <p:txBody>
-          <a:bodyPr rtlCol="0" anchor="ctr" wrap="square" lIns="109728" rIns="109728" tIns="0" bIns="0"/>
-          <a:lstStyle/>
-          <a:p>
-            <a:pPr algn="ctr"/>
-            <a:r>
-              <a:rPr sz="1200" b="0">
-                <a:solidFill>
-                  <a:srgbClr val="4A4842"/>
-                </a:solidFill>
-                <a:latin typeface="Readex Pro"/>
-                <a:cs typeface="Readex Pro"/>
-                <a:ea typeface="Readex Pro"/>
-              </a:rPr>
-              <a:t>the app's large model,</a:t>
-            </a:r>
-          </a:p>
-          <a:p>
-            <a:pPr algn="ctr"/>
-            <a:r>
-              <a:rPr sz="1200" b="0">
-                <a:solidFill>
-                  <a:srgbClr val="4A4842"/>
-                </a:solidFill>
-                <a:latin typeface="Readex Pro"/>
-                <a:cs typeface="Readex Pro"/>
-                <a:ea typeface="Readex Pro"/>
-              </a:rPr>
-              <a:t>four beams + safety net</a:t>
+              <a:t>decoded with four beams</a:t>
             </a:r>
           </a:p>
         </p:txBody>
@@ -19728,11 +19899,11 @@
         <p:spPr>
           <a:xfrm>
             <a:off x="1871535" y="5029200"/>
-            <a:ext cx="6159881" cy="357631"/>
+            <a:ext cx="6159881" cy="364236"/>
           </a:xfrm>
           <a:prstGeom prst="roundRect">
             <a:avLst>
-              <a:gd name="adj" fmla="val 23011"/>
+              <a:gd name="adj" fmla="val 22594"/>
             </a:avLst>
           </a:prstGeom>
           <a:solidFill>
@@ -20493,11 +20664,11 @@
         <p:spPr>
           <a:xfrm>
             <a:off x="1576578" y="4343400"/>
-            <a:ext cx="6749795" cy="341375"/>
+            <a:ext cx="6749795" cy="347472"/>
           </a:xfrm>
           <a:prstGeom prst="roundRect">
             <a:avLst>
-              <a:gd name="adj" fmla="val 24107"/>
+              <a:gd name="adj" fmla="val 23684"/>
             </a:avLst>
           </a:prstGeom>
           <a:solidFill>
@@ -20552,11 +20723,11 @@
         <p:spPr>
           <a:xfrm>
             <a:off x="3008248" y="4892040"/>
-            <a:ext cx="3886454" cy="357631"/>
+            <a:ext cx="3886454" cy="364236"/>
           </a:xfrm>
           <a:prstGeom prst="roundRect">
             <a:avLst>
-              <a:gd name="adj" fmla="val 23011"/>
+              <a:gd name="adj" fmla="val 22594"/>
             </a:avLst>
           </a:prstGeom>
           <a:solidFill>
@@ -20611,11 +20782,11 @@
         <p:spPr>
           <a:xfrm>
             <a:off x="990917" y="5440680"/>
-            <a:ext cx="7921116" cy="333248"/>
+            <a:ext cx="7921116" cy="339090"/>
           </a:xfrm>
           <a:prstGeom prst="roundRect">
             <a:avLst>
-              <a:gd name="adj" fmla="val 24695"/>
+              <a:gd name="adj" fmla="val 24269"/>
             </a:avLst>
           </a:prstGeom>
           <a:solidFill>
@@ -22483,11 +22654,11 @@
         <p:spPr>
           <a:xfrm>
             <a:off x="2318956" y="2606040"/>
-            <a:ext cx="5265039" cy="357631"/>
+            <a:ext cx="5265039" cy="364236"/>
           </a:xfrm>
           <a:prstGeom prst="roundRect">
             <a:avLst>
-              <a:gd name="adj" fmla="val 23011"/>
+              <a:gd name="adj" fmla="val 22594"/>
             </a:avLst>
           </a:prstGeom>
           <a:solidFill>
@@ -22542,11 +22713,11 @@
         <p:spPr>
           <a:xfrm>
             <a:off x="3236912" y="3172968"/>
-            <a:ext cx="3429127" cy="357631"/>
+            <a:ext cx="3429127" cy="364236"/>
           </a:xfrm>
           <a:prstGeom prst="roundRect">
             <a:avLst>
-              <a:gd name="adj" fmla="val 23011"/>
+              <a:gd name="adj" fmla="val 22594"/>
             </a:avLst>
           </a:prstGeom>
           <a:solidFill>
@@ -22601,11 +22772,11 @@
         <p:spPr>
           <a:xfrm>
             <a:off x="2642552" y="3739896"/>
-            <a:ext cx="4617847" cy="357631"/>
+            <a:ext cx="4617847" cy="364236"/>
           </a:xfrm>
           <a:prstGeom prst="roundRect">
             <a:avLst>
-              <a:gd name="adj" fmla="val 23011"/>
+              <a:gd name="adj" fmla="val 22594"/>
             </a:avLst>
           </a:prstGeom>
           <a:solidFill>
@@ -23358,11 +23529,11 @@
         <p:spPr>
           <a:xfrm>
             <a:off x="6034658" y="2788920"/>
-            <a:ext cx="2734818" cy="390144"/>
+            <a:ext cx="2734818" cy="397764"/>
           </a:xfrm>
           <a:prstGeom prst="roundRect">
             <a:avLst>
-              <a:gd name="adj" fmla="val 21093"/>
+              <a:gd name="adj" fmla="val 20689"/>
             </a:avLst>
           </a:prstGeom>
           <a:solidFill>
@@ -23417,11 +23588,11 @@
         <p:spPr>
           <a:xfrm>
             <a:off x="5963284" y="3429000"/>
-            <a:ext cx="2877566" cy="373888"/>
+            <a:ext cx="2877566" cy="381000"/>
           </a:xfrm>
           <a:prstGeom prst="roundRect">
             <a:avLst>
-              <a:gd name="adj" fmla="val 22010"/>
+              <a:gd name="adj" fmla="val 21599"/>
             </a:avLst>
           </a:prstGeom>
           <a:solidFill>
@@ -23476,11 +23647,11 @@
         <p:spPr>
           <a:xfrm>
             <a:off x="5662739" y="4069079"/>
-            <a:ext cx="3478657" cy="357631"/>
+            <a:ext cx="3478657" cy="364236"/>
           </a:xfrm>
           <a:prstGeom prst="roundRect">
             <a:avLst>
-              <a:gd name="adj" fmla="val 23011"/>
+              <a:gd name="adj" fmla="val 22594"/>
             </a:avLst>
           </a:prstGeom>
           <a:solidFill>
@@ -23898,11 +24069,11 @@
         <p:spPr>
           <a:xfrm>
             <a:off x="1501203" y="2743200"/>
-            <a:ext cx="2474849" cy="357631"/>
+            <a:ext cx="2474849" cy="364236"/>
           </a:xfrm>
           <a:prstGeom prst="roundRect">
             <a:avLst>
-              <a:gd name="adj" fmla="val 23011"/>
+              <a:gd name="adj" fmla="val 22594"/>
             </a:avLst>
           </a:prstGeom>
           <a:solidFill>
@@ -23957,11 +24128,11 @@
         <p:spPr>
           <a:xfrm>
             <a:off x="1388109" y="3520440"/>
-            <a:ext cx="2701036" cy="357631"/>
+            <a:ext cx="2701036" cy="364236"/>
           </a:xfrm>
           <a:prstGeom prst="roundRect">
             <a:avLst>
-              <a:gd name="adj" fmla="val 23011"/>
+              <a:gd name="adj" fmla="val 22594"/>
             </a:avLst>
           </a:prstGeom>
           <a:solidFill>
@@ -24016,11 +24187,11 @@
         <p:spPr>
           <a:xfrm>
             <a:off x="827881" y="4297680"/>
-            <a:ext cx="3821493" cy="333248"/>
+            <a:ext cx="3821493" cy="339090"/>
           </a:xfrm>
           <a:prstGeom prst="roundRect">
             <a:avLst>
-              <a:gd name="adj" fmla="val 24695"/>
+              <a:gd name="adj" fmla="val 24269"/>
             </a:avLst>
           </a:prstGeom>
           <a:solidFill>
@@ -24160,11 +24331,11 @@
         <p:spPr>
           <a:xfrm>
             <a:off x="5931852" y="2743200"/>
-            <a:ext cx="2940431" cy="357631"/>
+            <a:ext cx="2940431" cy="364236"/>
           </a:xfrm>
           <a:prstGeom prst="roundRect">
             <a:avLst>
-              <a:gd name="adj" fmla="val 23011"/>
+              <a:gd name="adj" fmla="val 22594"/>
             </a:avLst>
           </a:prstGeom>
           <a:solidFill>
@@ -24219,11 +24390,11 @@
         <p:spPr>
           <a:xfrm>
             <a:off x="5823711" y="3520440"/>
-            <a:ext cx="3156712" cy="357631"/>
+            <a:ext cx="3156712" cy="364236"/>
           </a:xfrm>
           <a:prstGeom prst="roundRect">
             <a:avLst>
-              <a:gd name="adj" fmla="val 23011"/>
+              <a:gd name="adj" fmla="val 22594"/>
             </a:avLst>
           </a:prstGeom>
           <a:solidFill>
@@ -24278,11 +24449,11 @@
         <p:spPr>
           <a:xfrm>
             <a:off x="5684202" y="4297680"/>
-            <a:ext cx="3435731" cy="357631"/>
+            <a:ext cx="3435731" cy="364236"/>
           </a:xfrm>
           <a:prstGeom prst="roundRect">
             <a:avLst>
-              <a:gd name="adj" fmla="val 23011"/>
+              <a:gd name="adj" fmla="val 22594"/>
             </a:avLst>
           </a:prstGeom>
           <a:solidFill>
@@ -24980,11 +25151,11 @@
         <p:spPr>
           <a:xfrm>
             <a:off x="566928" y="3401568"/>
-            <a:ext cx="2659761" cy="357631"/>
+            <a:ext cx="2659761" cy="364236"/>
           </a:xfrm>
           <a:prstGeom prst="roundRect">
             <a:avLst>
-              <a:gd name="adj" fmla="val 23011"/>
+              <a:gd name="adj" fmla="val 22594"/>
             </a:avLst>
           </a:prstGeom>
           <a:solidFill>
@@ -25039,11 +25210,11 @@
         <p:spPr>
           <a:xfrm>
             <a:off x="566928" y="3877056"/>
-            <a:ext cx="4485767" cy="357631"/>
+            <a:ext cx="4485767" cy="364236"/>
           </a:xfrm>
           <a:prstGeom prst="roundRect">
             <a:avLst>
-              <a:gd name="adj" fmla="val 23011"/>
+              <a:gd name="adj" fmla="val 22594"/>
             </a:avLst>
           </a:prstGeom>
           <a:solidFill>
@@ -25098,11 +25269,11 @@
         <p:spPr>
           <a:xfrm>
             <a:off x="566928" y="4352544"/>
-            <a:ext cx="3843528" cy="357631"/>
+            <a:ext cx="3843528" cy="364236"/>
           </a:xfrm>
           <a:prstGeom prst="roundRect">
             <a:avLst>
-              <a:gd name="adj" fmla="val 23011"/>
+              <a:gd name="adj" fmla="val 22594"/>
             </a:avLst>
           </a:prstGeom>
           <a:solidFill>
@@ -25157,11 +25328,11 @@
         <p:spPr>
           <a:xfrm>
             <a:off x="566928" y="5029200"/>
-            <a:ext cx="7021067" cy="341375"/>
+            <a:ext cx="7021067" cy="347472"/>
           </a:xfrm>
           <a:prstGeom prst="roundRect">
             <a:avLst>
-              <a:gd name="adj" fmla="val 24107"/>
+              <a:gd name="adj" fmla="val 23684"/>
             </a:avLst>
           </a:prstGeom>
           <a:solidFill>
@@ -26881,11 +27052,11 @@
         <p:spPr>
           <a:xfrm>
             <a:off x="5596128" y="2331720"/>
-            <a:ext cx="2827782" cy="601472"/>
+            <a:ext cx="2827782" cy="615696"/>
           </a:xfrm>
           <a:prstGeom prst="roundRect">
             <a:avLst>
-              <a:gd name="adj" fmla="val 13682"/>
+              <a:gd name="adj" fmla="val 13366"/>
             </a:avLst>
           </a:prstGeom>
           <a:solidFill>
@@ -26954,11 +27125,11 @@
         <p:spPr>
           <a:xfrm>
             <a:off x="1920493" y="3977639"/>
-            <a:ext cx="6061964" cy="373888"/>
+            <a:ext cx="6061964" cy="381000"/>
           </a:xfrm>
           <a:prstGeom prst="roundRect">
             <a:avLst>
-              <a:gd name="adj" fmla="val 22010"/>
+              <a:gd name="adj" fmla="val 21599"/>
             </a:avLst>
           </a:prstGeom>
           <a:solidFill>

--- a/deliverables/04_presentation/Bayan_Submission.pptx
+++ b/deliverables/04_presentation/Bayan_Submission.pptx
@@ -14781,12 +14781,12 @@
         </p:nvSpPr>
         <p:spPr>
           <a:xfrm>
-            <a:off x="566928" y="2926080"/>
-            <a:ext cx="4434840" cy="3063240"/>
+            <a:off x="566928" y="2834640"/>
+            <a:ext cx="4434840" cy="3246120"/>
           </a:xfrm>
           <a:prstGeom prst="roundRect">
             <a:avLst>
-              <a:gd name="adj" fmla="val 4776"/>
+              <a:gd name="adj" fmla="val 4507"/>
             </a:avLst>
           </a:prstGeom>
           <a:solidFill>
@@ -14829,7 +14829,7 @@
         </p:nvSpPr>
         <p:spPr>
           <a:xfrm>
-            <a:off x="566928" y="3090672"/>
+            <a:off x="566928" y="2999232"/>
             <a:ext cx="4434840" cy="347472"/>
           </a:xfrm>
           <a:prstGeom prst="rect">
@@ -14866,12 +14866,12 @@
         </p:nvSpPr>
         <p:spPr>
           <a:xfrm>
-            <a:off x="795528" y="3584448"/>
-            <a:ext cx="3977639" cy="442468"/>
+            <a:off x="818387" y="3493008"/>
+            <a:ext cx="3931920" cy="384048"/>
           </a:xfrm>
           <a:prstGeom prst="roundRect">
             <a:avLst>
-              <a:gd name="adj" fmla="val 18599"/>
+              <a:gd name="adj" fmla="val 21428"/>
             </a:avLst>
           </a:prstGeom>
           <a:solidFill>
@@ -14925,12 +14925,12 @@
         </p:nvSpPr>
         <p:spPr>
           <a:xfrm>
-            <a:off x="1988058" y="4173220"/>
-            <a:ext cx="1592579" cy="514858"/>
+            <a:off x="818387" y="4005072"/>
+            <a:ext cx="3931920" cy="384048"/>
           </a:xfrm>
           <a:prstGeom prst="roundRect">
             <a:avLst>
-              <a:gd name="adj" fmla="val 15984"/>
+              <a:gd name="adj" fmla="val 21428"/>
             </a:avLst>
           </a:prstGeom>
           <a:solidFill>
@@ -14963,7 +14963,7 @@
           <a:p>
             <a:pPr algn="ctr"/>
             <a:r>
-              <a:rPr sz="1300" b="0">
+              <a:rPr sz="1000" b="0">
                 <a:solidFill>
                   <a:srgbClr val="4A4842"/>
                 </a:solidFill>
@@ -14984,12 +14984,12 @@
         </p:nvSpPr>
         <p:spPr>
           <a:xfrm>
-            <a:off x="1942655" y="4834382"/>
-            <a:ext cx="1683384" cy="514858"/>
+            <a:off x="818387" y="4517136"/>
+            <a:ext cx="3931920" cy="384048"/>
           </a:xfrm>
           <a:prstGeom prst="roundRect">
             <a:avLst>
-              <a:gd name="adj" fmla="val 15984"/>
+              <a:gd name="adj" fmla="val 21428"/>
             </a:avLst>
           </a:prstGeom>
           <a:solidFill>
@@ -15022,7 +15022,7 @@
           <a:p>
             <a:pPr algn="ctr"/>
             <a:r>
-              <a:rPr sz="1300" b="0">
+              <a:rPr sz="1000" b="0">
                 <a:solidFill>
                   <a:srgbClr val="4A4842"/>
                 </a:solidFill>
@@ -15043,12 +15043,12 @@
         </p:nvSpPr>
         <p:spPr>
           <a:xfrm>
-            <a:off x="2010346" y="5495544"/>
-            <a:ext cx="1548003" cy="514858"/>
+            <a:off x="818387" y="5029200"/>
+            <a:ext cx="3931920" cy="384048"/>
           </a:xfrm>
           <a:prstGeom prst="roundRect">
             <a:avLst>
-              <a:gd name="adj" fmla="val 15984"/>
+              <a:gd name="adj" fmla="val 21428"/>
             </a:avLst>
           </a:prstGeom>
           <a:solidFill>
@@ -15081,7 +15081,7 @@
           <a:p>
             <a:pPr algn="ctr"/>
             <a:r>
-              <a:rPr sz="1300" b="0">
+              <a:rPr sz="1000" b="0">
                 <a:solidFill>
                   <a:srgbClr val="4A4842"/>
                 </a:solidFill>
@@ -15102,12 +15102,12 @@
         </p:nvSpPr>
         <p:spPr>
           <a:xfrm>
-            <a:off x="5321807" y="2926080"/>
-            <a:ext cx="4434840" cy="3063240"/>
+            <a:off x="5321807" y="2834640"/>
+            <a:ext cx="4434840" cy="3246120"/>
           </a:xfrm>
           <a:prstGeom prst="roundRect">
             <a:avLst>
-              <a:gd name="adj" fmla="val 4776"/>
+              <a:gd name="adj" fmla="val 4507"/>
             </a:avLst>
           </a:prstGeom>
           <a:solidFill>
@@ -15150,7 +15150,7 @@
         </p:nvSpPr>
         <p:spPr>
           <a:xfrm>
-            <a:off x="5321807" y="3090672"/>
+            <a:off x="5321807" y="2999232"/>
             <a:ext cx="4434840" cy="347472"/>
           </a:xfrm>
           <a:prstGeom prst="rect">
@@ -15187,12 +15187,12 @@
         </p:nvSpPr>
         <p:spPr>
           <a:xfrm>
-            <a:off x="6618287" y="3584448"/>
-            <a:ext cx="1841881" cy="514858"/>
+            <a:off x="5573267" y="3493008"/>
+            <a:ext cx="3931920" cy="384048"/>
           </a:xfrm>
           <a:prstGeom prst="roundRect">
             <a:avLst>
-              <a:gd name="adj" fmla="val 15984"/>
+              <a:gd name="adj" fmla="val 21428"/>
             </a:avLst>
           </a:prstGeom>
           <a:solidFill>
@@ -15225,7 +15225,7 @@
           <a:p>
             <a:pPr algn="ctr"/>
             <a:r>
-              <a:rPr sz="1300" b="0">
+              <a:rPr sz="1250" b="0">
                 <a:solidFill>
                   <a:srgbClr val="4A4842"/>
                 </a:solidFill>
@@ -15246,12 +15246,12 @@
         </p:nvSpPr>
         <p:spPr>
           <a:xfrm>
-            <a:off x="6879145" y="4245610"/>
-            <a:ext cx="1320165" cy="514858"/>
+            <a:off x="5573267" y="4005072"/>
+            <a:ext cx="3931920" cy="384048"/>
           </a:xfrm>
           <a:prstGeom prst="roundRect">
             <a:avLst>
-              <a:gd name="adj" fmla="val 15984"/>
+              <a:gd name="adj" fmla="val 21428"/>
             </a:avLst>
           </a:prstGeom>
           <a:solidFill>
@@ -15284,7 +15284,7 @@
           <a:p>
             <a:pPr algn="ctr"/>
             <a:r>
-              <a:rPr sz="1300" b="0">
+              <a:rPr sz="1250" b="0">
                 <a:solidFill>
                   <a:srgbClr val="4A4842"/>
                 </a:solidFill>
@@ -15305,12 +15305,12 @@
         </p:nvSpPr>
         <p:spPr>
           <a:xfrm>
-            <a:off x="6629019" y="4906772"/>
-            <a:ext cx="1820417" cy="514858"/>
+            <a:off x="5573267" y="4517136"/>
+            <a:ext cx="3931920" cy="384048"/>
           </a:xfrm>
           <a:prstGeom prst="roundRect">
             <a:avLst>
-              <a:gd name="adj" fmla="val 15984"/>
+              <a:gd name="adj" fmla="val 21428"/>
             </a:avLst>
           </a:prstGeom>
           <a:solidFill>
@@ -15343,7 +15343,7 @@
           <a:p>
             <a:pPr algn="ctr"/>
             <a:r>
-              <a:rPr sz="1300" b="0">
+              <a:rPr sz="1250" b="0">
                 <a:solidFill>
                   <a:srgbClr val="4A4842"/>
                 </a:solidFill>
@@ -15364,45 +15364,8 @@
         </p:nvSpPr>
         <p:spPr>
           <a:xfrm>
-            <a:off x="5504688" y="5550408"/>
-            <a:ext cx="4069079" cy="347472"/>
-          </a:xfrm>
-          <a:prstGeom prst="rect">
-            <a:avLst/>
-          </a:prstGeom>
-          <a:noFill/>
-        </p:spPr>
-        <p:txBody>
-          <a:bodyPr wrap="square" lIns="0" rIns="0" tIns="0" bIns="0" anchor="ctr">
-            <a:spAutoFit/>
-          </a:bodyPr>
-          <a:lstStyle/>
-          <a:p>
-            <a:pPr algn="ctr"/>
-            <a:r>
-              <a:rPr sz="1050" b="0">
-                <a:solidFill>
-                  <a:srgbClr val="6F6B5E"/>
-                </a:solidFill>
-                <a:latin typeface="Readex Pro"/>
-                <a:cs typeface="Readex Pro"/>
-                <a:ea typeface="Readex Pro"/>
-              </a:rPr>
-              <a:t>people barely agree on these: never used to decide</a:t>
-            </a:r>
-          </a:p>
-        </p:txBody>
-      </p:sp>
-      <p:sp>
-        <p:nvSpPr>
-          <p:cNvPr id="28" name="TextBox 27"/>
-          <p:cNvSpPr txBox="1"/>
-          <p:nvPr/>
-        </p:nvSpPr>
-        <p:spPr>
-          <a:xfrm>
-            <a:off x="5504688" y="5550408"/>
-            <a:ext cx="4069079" cy="347472"/>
+            <a:off x="5504688" y="5696712"/>
+            <a:ext cx="4069079" cy="292608"/>
           </a:xfrm>
           <a:prstGeom prst="rect">
             <a:avLst/>
@@ -21881,7 +21844,7 @@
         </p:nvSpPr>
         <p:spPr>
           <a:xfrm>
-            <a:off x="886968" y="3639312"/>
+            <a:off x="1069848" y="3639312"/>
             <a:ext cx="45720" cy="146304"/>
           </a:xfrm>
           <a:prstGeom prst="rect">
@@ -21925,7 +21888,7 @@
         </p:nvSpPr>
         <p:spPr>
           <a:xfrm>
-            <a:off x="996695" y="3611880"/>
+            <a:off x="1179576" y="3611880"/>
             <a:ext cx="5943600" cy="201168"/>
           </a:xfrm>
           <a:prstGeom prst="rect">
@@ -21939,7 +21902,7 @@
           </a:bodyPr>
           <a:lstStyle/>
           <a:p>
-            <a:pPr algn="l"/>
+            <a:pPr algn="ctr"/>
             <a:r>
               <a:rPr sz="1050" b="0">
                 <a:solidFill>

--- a/deliverables/04_presentation/Bayan_Submission.pptx
+++ b/deliverables/04_presentation/Bayan_Submission.pptx
@@ -28,6 +28,7 @@
     <p:sldId id="273" r:id="rId37"/>
     <p:sldId id="274" r:id="rId38"/>
     <p:sldId id="275" r:id="rId39"/>
+    <p:sldId id="276" r:id="rId40"/>
   </p:sldIdLst>
   <p:sldSz cx="9902825" cy="6858000"/>
   <p:notesSz cx="6858000" cy="9144000"/>
@@ -1753,7 +1754,7 @@
           </a:p>
           <a:p>
             <a:r>
-              <a:t>Shorter clauses help the weakest readers most. So Bayan reduces reading load: long clauses, hard words. Not decoding, and we don't yet claim it helps readers with dyslexia.</a:t>
+              <a:t>Shorter clauses help the weakest readers most. So Bayan reduces reading load: long clauses, hard words. Tashkeel is a setting in the app, and we don't yet claim it helps readers with dyslexia.</a:t>
             </a:r>
           </a:p>
         </p:txBody>
@@ -1937,7 +1938,7 @@
           </a:p>
           <a:p>
             <a:r>
-              <a:t>Shorter clauses help the weakest readers most. So Bayan reduces reading load: long clauses, hard words. Not decoding, and we don't yet claim it helps readers with dyslexia.</a:t>
+              <a:t>Shorter clauses help the weakest readers most. So Bayan reduces reading load: long clauses, hard words. Tashkeel is a setting in the app, and we don't yet claim it helps readers with dyslexia.</a:t>
             </a:r>
           </a:p>
         </p:txBody>
@@ -13959,7 +13960,7 @@
         <p:spPr>
           <a:xfrm>
             <a:off x="566928" y="4892040"/>
-            <a:ext cx="6126480" cy="256032"/>
+            <a:ext cx="6126480" cy="384048"/>
           </a:xfrm>
           <a:prstGeom prst="rect">
             <a:avLst/>
@@ -13982,7 +13983,7 @@
                 <a:cs typeface="Readex Pro"/>
                 <a:ea typeface="Readex Pro"/>
               </a:rPr>
-              <a:t>test core items, as trained · words cut = longest clause, before minus after</a:t>
+              <a:t>test core items, as trained (float, greedy) · the shipped app model with four beams is on the results slide</a:t>
             </a:r>
           </a:p>
         </p:txBody>
@@ -14781,12 +14782,12 @@
         </p:nvSpPr>
         <p:spPr>
           <a:xfrm>
-            <a:off x="566928" y="2834640"/>
-            <a:ext cx="4434840" cy="3246120"/>
+            <a:off x="566928" y="2651760"/>
+            <a:ext cx="4434840" cy="3611880"/>
           </a:xfrm>
           <a:prstGeom prst="roundRect">
             <a:avLst>
-              <a:gd name="adj" fmla="val 4507"/>
+              <a:gd name="adj" fmla="val 4050"/>
             </a:avLst>
           </a:prstGeom>
           <a:solidFill>
@@ -14829,8 +14830,8 @@
         </p:nvSpPr>
         <p:spPr>
           <a:xfrm>
-            <a:off x="566928" y="2999232"/>
-            <a:ext cx="4434840" cy="347472"/>
+            <a:off x="566928" y="2798064"/>
+            <a:ext cx="4434840" cy="329184"/>
           </a:xfrm>
           <a:prstGeom prst="rect">
             <a:avLst/>
@@ -14845,7 +14846,7 @@
           <a:p>
             <a:pPr algn="ctr"/>
             <a:r>
-              <a:rPr sz="1600" b="1">
+              <a:rPr sz="1500" b="1">
                 <a:solidFill>
                   <a:srgbClr val="8A5E35"/>
                 </a:solidFill>
@@ -14866,12 +14867,12 @@
         </p:nvSpPr>
         <p:spPr>
           <a:xfrm>
-            <a:off x="818387" y="3493008"/>
-            <a:ext cx="3931920" cy="384048"/>
+            <a:off x="694944" y="3218688"/>
+            <a:ext cx="4178807" cy="530352"/>
           </a:xfrm>
           <a:prstGeom prst="roundRect">
             <a:avLst>
-              <a:gd name="adj" fmla="val 21428"/>
+              <a:gd name="adj" fmla="val 15517"/>
             </a:avLst>
           </a:prstGeom>
           <a:solidFill>
@@ -14904,7 +14905,7 @@
           <a:p>
             <a:pPr algn="ctr"/>
             <a:r>
-              <a:rPr sz="1000" b="1">
+              <a:rPr sz="1050" b="1">
                 <a:solidFill>
                   <a:srgbClr val="1A1A14"/>
                 </a:solidFill>
@@ -14925,12 +14926,12 @@
         </p:nvSpPr>
         <p:spPr>
           <a:xfrm>
-            <a:off x="818387" y="4005072"/>
-            <a:ext cx="3931920" cy="384048"/>
+            <a:off x="694944" y="3858768"/>
+            <a:ext cx="4178807" cy="530352"/>
           </a:xfrm>
           <a:prstGeom prst="roundRect">
             <a:avLst>
-              <a:gd name="adj" fmla="val 21428"/>
+              <a:gd name="adj" fmla="val 15517"/>
             </a:avLst>
           </a:prstGeom>
           <a:solidFill>
@@ -14963,7 +14964,7 @@
           <a:p>
             <a:pPr algn="ctr"/>
             <a:r>
-              <a:rPr sz="1000" b="0">
+              <a:rPr sz="1050" b="0">
                 <a:solidFill>
                   <a:srgbClr val="4A4842"/>
                 </a:solidFill>
@@ -14984,12 +14985,12 @@
         </p:nvSpPr>
         <p:spPr>
           <a:xfrm>
-            <a:off x="818387" y="4517136"/>
-            <a:ext cx="3931920" cy="384048"/>
+            <a:off x="694944" y="4498848"/>
+            <a:ext cx="4178807" cy="530352"/>
           </a:xfrm>
           <a:prstGeom prst="roundRect">
             <a:avLst>
-              <a:gd name="adj" fmla="val 21428"/>
+              <a:gd name="adj" fmla="val 15517"/>
             </a:avLst>
           </a:prstGeom>
           <a:solidFill>
@@ -15022,7 +15023,7 @@
           <a:p>
             <a:pPr algn="ctr"/>
             <a:r>
-              <a:rPr sz="1000" b="0">
+              <a:rPr sz="1050" b="0">
                 <a:solidFill>
                   <a:srgbClr val="4A4842"/>
                 </a:solidFill>
@@ -15043,12 +15044,12 @@
         </p:nvSpPr>
         <p:spPr>
           <a:xfrm>
-            <a:off x="818387" y="5029200"/>
-            <a:ext cx="3931920" cy="384048"/>
+            <a:off x="694944" y="5138928"/>
+            <a:ext cx="4178807" cy="530352"/>
           </a:xfrm>
           <a:prstGeom prst="roundRect">
             <a:avLst>
-              <a:gd name="adj" fmla="val 21428"/>
+              <a:gd name="adj" fmla="val 15517"/>
             </a:avLst>
           </a:prstGeom>
           <a:solidFill>
@@ -15081,7 +15082,7 @@
           <a:p>
             <a:pPr algn="ctr"/>
             <a:r>
-              <a:rPr sz="1000" b="0">
+              <a:rPr sz="1050" b="0">
                 <a:solidFill>
                   <a:srgbClr val="4A4842"/>
                 </a:solidFill>
@@ -15102,12 +15103,12 @@
         </p:nvSpPr>
         <p:spPr>
           <a:xfrm>
-            <a:off x="5321807" y="2834640"/>
-            <a:ext cx="4434840" cy="3246120"/>
+            <a:off x="5321807" y="2651760"/>
+            <a:ext cx="4434840" cy="3611880"/>
           </a:xfrm>
           <a:prstGeom prst="roundRect">
             <a:avLst>
-              <a:gd name="adj" fmla="val 4507"/>
+              <a:gd name="adj" fmla="val 4050"/>
             </a:avLst>
           </a:prstGeom>
           <a:solidFill>
@@ -15150,8 +15151,8 @@
         </p:nvSpPr>
         <p:spPr>
           <a:xfrm>
-            <a:off x="5321807" y="2999232"/>
-            <a:ext cx="4434840" cy="347472"/>
+            <a:off x="5321807" y="2798064"/>
+            <a:ext cx="4434840" cy="329184"/>
           </a:xfrm>
           <a:prstGeom prst="rect">
             <a:avLst/>
@@ -15166,7 +15167,7 @@
           <a:p>
             <a:pPr algn="ctr"/>
             <a:r>
-              <a:rPr sz="1600" b="1">
+              <a:rPr sz="1500" b="1">
                 <a:solidFill>
                   <a:srgbClr val="8A5E35"/>
                 </a:solidFill>
@@ -15187,12 +15188,12 @@
         </p:nvSpPr>
         <p:spPr>
           <a:xfrm>
-            <a:off x="5573267" y="3493008"/>
-            <a:ext cx="3931920" cy="384048"/>
+            <a:off x="5449823" y="3218688"/>
+            <a:ext cx="4178807" cy="530352"/>
           </a:xfrm>
           <a:prstGeom prst="roundRect">
             <a:avLst>
-              <a:gd name="adj" fmla="val 21428"/>
+              <a:gd name="adj" fmla="val 15517"/>
             </a:avLst>
           </a:prstGeom>
           <a:solidFill>
@@ -15225,7 +15226,7 @@
           <a:p>
             <a:pPr algn="ctr"/>
             <a:r>
-              <a:rPr sz="1250" b="0">
+              <a:rPr sz="1050" b="0">
                 <a:solidFill>
                   <a:srgbClr val="4A4842"/>
                 </a:solidFill>
@@ -15246,12 +15247,12 @@
         </p:nvSpPr>
         <p:spPr>
           <a:xfrm>
-            <a:off x="5573267" y="4005072"/>
-            <a:ext cx="3931920" cy="384048"/>
+            <a:off x="5449823" y="3858768"/>
+            <a:ext cx="4178807" cy="530352"/>
           </a:xfrm>
           <a:prstGeom prst="roundRect">
             <a:avLst>
-              <a:gd name="adj" fmla="val 21428"/>
+              <a:gd name="adj" fmla="val 15517"/>
             </a:avLst>
           </a:prstGeom>
           <a:solidFill>
@@ -15284,7 +15285,7 @@
           <a:p>
             <a:pPr algn="ctr"/>
             <a:r>
-              <a:rPr sz="1250" b="0">
+              <a:rPr sz="1050" b="0">
                 <a:solidFill>
                   <a:srgbClr val="4A4842"/>
                 </a:solidFill>
@@ -15305,12 +15306,12 @@
         </p:nvSpPr>
         <p:spPr>
           <a:xfrm>
-            <a:off x="5573267" y="4517136"/>
-            <a:ext cx="3931920" cy="384048"/>
+            <a:off x="5449823" y="4498848"/>
+            <a:ext cx="4178807" cy="530352"/>
           </a:xfrm>
           <a:prstGeom prst="roundRect">
             <a:avLst>
-              <a:gd name="adj" fmla="val 21428"/>
+              <a:gd name="adj" fmla="val 15517"/>
             </a:avLst>
           </a:prstGeom>
           <a:solidFill>
@@ -15343,7 +15344,7 @@
           <a:p>
             <a:pPr algn="ctr"/>
             <a:r>
-              <a:rPr sz="1250" b="0">
+              <a:rPr sz="1050" b="0">
                 <a:solidFill>
                   <a:srgbClr val="4A4842"/>
                 </a:solidFill>
@@ -15364,8 +15365,8 @@
         </p:nvSpPr>
         <p:spPr>
           <a:xfrm>
-            <a:off x="5504688" y="5696712"/>
-            <a:ext cx="4069079" cy="292608"/>
+            <a:off x="5504688" y="5934455"/>
+            <a:ext cx="4069079" cy="256032"/>
           </a:xfrm>
           <a:prstGeom prst="rect">
             <a:avLst/>
@@ -15380,7 +15381,7 @@
           <a:p>
             <a:pPr algn="ctr"/>
             <a:r>
-              <a:rPr sz="1050" b="0">
+              <a:rPr sz="950" b="0">
                 <a:solidFill>
                   <a:srgbClr val="6F6B5E"/>
                 </a:solidFill>
@@ -17504,8 +17505,8 @@
         </p:nvCxnSpPr>
         <p:spPr>
           <a:xfrm>
-            <a:off x="2148840" y="5120640"/>
-            <a:ext cx="4617720" cy="0"/>
+            <a:off x="2331720" y="5029200"/>
+            <a:ext cx="4434839" cy="0"/>
           </a:xfrm>
           <a:prstGeom prst="line">
             <a:avLst/>
@@ -17539,8 +17540,8 @@
         </p:nvCxnSpPr>
         <p:spPr>
           <a:xfrm>
-            <a:off x="2148840" y="1874519"/>
-            <a:ext cx="0" cy="3246121"/>
+            <a:off x="2331720" y="1783080"/>
+            <a:ext cx="0" cy="3246120"/>
           </a:xfrm>
           <a:prstGeom prst="line">
             <a:avLst/>
@@ -17574,8 +17575,8 @@
         </p:nvSpPr>
         <p:spPr>
           <a:xfrm>
-            <a:off x="2148840" y="5230368"/>
-            <a:ext cx="4617720" cy="256032"/>
+            <a:off x="2331720" y="5138928"/>
+            <a:ext cx="4434840" cy="256032"/>
           </a:xfrm>
           <a:prstGeom prst="rect">
             <a:avLst/>
@@ -17611,8 +17612,8 @@
         </p:nvSpPr>
         <p:spPr>
           <a:xfrm rot="16200000">
-            <a:off x="1673352" y="3369563"/>
-            <a:ext cx="3291840" cy="256032"/>
+            <a:off x="393191" y="3278123"/>
+            <a:ext cx="3108960" cy="256032"/>
           </a:xfrm>
           <a:prstGeom prst="rect">
             <a:avLst/>
@@ -17627,7 +17628,7 @@
           <a:p>
             <a:pPr algn="ctr"/>
             <a:r>
-              <a:rPr sz="1150" b="0">
+              <a:rPr sz="1100" b="0">
                 <a:solidFill>
                   <a:srgbClr val="6F6B5E"/>
                 </a:solidFill>
@@ -17648,7 +17649,7 @@
         </p:nvSpPr>
         <p:spPr>
           <a:xfrm>
-            <a:off x="6353555" y="4777963"/>
+            <a:off x="6365747" y="4686523"/>
             <a:ext cx="210312" cy="210312"/>
           </a:xfrm>
           <a:prstGeom prst="ellipse">
@@ -17692,7 +17693,7 @@
         </p:nvSpPr>
         <p:spPr>
           <a:xfrm>
-            <a:off x="5836920" y="4467067"/>
+            <a:off x="5849112" y="4375627"/>
             <a:ext cx="1243584" cy="237744"/>
           </a:xfrm>
           <a:prstGeom prst="rect">
@@ -17729,7 +17730,7 @@
         </p:nvSpPr>
         <p:spPr>
           <a:xfrm>
-            <a:off x="4875885" y="4777963"/>
+            <a:off x="4946599" y="4686523"/>
             <a:ext cx="210312" cy="210312"/>
           </a:xfrm>
           <a:prstGeom prst="ellipse">
@@ -17773,7 +17774,7 @@
         </p:nvSpPr>
         <p:spPr>
           <a:xfrm>
-            <a:off x="4788255" y="4467067"/>
+            <a:off x="4858969" y="4969987"/>
             <a:ext cx="385572" cy="237744"/>
           </a:xfrm>
           <a:prstGeom prst="rect">
@@ -17810,7 +17811,7 @@
         </p:nvSpPr>
         <p:spPr>
           <a:xfrm>
-            <a:off x="5035966" y="4025813"/>
+            <a:off x="5100340" y="3934373"/>
             <a:ext cx="210312" cy="210312"/>
           </a:xfrm>
           <a:prstGeom prst="ellipse">
@@ -17854,7 +17855,7 @@
         </p:nvSpPr>
         <p:spPr>
           <a:xfrm>
-            <a:off x="4507900" y="3714917"/>
+            <a:off x="4572274" y="4217837"/>
             <a:ext cx="1266443" cy="237744"/>
           </a:xfrm>
           <a:prstGeom prst="rect">
@@ -17891,7 +17892,7 @@
         </p:nvSpPr>
         <p:spPr>
           <a:xfrm>
-            <a:off x="4401799" y="2996555"/>
+            <a:off x="4491288" y="2905115"/>
             <a:ext cx="210312" cy="210312"/>
           </a:xfrm>
           <a:prstGeom prst="ellipse">
@@ -17935,7 +17936,7 @@
         </p:nvSpPr>
         <p:spPr>
           <a:xfrm>
-            <a:off x="3257783" y="2982839"/>
+            <a:off x="3347272" y="2891399"/>
             <a:ext cx="1052576" cy="237744"/>
           </a:xfrm>
           <a:prstGeom prst="rect">
@@ -17972,7 +17973,7 @@
         </p:nvSpPr>
         <p:spPr>
           <a:xfrm>
-            <a:off x="3859987" y="2283992"/>
+            <a:off x="3970934" y="2192552"/>
             <a:ext cx="210312" cy="210312"/>
           </a:xfrm>
           <a:prstGeom prst="ellipse">
@@ -18016,7 +18017,7 @@
         </p:nvSpPr>
         <p:spPr>
           <a:xfrm>
-            <a:off x="3554107" y="2567456"/>
+            <a:off x="4290974" y="2178836"/>
             <a:ext cx="822070" cy="237744"/>
           </a:xfrm>
           <a:prstGeom prst="rect">
@@ -18053,7 +18054,7 @@
         </p:nvSpPr>
         <p:spPr>
           <a:xfrm>
-            <a:off x="3361273" y="2838208"/>
+            <a:off x="3491971" y="2746768"/>
             <a:ext cx="210312" cy="210312"/>
           </a:xfrm>
           <a:prstGeom prst="ellipse">
@@ -18097,7 +18098,7 @@
         </p:nvSpPr>
         <p:spPr>
           <a:xfrm>
-            <a:off x="2738973" y="3121672"/>
+            <a:off x="2869671" y="2435872"/>
             <a:ext cx="1454912" cy="237744"/>
           </a:xfrm>
           <a:prstGeom prst="rect">
@@ -18134,7 +18135,7 @@
         </p:nvSpPr>
         <p:spPr>
           <a:xfrm>
-            <a:off x="2665536" y="2125645"/>
+            <a:off x="2823789" y="2034205"/>
             <a:ext cx="210312" cy="210312"/>
           </a:xfrm>
           <a:prstGeom prst="ellipse">
@@ -18178,7 +18179,7 @@
         </p:nvSpPr>
         <p:spPr>
           <a:xfrm>
-            <a:off x="2985576" y="2111929"/>
+            <a:off x="2316741" y="1723309"/>
             <a:ext cx="1224407" cy="237744"/>
           </a:xfrm>
           <a:prstGeom prst="rect">
@@ -18215,7 +18216,7 @@
         </p:nvSpPr>
         <p:spPr>
           <a:xfrm>
-            <a:off x="5094427" y="2568571"/>
+            <a:off x="5150510" y="2477131"/>
             <a:ext cx="512064" cy="512064"/>
           </a:xfrm>
           <a:prstGeom prst="ellipse">
@@ -18259,7 +18260,7 @@
         </p:nvSpPr>
         <p:spPr>
           <a:xfrm>
-            <a:off x="5204155" y="2678299"/>
+            <a:off x="5260238" y="2586859"/>
             <a:ext cx="292608" cy="292608"/>
           </a:xfrm>
           <a:prstGeom prst="ellipse">
@@ -18303,7 +18304,7 @@
         </p:nvSpPr>
         <p:spPr>
           <a:xfrm>
-            <a:off x="5606491" y="2705731"/>
+            <a:off x="5662574" y="2614291"/>
             <a:ext cx="1364361" cy="237744"/>
           </a:xfrm>
           <a:prstGeom prst="rect">
@@ -18340,7 +18341,7 @@
         </p:nvSpPr>
         <p:spPr>
           <a:xfrm>
-            <a:off x="2240280" y="5605272"/>
+            <a:off x="2423160" y="5513832"/>
             <a:ext cx="45720" cy="146304"/>
           </a:xfrm>
           <a:prstGeom prst="rect">
@@ -18384,7 +18385,7 @@
         </p:nvSpPr>
         <p:spPr>
           <a:xfrm>
-            <a:off x="2350008" y="5577840"/>
+            <a:off x="2532888" y="5486400"/>
             <a:ext cx="5943600" cy="201168"/>
           </a:xfrm>
           <a:prstGeom prst="rect">
@@ -22867,6 +22868,24 @@
 </p:sld>
 </file>
 
+<file path=ppt/slides/slide21.xml><?xml version="1.0" encoding="utf-8"?>
+<p:sld xmlns:a="http://schemas.openxmlformats.org/drawingml/2006/main" xmlns:p="http://schemas.openxmlformats.org/presentationml/2006/main" xmlns:r="http://schemas.openxmlformats.org/officeDocument/2006/relationships">
+  <p:cSld>
+    <p:spTree>
+      <p:nvGrpSpPr>
+        <p:cNvPr id="1" name=""/>
+        <p:cNvGrpSpPr/>
+        <p:nvPr/>
+      </p:nvGrpSpPr>
+      <p:grpSpPr/>
+    </p:spTree>
+  </p:cSld>
+  <p:clrMapOvr>
+    <a:masterClrMapping/>
+  </p:clrMapOvr>
+</p:sld>
+</file>
+
 <file path=ppt/slides/slide3.xml><?xml version="1.0" encoding="utf-8"?>
 <p:sld xmlns:a="http://schemas.openxmlformats.org/drawingml/2006/main" xmlns:p="http://schemas.openxmlformats.org/presentationml/2006/main" xmlns:r="http://schemas.openxmlformats.org/officeDocument/2006/relationships">
   <p:cSld>
@@ -23609,12 +23628,12 @@
         </p:nvSpPr>
         <p:spPr>
           <a:xfrm>
-            <a:off x="5662739" y="4069079"/>
-            <a:ext cx="3478657" cy="364236"/>
+            <a:off x="5513958" y="4069079"/>
+            <a:ext cx="3776218" cy="339090"/>
           </a:xfrm>
           <a:prstGeom prst="roundRect">
             <a:avLst>
-              <a:gd name="adj" fmla="val 22594"/>
+              <a:gd name="adj" fmla="val 24269"/>
             </a:avLst>
           </a:prstGeom>
           <a:solidFill>
@@ -23647,7 +23666,7 @@
           <a:p>
             <a:pPr algn="ctr"/>
             <a:r>
-              <a:rPr sz="1300" b="0">
+              <a:rPr sz="1150" b="0">
                 <a:solidFill>
                   <a:srgbClr val="B5533C"/>
                 </a:solidFill>
@@ -23655,7 +23674,7 @@
                 <a:cs typeface="Readex Pro"/>
                 <a:ea typeface="Readex Pro"/>
               </a:rPr>
-              <a:t>not decoding · no reader claim yet</a:t>
+              <a:t>tashkeel is a setting · no reader claim yet</a:t>
             </a:r>
           </a:p>
         </p:txBody>

--- a/deliverables/04_presentation/Bayan_Submission.pptx
+++ b/deliverables/04_presentation/Bayan_Submission.pptx
@@ -21039,55 +21039,18 @@
       </p:sp>
       <p:sp>
         <p:nvSpPr>
-          <p:cNvPr id="8" name="TextBox 7"/>
-          <p:cNvSpPr txBox="1"/>
-          <p:nvPr/>
-        </p:nvSpPr>
-        <p:spPr>
-          <a:xfrm>
-            <a:off x="566928" y="1600200"/>
-            <a:ext cx="8769096" cy="411480"/>
-          </a:xfrm>
-          <a:prstGeom prst="rect">
-            <a:avLst/>
-          </a:prstGeom>
-          <a:noFill/>
-        </p:spPr>
-        <p:txBody>
-          <a:bodyPr wrap="square" lIns="0" rIns="0" tIns="0" bIns="0" anchor="ctr">
-            <a:spAutoFit/>
-          </a:bodyPr>
-          <a:lstStyle/>
-          <a:p>
-            <a:pPr algn="ctr"/>
-            <a:r>
-              <a:rPr sz="2200" b="1">
-                <a:solidFill>
-                  <a:srgbClr val="282824"/>
-                </a:solidFill>
-                <a:latin typeface="Readex Pro"/>
-                <a:cs typeface="Readex Pro"/>
-                <a:ea typeface="Readex Pro"/>
-              </a:rPr>
-              <a:t>What the app does</a:t>
-            </a:r>
-          </a:p>
-        </p:txBody>
-      </p:sp>
-      <p:sp>
-        <p:nvSpPr>
-          <p:cNvPr id="9" name="Rounded Rectangle 8"/>
+          <p:cNvPr id="8" name="Rounded Rectangle 7"/>
           <p:cNvSpPr/>
           <p:nvPr/>
         </p:nvSpPr>
         <p:spPr>
           <a:xfrm>
-            <a:off x="3648456" y="2148840"/>
-            <a:ext cx="2606040" cy="3794760"/>
+            <a:off x="7034479" y="1481328"/>
+            <a:ext cx="2301544" cy="4846320"/>
           </a:xfrm>
           <a:prstGeom prst="roundRect">
             <a:avLst>
-              <a:gd name="adj" fmla="val 9122"/>
+              <a:gd name="adj" fmla="val 10329"/>
             </a:avLst>
           </a:prstGeom>
           <a:solidFill>
@@ -21122,62 +21085,49 @@
           </a:p>
         </p:txBody>
       </p:sp>
-      <p:sp>
-        <p:nvSpPr>
-          <p:cNvPr id="10" name="Rounded Rectangle 9"/>
-          <p:cNvSpPr/>
-          <p:nvPr/>
-        </p:nvSpPr>
-        <p:spPr>
-          <a:xfrm>
-            <a:off x="3758184" y="2258568"/>
-            <a:ext cx="2386584" cy="3575304"/>
-          </a:xfrm>
-          <a:prstGeom prst="roundRect">
-            <a:avLst>
-              <a:gd name="adj" fmla="val 6130"/>
-            </a:avLst>
-          </a:prstGeom>
-          <a:solidFill>
-            <a:srgbClr val="EFE9D9"/>
-          </a:solidFill>
-          <a:ln>
-            <a:noFill/>
-          </a:ln>
-          <a:effectLst/>
-        </p:spPr>
-        <p:style>
-          <a:lnRef idx="1">
-            <a:schemeClr val="accent1"/>
-          </a:lnRef>
-          <a:fillRef idx="3">
-            <a:schemeClr val="accent1"/>
-          </a:fillRef>
-          <a:effectRef idx="2">
-            <a:schemeClr val="accent1"/>
-          </a:effectRef>
-          <a:fontRef idx="minor">
-            <a:schemeClr val="lt1"/>
-          </a:fontRef>
-        </p:style>
-        <p:txBody>
-          <a:bodyPr rtlCol="0" anchor="ctr"/>
-          <a:lstStyle/>
-          <a:p>
-            <a:pPr algn="ctr"/>
-          </a:p>
-        </p:txBody>
-      </p:sp>
-      <p:sp>
-        <p:nvSpPr>
-          <p:cNvPr id="11" name="TextBox 10"/>
+      <p:pic>
+        <p:nvPicPr>
+          <p:cNvPr id="9" name="Demo video" descr="Bayan demo: select Arabic text, tap Simplify, read aloud">
+            <a:hlinkClick r:id="" action="ppaction://media"/>
+          </p:cNvPr>
+          <p:cNvPicPr>
+            <a:picLocks noChangeAspect="1"/>
+          </p:cNvPicPr>
+          <p:nvPr>
+            <a:videoFile r:link="rId4"/>
+            <p:extLst>
+              <p:ext uri="{DAA4B4D4-6D71-4841-9C94-3DE7FCFB9230}">
+                <p14:media xmlns:p14="http://schemas.microsoft.com/office/powerpoint/2010/main" r:embed="rId3"/>
+              </p:ext>
+            </p:extLst>
+          </p:nvPr>
+        </p:nvPicPr>
+        <p:blipFill>
+          <a:blip r:embed="rId5"/>
+          <a:stretch>
+            <a:fillRect/>
+          </a:stretch>
+        </p:blipFill>
+        <p:spPr>
+          <a:xfrm>
+            <a:off x="7144207" y="1591056"/>
+            <a:ext cx="2082088" cy="4626864"/>
+          </a:xfrm>
+          <a:prstGeom prst="rect">
+            <a:avLst/>
+          </a:prstGeom>
+        </p:spPr>
+      </p:pic>
+      <p:sp>
+        <p:nvSpPr>
+          <p:cNvPr id="10" name="TextBox 9"/>
           <p:cNvSpPr txBox="1"/>
           <p:nvPr/>
         </p:nvSpPr>
         <p:spPr>
           <a:xfrm>
-            <a:off x="3648456" y="3543300"/>
-            <a:ext cx="2606040" cy="777240"/>
+            <a:off x="566928" y="2468880"/>
+            <a:ext cx="6010351" cy="502920"/>
           </a:xfrm>
           <a:prstGeom prst="rect">
             <a:avLst/>
@@ -21190,31 +21140,31 @@
           </a:bodyPr>
           <a:lstStyle/>
           <a:p>
-            <a:pPr algn="ctr"/>
-            <a:r>
-              <a:rPr sz="3600" b="0">
-                <a:solidFill>
-                  <a:srgbClr val="6F6B5E"/>
-                </a:solidFill>
-                <a:latin typeface="Readex Pro"/>
-                <a:cs typeface="Readex Pro"/>
-                <a:ea typeface="Readex Pro"/>
-              </a:rPr>
-              <a:t>▶</a:t>
-            </a:r>
-          </a:p>
-        </p:txBody>
-      </p:sp>
-      <p:sp>
-        <p:nvSpPr>
-          <p:cNvPr id="12" name="TextBox 11"/>
+            <a:pPr algn="l"/>
+            <a:r>
+              <a:rPr sz="3000" b="1">
+                <a:solidFill>
+                  <a:srgbClr val="282824"/>
+                </a:solidFill>
+                <a:latin typeface="Readex Pro"/>
+                <a:cs typeface="Readex Pro"/>
+                <a:ea typeface="Readex Pro"/>
+              </a:rPr>
+              <a:t>What the app does</a:t>
+            </a:r>
+          </a:p>
+        </p:txBody>
+      </p:sp>
+      <p:sp>
+        <p:nvSpPr>
+          <p:cNvPr id="11" name="TextBox 10"/>
           <p:cNvSpPr txBox="1"/>
           <p:nvPr/>
         </p:nvSpPr>
         <p:spPr>
           <a:xfrm>
-            <a:off x="3648456" y="4457700"/>
-            <a:ext cx="2606040" cy="274320"/>
+            <a:off x="566928" y="3154680"/>
+            <a:ext cx="6010351" cy="1463040"/>
           </a:xfrm>
           <a:prstGeom prst="rect">
             <a:avLst/>
@@ -21227,17 +21177,57 @@
           </a:bodyPr>
           <a:lstStyle/>
           <a:p>
-            <a:pPr algn="ctr"/>
-            <a:r>
-              <a:rPr sz="1200" b="0">
-                <a:solidFill>
-                  <a:srgbClr val="6F6B5E"/>
-                </a:solidFill>
-                <a:latin typeface="Readex Pro"/>
-                <a:cs typeface="Readex Pro"/>
-                <a:ea typeface="Readex Pro"/>
-              </a:rPr>
-              <a:t>recording goes here</a:t>
+            <a:pPr algn="l">
+              <a:lnSpc>
+                <a:spcPct val="125000"/>
+              </a:lnSpc>
+            </a:pPr>
+            <a:r>
+              <a:rPr sz="1800" b="0">
+                <a:solidFill>
+                  <a:srgbClr val="4A4842"/>
+                </a:solidFill>
+                <a:latin typeface="Readex Pro"/>
+                <a:cs typeface="Readex Pro"/>
+                <a:ea typeface="Readex Pro"/>
+              </a:rPr>
+              <a:t>Select Arabic text in any app.</a:t>
+            </a:r>
+          </a:p>
+          <a:p>
+            <a:pPr algn="l">
+              <a:lnSpc>
+                <a:spcPct val="125000"/>
+              </a:lnSpc>
+            </a:pPr>
+            <a:r>
+              <a:rPr sz="1800" b="0">
+                <a:solidFill>
+                  <a:srgbClr val="4A4842"/>
+                </a:solidFill>
+                <a:latin typeface="Readex Pro"/>
+                <a:cs typeface="Readex Pro"/>
+                <a:ea typeface="Readex Pro"/>
+              </a:rPr>
+              <a:t>Tap تبسيط. Bayan simplifies it</a:t>
+            </a:r>
+          </a:p>
+          <a:p>
+            <a:pPr algn="l">
+              <a:lnSpc>
+                <a:spcPct val="125000"/>
+              </a:lnSpc>
+            </a:pPr>
+            <a:r>
+              <a:rPr sz="1800" b="0">
+                <a:solidFill>
+                  <a:srgbClr val="4A4842"/>
+                </a:solidFill>
+                <a:latin typeface="Readex Pro"/>
+                <a:cs typeface="Readex Pro"/>
+                <a:ea typeface="Readex Pro"/>
+              </a:rPr>
+              <a:t>and reads it aloud.</a:t>
             </a:r>
           </a:p>
         </p:txBody>
@@ -21247,6 +21237,50 @@
   <p:clrMapOvr>
     <a:masterClrMapping/>
   </p:clrMapOvr>
+  <p:timing>
+    <p:tnLst>
+      <p:par>
+        <p:cTn id="1" dur="indefinite" restart="never" nodeType="tmRoot">
+          <p:childTnLst>
+            <p:video>
+              <p:cMediaNode vol="80000">
+                <p:cTn id="2" fill="hold" display="0">
+                  <p:stCondLst>
+                    <p:cond delay="indefinite"/>
+                  </p:stCondLst>
+                </p:cTn>
+                <p:tgtEl>
+                  <p:spTgt spid="9"/>
+                </p:tgtEl>
+              </p:cMediaNode>
+            </p:video>
+          </p:childTnLst>
+        </p:cTn>
+      </p:par>
+    </p:tnLst>
+  </p:timing>
+  <p:timing>
+    <p:tnLst>
+      <p:par>
+        <p:cTn id="1" dur="indefinite" restart="never" nodeType="tmRoot">
+          <p:childTnLst>
+            <p:video>
+              <p:cMediaNode vol="80000">
+                <p:cTn id="2" fill="hold" display="0">
+                  <p:stCondLst>
+                    <p:cond delay="0"/>
+                  </p:stCondLst>
+                </p:cTn>
+                <p:tgtEl>
+                  <p:spTgt spid="9"/>
+                </p:tgtEl>
+              </p:cMediaNode>
+            </p:video>
+          </p:childTnLst>
+        </p:cTn>
+      </p:par>
+    </p:tnLst>
+  </p:timing>
 </p:sld>
 </file>
 

--- a/deliverables/04_presentation/Bayan_Submission.pptx
+++ b/deliverables/04_presentation/Bayan_Submission.pptx
@@ -21045,12 +21045,12 @@
         </p:nvSpPr>
         <p:spPr>
           <a:xfrm>
-            <a:off x="7034479" y="1481328"/>
-            <a:ext cx="2301544" cy="4846320"/>
+            <a:off x="6958963" y="1481328"/>
+            <a:ext cx="2377060" cy="4846320"/>
           </a:xfrm>
           <a:prstGeom prst="roundRect">
             <a:avLst>
-              <a:gd name="adj" fmla="val 10329"/>
+              <a:gd name="adj" fmla="val 10001"/>
             </a:avLst>
           </a:prstGeom>
           <a:solidFill>
@@ -21110,8 +21110,8 @@
         </p:blipFill>
         <p:spPr>
           <a:xfrm>
-            <a:off x="7144207" y="1591056"/>
-            <a:ext cx="2082088" cy="4626864"/>
+            <a:off x="7068691" y="1591056"/>
+            <a:ext cx="2157604" cy="4626864"/>
           </a:xfrm>
           <a:prstGeom prst="rect">
             <a:avLst/>
@@ -21127,7 +21127,7 @@
         <p:spPr>
           <a:xfrm>
             <a:off x="566928" y="2468880"/>
-            <a:ext cx="6010351" cy="502920"/>
+            <a:ext cx="5934835" cy="502920"/>
           </a:xfrm>
           <a:prstGeom prst="rect">
             <a:avLst/>
@@ -21164,7 +21164,7 @@
         <p:spPr>
           <a:xfrm>
             <a:off x="566928" y="3154680"/>
-            <a:ext cx="6010351" cy="1463040"/>
+            <a:ext cx="5934835" cy="1463040"/>
           </a:xfrm>
           <a:prstGeom prst="rect">
             <a:avLst/>

--- a/deliverables/04_presentation/Bayan_Submission.pptx
+++ b/deliverables/04_presentation/Bayan_Submission.pptx
@@ -11271,7 +11271,7 @@
                 <a:cs typeface="Readex Pro"/>
                 <a:ea typeface="Readex Pro"/>
               </a:rPr>
-              <a:t>1 / 8</a:t>
+              <a:t>1 / 9</a:t>
             </a:r>
           </a:p>
         </p:txBody>
@@ -11758,7 +11758,7 @@
                 <a:cs typeface="Readex Pro"/>
                 <a:ea typeface="Readex Pro"/>
               </a:rPr>
-              <a:t>5 / 8</a:t>
+              <a:t>5 / 9</a:t>
             </a:r>
           </a:p>
         </p:txBody>
@@ -12330,7 +12330,7 @@
                 <a:cs typeface="Readex Pro"/>
                 <a:ea typeface="Readex Pro"/>
               </a:rPr>
-              <a:t>5 / 8</a:t>
+              <a:t>5 / 9</a:t>
             </a:r>
           </a:p>
         </p:txBody>
@@ -13232,7 +13232,7 @@
                 <a:cs typeface="Readex Pro"/>
                 <a:ea typeface="Readex Pro"/>
               </a:rPr>
-              <a:t>5 / 8</a:t>
+              <a:t>5 / 9</a:t>
             </a:r>
           </a:p>
         </p:txBody>
@@ -14678,7 +14678,7 @@
                 <a:cs typeface="Readex Pro"/>
                 <a:ea typeface="Readex Pro"/>
               </a:rPr>
-              <a:t>6 / 8</a:t>
+              <a:t>6 / 9</a:t>
             </a:r>
           </a:p>
         </p:txBody>
@@ -16117,7 +16117,7 @@
                 <a:cs typeface="Readex Pro"/>
                 <a:ea typeface="Readex Pro"/>
               </a:rPr>
-              <a:t>6 / 8</a:t>
+              <a:t>6 / 9</a:t>
             </a:r>
           </a:p>
         </p:txBody>
@@ -17327,7 +17327,7 @@
                 <a:cs typeface="Readex Pro"/>
                 <a:ea typeface="Readex Pro"/>
               </a:rPr>
-              <a:t>6 / 8</a:t>
+              <a:t>6 / 9</a:t>
             </a:r>
           </a:p>
         </p:txBody>
@@ -18199,7 +18199,7 @@
                 <a:cs typeface="Readex Pro"/>
                 <a:ea typeface="Readex Pro"/>
               </a:rPr>
-              <a:t>6 / 8</a:t>
+              <a:t>6 / 9</a:t>
             </a:r>
           </a:p>
         </p:txBody>
@@ -19152,7 +19152,7 @@
                 <a:cs typeface="Readex Pro"/>
                 <a:ea typeface="Readex Pro"/>
               </a:rPr>
-              <a:t>7 / 8</a:t>
+              <a:t>7 / 9</a:t>
             </a:r>
           </a:p>
         </p:txBody>
@@ -20580,7 +20580,7 @@
                 <a:cs typeface="Readex Pro"/>
                 <a:ea typeface="Readex Pro"/>
               </a:rPr>
-              <a:t>7 / 8</a:t>
+              <a:t>7 / 9</a:t>
             </a:r>
           </a:p>
         </p:txBody>
@@ -21846,7 +21846,7 @@
                 <a:cs typeface="Readex Pro"/>
                 <a:ea typeface="Readex Pro"/>
               </a:rPr>
-              <a:t>7 / 8</a:t>
+              <a:t>7 / 9</a:t>
             </a:r>
           </a:p>
         </p:txBody>
@@ -22729,7 +22729,7 @@
                 <a:cs typeface="Readex Pro"/>
                 <a:ea typeface="Readex Pro"/>
               </a:rPr>
-              <a:t>2 / 8</a:t>
+              <a:t>2 / 9</a:t>
             </a:r>
           </a:p>
         </p:txBody>
@@ -23641,7 +23641,7 @@
                 <a:cs typeface="Readex Pro"/>
                 <a:ea typeface="Readex Pro"/>
               </a:rPr>
-              <a:t>8 / 8</a:t>
+              <a:t>8 / 9</a:t>
             </a:r>
           </a:p>
         </p:txBody>
@@ -24040,7 +24040,7 @@
                 <a:cs typeface="Readex Pro"/>
                 <a:ea typeface="Readex Pro"/>
               </a:rPr>
-              <a:t>9 / 8</a:t>
+              <a:t>9 / 9</a:t>
             </a:r>
           </a:p>
         </p:txBody>
@@ -24261,7 +24261,7 @@
                 <a:cs typeface="Readex Pro"/>
                 <a:ea typeface="Readex Pro"/>
               </a:rPr>
-              <a:t>9 / 8</a:t>
+              <a:t>9 / 9</a:t>
             </a:r>
           </a:p>
         </p:txBody>
@@ -24845,7 +24845,7 @@
                 <a:cs typeface="Readex Pro"/>
                 <a:ea typeface="Readex Pro"/>
               </a:rPr>
-              <a:t>2 / 8</a:t>
+              <a:t>2 / 9</a:t>
             </a:r>
           </a:p>
         </p:txBody>
@@ -25646,7 +25646,7 @@
                 <a:cs typeface="Readex Pro"/>
                 <a:ea typeface="Readex Pro"/>
               </a:rPr>
-              <a:t>3 / 8</a:t>
+              <a:t>3 / 9</a:t>
             </a:r>
           </a:p>
         </p:txBody>
@@ -26448,7 +26448,7 @@
                 <a:cs typeface="Readex Pro"/>
                 <a:ea typeface="Readex Pro"/>
               </a:rPr>
-              <a:t>3 / 8</a:t>
+              <a:t>3 / 9</a:t>
             </a:r>
           </a:p>
         </p:txBody>
@@ -27327,7 +27327,7 @@
                 <a:cs typeface="Readex Pro"/>
                 <a:ea typeface="Readex Pro"/>
               </a:rPr>
-              <a:t>3 / 8</a:t>
+              <a:t>3 / 9</a:t>
             </a:r>
           </a:p>
         </p:txBody>
@@ -28555,7 +28555,7 @@
                 <a:cs typeface="Readex Pro"/>
                 <a:ea typeface="Readex Pro"/>
               </a:rPr>
-              <a:t>3 / 8</a:t>
+              <a:t>3 / 9</a:t>
             </a:r>
           </a:p>
         </p:txBody>
@@ -29124,7 +29124,7 @@
                 <a:cs typeface="Readex Pro"/>
                 <a:ea typeface="Readex Pro"/>
               </a:rPr>
-              <a:t>4 / 8</a:t>
+              <a:t>4 / 9</a:t>
             </a:r>
           </a:p>
         </p:txBody>
@@ -30266,7 +30266,7 @@
                 <a:cs typeface="Readex Pro"/>
                 <a:ea typeface="Readex Pro"/>
               </a:rPr>
-              <a:t>4 / 8</a:t>
+              <a:t>4 / 9</a:t>
             </a:r>
           </a:p>
         </p:txBody>

--- a/deliverables/04_presentation/Bayan_Submission.pptx
+++ b/deliverables/04_presentation/Bayan_Submission.pptx
@@ -802,34 +802,23 @@
           <a:p/>
           <a:p>
             <a:r>
-              <a:t>▶ Step 1 (on arrival; Lane v0.1: AraT5v2 on SAMER. Found: returned 65% of rows unchanged, swapped single words)</a:t>
-            </a:r>
-          </a:p>
-          <a:p>
-            <a:r>
-              <a:t>BayanSimplify v0.1 trained on SAMER. It returned sixty-five percent of sentences untouched, where editors leave forty-nine. Bold strategy: change nothing.</a:t>
+              <a:t>▶ Step 1 (on arrival; Five connected stages: sources, leakage check, meaning gate, fine-tune, measure)</a:t>
+            </a:r>
+          </a:p>
+          <a:p>
+            <a:r>
+              <a:t>Those three versions came out of one pipeline. Sources pass a leakage check, then a meaning gate set at point eight five, then fine-tuning, then BayanBench.</a:t>
             </a:r>
           </a:p>
           <a:p/>
           <a:p>
             <a:r>
-              <a:t>▶ Step 2 (step 2 (auto); Lane v0.2: two models, AraT5v2 (v0.2) and AraBART (v0.2-Fast); meaning kept 60% / 40%; the tag costs meaning)</a:t>
-            </a:r>
-          </a:p>
-          <a:p>
-            <a:r>
-              <a:t>v0.2 is two models, AraT5v2 and AraBART, trained with everyday text and strength tags. They kept the meaning in sixty and forty percent of outputs. The tag costs meaning, so the app sends none.</a:t>
-            </a:r>
-          </a:p>
-          <a:p/>
-          <a:p>
-            <a:r>
-              <a:t>▶ Step 3 (step 3 (auto); Lane v0.3: AraT5v2 on corpus v1, our best: cuts 9.5 words vs 4.5, about the same meaning (vs v0.2, no tag))</a:t>
-            </a:r>
-          </a:p>
-          <a:p>
-            <a:r>
-              <a:t>v0.3 is AraT5v2 on corpus v1, no tag. As trained, it cuts twice the words of v0.2 and keeps about the same meaning.</a:t>
+              <a:t>▶ Step 2 (step 2 (auto); A feedback loop closes back on the sources, carrying the three version findings)</a:t>
+            </a:r>
+          </a:p>
+          <a:p>
+            <a:r>
+              <a:t>And the loop is the point. v0.1 taught us that copying wins. v0.2 taught us that meaning breaks first. Each finding became the next version's data, and v0.3 keeps meaning in eighty-two percent of outputs. Next: how we trust that measurement.</a:t>
             </a:r>
           </a:p>
         </p:txBody>
@@ -905,34 +894,23 @@
           <a:p/>
           <a:p>
             <a:r>
-              <a:t>▶ Step 1 (on arrival; Lane v0.1: AraT5v2 on SAMER. Found: returned 65% of rows unchanged, swapped single words)</a:t>
-            </a:r>
-          </a:p>
-          <a:p>
-            <a:r>
-              <a:t>BayanSimplify v0.1 trained on SAMER. It returned sixty-five percent of sentences untouched, where editors leave forty-nine. Bold strategy: change nothing.</a:t>
+              <a:t>▶ Step 1 (on arrival; Five connected stages: sources, leakage check, meaning gate, fine-tune, measure)</a:t>
+            </a:r>
+          </a:p>
+          <a:p>
+            <a:r>
+              <a:t>Those three versions came out of one pipeline. Sources pass a leakage check, then a meaning gate set at point eight five, then fine-tuning, then BayanBench.</a:t>
             </a:r>
           </a:p>
           <a:p/>
           <a:p>
             <a:r>
-              <a:t>▶ Step 2 (step 2 (auto); Lane v0.2: two models, AraT5v2 (v0.2) and AraBART (v0.2-Fast); meaning kept 60% / 40%; the tag costs meaning)</a:t>
-            </a:r>
-          </a:p>
-          <a:p>
-            <a:r>
-              <a:t>v0.2 is two models, AraT5v2 and AraBART, trained with everyday text and strength tags. They kept the meaning in sixty and forty percent of outputs. The tag costs meaning, so the app sends none.</a:t>
-            </a:r>
-          </a:p>
-          <a:p/>
-          <a:p>
-            <a:r>
-              <a:t>▶ Step 3 (step 3 (auto); Lane v0.3: AraT5v2 on corpus v1, our best: cuts 9.5 words vs 4.5, about the same meaning (vs v0.2, no tag))</a:t>
-            </a:r>
-          </a:p>
-          <a:p>
-            <a:r>
-              <a:t>v0.3 is AraT5v2 on corpus v1, no tag. As trained, it cuts twice the words of v0.2 and keeps about the same meaning.</a:t>
+              <a:t>▶ Step 2 (step 2 (auto); A feedback loop closes back on the sources, carrying the three version findings)</a:t>
+            </a:r>
+          </a:p>
+          <a:p>
+            <a:r>
+              <a:t>And the loop is the point. v0.1 taught us that copying wins. v0.2 taught us that meaning breaks first. Each finding became the next version's data, and v0.3 keeps meaning in eighty-two percent of outputs. Next: how we trust that measurement.</a:t>
             </a:r>
           </a:p>
         </p:txBody>
@@ -2678,23 +2656,34 @@
           <a:p/>
           <a:p>
             <a:r>
-              <a:t>▶ Step 1 (on arrival; Five connected stages: sources, leakage check, meaning gate, fine-tune, measure)</a:t>
-            </a:r>
-          </a:p>
-          <a:p>
-            <a:r>
-              <a:t>One pipeline carried every version. The sources pass a leakage check, then a meaning gate set at point eight five, then fine-tuning, then measuring on BayanBench.</a:t>
+              <a:t>▶ Step 1 (on arrival; Lane v0.1: AraT5v2 on SAMER. Found: returned 65% of rows unchanged, swapped single words)</a:t>
+            </a:r>
+          </a:p>
+          <a:p>
+            <a:r>
+              <a:t>BayanSimplify v0.1 trained on SAMER. It returned sixty-five percent of sentences untouched, where editors leave forty-nine. Bold strategy: change nothing.</a:t>
             </a:r>
           </a:p>
           <a:p/>
           <a:p>
             <a:r>
-              <a:t>▶ Step 2 (step 2 (auto); A feedback loop closes back on the sources, carrying the three version findings)</a:t>
-            </a:r>
-          </a:p>
-          <a:p>
-            <a:r>
-              <a:t>And the loop is the point: every measurement came back as the next version's data. v0.1 taught us that copying wins and the model only swaps words. v0.2 taught us that meaning breaks first. v0.3 rebuilt the data around those two findings, and it keeps meaning in eighty-two percent of outputs.</a:t>
+              <a:t>▶ Step 2 (step 2 (auto); Lane v0.2: two models, AraT5v2 (v0.2) and AraBART (v0.2-Fast); meaning kept 60% / 40%; the tag costs meaning)</a:t>
+            </a:r>
+          </a:p>
+          <a:p>
+            <a:r>
+              <a:t>v0.2 is two models, AraT5v2 and AraBART, trained with everyday text and strength tags. They kept the meaning in sixty and forty percent of outputs. The tag costs meaning, so the app sends none.</a:t>
+            </a:r>
+          </a:p>
+          <a:p/>
+          <a:p>
+            <a:r>
+              <a:t>▶ Step 3 (step 3 (auto); Lane v0.3: AraT5v2 on corpus v1, our best: cuts 9.5 words vs 4.5, about the same meaning (vs v0.2, no tag))</a:t>
+            </a:r>
+          </a:p>
+          <a:p>
+            <a:r>
+              <a:t>v0.3 is AraT5v2 on corpus v1, no tag. As trained, it cuts twice the words of v0.2 and keeps about the same meaning.</a:t>
             </a:r>
           </a:p>
         </p:txBody>
@@ -2770,23 +2759,34 @@
           <a:p/>
           <a:p>
             <a:r>
-              <a:t>▶ Step 1 (on arrival; Five connected stages: sources, leakage check, meaning gate, fine-tune, measure)</a:t>
-            </a:r>
-          </a:p>
-          <a:p>
-            <a:r>
-              <a:t>One pipeline carried every version. The sources pass a leakage check, then a meaning gate set at point eight five, then fine-tuning, then measuring on BayanBench.</a:t>
+              <a:t>▶ Step 1 (on arrival; Lane v0.1: AraT5v2 on SAMER. Found: returned 65% of rows unchanged, swapped single words)</a:t>
+            </a:r>
+          </a:p>
+          <a:p>
+            <a:r>
+              <a:t>BayanSimplify v0.1 trained on SAMER. It returned sixty-five percent of sentences untouched, where editors leave forty-nine. Bold strategy: change nothing.</a:t>
             </a:r>
           </a:p>
           <a:p/>
           <a:p>
             <a:r>
-              <a:t>▶ Step 2 (step 2 (auto); A feedback loop closes back on the sources, carrying the three version findings)</a:t>
-            </a:r>
-          </a:p>
-          <a:p>
-            <a:r>
-              <a:t>And the loop is the point: every measurement came back as the next version's data. v0.1 taught us that copying wins and the model only swaps words. v0.2 taught us that meaning breaks first. v0.3 rebuilt the data around those two findings, and it keeps meaning in eighty-two percent of outputs.</a:t>
+              <a:t>▶ Step 2 (step 2 (auto); Lane v0.2: two models, AraT5v2 (v0.2) and AraBART (v0.2-Fast); meaning kept 60% / 40%; the tag costs meaning)</a:t>
+            </a:r>
+          </a:p>
+          <a:p>
+            <a:r>
+              <a:t>v0.2 is two models, AraT5v2 and AraBART, trained with everyday text and strength tags. They kept the meaning in sixty and forty percent of outputs. The tag costs meaning, so the app sends none.</a:t>
+            </a:r>
+          </a:p>
+          <a:p/>
+          <a:p>
+            <a:r>
+              <a:t>▶ Step 3 (step 3 (auto); Lane v0.3: AraT5v2 on corpus v1, our best: cuts 9.5 words vs 4.5, about the same meaning (vs v0.2, no tag))</a:t>
+            </a:r>
+          </a:p>
+          <a:p>
+            <a:r>
+              <a:t>v0.3 is AraT5v2 on corpus v1, no tag. As trained, it cuts twice the words of v0.2 and keeps about the same meaning.</a:t>
             </a:r>
           </a:p>
         </p:txBody>
@@ -11623,7 +11623,7 @@
                 <a:cs typeface="Readex Pro"/>
                 <a:ea typeface="Readex Pro"/>
               </a:rPr>
-              <a:t>04 · BAYANSIMPLIFY MODELS</a:t>
+              <a:t>03 · BAYANSIMPLIFY MODELS</a:t>
             </a:r>
           </a:p>
         </p:txBody>
@@ -11758,7 +11758,7 @@
                 <a:cs typeface="Readex Pro"/>
                 <a:ea typeface="Readex Pro"/>
               </a:rPr>
-              <a:t>5 / 9</a:t>
+              <a:t>4 / 9</a:t>
             </a:r>
           </a:p>
         </p:txBody>
@@ -12053,6 +12053,880 @@
                 <a:ea typeface="Readex Pro"/>
               </a:rPr>
               <a:t>Swapped words, never restructured.</a:t>
+            </a:r>
+          </a:p>
+        </p:txBody>
+      </p:sp>
+      <p:sp>
+        <p:nvSpPr>
+          <p:cNvPr id="14" name="TextBox 13"/>
+          <p:cNvSpPr txBox="1"/>
+          <p:nvPr/>
+        </p:nvSpPr>
+        <p:spPr>
+          <a:xfrm>
+            <a:off x="3557016" y="1874519"/>
+            <a:ext cx="2788920" cy="292608"/>
+          </a:xfrm>
+          <a:prstGeom prst="rect">
+            <a:avLst/>
+          </a:prstGeom>
+          <a:noFill/>
+        </p:spPr>
+        <p:txBody>
+          <a:bodyPr wrap="square" lIns="0" rIns="0" tIns="0" bIns="0" anchor="ctr">
+            <a:spAutoFit/>
+          </a:bodyPr>
+          <a:lstStyle/>
+          <a:p>
+            <a:pPr algn="ctr"/>
+            <a:r>
+              <a:rPr sz="1150" b="1">
+                <a:solidFill>
+                  <a:srgbClr val="8A5E35"/>
+                </a:solidFill>
+                <a:latin typeface="Readex Pro"/>
+                <a:cs typeface="Readex Pro"/>
+                <a:ea typeface="Readex Pro"/>
+              </a:rPr>
+              <a:t>AraT5v2 + AraBART</a:t>
+            </a:r>
+          </a:p>
+        </p:txBody>
+      </p:sp>
+      <p:sp>
+        <p:nvSpPr>
+          <p:cNvPr id="15" name="Rounded Rectangle 14"/>
+          <p:cNvSpPr/>
+          <p:nvPr/>
+        </p:nvSpPr>
+        <p:spPr>
+          <a:xfrm>
+            <a:off x="3557016" y="2221991"/>
+            <a:ext cx="2788920" cy="475488"/>
+          </a:xfrm>
+          <a:prstGeom prst="roundRect">
+            <a:avLst>
+              <a:gd name="adj" fmla="val 19230"/>
+            </a:avLst>
+          </a:prstGeom>
+          <a:solidFill>
+            <a:srgbClr val="E6DFCC"/>
+          </a:solidFill>
+          <a:ln w="15875">
+            <a:solidFill>
+              <a:srgbClr val="E6DFCC"/>
+            </a:solidFill>
+          </a:ln>
+          <a:effectLst/>
+        </p:spPr>
+        <p:style>
+          <a:lnRef idx="1">
+            <a:schemeClr val="accent1"/>
+          </a:lnRef>
+          <a:fillRef idx="3">
+            <a:schemeClr val="accent1"/>
+          </a:fillRef>
+          <a:effectRef idx="2">
+            <a:schemeClr val="accent1"/>
+          </a:effectRef>
+          <a:fontRef idx="minor">
+            <a:schemeClr val="lt1"/>
+          </a:fontRef>
+        </p:style>
+        <p:txBody>
+          <a:bodyPr rtlCol="0" anchor="ctr" wrap="square" lIns="109728" rIns="109728" tIns="0" bIns="0"/>
+          <a:lstStyle/>
+          <a:p>
+            <a:pPr algn="ctr"/>
+            <a:r>
+              <a:rPr sz="1700" b="1">
+                <a:solidFill>
+                  <a:srgbClr val="282824"/>
+                </a:solidFill>
+                <a:latin typeface="Readex Pro"/>
+                <a:cs typeface="Readex Pro"/>
+                <a:ea typeface="Readex Pro"/>
+              </a:rPr>
+              <a:t>v0.2</a:t>
+            </a:r>
+          </a:p>
+        </p:txBody>
+      </p:sp>
+      <p:sp>
+        <p:nvSpPr>
+          <p:cNvPr id="16" name="Rounded Rectangle 15"/>
+          <p:cNvSpPr/>
+          <p:nvPr/>
+        </p:nvSpPr>
+        <p:spPr>
+          <a:xfrm>
+            <a:off x="3557016" y="2807208"/>
+            <a:ext cx="2788920" cy="1051560"/>
+          </a:xfrm>
+          <a:prstGeom prst="roundRect">
+            <a:avLst>
+              <a:gd name="adj" fmla="val 8695"/>
+            </a:avLst>
+          </a:prstGeom>
+          <a:solidFill>
+            <a:srgbClr val="EFE9D9"/>
+          </a:solidFill>
+          <a:ln w="15875">
+            <a:solidFill>
+              <a:srgbClr val="E6DFCC"/>
+            </a:solidFill>
+          </a:ln>
+          <a:effectLst/>
+        </p:spPr>
+        <p:style>
+          <a:lnRef idx="1">
+            <a:schemeClr val="accent1"/>
+          </a:lnRef>
+          <a:fillRef idx="3">
+            <a:schemeClr val="accent1"/>
+          </a:fillRef>
+          <a:effectRef idx="2">
+            <a:schemeClr val="accent1"/>
+          </a:effectRef>
+          <a:fontRef idx="minor">
+            <a:schemeClr val="lt1"/>
+          </a:fontRef>
+        </p:style>
+        <p:txBody>
+          <a:bodyPr rtlCol="0" anchor="ctr" wrap="square" lIns="109728" rIns="109728" tIns="0" bIns="0"/>
+          <a:lstStyle/>
+          <a:p>
+            <a:pPr algn="ctr"/>
+            <a:r>
+              <a:rPr sz="1200" b="0">
+                <a:solidFill>
+                  <a:srgbClr val="4A4842"/>
+                </a:solidFill>
+                <a:latin typeface="Readex Pro"/>
+                <a:cs typeface="Readex Pro"/>
+                <a:ea typeface="Readex Pro"/>
+              </a:rPr>
+              <a:t>SAMER + everyday text +</a:t>
+            </a:r>
+          </a:p>
+          <a:p>
+            <a:pPr algn="ctr"/>
+            <a:r>
+              <a:rPr sz="1200" b="0">
+                <a:solidFill>
+                  <a:srgbClr val="4A4842"/>
+                </a:solidFill>
+                <a:latin typeface="Readex Pro"/>
+                <a:cs typeface="Readex Pro"/>
+                <a:ea typeface="Readex Pro"/>
+              </a:rPr>
+              <a:t>meaning-filtered pairs + tags</a:t>
+            </a:r>
+          </a:p>
+        </p:txBody>
+      </p:sp>
+      <p:sp>
+        <p:nvSpPr>
+          <p:cNvPr id="17" name="Rounded Rectangle 16"/>
+          <p:cNvSpPr/>
+          <p:nvPr/>
+        </p:nvSpPr>
+        <p:spPr>
+          <a:xfrm>
+            <a:off x="3557016" y="3959352"/>
+            <a:ext cx="2788920" cy="1417320"/>
+          </a:xfrm>
+          <a:prstGeom prst="roundRect">
+            <a:avLst>
+              <a:gd name="adj" fmla="val 6451"/>
+            </a:avLst>
+          </a:prstGeom>
+          <a:solidFill>
+            <a:srgbClr val="F3E2DA"/>
+          </a:solidFill>
+          <a:ln w="15875">
+            <a:solidFill>
+              <a:srgbClr val="F3E2DA"/>
+            </a:solidFill>
+          </a:ln>
+          <a:effectLst/>
+        </p:spPr>
+        <p:style>
+          <a:lnRef idx="1">
+            <a:schemeClr val="accent1"/>
+          </a:lnRef>
+          <a:fillRef idx="3">
+            <a:schemeClr val="accent1"/>
+          </a:fillRef>
+          <a:effectRef idx="2">
+            <a:schemeClr val="accent1"/>
+          </a:effectRef>
+          <a:fontRef idx="minor">
+            <a:schemeClr val="lt1"/>
+          </a:fontRef>
+        </p:style>
+        <p:txBody>
+          <a:bodyPr rtlCol="0" anchor="ctr"/>
+          <a:lstStyle/>
+          <a:p>
+            <a:pPr algn="ctr"/>
+          </a:p>
+        </p:txBody>
+      </p:sp>
+      <p:sp>
+        <p:nvSpPr>
+          <p:cNvPr id="18" name="TextBox 17"/>
+          <p:cNvSpPr txBox="1"/>
+          <p:nvPr/>
+        </p:nvSpPr>
+        <p:spPr>
+          <a:xfrm>
+            <a:off x="3666744" y="4087368"/>
+            <a:ext cx="2569463" cy="1188720"/>
+          </a:xfrm>
+          <a:prstGeom prst="rect">
+            <a:avLst/>
+          </a:prstGeom>
+          <a:noFill/>
+        </p:spPr>
+        <p:txBody>
+          <a:bodyPr wrap="square" lIns="0" rIns="0" tIns="0" bIns="0" anchor="ctr">
+            <a:spAutoFit/>
+          </a:bodyPr>
+          <a:lstStyle/>
+          <a:p>
+            <a:pPr algn="ctr">
+              <a:lnSpc>
+                <a:spcPct val="108000"/>
+              </a:lnSpc>
+            </a:pPr>
+            <a:r>
+              <a:rPr sz="1150" b="0">
+                <a:solidFill>
+                  <a:srgbClr val="B5533C"/>
+                </a:solidFill>
+                <a:latin typeface="Readex Pro"/>
+                <a:cs typeface="Readex Pro"/>
+                <a:ea typeface="Readex Pro"/>
+              </a:rPr>
+              <a:t>v0.2 keeps the meaning in 60%</a:t>
+            </a:r>
+          </a:p>
+          <a:p>
+            <a:pPr algn="ctr">
+              <a:lnSpc>
+                <a:spcPct val="108000"/>
+              </a:lnSpc>
+            </a:pPr>
+            <a:r>
+              <a:rPr sz="1150" b="0">
+                <a:solidFill>
+                  <a:srgbClr val="B5533C"/>
+                </a:solidFill>
+                <a:latin typeface="Readex Pro"/>
+                <a:cs typeface="Readex Pro"/>
+                <a:ea typeface="Readex Pro"/>
+              </a:rPr>
+              <a:t>of outputs, v0.2-Fast in 40%.</a:t>
+            </a:r>
+          </a:p>
+          <a:p>
+            <a:pPr algn="ctr">
+              <a:lnSpc>
+                <a:spcPct val="108000"/>
+              </a:lnSpc>
+            </a:pPr>
+            <a:r>
+              <a:rPr sz="1150" b="0">
+                <a:solidFill>
+                  <a:srgbClr val="B5533C"/>
+                </a:solidFill>
+                <a:latin typeface="Readex Pro"/>
+                <a:cs typeface="Readex Pro"/>
+                <a:ea typeface="Readex Pro"/>
+              </a:rPr>
+              <a:t>The tag costs meaning.</a:t>
+            </a:r>
+          </a:p>
+        </p:txBody>
+      </p:sp>
+      <p:cxnSp>
+        <p:nvCxnSpPr>
+          <p:cNvPr id="19" name="Connector 18"/>
+          <p:cNvCxnSpPr/>
+          <p:nvPr/>
+        </p:nvCxnSpPr>
+        <p:spPr>
+          <a:xfrm>
+            <a:off x="3108960" y="2880360"/>
+            <a:ext cx="393192" cy="0"/>
+          </a:xfrm>
+          <a:prstGeom prst="line">
+            <a:avLst/>
+          </a:prstGeom>
+          <a:ln w="31750">
+            <a:solidFill>
+              <a:srgbClr val="C6986B"/>
+            </a:solidFill>
+            <a:tailEnd type="triangle"/>
+          </a:ln>
+        </p:spPr>
+        <p:style>
+          <a:lnRef idx="2">
+            <a:schemeClr val="accent1"/>
+          </a:lnRef>
+          <a:fillRef idx="0">
+            <a:schemeClr val="accent1"/>
+          </a:fillRef>
+          <a:effectRef idx="1">
+            <a:schemeClr val="accent1"/>
+          </a:effectRef>
+          <a:fontRef idx="minor">
+            <a:schemeClr val="tx1"/>
+          </a:fontRef>
+        </p:style>
+      </p:cxnSp>
+      <p:sp>
+        <p:nvSpPr>
+          <p:cNvPr id="20" name="TextBox 19"/>
+          <p:cNvSpPr txBox="1"/>
+          <p:nvPr/>
+        </p:nvSpPr>
+        <p:spPr>
+          <a:xfrm>
+            <a:off x="6848856" y="1874519"/>
+            <a:ext cx="2788920" cy="292608"/>
+          </a:xfrm>
+          <a:prstGeom prst="rect">
+            <a:avLst/>
+          </a:prstGeom>
+          <a:noFill/>
+        </p:spPr>
+        <p:txBody>
+          <a:bodyPr wrap="square" lIns="0" rIns="0" tIns="0" bIns="0" anchor="ctr">
+            <a:spAutoFit/>
+          </a:bodyPr>
+          <a:lstStyle/>
+          <a:p>
+            <a:pPr algn="ctr"/>
+            <a:r>
+              <a:rPr sz="1150" b="0">
+                <a:solidFill>
+                  <a:srgbClr val="6F6B5E"/>
+                </a:solidFill>
+                <a:latin typeface="Readex Pro"/>
+                <a:cs typeface="Readex Pro"/>
+                <a:ea typeface="Readex Pro"/>
+              </a:rPr>
+              <a:t>AraT5v2 on corpus v1</a:t>
+            </a:r>
+          </a:p>
+        </p:txBody>
+      </p:sp>
+      <p:sp>
+        <p:nvSpPr>
+          <p:cNvPr id="21" name="Rounded Rectangle 20"/>
+          <p:cNvSpPr/>
+          <p:nvPr/>
+        </p:nvSpPr>
+        <p:spPr>
+          <a:xfrm>
+            <a:off x="6848856" y="2221991"/>
+            <a:ext cx="2788920" cy="475488"/>
+          </a:xfrm>
+          <a:prstGeom prst="roundRect">
+            <a:avLst>
+              <a:gd name="adj" fmla="val 19230"/>
+            </a:avLst>
+          </a:prstGeom>
+          <a:solidFill>
+            <a:srgbClr val="C6986B"/>
+          </a:solidFill>
+          <a:ln w="15875">
+            <a:solidFill>
+              <a:srgbClr val="C6986B"/>
+            </a:solidFill>
+          </a:ln>
+          <a:effectLst/>
+        </p:spPr>
+        <p:style>
+          <a:lnRef idx="1">
+            <a:schemeClr val="accent1"/>
+          </a:lnRef>
+          <a:fillRef idx="3">
+            <a:schemeClr val="accent1"/>
+          </a:fillRef>
+          <a:effectRef idx="2">
+            <a:schemeClr val="accent1"/>
+          </a:effectRef>
+          <a:fontRef idx="minor">
+            <a:schemeClr val="lt1"/>
+          </a:fontRef>
+        </p:style>
+        <p:txBody>
+          <a:bodyPr rtlCol="0" anchor="ctr" wrap="square" lIns="109728" rIns="109728" tIns="0" bIns="0"/>
+          <a:lstStyle/>
+          <a:p>
+            <a:pPr algn="ctr"/>
+            <a:r>
+              <a:rPr sz="1700" b="1">
+                <a:solidFill>
+                  <a:srgbClr val="1A1A14"/>
+                </a:solidFill>
+                <a:latin typeface="Readex Pro"/>
+                <a:cs typeface="Readex Pro"/>
+                <a:ea typeface="Readex Pro"/>
+              </a:rPr>
+              <a:t>v0.3</a:t>
+            </a:r>
+          </a:p>
+        </p:txBody>
+      </p:sp>
+      <p:sp>
+        <p:nvSpPr>
+          <p:cNvPr id="22" name="Rounded Rectangle 21"/>
+          <p:cNvSpPr/>
+          <p:nvPr/>
+        </p:nvSpPr>
+        <p:spPr>
+          <a:xfrm>
+            <a:off x="6848856" y="2807208"/>
+            <a:ext cx="2788920" cy="1051560"/>
+          </a:xfrm>
+          <a:prstGeom prst="roundRect">
+            <a:avLst>
+              <a:gd name="adj" fmla="val 8695"/>
+            </a:avLst>
+          </a:prstGeom>
+          <a:solidFill>
+            <a:srgbClr val="EFE9D9"/>
+          </a:solidFill>
+          <a:ln w="15875">
+            <a:solidFill>
+              <a:srgbClr val="E6DFCC"/>
+            </a:solidFill>
+          </a:ln>
+          <a:effectLst/>
+        </p:spPr>
+        <p:style>
+          <a:lnRef idx="1">
+            <a:schemeClr val="accent1"/>
+          </a:lnRef>
+          <a:fillRef idx="3">
+            <a:schemeClr val="accent1"/>
+          </a:fillRef>
+          <a:effectRef idx="2">
+            <a:schemeClr val="accent1"/>
+          </a:effectRef>
+          <a:fontRef idx="minor">
+            <a:schemeClr val="lt1"/>
+          </a:fontRef>
+        </p:style>
+        <p:txBody>
+          <a:bodyPr rtlCol="0" anchor="ctr" wrap="square" lIns="109728" rIns="109728" tIns="0" bIns="0"/>
+          <a:lstStyle/>
+          <a:p>
+            <a:pPr algn="ctr"/>
+            <a:r>
+              <a:rPr sz="1200" b="0">
+                <a:solidFill>
+                  <a:srgbClr val="4A4842"/>
+                </a:solidFill>
+                <a:latin typeface="Readex Pro"/>
+                <a:cs typeface="Readex Pro"/>
+                <a:ea typeface="Readex Pro"/>
+              </a:rPr>
+              <a:t>corpus v1, 14,975 rows,</a:t>
+            </a:r>
+          </a:p>
+          <a:p>
+            <a:pPr algn="ctr"/>
+            <a:r>
+              <a:rPr sz="1200" b="0">
+                <a:solidFill>
+                  <a:srgbClr val="4A4842"/>
+                </a:solidFill>
+                <a:latin typeface="Readex Pro"/>
+                <a:cs typeface="Readex Pro"/>
+                <a:ea typeface="Readex Pro"/>
+              </a:rPr>
+              <a:t>no tag</a:t>
+            </a:r>
+          </a:p>
+        </p:txBody>
+      </p:sp>
+      <p:sp>
+        <p:nvSpPr>
+          <p:cNvPr id="23" name="Rounded Rectangle 22"/>
+          <p:cNvSpPr/>
+          <p:nvPr/>
+        </p:nvSpPr>
+        <p:spPr>
+          <a:xfrm>
+            <a:off x="6848856" y="3959352"/>
+            <a:ext cx="2788920" cy="1417320"/>
+          </a:xfrm>
+          <a:prstGeom prst="roundRect">
+            <a:avLst>
+              <a:gd name="adj" fmla="val 6451"/>
+            </a:avLst>
+          </a:prstGeom>
+          <a:solidFill>
+            <a:srgbClr val="F3E2DA"/>
+          </a:solidFill>
+          <a:ln w="15875">
+            <a:solidFill>
+              <a:srgbClr val="F3E2DA"/>
+            </a:solidFill>
+          </a:ln>
+          <a:effectLst/>
+        </p:spPr>
+        <p:style>
+          <a:lnRef idx="1">
+            <a:schemeClr val="accent1"/>
+          </a:lnRef>
+          <a:fillRef idx="3">
+            <a:schemeClr val="accent1"/>
+          </a:fillRef>
+          <a:effectRef idx="2">
+            <a:schemeClr val="accent1"/>
+          </a:effectRef>
+          <a:fontRef idx="minor">
+            <a:schemeClr val="lt1"/>
+          </a:fontRef>
+        </p:style>
+        <p:txBody>
+          <a:bodyPr rtlCol="0" anchor="ctr"/>
+          <a:lstStyle/>
+          <a:p>
+            <a:pPr algn="ctr"/>
+          </a:p>
+        </p:txBody>
+      </p:sp>
+      <p:sp>
+        <p:nvSpPr>
+          <p:cNvPr id="24" name="TextBox 23"/>
+          <p:cNvSpPr txBox="1"/>
+          <p:nvPr/>
+        </p:nvSpPr>
+        <p:spPr>
+          <a:xfrm>
+            <a:off x="6958584" y="4087368"/>
+            <a:ext cx="2569463" cy="1188720"/>
+          </a:xfrm>
+          <a:prstGeom prst="rect">
+            <a:avLst/>
+          </a:prstGeom>
+          <a:noFill/>
+        </p:spPr>
+        <p:txBody>
+          <a:bodyPr wrap="square" lIns="0" rIns="0" tIns="0" bIns="0" anchor="ctr">
+            <a:spAutoFit/>
+          </a:bodyPr>
+          <a:lstStyle/>
+          <a:p>
+            <a:pPr algn="ctr">
+              <a:lnSpc>
+                <a:spcPct val="108000"/>
+              </a:lnSpc>
+            </a:pPr>
+            <a:r>
+              <a:rPr sz="1150" b="0">
+                <a:solidFill>
+                  <a:srgbClr val="B5533C"/>
+                </a:solidFill>
+                <a:latin typeface="Readex Pro"/>
+                <a:cs typeface="Readex Pro"/>
+                <a:ea typeface="Readex Pro"/>
+              </a:rPr>
+              <a:t>Our best: cuts 9.5 words from the</a:t>
+            </a:r>
+          </a:p>
+          <a:p>
+            <a:pPr algn="ctr">
+              <a:lnSpc>
+                <a:spcPct val="108000"/>
+              </a:lnSpc>
+            </a:pPr>
+            <a:r>
+              <a:rPr sz="1150" b="0">
+                <a:solidFill>
+                  <a:srgbClr val="B5533C"/>
+                </a:solidFill>
+                <a:latin typeface="Readex Pro"/>
+                <a:cs typeface="Readex Pro"/>
+                <a:ea typeface="Readex Pro"/>
+              </a:rPr>
+              <a:t>longest clause vs 4.5, with about</a:t>
+            </a:r>
+          </a:p>
+          <a:p>
+            <a:pPr algn="ctr">
+              <a:lnSpc>
+                <a:spcPct val="108000"/>
+              </a:lnSpc>
+            </a:pPr>
+            <a:r>
+              <a:rPr sz="1150" b="0">
+                <a:solidFill>
+                  <a:srgbClr val="B5533C"/>
+                </a:solidFill>
+                <a:latin typeface="Readex Pro"/>
+                <a:cs typeface="Readex Pro"/>
+                <a:ea typeface="Readex Pro"/>
+              </a:rPr>
+              <a:t>the same meaning (vs v0.2, no tag).</a:t>
+            </a:r>
+          </a:p>
+        </p:txBody>
+      </p:sp>
+      <p:cxnSp>
+        <p:nvCxnSpPr>
+          <p:cNvPr id="25" name="Connector 24"/>
+          <p:cNvCxnSpPr/>
+          <p:nvPr/>
+        </p:nvCxnSpPr>
+        <p:spPr>
+          <a:xfrm>
+            <a:off x="6400800" y="2880360"/>
+            <a:ext cx="393192" cy="0"/>
+          </a:xfrm>
+          <a:prstGeom prst="line">
+            <a:avLst/>
+          </a:prstGeom>
+          <a:ln w="31750">
+            <a:solidFill>
+              <a:srgbClr val="C6986B"/>
+            </a:solidFill>
+            <a:tailEnd type="triangle"/>
+          </a:ln>
+        </p:spPr>
+        <p:style>
+          <a:lnRef idx="2">
+            <a:schemeClr val="accent1"/>
+          </a:lnRef>
+          <a:fillRef idx="0">
+            <a:schemeClr val="accent1"/>
+          </a:fillRef>
+          <a:effectRef idx="1">
+            <a:schemeClr val="accent1"/>
+          </a:effectRef>
+          <a:fontRef idx="minor">
+            <a:schemeClr val="tx1"/>
+          </a:fontRef>
+        </p:style>
+      </p:cxnSp>
+      <p:sp>
+        <p:nvSpPr>
+          <p:cNvPr id="26" name="TextBox 25"/>
+          <p:cNvSpPr txBox="1"/>
+          <p:nvPr/>
+        </p:nvSpPr>
+        <p:spPr>
+          <a:xfrm>
+            <a:off x="566928" y="5532120"/>
+            <a:ext cx="1463040" cy="256032"/>
+          </a:xfrm>
+          <a:prstGeom prst="rect">
+            <a:avLst/>
+          </a:prstGeom>
+          <a:noFill/>
+        </p:spPr>
+        <p:txBody>
+          <a:bodyPr wrap="square" lIns="0" rIns="0" tIns="0" bIns="0" anchor="ctr">
+            <a:spAutoFit/>
+          </a:bodyPr>
+          <a:lstStyle/>
+          <a:p>
+            <a:pPr algn="l"/>
+            <a:r>
+              <a:rPr sz="1100" b="0">
+                <a:solidFill>
+                  <a:srgbClr val="6F6B5E"/>
+                </a:solidFill>
+                <a:latin typeface="Readex Pro"/>
+                <a:cs typeface="Readex Pro"/>
+                <a:ea typeface="Readex Pro"/>
+              </a:rPr>
+              <a:t>Tried and dropped:</a:t>
+            </a:r>
+          </a:p>
+        </p:txBody>
+      </p:sp>
+      <p:sp>
+        <p:nvSpPr>
+          <p:cNvPr id="27" name="Rounded Rectangle 26"/>
+          <p:cNvSpPr/>
+          <p:nvPr/>
+        </p:nvSpPr>
+        <p:spPr>
+          <a:xfrm>
+            <a:off x="2075688" y="5513832"/>
+            <a:ext cx="1375155" cy="330708"/>
+          </a:xfrm>
+          <a:prstGeom prst="roundRect">
+            <a:avLst>
+              <a:gd name="adj" fmla="val 24884"/>
+            </a:avLst>
+          </a:prstGeom>
+          <a:solidFill>
+            <a:srgbClr val="EFE9D9"/>
+          </a:solidFill>
+          <a:ln w="15875">
+            <a:solidFill>
+              <a:srgbClr val="EFE9D9"/>
+            </a:solidFill>
+          </a:ln>
+          <a:effectLst/>
+        </p:spPr>
+        <p:style>
+          <a:lnRef idx="1">
+            <a:schemeClr val="accent1"/>
+          </a:lnRef>
+          <a:fillRef idx="3">
+            <a:schemeClr val="accent1"/>
+          </a:fillRef>
+          <a:effectRef idx="2">
+            <a:schemeClr val="accent1"/>
+          </a:effectRef>
+          <a:fontRef idx="minor">
+            <a:schemeClr val="lt1"/>
+          </a:fontRef>
+        </p:style>
+        <p:txBody>
+          <a:bodyPr rtlCol="0" anchor="ctr" wrap="square" lIns="109728" rIns="109728" tIns="0" bIns="0"/>
+          <a:lstStyle/>
+          <a:p>
+            <a:pPr algn="ctr"/>
+            <a:r>
+              <a:rPr sz="1100" b="0">
+                <a:solidFill>
+                  <a:srgbClr val="6F6B5E"/>
+                </a:solidFill>
+                <a:latin typeface="Readex Pro"/>
+                <a:cs typeface="Readex Pro"/>
+                <a:ea typeface="Readex Pro"/>
+              </a:rPr>
+              <a:t>student DPO</a:t>
+            </a:r>
+          </a:p>
+        </p:txBody>
+      </p:sp>
+      <p:sp>
+        <p:nvSpPr>
+          <p:cNvPr id="28" name="Rounded Rectangle 27"/>
+          <p:cNvSpPr/>
+          <p:nvPr/>
+        </p:nvSpPr>
+        <p:spPr>
+          <a:xfrm>
+            <a:off x="3661155" y="5513832"/>
+            <a:ext cx="2026158" cy="330708"/>
+          </a:xfrm>
+          <a:prstGeom prst="roundRect">
+            <a:avLst>
+              <a:gd name="adj" fmla="val 24884"/>
+            </a:avLst>
+          </a:prstGeom>
+          <a:solidFill>
+            <a:srgbClr val="EFE9D9"/>
+          </a:solidFill>
+          <a:ln w="15875">
+            <a:solidFill>
+              <a:srgbClr val="EFE9D9"/>
+            </a:solidFill>
+          </a:ln>
+          <a:effectLst/>
+        </p:spPr>
+        <p:style>
+          <a:lnRef idx="1">
+            <a:schemeClr val="accent1"/>
+          </a:lnRef>
+          <a:fillRef idx="3">
+            <a:schemeClr val="accent1"/>
+          </a:fillRef>
+          <a:effectRef idx="2">
+            <a:schemeClr val="accent1"/>
+          </a:effectRef>
+          <a:fontRef idx="minor">
+            <a:schemeClr val="lt1"/>
+          </a:fontRef>
+        </p:style>
+        <p:txBody>
+          <a:bodyPr rtlCol="0" anchor="ctr" wrap="square" lIns="109728" rIns="109728" tIns="0" bIns="0"/>
+          <a:lstStyle/>
+          <a:p>
+            <a:pPr algn="ctr"/>
+            <a:r>
+              <a:rPr sz="1100" b="0">
+                <a:solidFill>
+                  <a:srgbClr val="6F6B5E"/>
+                </a:solidFill>
+                <a:latin typeface="Readex Pro"/>
+                <a:cs typeface="Readex Pro"/>
+                <a:ea typeface="Readex Pro"/>
+              </a:rPr>
+              <a:t>minimum-risk training</a:t>
+            </a:r>
+          </a:p>
+        </p:txBody>
+      </p:sp>
+      <p:sp>
+        <p:nvSpPr>
+          <p:cNvPr id="29" name="Rounded Rectangle 28"/>
+          <p:cNvSpPr/>
+          <p:nvPr/>
+        </p:nvSpPr>
+        <p:spPr>
+          <a:xfrm>
+            <a:off x="5897626" y="5513832"/>
+            <a:ext cx="1552574" cy="330708"/>
+          </a:xfrm>
+          <a:prstGeom prst="roundRect">
+            <a:avLst>
+              <a:gd name="adj" fmla="val 24884"/>
+            </a:avLst>
+          </a:prstGeom>
+          <a:solidFill>
+            <a:srgbClr val="EFE9D9"/>
+          </a:solidFill>
+          <a:ln w="15875">
+            <a:solidFill>
+              <a:srgbClr val="EFE9D9"/>
+            </a:solidFill>
+          </a:ln>
+          <a:effectLst/>
+        </p:spPr>
+        <p:style>
+          <a:lnRef idx="1">
+            <a:schemeClr val="accent1"/>
+          </a:lnRef>
+          <a:fillRef idx="3">
+            <a:schemeClr val="accent1"/>
+          </a:fillRef>
+          <a:effectRef idx="2">
+            <a:schemeClr val="accent1"/>
+          </a:effectRef>
+          <a:fontRef idx="minor">
+            <a:schemeClr val="lt1"/>
+          </a:fontRef>
+        </p:style>
+        <p:txBody>
+          <a:bodyPr rtlCol="0" anchor="ctr" wrap="square" lIns="109728" rIns="109728" tIns="0" bIns="0"/>
+          <a:lstStyle/>
+          <a:p>
+            <a:pPr algn="ctr"/>
+            <a:r>
+              <a:rPr sz="1100" b="0">
+                <a:solidFill>
+                  <a:srgbClr val="6F6B5E"/>
+                </a:solidFill>
+                <a:latin typeface="Readex Pro"/>
+                <a:cs typeface="Readex Pro"/>
+                <a:ea typeface="Readex Pro"/>
+              </a:rPr>
+              <a:t>fluency retrain</a:t>
             </a:r>
           </a:p>
         </p:txBody>
@@ -12195,7 +13069,7 @@
                 <a:cs typeface="Readex Pro"/>
                 <a:ea typeface="Readex Pro"/>
               </a:rPr>
-              <a:t>04 · BAYANSIMPLIFY MODELS</a:t>
+              <a:t>04 · THE PIPELINE</a:t>
             </a:r>
           </a:p>
         </p:txBody>
@@ -12232,7 +13106,7 @@
                 <a:cs typeface="Readex Pro"/>
                 <a:ea typeface="Readex Pro"/>
               </a:rPr>
-              <a:t>Each version answered the last failure</a:t>
+              <a:t>Build, measure, learn</a:t>
             </a:r>
           </a:p>
         </p:txBody>
@@ -12337,114 +13211,18 @@
       </p:sp>
       <p:sp>
         <p:nvSpPr>
-          <p:cNvPr id="9" name="TextBox 8"/>
-          <p:cNvSpPr txBox="1"/>
-          <p:nvPr/>
-        </p:nvSpPr>
-        <p:spPr>
-          <a:xfrm>
-            <a:off x="265176" y="1874519"/>
-            <a:ext cx="2788920" cy="292608"/>
-          </a:xfrm>
-          <a:prstGeom prst="rect">
-            <a:avLst/>
-          </a:prstGeom>
-          <a:noFill/>
-        </p:spPr>
-        <p:txBody>
-          <a:bodyPr wrap="square" lIns="0" rIns="0" tIns="0" bIns="0" anchor="ctr">
-            <a:spAutoFit/>
-          </a:bodyPr>
-          <a:lstStyle/>
-          <a:p>
-            <a:pPr algn="ctr"/>
-            <a:r>
-              <a:rPr sz="1150" b="0">
-                <a:solidFill>
-                  <a:srgbClr val="6F6B5E"/>
-                </a:solidFill>
-                <a:latin typeface="Readex Pro"/>
-                <a:cs typeface="Readex Pro"/>
-                <a:ea typeface="Readex Pro"/>
-              </a:rPr>
-              <a:t>AraT5v2 on SAMER</a:t>
-            </a:r>
-          </a:p>
-        </p:txBody>
-      </p:sp>
-      <p:sp>
-        <p:nvSpPr>
-          <p:cNvPr id="10" name="Rounded Rectangle 9"/>
+          <p:cNvPr id="9" name="Rounded Rectangle 8"/>
           <p:cNvSpPr/>
           <p:nvPr/>
         </p:nvSpPr>
         <p:spPr>
           <a:xfrm>
-            <a:off x="265176" y="2221991"/>
-            <a:ext cx="2788920" cy="475488"/>
+            <a:off x="425196" y="2148840"/>
+            <a:ext cx="1481328" cy="1143000"/>
           </a:xfrm>
           <a:prstGeom prst="roundRect">
             <a:avLst>
-              <a:gd name="adj" fmla="val 19230"/>
-            </a:avLst>
-          </a:prstGeom>
-          <a:solidFill>
-            <a:srgbClr val="E6DFCC"/>
-          </a:solidFill>
-          <a:ln w="15875">
-            <a:solidFill>
-              <a:srgbClr val="E6DFCC"/>
-            </a:solidFill>
-          </a:ln>
-          <a:effectLst/>
-        </p:spPr>
-        <p:style>
-          <a:lnRef idx="1">
-            <a:schemeClr val="accent1"/>
-          </a:lnRef>
-          <a:fillRef idx="3">
-            <a:schemeClr val="accent1"/>
-          </a:fillRef>
-          <a:effectRef idx="2">
-            <a:schemeClr val="accent1"/>
-          </a:effectRef>
-          <a:fontRef idx="minor">
-            <a:schemeClr val="lt1"/>
-          </a:fontRef>
-        </p:style>
-        <p:txBody>
-          <a:bodyPr rtlCol="0" anchor="ctr" wrap="square" lIns="109728" rIns="109728" tIns="0" bIns="0"/>
-          <a:lstStyle/>
-          <a:p>
-            <a:pPr algn="ctr"/>
-            <a:r>
-              <a:rPr sz="1700" b="1">
-                <a:solidFill>
-                  <a:srgbClr val="282824"/>
-                </a:solidFill>
-                <a:latin typeface="Readex Pro"/>
-                <a:cs typeface="Readex Pro"/>
-                <a:ea typeface="Readex Pro"/>
-              </a:rPr>
-              <a:t>v0.1</a:t>
-            </a:r>
-          </a:p>
-        </p:txBody>
-      </p:sp>
-      <p:sp>
-        <p:nvSpPr>
-          <p:cNvPr id="11" name="Rounded Rectangle 10"/>
-          <p:cNvSpPr/>
-          <p:nvPr/>
-        </p:nvSpPr>
-        <p:spPr>
-          <a:xfrm>
-            <a:off x="265176" y="2807208"/>
-            <a:ext cx="2788920" cy="1051560"/>
-          </a:xfrm>
-          <a:prstGeom prst="roundRect">
-            <a:avLst>
-              <a:gd name="adj" fmla="val 8695"/>
+              <a:gd name="adj" fmla="val 8000"/>
             </a:avLst>
           </a:prstGeom>
           <a:solidFill>
@@ -12472,12 +13250,79 @@
           </a:fontRef>
         </p:style>
         <p:txBody>
-          <a:bodyPr rtlCol="0" anchor="ctr" wrap="square" lIns="109728" rIns="109728" tIns="0" bIns="0"/>
+          <a:bodyPr rtlCol="0" anchor="ctr"/>
           <a:lstStyle/>
           <a:p>
             <a:pPr algn="ctr"/>
-            <a:r>
-              <a:rPr sz="1200" b="0">
+          </a:p>
+        </p:txBody>
+      </p:sp>
+      <p:sp>
+        <p:nvSpPr>
+          <p:cNvPr id="10" name="TextBox 9"/>
+          <p:cNvSpPr txBox="1"/>
+          <p:nvPr/>
+        </p:nvSpPr>
+        <p:spPr>
+          <a:xfrm>
+            <a:off x="489204" y="2258568"/>
+            <a:ext cx="1353312" cy="274320"/>
+          </a:xfrm>
+          <a:prstGeom prst="rect">
+            <a:avLst/>
+          </a:prstGeom>
+          <a:noFill/>
+        </p:spPr>
+        <p:txBody>
+          <a:bodyPr wrap="square" lIns="0" rIns="0" tIns="0" bIns="0" anchor="ctr">
+            <a:spAutoFit/>
+          </a:bodyPr>
+          <a:lstStyle/>
+          <a:p>
+            <a:pPr algn="ctr"/>
+            <a:r>
+              <a:rPr sz="1200" b="1">
+                <a:solidFill>
+                  <a:srgbClr val="282824"/>
+                </a:solidFill>
+                <a:latin typeface="Readex Pro"/>
+                <a:cs typeface="Readex Pro"/>
+                <a:ea typeface="Readex Pro"/>
+              </a:rPr>
+              <a:t>Source corpora</a:t>
+            </a:r>
+          </a:p>
+        </p:txBody>
+      </p:sp>
+      <p:sp>
+        <p:nvSpPr>
+          <p:cNvPr id="11" name="TextBox 10"/>
+          <p:cNvSpPr txBox="1"/>
+          <p:nvPr/>
+        </p:nvSpPr>
+        <p:spPr>
+          <a:xfrm>
+            <a:off x="489204" y="2606040"/>
+            <a:ext cx="1353312" cy="621792"/>
+          </a:xfrm>
+          <a:prstGeom prst="rect">
+            <a:avLst/>
+          </a:prstGeom>
+          <a:noFill/>
+        </p:spPr>
+        <p:txBody>
+          <a:bodyPr wrap="square" lIns="0" rIns="0" tIns="0" bIns="0" anchor="ctr">
+            <a:spAutoFit/>
+          </a:bodyPr>
+          <a:lstStyle/>
+          <a:p>
+            <a:pPr algn="ctr">
+              <a:lnSpc>
+                <a:spcPct val="112000"/>
+              </a:lnSpc>
+            </a:pPr>
+            <a:r>
+              <a:rPr sz="1050" b="0">
                 <a:solidFill>
                   <a:srgbClr val="4A4842"/>
                 </a:solidFill>
@@ -12485,13 +13330,17 @@
                 <a:cs typeface="Readex Pro"/>
                 <a:ea typeface="Readex Pro"/>
               </a:rPr>
-              <a:t>SAMER level 5 → 3,</a:t>
-            </a:r>
-          </a:p>
-          <a:p>
-            <a:pPr algn="ctr"/>
-            <a:r>
-              <a:rPr sz="1200" b="0">
+              <a:t>SAMER · DAASI ·</a:t>
+            </a:r>
+          </a:p>
+          <a:p>
+            <a:pPr algn="ctr">
+              <a:lnSpc>
+                <a:spcPct val="112000"/>
+              </a:lnSpc>
+            </a:pPr>
+            <a:r>
+              <a:rPr sz="1050" b="0">
                 <a:solidFill>
                   <a:srgbClr val="4A4842"/>
                 </a:solidFill>
@@ -12499,7 +13348,7 @@
                 <a:cs typeface="Readex Pro"/>
                 <a:ea typeface="Readex Pro"/>
               </a:rPr>
-              <a:t>14,343 pairs</a:t>
+              <a:t>other datasets · BAREC</a:t>
             </a:r>
           </a:p>
         </p:txBody>
@@ -12512,12 +13361,12 @@
         </p:nvSpPr>
         <p:spPr>
           <a:xfrm>
-            <a:off x="265176" y="3959352"/>
-            <a:ext cx="2788920" cy="1417320"/>
+            <a:off x="2318004" y="2148840"/>
+            <a:ext cx="1481328" cy="1143000"/>
           </a:xfrm>
           <a:prstGeom prst="roundRect">
             <a:avLst>
-              <a:gd name="adj" fmla="val 6451"/>
+              <a:gd name="adj" fmla="val 8000"/>
             </a:avLst>
           </a:prstGeom>
           <a:solidFill>
@@ -12525,7 +13374,7 @@
           </a:solidFill>
           <a:ln w="15875">
             <a:solidFill>
-              <a:srgbClr val="F3E2DA"/>
+              <a:srgbClr val="B5533C"/>
             </a:solidFill>
           </a:ln>
           <a:effectLst/>
@@ -12560,8 +13409,8 @@
         </p:nvSpPr>
         <p:spPr>
           <a:xfrm>
-            <a:off x="374904" y="4087368"/>
-            <a:ext cx="2569463" cy="1188720"/>
+            <a:off x="2382012" y="2258568"/>
+            <a:ext cx="1353312" cy="274320"/>
           </a:xfrm>
           <a:prstGeom prst="rect">
             <a:avLst/>
@@ -12574,71 +13423,90 @@
           </a:bodyPr>
           <a:lstStyle/>
           <a:p>
+            <a:pPr algn="ctr"/>
+            <a:r>
+              <a:rPr sz="1200" b="1">
+                <a:solidFill>
+                  <a:srgbClr val="B5533C"/>
+                </a:solidFill>
+                <a:latin typeface="Readex Pro"/>
+                <a:cs typeface="Readex Pro"/>
+                <a:ea typeface="Readex Pro"/>
+              </a:rPr>
+              <a:t>Leakage check</a:t>
+            </a:r>
+          </a:p>
+        </p:txBody>
+      </p:sp>
+      <p:sp>
+        <p:nvSpPr>
+          <p:cNvPr id="14" name="TextBox 13"/>
+          <p:cNvSpPr txBox="1"/>
+          <p:nvPr/>
+        </p:nvSpPr>
+        <p:spPr>
+          <a:xfrm>
+            <a:off x="2382012" y="2606040"/>
+            <a:ext cx="1353312" cy="621792"/>
+          </a:xfrm>
+          <a:prstGeom prst="rect">
+            <a:avLst/>
+          </a:prstGeom>
+          <a:noFill/>
+        </p:spPr>
+        <p:txBody>
+          <a:bodyPr wrap="square" lIns="0" rIns="0" tIns="0" bIns="0" anchor="ctr">
+            <a:spAutoFit/>
+          </a:bodyPr>
+          <a:lstStyle/>
+          <a:p>
             <a:pPr algn="ctr">
               <a:lnSpc>
-                <a:spcPct val="108000"/>
+                <a:spcPct val="112000"/>
               </a:lnSpc>
             </a:pPr>
             <a:r>
-              <a:rPr sz="1150" b="0">
-                <a:solidFill>
-                  <a:srgbClr val="B5533C"/>
-                </a:solidFill>
-                <a:latin typeface="Readex Pro"/>
-                <a:cs typeface="Readex Pro"/>
-                <a:ea typeface="Readex Pro"/>
-              </a:rPr>
-              <a:t>Returned 65% of rows unchanged</a:t>
+              <a:rPr sz="1050" b="0">
+                <a:solidFill>
+                  <a:srgbClr val="4A4842"/>
+                </a:solidFill>
+                <a:latin typeface="Readex Pro"/>
+                <a:cs typeface="Readex Pro"/>
+                <a:ea typeface="Readex Pro"/>
+              </a:rPr>
+              <a:t>exact + 5-gram ·</a:t>
             </a:r>
           </a:p>
           <a:p>
             <a:pPr algn="ctr">
               <a:lnSpc>
-                <a:spcPct val="108000"/>
+                <a:spcPct val="112000"/>
               </a:lnSpc>
             </a:pPr>
             <a:r>
-              <a:rPr sz="1150" b="0">
-                <a:solidFill>
-                  <a:srgbClr val="B5533C"/>
-                </a:solidFill>
-                <a:latin typeface="Readex Pro"/>
-                <a:cs typeface="Readex Pro"/>
-                <a:ea typeface="Readex Pro"/>
-              </a:rPr>
-              <a:t>(editors: 49%).</a:t>
-            </a:r>
-          </a:p>
-          <a:p>
-            <a:pPr algn="ctr">
-              <a:lnSpc>
-                <a:spcPct val="108000"/>
-              </a:lnSpc>
-            </a:pPr>
-            <a:r>
-              <a:rPr sz="1150" b="0">
-                <a:solidFill>
-                  <a:srgbClr val="B5533C"/>
-                </a:solidFill>
-                <a:latin typeface="Readex Pro"/>
-                <a:cs typeface="Readex Pro"/>
-                <a:ea typeface="Readex Pro"/>
-              </a:rPr>
-              <a:t>Swapped words, never restructured.</a:t>
+              <a:rPr sz="1050" b="0">
+                <a:solidFill>
+                  <a:srgbClr val="4A4842"/>
+                </a:solidFill>
+                <a:latin typeface="Readex Pro"/>
+                <a:cs typeface="Readex Pro"/>
+                <a:ea typeface="Readex Pro"/>
+              </a:rPr>
+              <a:t>grouped split</a:t>
             </a:r>
           </a:p>
         </p:txBody>
       </p:sp>
       <p:cxnSp>
         <p:nvCxnSpPr>
-          <p:cNvPr id="14" name="Connector 13"/>
+          <p:cNvPr id="15" name="Connector 14"/>
           <p:cNvCxnSpPr/>
           <p:nvPr/>
         </p:nvCxnSpPr>
         <p:spPr>
           <a:xfrm>
-            <a:off x="3108960" y="2880360"/>
-            <a:ext cx="393192" cy="0"/>
+            <a:off x="1952243" y="2715768"/>
+            <a:ext cx="320041" cy="0"/>
           </a:xfrm>
           <a:prstGeom prst="line">
             <a:avLst/>
@@ -12667,63 +13535,26 @@
       </p:cxnSp>
       <p:sp>
         <p:nvSpPr>
-          <p:cNvPr id="15" name="TextBox 14"/>
-          <p:cNvSpPr txBox="1"/>
-          <p:nvPr/>
-        </p:nvSpPr>
-        <p:spPr>
-          <a:xfrm>
-            <a:off x="3557016" y="1874519"/>
-            <a:ext cx="2788920" cy="292608"/>
-          </a:xfrm>
-          <a:prstGeom prst="rect">
-            <a:avLst/>
-          </a:prstGeom>
-          <a:noFill/>
-        </p:spPr>
-        <p:txBody>
-          <a:bodyPr wrap="square" lIns="0" rIns="0" tIns="0" bIns="0" anchor="ctr">
-            <a:spAutoFit/>
-          </a:bodyPr>
-          <a:lstStyle/>
-          <a:p>
-            <a:pPr algn="ctr"/>
-            <a:r>
-              <a:rPr sz="1150" b="1">
-                <a:solidFill>
-                  <a:srgbClr val="8A5E35"/>
-                </a:solidFill>
-                <a:latin typeface="Readex Pro"/>
-                <a:cs typeface="Readex Pro"/>
-                <a:ea typeface="Readex Pro"/>
-              </a:rPr>
-              <a:t>AraT5v2 + AraBART</a:t>
-            </a:r>
-          </a:p>
-        </p:txBody>
-      </p:sp>
-      <p:sp>
-        <p:nvSpPr>
           <p:cNvPr id="16" name="Rounded Rectangle 15"/>
           <p:cNvSpPr/>
           <p:nvPr/>
         </p:nvSpPr>
         <p:spPr>
           <a:xfrm>
-            <a:off x="3557016" y="2221991"/>
-            <a:ext cx="2788920" cy="475488"/>
+            <a:off x="4210812" y="2148840"/>
+            <a:ext cx="1481328" cy="1143000"/>
           </a:xfrm>
           <a:prstGeom prst="roundRect">
             <a:avLst>
-              <a:gd name="adj" fmla="val 19230"/>
+              <a:gd name="adj" fmla="val 8000"/>
             </a:avLst>
           </a:prstGeom>
           <a:solidFill>
-            <a:srgbClr val="E6DFCC"/>
+            <a:srgbClr val="F3E2DA"/>
           </a:solidFill>
           <a:ln w="15875">
             <a:solidFill>
-              <a:srgbClr val="E6DFCC"/>
+              <a:srgbClr val="B5533C"/>
             </a:solidFill>
           </a:ln>
           <a:effectLst/>
@@ -12743,38 +13574,159 @@
           </a:fontRef>
         </p:style>
         <p:txBody>
-          <a:bodyPr rtlCol="0" anchor="ctr" wrap="square" lIns="109728" rIns="109728" tIns="0" bIns="0"/>
+          <a:bodyPr rtlCol="0" anchor="ctr"/>
           <a:lstStyle/>
           <a:p>
             <a:pPr algn="ctr"/>
-            <a:r>
-              <a:rPr sz="1700" b="1">
-                <a:solidFill>
-                  <a:srgbClr val="282824"/>
-                </a:solidFill>
-                <a:latin typeface="Readex Pro"/>
-                <a:cs typeface="Readex Pro"/>
-                <a:ea typeface="Readex Pro"/>
-              </a:rPr>
-              <a:t>v0.2</a:t>
-            </a:r>
-          </a:p>
-        </p:txBody>
-      </p:sp>
-      <p:sp>
-        <p:nvSpPr>
-          <p:cNvPr id="17" name="Rounded Rectangle 16"/>
+          </a:p>
+        </p:txBody>
+      </p:sp>
+      <p:sp>
+        <p:nvSpPr>
+          <p:cNvPr id="17" name="TextBox 16"/>
+          <p:cNvSpPr txBox="1"/>
+          <p:nvPr/>
+        </p:nvSpPr>
+        <p:spPr>
+          <a:xfrm>
+            <a:off x="4274820" y="2258568"/>
+            <a:ext cx="1353312" cy="274320"/>
+          </a:xfrm>
+          <a:prstGeom prst="rect">
+            <a:avLst/>
+          </a:prstGeom>
+          <a:noFill/>
+        </p:spPr>
+        <p:txBody>
+          <a:bodyPr wrap="square" lIns="0" rIns="0" tIns="0" bIns="0" anchor="ctr">
+            <a:spAutoFit/>
+          </a:bodyPr>
+          <a:lstStyle/>
+          <a:p>
+            <a:pPr algn="ctr"/>
+            <a:r>
+              <a:rPr sz="1200" b="1">
+                <a:solidFill>
+                  <a:srgbClr val="B5533C"/>
+                </a:solidFill>
+                <a:latin typeface="Readex Pro"/>
+                <a:cs typeface="Readex Pro"/>
+                <a:ea typeface="Readex Pro"/>
+              </a:rPr>
+              <a:t>Meaning gate</a:t>
+            </a:r>
+          </a:p>
+        </p:txBody>
+      </p:sp>
+      <p:sp>
+        <p:nvSpPr>
+          <p:cNvPr id="18" name="TextBox 17"/>
+          <p:cNvSpPr txBox="1"/>
+          <p:nvPr/>
+        </p:nvSpPr>
+        <p:spPr>
+          <a:xfrm>
+            <a:off x="4274820" y="2606040"/>
+            <a:ext cx="1353312" cy="621792"/>
+          </a:xfrm>
+          <a:prstGeom prst="rect">
+            <a:avLst/>
+          </a:prstGeom>
+          <a:noFill/>
+        </p:spPr>
+        <p:txBody>
+          <a:bodyPr wrap="square" lIns="0" rIns="0" tIns="0" bIns="0" anchor="ctr">
+            <a:spAutoFit/>
+          </a:bodyPr>
+          <a:lstStyle/>
+          <a:p>
+            <a:pPr algn="ctr">
+              <a:lnSpc>
+                <a:spcPct val="112000"/>
+              </a:lnSpc>
+            </a:pPr>
+            <a:r>
+              <a:rPr sz="1050" b="0">
+                <a:solidFill>
+                  <a:srgbClr val="4A4842"/>
+                </a:solidFill>
+                <a:latin typeface="Readex Pro"/>
+                <a:cs typeface="Readex Pro"/>
+                <a:ea typeface="Readex Pro"/>
+              </a:rPr>
+              <a:t>Qwen judge ≥ 0.85</a:t>
+            </a:r>
+          </a:p>
+          <a:p>
+            <a:pPr algn="ctr">
+              <a:lnSpc>
+                <a:spcPct val="112000"/>
+              </a:lnSpc>
+            </a:pPr>
+            <a:r>
+              <a:rPr sz="1050" b="0">
+                <a:solidFill>
+                  <a:srgbClr val="4A4842"/>
+                </a:solidFill>
+                <a:latin typeface="Readex Pro"/>
+                <a:cs typeface="Readex Pro"/>
+                <a:ea typeface="Readex Pro"/>
+              </a:rPr>
+              <a:t>strength tags [S0]–[SA]</a:t>
+            </a:r>
+          </a:p>
+        </p:txBody>
+      </p:sp>
+      <p:cxnSp>
+        <p:nvCxnSpPr>
+          <p:cNvPr id="19" name="Connector 18"/>
+          <p:cNvCxnSpPr/>
+          <p:nvPr/>
+        </p:nvCxnSpPr>
+        <p:spPr>
+          <a:xfrm>
+            <a:off x="3845052" y="2715768"/>
+            <a:ext cx="320040" cy="0"/>
+          </a:xfrm>
+          <a:prstGeom prst="line">
+            <a:avLst/>
+          </a:prstGeom>
+          <a:ln w="31750">
+            <a:solidFill>
+              <a:srgbClr val="C6986B"/>
+            </a:solidFill>
+            <a:tailEnd type="triangle"/>
+          </a:ln>
+        </p:spPr>
+        <p:style>
+          <a:lnRef idx="2">
+            <a:schemeClr val="accent1"/>
+          </a:lnRef>
+          <a:fillRef idx="0">
+            <a:schemeClr val="accent1"/>
+          </a:fillRef>
+          <a:effectRef idx="1">
+            <a:schemeClr val="accent1"/>
+          </a:effectRef>
+          <a:fontRef idx="minor">
+            <a:schemeClr val="tx1"/>
+          </a:fontRef>
+        </p:style>
+      </p:cxnSp>
+      <p:sp>
+        <p:nvSpPr>
+          <p:cNvPr id="20" name="Rounded Rectangle 19"/>
           <p:cNvSpPr/>
           <p:nvPr/>
         </p:nvSpPr>
         <p:spPr>
           <a:xfrm>
-            <a:off x="3557016" y="2807208"/>
-            <a:ext cx="2788920" cy="1051560"/>
+            <a:off x="6103620" y="2148840"/>
+            <a:ext cx="1481328" cy="1143000"/>
           </a:xfrm>
           <a:prstGeom prst="roundRect">
             <a:avLst>
-              <a:gd name="adj" fmla="val 8695"/>
+              <a:gd name="adj" fmla="val 8000"/>
             </a:avLst>
           </a:prstGeom>
           <a:solidFill>
@@ -12802,12 +13754,79 @@
           </a:fontRef>
         </p:style>
         <p:txBody>
-          <a:bodyPr rtlCol="0" anchor="ctr" wrap="square" lIns="109728" rIns="109728" tIns="0" bIns="0"/>
+          <a:bodyPr rtlCol="0" anchor="ctr"/>
           <a:lstStyle/>
           <a:p>
             <a:pPr algn="ctr"/>
-            <a:r>
-              <a:rPr sz="1200" b="0">
+          </a:p>
+        </p:txBody>
+      </p:sp>
+      <p:sp>
+        <p:nvSpPr>
+          <p:cNvPr id="21" name="TextBox 20"/>
+          <p:cNvSpPr txBox="1"/>
+          <p:nvPr/>
+        </p:nvSpPr>
+        <p:spPr>
+          <a:xfrm>
+            <a:off x="6167628" y="2258568"/>
+            <a:ext cx="1353312" cy="274320"/>
+          </a:xfrm>
+          <a:prstGeom prst="rect">
+            <a:avLst/>
+          </a:prstGeom>
+          <a:noFill/>
+        </p:spPr>
+        <p:txBody>
+          <a:bodyPr wrap="square" lIns="0" rIns="0" tIns="0" bIns="0" anchor="ctr">
+            <a:spAutoFit/>
+          </a:bodyPr>
+          <a:lstStyle/>
+          <a:p>
+            <a:pPr algn="ctr"/>
+            <a:r>
+              <a:rPr sz="1200" b="1">
+                <a:solidFill>
+                  <a:srgbClr val="282824"/>
+                </a:solidFill>
+                <a:latin typeface="Readex Pro"/>
+                <a:cs typeface="Readex Pro"/>
+                <a:ea typeface="Readex Pro"/>
+              </a:rPr>
+              <a:t>Fine-tune</a:t>
+            </a:r>
+          </a:p>
+        </p:txBody>
+      </p:sp>
+      <p:sp>
+        <p:nvSpPr>
+          <p:cNvPr id="22" name="TextBox 21"/>
+          <p:cNvSpPr txBox="1"/>
+          <p:nvPr/>
+        </p:nvSpPr>
+        <p:spPr>
+          <a:xfrm>
+            <a:off x="6167628" y="2606040"/>
+            <a:ext cx="1353312" cy="621792"/>
+          </a:xfrm>
+          <a:prstGeom prst="rect">
+            <a:avLst/>
+          </a:prstGeom>
+          <a:noFill/>
+        </p:spPr>
+        <p:txBody>
+          <a:bodyPr wrap="square" lIns="0" rIns="0" tIns="0" bIns="0" anchor="ctr">
+            <a:spAutoFit/>
+          </a:bodyPr>
+          <a:lstStyle/>
+          <a:p>
+            <a:pPr algn="ctr">
+              <a:lnSpc>
+                <a:spcPct val="112000"/>
+              </a:lnSpc>
+            </a:pPr>
+            <a:r>
+              <a:rPr sz="1050" b="0">
                 <a:solidFill>
                   <a:srgbClr val="4A4842"/>
                 </a:solidFill>
@@ -12815,13 +13834,17 @@
                 <a:cs typeface="Readex Pro"/>
                 <a:ea typeface="Readex Pro"/>
               </a:rPr>
-              <a:t>SAMER + everyday text +</a:t>
-            </a:r>
-          </a:p>
-          <a:p>
-            <a:pPr algn="ctr"/>
-            <a:r>
-              <a:rPr sz="1200" b="0">
+              <a:t>AraT5v2 · AraBART ·</a:t>
+            </a:r>
+          </a:p>
+          <a:p>
+            <a:pPr algn="ctr">
+              <a:lnSpc>
+                <a:spcPct val="112000"/>
+              </a:lnSpc>
+            </a:pPr>
+            <a:r>
+              <a:rPr sz="1050" b="0">
                 <a:solidFill>
                   <a:srgbClr val="4A4842"/>
                 </a:solidFill>
@@ -12829,33 +13852,69 @@
                 <a:cs typeface="Readex Pro"/>
                 <a:ea typeface="Readex Pro"/>
               </a:rPr>
-              <a:t>meaning-filtered pairs + tags</a:t>
-            </a:r>
-          </a:p>
-        </p:txBody>
-      </p:sp>
-      <p:sp>
-        <p:nvSpPr>
-          <p:cNvPr id="18" name="Rounded Rectangle 17"/>
+              <a:t>int8 bundle → the phone</a:t>
+            </a:r>
+          </a:p>
+        </p:txBody>
+      </p:sp>
+      <p:cxnSp>
+        <p:nvCxnSpPr>
+          <p:cNvPr id="23" name="Connector 22"/>
+          <p:cNvCxnSpPr/>
+          <p:nvPr/>
+        </p:nvCxnSpPr>
+        <p:spPr>
+          <a:xfrm>
+            <a:off x="5737860" y="2715768"/>
+            <a:ext cx="320040" cy="0"/>
+          </a:xfrm>
+          <a:prstGeom prst="line">
+            <a:avLst/>
+          </a:prstGeom>
+          <a:ln w="31750">
+            <a:solidFill>
+              <a:srgbClr val="C6986B"/>
+            </a:solidFill>
+            <a:tailEnd type="triangle"/>
+          </a:ln>
+        </p:spPr>
+        <p:style>
+          <a:lnRef idx="2">
+            <a:schemeClr val="accent1"/>
+          </a:lnRef>
+          <a:fillRef idx="0">
+            <a:schemeClr val="accent1"/>
+          </a:fillRef>
+          <a:effectRef idx="1">
+            <a:schemeClr val="accent1"/>
+          </a:effectRef>
+          <a:fontRef idx="minor">
+            <a:schemeClr val="tx1"/>
+          </a:fontRef>
+        </p:style>
+      </p:cxnSp>
+      <p:sp>
+        <p:nvSpPr>
+          <p:cNvPr id="24" name="Rounded Rectangle 23"/>
           <p:cNvSpPr/>
           <p:nvPr/>
         </p:nvSpPr>
         <p:spPr>
           <a:xfrm>
-            <a:off x="3557016" y="3959352"/>
-            <a:ext cx="2788920" cy="1417320"/>
+            <a:off x="7996428" y="2148840"/>
+            <a:ext cx="1481328" cy="1143000"/>
           </a:xfrm>
           <a:prstGeom prst="roundRect">
             <a:avLst>
-              <a:gd name="adj" fmla="val 6451"/>
+              <a:gd name="adj" fmla="val 8000"/>
             </a:avLst>
           </a:prstGeom>
           <a:solidFill>
-            <a:srgbClr val="F3E2DA"/>
+            <a:srgbClr val="EFE9D9"/>
           </a:solidFill>
           <a:ln w="15875">
             <a:solidFill>
-              <a:srgbClr val="F3E2DA"/>
+              <a:srgbClr val="E6DFCC"/>
             </a:solidFill>
           </a:ln>
           <a:effectLst/>
@@ -12884,14 +13943,14 @@
       </p:sp>
       <p:sp>
         <p:nvSpPr>
-          <p:cNvPr id="19" name="TextBox 18"/>
+          <p:cNvPr id="25" name="TextBox 24"/>
           <p:cNvSpPr txBox="1"/>
           <p:nvPr/>
         </p:nvSpPr>
         <p:spPr>
           <a:xfrm>
-            <a:off x="3666744" y="4087368"/>
-            <a:ext cx="2569463" cy="1188720"/>
+            <a:off x="8060436" y="2258568"/>
+            <a:ext cx="1353312" cy="274320"/>
           </a:xfrm>
           <a:prstGeom prst="rect">
             <a:avLst/>
@@ -12904,61 +13963,116 @@
           </a:bodyPr>
           <a:lstStyle/>
           <a:p>
+            <a:pPr algn="ctr"/>
+            <a:r>
+              <a:rPr sz="1200" b="1">
+                <a:solidFill>
+                  <a:srgbClr val="282824"/>
+                </a:solidFill>
+                <a:latin typeface="Readex Pro"/>
+                <a:cs typeface="Readex Pro"/>
+                <a:ea typeface="Readex Pro"/>
+              </a:rPr>
+              <a:t>Measure</a:t>
+            </a:r>
+          </a:p>
+        </p:txBody>
+      </p:sp>
+      <p:sp>
+        <p:nvSpPr>
+          <p:cNvPr id="26" name="TextBox 25"/>
+          <p:cNvSpPr txBox="1"/>
+          <p:nvPr/>
+        </p:nvSpPr>
+        <p:spPr>
+          <a:xfrm>
+            <a:off x="8060436" y="2606040"/>
+            <a:ext cx="1353312" cy="621792"/>
+          </a:xfrm>
+          <a:prstGeom prst="rect">
+            <a:avLst/>
+          </a:prstGeom>
+          <a:noFill/>
+        </p:spPr>
+        <p:txBody>
+          <a:bodyPr wrap="square" lIns="0" rIns="0" tIns="0" bIns="0" anchor="ctr">
+            <a:spAutoFit/>
+          </a:bodyPr>
+          <a:lstStyle/>
+          <a:p>
             <a:pPr algn="ctr">
               <a:lnSpc>
-                <a:spcPct val="108000"/>
+                <a:spcPct val="112000"/>
               </a:lnSpc>
             </a:pPr>
             <a:r>
-              <a:rPr sz="1150" b="0">
-                <a:solidFill>
-                  <a:srgbClr val="B5533C"/>
-                </a:solidFill>
-                <a:latin typeface="Readex Pro"/>
-                <a:cs typeface="Readex Pro"/>
-                <a:ea typeface="Readex Pro"/>
-              </a:rPr>
-              <a:t>v0.2 keeps the meaning in 60%</a:t>
+              <a:rPr sz="1050" b="0">
+                <a:solidFill>
+                  <a:srgbClr val="4A4842"/>
+                </a:solidFill>
+                <a:latin typeface="Readex Pro"/>
+                <a:cs typeface="Readex Pro"/>
+                <a:ea typeface="Readex Pro"/>
+              </a:rPr>
+              <a:t>BayanBench v2 ·</a:t>
             </a:r>
           </a:p>
           <a:p>
             <a:pPr algn="ctr">
               <a:lnSpc>
-                <a:spcPct val="108000"/>
+                <a:spcPct val="112000"/>
               </a:lnSpc>
             </a:pPr>
             <a:r>
-              <a:rPr sz="1150" b="0">
-                <a:solidFill>
-                  <a:srgbClr val="B5533C"/>
-                </a:solidFill>
-                <a:latin typeface="Readex Pro"/>
-                <a:cs typeface="Readex Pro"/>
-                <a:ea typeface="Readex Pro"/>
-              </a:rPr>
-              <a:t>of outputs, v0.2-Fast in 40%.</a:t>
-            </a:r>
-          </a:p>
-          <a:p>
-            <a:pPr algn="ctr">
-              <a:lnSpc>
-                <a:spcPct val="108000"/>
-              </a:lnSpc>
-            </a:pPr>
-            <a:r>
-              <a:rPr sz="1150" b="0">
-                <a:solidFill>
-                  <a:srgbClr val="B5533C"/>
-                </a:solidFill>
-                <a:latin typeface="Readex Pro"/>
-                <a:cs typeface="Readex Pro"/>
-                <a:ea typeface="Readex Pro"/>
-              </a:rPr>
-              <a:t>The tag costs meaning.</a:t>
-            </a:r>
-          </a:p>
-        </p:txBody>
-      </p:sp>
+              <a:rPr sz="1050" b="0">
+                <a:solidFill>
+                  <a:srgbClr val="4A4842"/>
+                </a:solidFill>
+                <a:latin typeface="Readex Pro"/>
+                <a:cs typeface="Readex Pro"/>
+                <a:ea typeface="Readex Pro"/>
+              </a:rPr>
+              <a:t>1,981 items, one scorer</a:t>
+            </a:r>
+          </a:p>
+        </p:txBody>
+      </p:sp>
+      <p:cxnSp>
+        <p:nvCxnSpPr>
+          <p:cNvPr id="27" name="Connector 26"/>
+          <p:cNvCxnSpPr/>
+          <p:nvPr/>
+        </p:nvCxnSpPr>
+        <p:spPr>
+          <a:xfrm>
+            <a:off x="7630668" y="2715768"/>
+            <a:ext cx="320040" cy="0"/>
+          </a:xfrm>
+          <a:prstGeom prst="line">
+            <a:avLst/>
+          </a:prstGeom>
+          <a:ln w="31750">
+            <a:solidFill>
+              <a:srgbClr val="C6986B"/>
+            </a:solidFill>
+            <a:tailEnd type="triangle"/>
+          </a:ln>
+        </p:spPr>
+        <p:style>
+          <a:lnRef idx="2">
+            <a:schemeClr val="accent1"/>
+          </a:lnRef>
+          <a:fillRef idx="0">
+            <a:schemeClr val="accent1"/>
+          </a:fillRef>
+          <a:effectRef idx="1">
+            <a:schemeClr val="accent1"/>
+          </a:effectRef>
+          <a:fontRef idx="minor">
+            <a:schemeClr val="tx1"/>
+          </a:fontRef>
+        </p:style>
+      </p:cxnSp>
     </p:spTree>
   </p:cSld>
   <p:clrMapOvr>
@@ -13097,7 +14211,7 @@
                 <a:cs typeface="Readex Pro"/>
                 <a:ea typeface="Readex Pro"/>
               </a:rPr>
-              <a:t>04 · BAYANSIMPLIFY MODELS</a:t>
+              <a:t>04 · THE PIPELINE</a:t>
             </a:r>
           </a:p>
         </p:txBody>
@@ -13134,7 +14248,7 @@
                 <a:cs typeface="Readex Pro"/>
                 <a:ea typeface="Readex Pro"/>
               </a:rPr>
-              <a:t>Each version answered the last failure</a:t>
+              <a:t>Build, measure, learn</a:t>
             </a:r>
           </a:p>
         </p:txBody>
@@ -13239,114 +14353,18 @@
       </p:sp>
       <p:sp>
         <p:nvSpPr>
-          <p:cNvPr id="9" name="TextBox 8"/>
-          <p:cNvSpPr txBox="1"/>
-          <p:nvPr/>
-        </p:nvSpPr>
-        <p:spPr>
-          <a:xfrm>
-            <a:off x="265176" y="1874519"/>
-            <a:ext cx="2788920" cy="292608"/>
-          </a:xfrm>
-          <a:prstGeom prst="rect">
-            <a:avLst/>
-          </a:prstGeom>
-          <a:noFill/>
-        </p:spPr>
-        <p:txBody>
-          <a:bodyPr wrap="square" lIns="0" rIns="0" tIns="0" bIns="0" anchor="ctr">
-            <a:spAutoFit/>
-          </a:bodyPr>
-          <a:lstStyle/>
-          <a:p>
-            <a:pPr algn="ctr"/>
-            <a:r>
-              <a:rPr sz="1150" b="0">
-                <a:solidFill>
-                  <a:srgbClr val="6F6B5E"/>
-                </a:solidFill>
-                <a:latin typeface="Readex Pro"/>
-                <a:cs typeface="Readex Pro"/>
-                <a:ea typeface="Readex Pro"/>
-              </a:rPr>
-              <a:t>AraT5v2 on SAMER</a:t>
-            </a:r>
-          </a:p>
-        </p:txBody>
-      </p:sp>
-      <p:sp>
-        <p:nvSpPr>
-          <p:cNvPr id="10" name="Rounded Rectangle 9"/>
+          <p:cNvPr id="9" name="Rounded Rectangle 8"/>
           <p:cNvSpPr/>
           <p:nvPr/>
         </p:nvSpPr>
         <p:spPr>
           <a:xfrm>
-            <a:off x="265176" y="2221991"/>
-            <a:ext cx="2788920" cy="475488"/>
+            <a:off x="425196" y="2148840"/>
+            <a:ext cx="1481328" cy="1143000"/>
           </a:xfrm>
           <a:prstGeom prst="roundRect">
             <a:avLst>
-              <a:gd name="adj" fmla="val 19230"/>
-            </a:avLst>
-          </a:prstGeom>
-          <a:solidFill>
-            <a:srgbClr val="E6DFCC"/>
-          </a:solidFill>
-          <a:ln w="15875">
-            <a:solidFill>
-              <a:srgbClr val="E6DFCC"/>
-            </a:solidFill>
-          </a:ln>
-          <a:effectLst/>
-        </p:spPr>
-        <p:style>
-          <a:lnRef idx="1">
-            <a:schemeClr val="accent1"/>
-          </a:lnRef>
-          <a:fillRef idx="3">
-            <a:schemeClr val="accent1"/>
-          </a:fillRef>
-          <a:effectRef idx="2">
-            <a:schemeClr val="accent1"/>
-          </a:effectRef>
-          <a:fontRef idx="minor">
-            <a:schemeClr val="lt1"/>
-          </a:fontRef>
-        </p:style>
-        <p:txBody>
-          <a:bodyPr rtlCol="0" anchor="ctr" wrap="square" lIns="109728" rIns="109728" tIns="0" bIns="0"/>
-          <a:lstStyle/>
-          <a:p>
-            <a:pPr algn="ctr"/>
-            <a:r>
-              <a:rPr sz="1700" b="1">
-                <a:solidFill>
-                  <a:srgbClr val="282824"/>
-                </a:solidFill>
-                <a:latin typeface="Readex Pro"/>
-                <a:cs typeface="Readex Pro"/>
-                <a:ea typeface="Readex Pro"/>
-              </a:rPr>
-              <a:t>v0.1</a:t>
-            </a:r>
-          </a:p>
-        </p:txBody>
-      </p:sp>
-      <p:sp>
-        <p:nvSpPr>
-          <p:cNvPr id="11" name="Rounded Rectangle 10"/>
-          <p:cNvSpPr/>
-          <p:nvPr/>
-        </p:nvSpPr>
-        <p:spPr>
-          <a:xfrm>
-            <a:off x="265176" y="2807208"/>
-            <a:ext cx="2788920" cy="1051560"/>
-          </a:xfrm>
-          <a:prstGeom prst="roundRect">
-            <a:avLst>
-              <a:gd name="adj" fmla="val 8695"/>
+              <a:gd name="adj" fmla="val 8000"/>
             </a:avLst>
           </a:prstGeom>
           <a:solidFill>
@@ -13374,12 +14392,79 @@
           </a:fontRef>
         </p:style>
         <p:txBody>
-          <a:bodyPr rtlCol="0" anchor="ctr" wrap="square" lIns="109728" rIns="109728" tIns="0" bIns="0"/>
+          <a:bodyPr rtlCol="0" anchor="ctr"/>
           <a:lstStyle/>
           <a:p>
             <a:pPr algn="ctr"/>
-            <a:r>
-              <a:rPr sz="1200" b="0">
+          </a:p>
+        </p:txBody>
+      </p:sp>
+      <p:sp>
+        <p:nvSpPr>
+          <p:cNvPr id="10" name="TextBox 9"/>
+          <p:cNvSpPr txBox="1"/>
+          <p:nvPr/>
+        </p:nvSpPr>
+        <p:spPr>
+          <a:xfrm>
+            <a:off x="489204" y="2258568"/>
+            <a:ext cx="1353312" cy="274320"/>
+          </a:xfrm>
+          <a:prstGeom prst="rect">
+            <a:avLst/>
+          </a:prstGeom>
+          <a:noFill/>
+        </p:spPr>
+        <p:txBody>
+          <a:bodyPr wrap="square" lIns="0" rIns="0" tIns="0" bIns="0" anchor="ctr">
+            <a:spAutoFit/>
+          </a:bodyPr>
+          <a:lstStyle/>
+          <a:p>
+            <a:pPr algn="ctr"/>
+            <a:r>
+              <a:rPr sz="1200" b="1">
+                <a:solidFill>
+                  <a:srgbClr val="282824"/>
+                </a:solidFill>
+                <a:latin typeface="Readex Pro"/>
+                <a:cs typeface="Readex Pro"/>
+                <a:ea typeface="Readex Pro"/>
+              </a:rPr>
+              <a:t>Source corpora</a:t>
+            </a:r>
+          </a:p>
+        </p:txBody>
+      </p:sp>
+      <p:sp>
+        <p:nvSpPr>
+          <p:cNvPr id="11" name="TextBox 10"/>
+          <p:cNvSpPr txBox="1"/>
+          <p:nvPr/>
+        </p:nvSpPr>
+        <p:spPr>
+          <a:xfrm>
+            <a:off x="489204" y="2606040"/>
+            <a:ext cx="1353312" cy="621792"/>
+          </a:xfrm>
+          <a:prstGeom prst="rect">
+            <a:avLst/>
+          </a:prstGeom>
+          <a:noFill/>
+        </p:spPr>
+        <p:txBody>
+          <a:bodyPr wrap="square" lIns="0" rIns="0" tIns="0" bIns="0" anchor="ctr">
+            <a:spAutoFit/>
+          </a:bodyPr>
+          <a:lstStyle/>
+          <a:p>
+            <a:pPr algn="ctr">
+              <a:lnSpc>
+                <a:spcPct val="112000"/>
+              </a:lnSpc>
+            </a:pPr>
+            <a:r>
+              <a:rPr sz="1050" b="0">
                 <a:solidFill>
                   <a:srgbClr val="4A4842"/>
                 </a:solidFill>
@@ -13387,13 +14472,17 @@
                 <a:cs typeface="Readex Pro"/>
                 <a:ea typeface="Readex Pro"/>
               </a:rPr>
-              <a:t>SAMER level 5 → 3,</a:t>
-            </a:r>
-          </a:p>
-          <a:p>
-            <a:pPr algn="ctr"/>
-            <a:r>
-              <a:rPr sz="1200" b="0">
+              <a:t>SAMER · DAASI ·</a:t>
+            </a:r>
+          </a:p>
+          <a:p>
+            <a:pPr algn="ctr">
+              <a:lnSpc>
+                <a:spcPct val="112000"/>
+              </a:lnSpc>
+            </a:pPr>
+            <a:r>
+              <a:rPr sz="1050" b="0">
                 <a:solidFill>
                   <a:srgbClr val="4A4842"/>
                 </a:solidFill>
@@ -13401,7 +14490,7 @@
                 <a:cs typeface="Readex Pro"/>
                 <a:ea typeface="Readex Pro"/>
               </a:rPr>
-              <a:t>14,343 pairs</a:t>
+              <a:t>other datasets · BAREC</a:t>
             </a:r>
           </a:p>
         </p:txBody>
@@ -13414,12 +14503,12 @@
         </p:nvSpPr>
         <p:spPr>
           <a:xfrm>
-            <a:off x="265176" y="3959352"/>
-            <a:ext cx="2788920" cy="1417320"/>
+            <a:off x="2318004" y="2148840"/>
+            <a:ext cx="1481328" cy="1143000"/>
           </a:xfrm>
           <a:prstGeom prst="roundRect">
             <a:avLst>
-              <a:gd name="adj" fmla="val 6451"/>
+              <a:gd name="adj" fmla="val 8000"/>
             </a:avLst>
           </a:prstGeom>
           <a:solidFill>
@@ -13427,7 +14516,7 @@
           </a:solidFill>
           <a:ln w="15875">
             <a:solidFill>
-              <a:srgbClr val="F3E2DA"/>
+              <a:srgbClr val="B5533C"/>
             </a:solidFill>
           </a:ln>
           <a:effectLst/>
@@ -13462,8 +14551,8 @@
         </p:nvSpPr>
         <p:spPr>
           <a:xfrm>
-            <a:off x="374904" y="4087368"/>
-            <a:ext cx="2569463" cy="1188720"/>
+            <a:off x="2382012" y="2258568"/>
+            <a:ext cx="1353312" cy="274320"/>
           </a:xfrm>
           <a:prstGeom prst="rect">
             <a:avLst/>
@@ -13476,13 +14565,9 @@
           </a:bodyPr>
           <a:lstStyle/>
           <a:p>
-            <a:pPr algn="ctr">
-              <a:lnSpc>
-                <a:spcPct val="108000"/>
-              </a:lnSpc>
-            </a:pPr>
-            <a:r>
-              <a:rPr sz="1150" b="0">
+            <a:pPr algn="ctr"/>
+            <a:r>
+              <a:rPr sz="1200" b="1">
                 <a:solidFill>
                   <a:srgbClr val="B5533C"/>
                 </a:solidFill>
@@ -13490,43 +14575,7 @@
                 <a:cs typeface="Readex Pro"/>
                 <a:ea typeface="Readex Pro"/>
               </a:rPr>
-              <a:t>Returned 65% of rows unchanged</a:t>
-            </a:r>
-          </a:p>
-          <a:p>
-            <a:pPr algn="ctr">
-              <a:lnSpc>
-                <a:spcPct val="108000"/>
-              </a:lnSpc>
-            </a:pPr>
-            <a:r>
-              <a:rPr sz="1150" b="0">
-                <a:solidFill>
-                  <a:srgbClr val="B5533C"/>
-                </a:solidFill>
-                <a:latin typeface="Readex Pro"/>
-                <a:cs typeface="Readex Pro"/>
-                <a:ea typeface="Readex Pro"/>
-              </a:rPr>
-              <a:t>(editors: 49%).</a:t>
-            </a:r>
-          </a:p>
-          <a:p>
-            <a:pPr algn="ctr">
-              <a:lnSpc>
-                <a:spcPct val="108000"/>
-              </a:lnSpc>
-            </a:pPr>
-            <a:r>
-              <a:rPr sz="1150" b="0">
-                <a:solidFill>
-                  <a:srgbClr val="B5533C"/>
-                </a:solidFill>
-                <a:latin typeface="Readex Pro"/>
-                <a:cs typeface="Readex Pro"/>
-                <a:ea typeface="Readex Pro"/>
-              </a:rPr>
-              <a:t>Swapped words, never restructured.</a:t>
+              <a:t>Leakage check</a:t>
             </a:r>
           </a:p>
         </p:txBody>
@@ -13539,8 +14588,8 @@
         </p:nvSpPr>
         <p:spPr>
           <a:xfrm>
-            <a:off x="3557016" y="1874519"/>
-            <a:ext cx="2788920" cy="292608"/>
+            <a:off x="2382012" y="2606040"/>
+            <a:ext cx="1353312" cy="621792"/>
           </a:xfrm>
           <a:prstGeom prst="rect">
             <a:avLst/>
@@ -13553,43 +14602,101 @@
           </a:bodyPr>
           <a:lstStyle/>
           <a:p>
-            <a:pPr algn="ctr"/>
-            <a:r>
-              <a:rPr sz="1150" b="1">
-                <a:solidFill>
-                  <a:srgbClr val="8A5E35"/>
-                </a:solidFill>
-                <a:latin typeface="Readex Pro"/>
-                <a:cs typeface="Readex Pro"/>
-                <a:ea typeface="Readex Pro"/>
-              </a:rPr>
-              <a:t>AraT5v2 + AraBART</a:t>
-            </a:r>
-          </a:p>
-        </p:txBody>
-      </p:sp>
-      <p:sp>
-        <p:nvSpPr>
-          <p:cNvPr id="15" name="Rounded Rectangle 14"/>
+            <a:pPr algn="ctr">
+              <a:lnSpc>
+                <a:spcPct val="112000"/>
+              </a:lnSpc>
+            </a:pPr>
+            <a:r>
+              <a:rPr sz="1050" b="0">
+                <a:solidFill>
+                  <a:srgbClr val="4A4842"/>
+                </a:solidFill>
+                <a:latin typeface="Readex Pro"/>
+                <a:cs typeface="Readex Pro"/>
+                <a:ea typeface="Readex Pro"/>
+              </a:rPr>
+              <a:t>exact + 5-gram ·</a:t>
+            </a:r>
+          </a:p>
+          <a:p>
+            <a:pPr algn="ctr">
+              <a:lnSpc>
+                <a:spcPct val="112000"/>
+              </a:lnSpc>
+            </a:pPr>
+            <a:r>
+              <a:rPr sz="1050" b="0">
+                <a:solidFill>
+                  <a:srgbClr val="4A4842"/>
+                </a:solidFill>
+                <a:latin typeface="Readex Pro"/>
+                <a:cs typeface="Readex Pro"/>
+                <a:ea typeface="Readex Pro"/>
+              </a:rPr>
+              <a:t>grouped split</a:t>
+            </a:r>
+          </a:p>
+        </p:txBody>
+      </p:sp>
+      <p:cxnSp>
+        <p:nvCxnSpPr>
+          <p:cNvPr id="15" name="Connector 14"/>
+          <p:cNvCxnSpPr/>
+          <p:nvPr/>
+        </p:nvCxnSpPr>
+        <p:spPr>
+          <a:xfrm>
+            <a:off x="1952243" y="2715768"/>
+            <a:ext cx="320041" cy="0"/>
+          </a:xfrm>
+          <a:prstGeom prst="line">
+            <a:avLst/>
+          </a:prstGeom>
+          <a:ln w="31750">
+            <a:solidFill>
+              <a:srgbClr val="C6986B"/>
+            </a:solidFill>
+            <a:tailEnd type="triangle"/>
+          </a:ln>
+        </p:spPr>
+        <p:style>
+          <a:lnRef idx="2">
+            <a:schemeClr val="accent1"/>
+          </a:lnRef>
+          <a:fillRef idx="0">
+            <a:schemeClr val="accent1"/>
+          </a:fillRef>
+          <a:effectRef idx="1">
+            <a:schemeClr val="accent1"/>
+          </a:effectRef>
+          <a:fontRef idx="minor">
+            <a:schemeClr val="tx1"/>
+          </a:fontRef>
+        </p:style>
+      </p:cxnSp>
+      <p:sp>
+        <p:nvSpPr>
+          <p:cNvPr id="16" name="Rounded Rectangle 15"/>
           <p:cNvSpPr/>
           <p:nvPr/>
         </p:nvSpPr>
         <p:spPr>
           <a:xfrm>
-            <a:off x="3557016" y="2221991"/>
-            <a:ext cx="2788920" cy="475488"/>
+            <a:off x="4210812" y="2148840"/>
+            <a:ext cx="1481328" cy="1143000"/>
           </a:xfrm>
           <a:prstGeom prst="roundRect">
             <a:avLst>
-              <a:gd name="adj" fmla="val 19230"/>
+              <a:gd name="adj" fmla="val 8000"/>
             </a:avLst>
           </a:prstGeom>
           <a:solidFill>
-            <a:srgbClr val="E6DFCC"/>
+            <a:srgbClr val="F3E2DA"/>
           </a:solidFill>
           <a:ln w="15875">
             <a:solidFill>
-              <a:srgbClr val="E6DFCC"/>
+              <a:srgbClr val="B5533C"/>
             </a:solidFill>
           </a:ln>
           <a:effectLst/>
@@ -13609,38 +14716,159 @@
           </a:fontRef>
         </p:style>
         <p:txBody>
-          <a:bodyPr rtlCol="0" anchor="ctr" wrap="square" lIns="109728" rIns="109728" tIns="0" bIns="0"/>
+          <a:bodyPr rtlCol="0" anchor="ctr"/>
           <a:lstStyle/>
           <a:p>
             <a:pPr algn="ctr"/>
-            <a:r>
-              <a:rPr sz="1700" b="1">
-                <a:solidFill>
-                  <a:srgbClr val="282824"/>
-                </a:solidFill>
-                <a:latin typeface="Readex Pro"/>
-                <a:cs typeface="Readex Pro"/>
-                <a:ea typeface="Readex Pro"/>
-              </a:rPr>
-              <a:t>v0.2</a:t>
-            </a:r>
-          </a:p>
-        </p:txBody>
-      </p:sp>
-      <p:sp>
-        <p:nvSpPr>
-          <p:cNvPr id="16" name="Rounded Rectangle 15"/>
+          </a:p>
+        </p:txBody>
+      </p:sp>
+      <p:sp>
+        <p:nvSpPr>
+          <p:cNvPr id="17" name="TextBox 16"/>
+          <p:cNvSpPr txBox="1"/>
+          <p:nvPr/>
+        </p:nvSpPr>
+        <p:spPr>
+          <a:xfrm>
+            <a:off x="4274820" y="2258568"/>
+            <a:ext cx="1353312" cy="274320"/>
+          </a:xfrm>
+          <a:prstGeom prst="rect">
+            <a:avLst/>
+          </a:prstGeom>
+          <a:noFill/>
+        </p:spPr>
+        <p:txBody>
+          <a:bodyPr wrap="square" lIns="0" rIns="0" tIns="0" bIns="0" anchor="ctr">
+            <a:spAutoFit/>
+          </a:bodyPr>
+          <a:lstStyle/>
+          <a:p>
+            <a:pPr algn="ctr"/>
+            <a:r>
+              <a:rPr sz="1200" b="1">
+                <a:solidFill>
+                  <a:srgbClr val="B5533C"/>
+                </a:solidFill>
+                <a:latin typeface="Readex Pro"/>
+                <a:cs typeface="Readex Pro"/>
+                <a:ea typeface="Readex Pro"/>
+              </a:rPr>
+              <a:t>Meaning gate</a:t>
+            </a:r>
+          </a:p>
+        </p:txBody>
+      </p:sp>
+      <p:sp>
+        <p:nvSpPr>
+          <p:cNvPr id="18" name="TextBox 17"/>
+          <p:cNvSpPr txBox="1"/>
+          <p:nvPr/>
+        </p:nvSpPr>
+        <p:spPr>
+          <a:xfrm>
+            <a:off x="4274820" y="2606040"/>
+            <a:ext cx="1353312" cy="621792"/>
+          </a:xfrm>
+          <a:prstGeom prst="rect">
+            <a:avLst/>
+          </a:prstGeom>
+          <a:noFill/>
+        </p:spPr>
+        <p:txBody>
+          <a:bodyPr wrap="square" lIns="0" rIns="0" tIns="0" bIns="0" anchor="ctr">
+            <a:spAutoFit/>
+          </a:bodyPr>
+          <a:lstStyle/>
+          <a:p>
+            <a:pPr algn="ctr">
+              <a:lnSpc>
+                <a:spcPct val="112000"/>
+              </a:lnSpc>
+            </a:pPr>
+            <a:r>
+              <a:rPr sz="1050" b="0">
+                <a:solidFill>
+                  <a:srgbClr val="4A4842"/>
+                </a:solidFill>
+                <a:latin typeface="Readex Pro"/>
+                <a:cs typeface="Readex Pro"/>
+                <a:ea typeface="Readex Pro"/>
+              </a:rPr>
+              <a:t>Qwen judge ≥ 0.85</a:t>
+            </a:r>
+          </a:p>
+          <a:p>
+            <a:pPr algn="ctr">
+              <a:lnSpc>
+                <a:spcPct val="112000"/>
+              </a:lnSpc>
+            </a:pPr>
+            <a:r>
+              <a:rPr sz="1050" b="0">
+                <a:solidFill>
+                  <a:srgbClr val="4A4842"/>
+                </a:solidFill>
+                <a:latin typeface="Readex Pro"/>
+                <a:cs typeface="Readex Pro"/>
+                <a:ea typeface="Readex Pro"/>
+              </a:rPr>
+              <a:t>strength tags [S0]–[SA]</a:t>
+            </a:r>
+          </a:p>
+        </p:txBody>
+      </p:sp>
+      <p:cxnSp>
+        <p:nvCxnSpPr>
+          <p:cNvPr id="19" name="Connector 18"/>
+          <p:cNvCxnSpPr/>
+          <p:nvPr/>
+        </p:nvCxnSpPr>
+        <p:spPr>
+          <a:xfrm>
+            <a:off x="3845052" y="2715768"/>
+            <a:ext cx="320040" cy="0"/>
+          </a:xfrm>
+          <a:prstGeom prst="line">
+            <a:avLst/>
+          </a:prstGeom>
+          <a:ln w="31750">
+            <a:solidFill>
+              <a:srgbClr val="C6986B"/>
+            </a:solidFill>
+            <a:tailEnd type="triangle"/>
+          </a:ln>
+        </p:spPr>
+        <p:style>
+          <a:lnRef idx="2">
+            <a:schemeClr val="accent1"/>
+          </a:lnRef>
+          <a:fillRef idx="0">
+            <a:schemeClr val="accent1"/>
+          </a:fillRef>
+          <a:effectRef idx="1">
+            <a:schemeClr val="accent1"/>
+          </a:effectRef>
+          <a:fontRef idx="minor">
+            <a:schemeClr val="tx1"/>
+          </a:fontRef>
+        </p:style>
+      </p:cxnSp>
+      <p:sp>
+        <p:nvSpPr>
+          <p:cNvPr id="20" name="Rounded Rectangle 19"/>
           <p:cNvSpPr/>
           <p:nvPr/>
         </p:nvSpPr>
         <p:spPr>
           <a:xfrm>
-            <a:off x="3557016" y="2807208"/>
-            <a:ext cx="2788920" cy="1051560"/>
+            <a:off x="6103620" y="2148840"/>
+            <a:ext cx="1481328" cy="1143000"/>
           </a:xfrm>
           <a:prstGeom prst="roundRect">
             <a:avLst>
-              <a:gd name="adj" fmla="val 8695"/>
+              <a:gd name="adj" fmla="val 8000"/>
             </a:avLst>
           </a:prstGeom>
           <a:solidFill>
@@ -13668,96 +14896,23 @@
           </a:fontRef>
         </p:style>
         <p:txBody>
-          <a:bodyPr rtlCol="0" anchor="ctr" wrap="square" lIns="109728" rIns="109728" tIns="0" bIns="0"/>
+          <a:bodyPr rtlCol="0" anchor="ctr"/>
           <a:lstStyle/>
           <a:p>
             <a:pPr algn="ctr"/>
-            <a:r>
-              <a:rPr sz="1200" b="0">
-                <a:solidFill>
-                  <a:srgbClr val="4A4842"/>
-                </a:solidFill>
-                <a:latin typeface="Readex Pro"/>
-                <a:cs typeface="Readex Pro"/>
-                <a:ea typeface="Readex Pro"/>
-              </a:rPr>
-              <a:t>SAMER + everyday text +</a:t>
-            </a:r>
-          </a:p>
-          <a:p>
-            <a:pPr algn="ctr"/>
-            <a:r>
-              <a:rPr sz="1200" b="0">
-                <a:solidFill>
-                  <a:srgbClr val="4A4842"/>
-                </a:solidFill>
-                <a:latin typeface="Readex Pro"/>
-                <a:cs typeface="Readex Pro"/>
-                <a:ea typeface="Readex Pro"/>
-              </a:rPr>
-              <a:t>meaning-filtered pairs + tags</a:t>
-            </a:r>
-          </a:p>
-        </p:txBody>
-      </p:sp>
-      <p:sp>
-        <p:nvSpPr>
-          <p:cNvPr id="17" name="Rounded Rectangle 16"/>
-          <p:cNvSpPr/>
-          <p:nvPr/>
-        </p:nvSpPr>
-        <p:spPr>
-          <a:xfrm>
-            <a:off x="3557016" y="3959352"/>
-            <a:ext cx="2788920" cy="1417320"/>
-          </a:xfrm>
-          <a:prstGeom prst="roundRect">
-            <a:avLst>
-              <a:gd name="adj" fmla="val 6451"/>
-            </a:avLst>
-          </a:prstGeom>
-          <a:solidFill>
-            <a:srgbClr val="F3E2DA"/>
-          </a:solidFill>
-          <a:ln w="15875">
-            <a:solidFill>
-              <a:srgbClr val="F3E2DA"/>
-            </a:solidFill>
-          </a:ln>
-          <a:effectLst/>
-        </p:spPr>
-        <p:style>
-          <a:lnRef idx="1">
-            <a:schemeClr val="accent1"/>
-          </a:lnRef>
-          <a:fillRef idx="3">
-            <a:schemeClr val="accent1"/>
-          </a:fillRef>
-          <a:effectRef idx="2">
-            <a:schemeClr val="accent1"/>
-          </a:effectRef>
-          <a:fontRef idx="minor">
-            <a:schemeClr val="lt1"/>
-          </a:fontRef>
-        </p:style>
-        <p:txBody>
-          <a:bodyPr rtlCol="0" anchor="ctr"/>
-          <a:lstStyle/>
-          <a:p>
-            <a:pPr algn="ctr"/>
-          </a:p>
-        </p:txBody>
-      </p:sp>
-      <p:sp>
-        <p:nvSpPr>
-          <p:cNvPr id="18" name="TextBox 17"/>
+          </a:p>
+        </p:txBody>
+      </p:sp>
+      <p:sp>
+        <p:nvSpPr>
+          <p:cNvPr id="21" name="TextBox 20"/>
           <p:cNvSpPr txBox="1"/>
           <p:nvPr/>
         </p:nvSpPr>
         <p:spPr>
           <a:xfrm>
-            <a:off x="3666744" y="4087368"/>
-            <a:ext cx="2569463" cy="1188720"/>
+            <a:off x="6167628" y="2258568"/>
+            <a:ext cx="1353312" cy="274320"/>
           </a:xfrm>
           <a:prstGeom prst="rect">
             <a:avLst/>
@@ -13770,71 +14925,90 @@
           </a:bodyPr>
           <a:lstStyle/>
           <a:p>
+            <a:pPr algn="ctr"/>
+            <a:r>
+              <a:rPr sz="1200" b="1">
+                <a:solidFill>
+                  <a:srgbClr val="282824"/>
+                </a:solidFill>
+                <a:latin typeface="Readex Pro"/>
+                <a:cs typeface="Readex Pro"/>
+                <a:ea typeface="Readex Pro"/>
+              </a:rPr>
+              <a:t>Fine-tune</a:t>
+            </a:r>
+          </a:p>
+        </p:txBody>
+      </p:sp>
+      <p:sp>
+        <p:nvSpPr>
+          <p:cNvPr id="22" name="TextBox 21"/>
+          <p:cNvSpPr txBox="1"/>
+          <p:nvPr/>
+        </p:nvSpPr>
+        <p:spPr>
+          <a:xfrm>
+            <a:off x="6167628" y="2606040"/>
+            <a:ext cx="1353312" cy="621792"/>
+          </a:xfrm>
+          <a:prstGeom prst="rect">
+            <a:avLst/>
+          </a:prstGeom>
+          <a:noFill/>
+        </p:spPr>
+        <p:txBody>
+          <a:bodyPr wrap="square" lIns="0" rIns="0" tIns="0" bIns="0" anchor="ctr">
+            <a:spAutoFit/>
+          </a:bodyPr>
+          <a:lstStyle/>
+          <a:p>
             <a:pPr algn="ctr">
               <a:lnSpc>
-                <a:spcPct val="108000"/>
+                <a:spcPct val="112000"/>
               </a:lnSpc>
             </a:pPr>
             <a:r>
-              <a:rPr sz="1150" b="0">
-                <a:solidFill>
-                  <a:srgbClr val="B5533C"/>
-                </a:solidFill>
-                <a:latin typeface="Readex Pro"/>
-                <a:cs typeface="Readex Pro"/>
-                <a:ea typeface="Readex Pro"/>
-              </a:rPr>
-              <a:t>v0.2 keeps the meaning in 60%</a:t>
+              <a:rPr sz="1050" b="0">
+                <a:solidFill>
+                  <a:srgbClr val="4A4842"/>
+                </a:solidFill>
+                <a:latin typeface="Readex Pro"/>
+                <a:cs typeface="Readex Pro"/>
+                <a:ea typeface="Readex Pro"/>
+              </a:rPr>
+              <a:t>AraT5v2 · AraBART ·</a:t>
             </a:r>
           </a:p>
           <a:p>
             <a:pPr algn="ctr">
               <a:lnSpc>
-                <a:spcPct val="108000"/>
+                <a:spcPct val="112000"/>
               </a:lnSpc>
             </a:pPr>
             <a:r>
-              <a:rPr sz="1150" b="0">
-                <a:solidFill>
-                  <a:srgbClr val="B5533C"/>
-                </a:solidFill>
-                <a:latin typeface="Readex Pro"/>
-                <a:cs typeface="Readex Pro"/>
-                <a:ea typeface="Readex Pro"/>
-              </a:rPr>
-              <a:t>of outputs, v0.2-Fast in 40%.</a:t>
-            </a:r>
-          </a:p>
-          <a:p>
-            <a:pPr algn="ctr">
-              <a:lnSpc>
-                <a:spcPct val="108000"/>
-              </a:lnSpc>
-            </a:pPr>
-            <a:r>
-              <a:rPr sz="1150" b="0">
-                <a:solidFill>
-                  <a:srgbClr val="B5533C"/>
-                </a:solidFill>
-                <a:latin typeface="Readex Pro"/>
-                <a:cs typeface="Readex Pro"/>
-                <a:ea typeface="Readex Pro"/>
-              </a:rPr>
-              <a:t>The tag costs meaning.</a:t>
+              <a:rPr sz="1050" b="0">
+                <a:solidFill>
+                  <a:srgbClr val="4A4842"/>
+                </a:solidFill>
+                <a:latin typeface="Readex Pro"/>
+                <a:cs typeface="Readex Pro"/>
+                <a:ea typeface="Readex Pro"/>
+              </a:rPr>
+              <a:t>int8 bundle → the phone</a:t>
             </a:r>
           </a:p>
         </p:txBody>
       </p:sp>
       <p:cxnSp>
         <p:nvCxnSpPr>
-          <p:cNvPr id="19" name="Connector 18"/>
+          <p:cNvPr id="23" name="Connector 22"/>
           <p:cNvCxnSpPr/>
           <p:nvPr/>
         </p:nvCxnSpPr>
         <p:spPr>
           <a:xfrm>
-            <a:off x="3108960" y="2880360"/>
-            <a:ext cx="393192" cy="0"/>
+            <a:off x="5737860" y="2715768"/>
+            <a:ext cx="320040" cy="0"/>
           </a:xfrm>
           <a:prstGeom prst="line">
             <a:avLst/>
@@ -13863,114 +15037,18 @@
       </p:cxnSp>
       <p:sp>
         <p:nvSpPr>
-          <p:cNvPr id="20" name="TextBox 19"/>
-          <p:cNvSpPr txBox="1"/>
-          <p:nvPr/>
-        </p:nvSpPr>
-        <p:spPr>
-          <a:xfrm>
-            <a:off x="6848856" y="1874519"/>
-            <a:ext cx="2788920" cy="292608"/>
-          </a:xfrm>
-          <a:prstGeom prst="rect">
-            <a:avLst/>
-          </a:prstGeom>
-          <a:noFill/>
-        </p:spPr>
-        <p:txBody>
-          <a:bodyPr wrap="square" lIns="0" rIns="0" tIns="0" bIns="0" anchor="ctr">
-            <a:spAutoFit/>
-          </a:bodyPr>
-          <a:lstStyle/>
-          <a:p>
-            <a:pPr algn="ctr"/>
-            <a:r>
-              <a:rPr sz="1150" b="0">
-                <a:solidFill>
-                  <a:srgbClr val="6F6B5E"/>
-                </a:solidFill>
-                <a:latin typeface="Readex Pro"/>
-                <a:cs typeface="Readex Pro"/>
-                <a:ea typeface="Readex Pro"/>
-              </a:rPr>
-              <a:t>AraT5v2 on corpus v1</a:t>
-            </a:r>
-          </a:p>
-        </p:txBody>
-      </p:sp>
-      <p:sp>
-        <p:nvSpPr>
-          <p:cNvPr id="21" name="Rounded Rectangle 20"/>
+          <p:cNvPr id="24" name="Rounded Rectangle 23"/>
           <p:cNvSpPr/>
           <p:nvPr/>
         </p:nvSpPr>
         <p:spPr>
           <a:xfrm>
-            <a:off x="6848856" y="2221991"/>
-            <a:ext cx="2788920" cy="475488"/>
+            <a:off x="7996428" y="2148840"/>
+            <a:ext cx="1481328" cy="1143000"/>
           </a:xfrm>
           <a:prstGeom prst="roundRect">
             <a:avLst>
-              <a:gd name="adj" fmla="val 19230"/>
-            </a:avLst>
-          </a:prstGeom>
-          <a:solidFill>
-            <a:srgbClr val="C6986B"/>
-          </a:solidFill>
-          <a:ln w="15875">
-            <a:solidFill>
-              <a:srgbClr val="C6986B"/>
-            </a:solidFill>
-          </a:ln>
-          <a:effectLst/>
-        </p:spPr>
-        <p:style>
-          <a:lnRef idx="1">
-            <a:schemeClr val="accent1"/>
-          </a:lnRef>
-          <a:fillRef idx="3">
-            <a:schemeClr val="accent1"/>
-          </a:fillRef>
-          <a:effectRef idx="2">
-            <a:schemeClr val="accent1"/>
-          </a:effectRef>
-          <a:fontRef idx="minor">
-            <a:schemeClr val="lt1"/>
-          </a:fontRef>
-        </p:style>
-        <p:txBody>
-          <a:bodyPr rtlCol="0" anchor="ctr" wrap="square" lIns="109728" rIns="109728" tIns="0" bIns="0"/>
-          <a:lstStyle/>
-          <a:p>
-            <a:pPr algn="ctr"/>
-            <a:r>
-              <a:rPr sz="1700" b="1">
-                <a:solidFill>
-                  <a:srgbClr val="1A1A14"/>
-                </a:solidFill>
-                <a:latin typeface="Readex Pro"/>
-                <a:cs typeface="Readex Pro"/>
-                <a:ea typeface="Readex Pro"/>
-              </a:rPr>
-              <a:t>v0.3</a:t>
-            </a:r>
-          </a:p>
-        </p:txBody>
-      </p:sp>
-      <p:sp>
-        <p:nvSpPr>
-          <p:cNvPr id="22" name="Rounded Rectangle 21"/>
-          <p:cNvSpPr/>
-          <p:nvPr/>
-        </p:nvSpPr>
-        <p:spPr>
-          <a:xfrm>
-            <a:off x="6848856" y="2807208"/>
-            <a:ext cx="2788920" cy="1051560"/>
-          </a:xfrm>
-          <a:prstGeom prst="roundRect">
-            <a:avLst>
-              <a:gd name="adj" fmla="val 8695"/>
+              <a:gd name="adj" fmla="val 8000"/>
             </a:avLst>
           </a:prstGeom>
           <a:solidFill>
@@ -13998,96 +15076,23 @@
           </a:fontRef>
         </p:style>
         <p:txBody>
-          <a:bodyPr rtlCol="0" anchor="ctr" wrap="square" lIns="109728" rIns="109728" tIns="0" bIns="0"/>
+          <a:bodyPr rtlCol="0" anchor="ctr"/>
           <a:lstStyle/>
           <a:p>
             <a:pPr algn="ctr"/>
-            <a:r>
-              <a:rPr sz="1200" b="0">
-                <a:solidFill>
-                  <a:srgbClr val="4A4842"/>
-                </a:solidFill>
-                <a:latin typeface="Readex Pro"/>
-                <a:cs typeface="Readex Pro"/>
-                <a:ea typeface="Readex Pro"/>
-              </a:rPr>
-              <a:t>corpus v1, 14,975 rows,</a:t>
-            </a:r>
-          </a:p>
-          <a:p>
-            <a:pPr algn="ctr"/>
-            <a:r>
-              <a:rPr sz="1200" b="0">
-                <a:solidFill>
-                  <a:srgbClr val="4A4842"/>
-                </a:solidFill>
-                <a:latin typeface="Readex Pro"/>
-                <a:cs typeface="Readex Pro"/>
-                <a:ea typeface="Readex Pro"/>
-              </a:rPr>
-              <a:t>no tag</a:t>
-            </a:r>
-          </a:p>
-        </p:txBody>
-      </p:sp>
-      <p:sp>
-        <p:nvSpPr>
-          <p:cNvPr id="23" name="Rounded Rectangle 22"/>
-          <p:cNvSpPr/>
-          <p:nvPr/>
-        </p:nvSpPr>
-        <p:spPr>
-          <a:xfrm>
-            <a:off x="6848856" y="3959352"/>
-            <a:ext cx="2788920" cy="1417320"/>
-          </a:xfrm>
-          <a:prstGeom prst="roundRect">
-            <a:avLst>
-              <a:gd name="adj" fmla="val 6451"/>
-            </a:avLst>
-          </a:prstGeom>
-          <a:solidFill>
-            <a:srgbClr val="F3E2DA"/>
-          </a:solidFill>
-          <a:ln w="15875">
-            <a:solidFill>
-              <a:srgbClr val="F3E2DA"/>
-            </a:solidFill>
-          </a:ln>
-          <a:effectLst/>
-        </p:spPr>
-        <p:style>
-          <a:lnRef idx="1">
-            <a:schemeClr val="accent1"/>
-          </a:lnRef>
-          <a:fillRef idx="3">
-            <a:schemeClr val="accent1"/>
-          </a:fillRef>
-          <a:effectRef idx="2">
-            <a:schemeClr val="accent1"/>
-          </a:effectRef>
-          <a:fontRef idx="minor">
-            <a:schemeClr val="lt1"/>
-          </a:fontRef>
-        </p:style>
-        <p:txBody>
-          <a:bodyPr rtlCol="0" anchor="ctr"/>
-          <a:lstStyle/>
-          <a:p>
-            <a:pPr algn="ctr"/>
-          </a:p>
-        </p:txBody>
-      </p:sp>
-      <p:sp>
-        <p:nvSpPr>
-          <p:cNvPr id="24" name="TextBox 23"/>
+          </a:p>
+        </p:txBody>
+      </p:sp>
+      <p:sp>
+        <p:nvSpPr>
+          <p:cNvPr id="25" name="TextBox 24"/>
           <p:cNvSpPr txBox="1"/>
           <p:nvPr/>
         </p:nvSpPr>
         <p:spPr>
           <a:xfrm>
-            <a:off x="6958584" y="4087368"/>
-            <a:ext cx="2569463" cy="1188720"/>
+            <a:off x="8060436" y="2258568"/>
+            <a:ext cx="1353312" cy="274320"/>
           </a:xfrm>
           <a:prstGeom prst="rect">
             <a:avLst/>
@@ -14100,71 +15105,90 @@
           </a:bodyPr>
           <a:lstStyle/>
           <a:p>
+            <a:pPr algn="ctr"/>
+            <a:r>
+              <a:rPr sz="1200" b="1">
+                <a:solidFill>
+                  <a:srgbClr val="282824"/>
+                </a:solidFill>
+                <a:latin typeface="Readex Pro"/>
+                <a:cs typeface="Readex Pro"/>
+                <a:ea typeface="Readex Pro"/>
+              </a:rPr>
+              <a:t>Measure</a:t>
+            </a:r>
+          </a:p>
+        </p:txBody>
+      </p:sp>
+      <p:sp>
+        <p:nvSpPr>
+          <p:cNvPr id="26" name="TextBox 25"/>
+          <p:cNvSpPr txBox="1"/>
+          <p:nvPr/>
+        </p:nvSpPr>
+        <p:spPr>
+          <a:xfrm>
+            <a:off x="8060436" y="2606040"/>
+            <a:ext cx="1353312" cy="621792"/>
+          </a:xfrm>
+          <a:prstGeom prst="rect">
+            <a:avLst/>
+          </a:prstGeom>
+          <a:noFill/>
+        </p:spPr>
+        <p:txBody>
+          <a:bodyPr wrap="square" lIns="0" rIns="0" tIns="0" bIns="0" anchor="ctr">
+            <a:spAutoFit/>
+          </a:bodyPr>
+          <a:lstStyle/>
+          <a:p>
             <a:pPr algn="ctr">
               <a:lnSpc>
-                <a:spcPct val="108000"/>
+                <a:spcPct val="112000"/>
               </a:lnSpc>
             </a:pPr>
             <a:r>
-              <a:rPr sz="1150" b="0">
-                <a:solidFill>
-                  <a:srgbClr val="B5533C"/>
-                </a:solidFill>
-                <a:latin typeface="Readex Pro"/>
-                <a:cs typeface="Readex Pro"/>
-                <a:ea typeface="Readex Pro"/>
-              </a:rPr>
-              <a:t>Our best: cuts 9.5 words from the</a:t>
+              <a:rPr sz="1050" b="0">
+                <a:solidFill>
+                  <a:srgbClr val="4A4842"/>
+                </a:solidFill>
+                <a:latin typeface="Readex Pro"/>
+                <a:cs typeface="Readex Pro"/>
+                <a:ea typeface="Readex Pro"/>
+              </a:rPr>
+              <a:t>BayanBench v2 ·</a:t>
             </a:r>
           </a:p>
           <a:p>
             <a:pPr algn="ctr">
               <a:lnSpc>
-                <a:spcPct val="108000"/>
+                <a:spcPct val="112000"/>
               </a:lnSpc>
             </a:pPr>
             <a:r>
-              <a:rPr sz="1150" b="0">
-                <a:solidFill>
-                  <a:srgbClr val="B5533C"/>
-                </a:solidFill>
-                <a:latin typeface="Readex Pro"/>
-                <a:cs typeface="Readex Pro"/>
-                <a:ea typeface="Readex Pro"/>
-              </a:rPr>
-              <a:t>longest clause vs 4.5, with about</a:t>
-            </a:r>
-          </a:p>
-          <a:p>
-            <a:pPr algn="ctr">
-              <a:lnSpc>
-                <a:spcPct val="108000"/>
-              </a:lnSpc>
-            </a:pPr>
-            <a:r>
-              <a:rPr sz="1150" b="0">
-                <a:solidFill>
-                  <a:srgbClr val="B5533C"/>
-                </a:solidFill>
-                <a:latin typeface="Readex Pro"/>
-                <a:cs typeface="Readex Pro"/>
-                <a:ea typeface="Readex Pro"/>
-              </a:rPr>
-              <a:t>the same meaning (vs v0.2, no tag).</a:t>
+              <a:rPr sz="1050" b="0">
+                <a:solidFill>
+                  <a:srgbClr val="4A4842"/>
+                </a:solidFill>
+                <a:latin typeface="Readex Pro"/>
+                <a:cs typeface="Readex Pro"/>
+                <a:ea typeface="Readex Pro"/>
+              </a:rPr>
+              <a:t>1,981 items, one scorer</a:t>
             </a:r>
           </a:p>
         </p:txBody>
       </p:sp>
       <p:cxnSp>
         <p:nvCxnSpPr>
-          <p:cNvPr id="25" name="Connector 24"/>
+          <p:cNvPr id="27" name="Connector 26"/>
           <p:cNvCxnSpPr/>
           <p:nvPr/>
         </p:nvCxnSpPr>
         <p:spPr>
           <a:xfrm>
-            <a:off x="6400800" y="2880360"/>
-            <a:ext cx="393192" cy="0"/>
+            <a:off x="7630668" y="2715768"/>
+            <a:ext cx="320040" cy="0"/>
           </a:xfrm>
           <a:prstGeom prst="line">
             <a:avLst/>
@@ -14191,65 +15215,134 @@
           </a:fontRef>
         </p:style>
       </p:cxnSp>
-      <p:sp>
-        <p:nvSpPr>
-          <p:cNvPr id="26" name="TextBox 25"/>
-          <p:cNvSpPr txBox="1"/>
-          <p:nvPr/>
-        </p:nvSpPr>
-        <p:spPr>
-          <a:xfrm>
-            <a:off x="566928" y="5532120"/>
-            <a:ext cx="1463040" cy="256032"/>
-          </a:xfrm>
-          <a:prstGeom prst="rect">
-            <a:avLst/>
-          </a:prstGeom>
-          <a:noFill/>
-        </p:spPr>
-        <p:txBody>
-          <a:bodyPr wrap="square" lIns="0" rIns="0" tIns="0" bIns="0" anchor="ctr">
-            <a:spAutoFit/>
-          </a:bodyPr>
-          <a:lstStyle/>
-          <a:p>
-            <a:pPr algn="l"/>
-            <a:r>
-              <a:rPr sz="1100" b="0">
-                <a:solidFill>
-                  <a:srgbClr val="6F6B5E"/>
-                </a:solidFill>
-                <a:latin typeface="Readex Pro"/>
-                <a:cs typeface="Readex Pro"/>
-                <a:ea typeface="Readex Pro"/>
-              </a:rPr>
-              <a:t>Tried and dropped:</a:t>
-            </a:r>
-          </a:p>
-        </p:txBody>
-      </p:sp>
-      <p:sp>
-        <p:nvSpPr>
-          <p:cNvPr id="27" name="Rounded Rectangle 26"/>
+      <p:cxnSp>
+        <p:nvCxnSpPr>
+          <p:cNvPr id="28" name="Connector 27"/>
+          <p:cNvCxnSpPr/>
+          <p:nvPr/>
+        </p:nvCxnSpPr>
+        <p:spPr>
+          <a:xfrm>
+            <a:off x="8737092" y="3291840"/>
+            <a:ext cx="0" cy="1463040"/>
+          </a:xfrm>
+          <a:prstGeom prst="line">
+            <a:avLst/>
+          </a:prstGeom>
+          <a:ln w="31750">
+            <a:solidFill>
+              <a:srgbClr val="8A5E35"/>
+            </a:solidFill>
+          </a:ln>
+        </p:spPr>
+        <p:style>
+          <a:lnRef idx="2">
+            <a:schemeClr val="accent1"/>
+          </a:lnRef>
+          <a:fillRef idx="0">
+            <a:schemeClr val="accent1"/>
+          </a:fillRef>
+          <a:effectRef idx="1">
+            <a:schemeClr val="accent1"/>
+          </a:effectRef>
+          <a:fontRef idx="minor">
+            <a:schemeClr val="tx1"/>
+          </a:fontRef>
+        </p:style>
+      </p:cxnSp>
+      <p:cxnSp>
+        <p:nvCxnSpPr>
+          <p:cNvPr id="29" name="Connector 28"/>
+          <p:cNvCxnSpPr/>
+          <p:nvPr/>
+        </p:nvCxnSpPr>
+        <p:spPr>
+          <a:xfrm flipH="1">
+            <a:off x="1165860" y="4754880"/>
+            <a:ext cx="7571232" cy="0"/>
+          </a:xfrm>
+          <a:prstGeom prst="line">
+            <a:avLst/>
+          </a:prstGeom>
+          <a:ln w="31750">
+            <a:solidFill>
+              <a:srgbClr val="8A5E35"/>
+            </a:solidFill>
+          </a:ln>
+        </p:spPr>
+        <p:style>
+          <a:lnRef idx="2">
+            <a:schemeClr val="accent1"/>
+          </a:lnRef>
+          <a:fillRef idx="0">
+            <a:schemeClr val="accent1"/>
+          </a:fillRef>
+          <a:effectRef idx="1">
+            <a:schemeClr val="accent1"/>
+          </a:effectRef>
+          <a:fontRef idx="minor">
+            <a:schemeClr val="tx1"/>
+          </a:fontRef>
+        </p:style>
+      </p:cxnSp>
+      <p:cxnSp>
+        <p:nvCxnSpPr>
+          <p:cNvPr id="30" name="Connector 29"/>
+          <p:cNvCxnSpPr/>
+          <p:nvPr/>
+        </p:nvCxnSpPr>
+        <p:spPr>
+          <a:xfrm flipV="1">
+            <a:off x="1165860" y="3291840"/>
+            <a:ext cx="0" cy="1463040"/>
+          </a:xfrm>
+          <a:prstGeom prst="line">
+            <a:avLst/>
+          </a:prstGeom>
+          <a:ln w="31750">
+            <a:solidFill>
+              <a:srgbClr val="8A5E35"/>
+            </a:solidFill>
+            <a:tailEnd type="triangle"/>
+          </a:ln>
+        </p:spPr>
+        <p:style>
+          <a:lnRef idx="2">
+            <a:schemeClr val="accent1"/>
+          </a:lnRef>
+          <a:fillRef idx="0">
+            <a:schemeClr val="accent1"/>
+          </a:fillRef>
+          <a:effectRef idx="1">
+            <a:schemeClr val="accent1"/>
+          </a:effectRef>
+          <a:fontRef idx="minor">
+            <a:schemeClr val="tx1"/>
+          </a:fontRef>
+        </p:style>
+      </p:cxnSp>
+      <p:sp>
+        <p:nvSpPr>
+          <p:cNvPr id="31" name="Rounded Rectangle 30"/>
           <p:cNvSpPr/>
           <p:nvPr/>
         </p:nvSpPr>
         <p:spPr>
           <a:xfrm>
-            <a:off x="2075688" y="5513832"/>
-            <a:ext cx="1375155" cy="330708"/>
+            <a:off x="-9906" y="4617720"/>
+            <a:ext cx="3206496" cy="347472"/>
           </a:xfrm>
           <a:prstGeom prst="roundRect">
             <a:avLst>
-              <a:gd name="adj" fmla="val 24884"/>
+              <a:gd name="adj" fmla="val 23684"/>
             </a:avLst>
           </a:prstGeom>
           <a:solidFill>
-            <a:srgbClr val="EFE9D9"/>
+            <a:srgbClr val="EEDDC7"/>
           </a:solidFill>
           <a:ln w="15875">
             <a:solidFill>
-              <a:srgbClr val="EFE9D9"/>
+              <a:srgbClr val="EEDDC7"/>
             </a:solidFill>
           </a:ln>
           <a:effectLst/>
@@ -14274,41 +15367,41 @@
           <a:p>
             <a:pPr algn="ctr"/>
             <a:r>
-              <a:rPr sz="1100" b="0">
-                <a:solidFill>
-                  <a:srgbClr val="6F6B5E"/>
-                </a:solidFill>
-                <a:latin typeface="Readex Pro"/>
-                <a:cs typeface="Readex Pro"/>
-                <a:ea typeface="Readex Pro"/>
-              </a:rPr>
-              <a:t>student DPO</a:t>
-            </a:r>
-          </a:p>
-        </p:txBody>
-      </p:sp>
-      <p:sp>
-        <p:nvSpPr>
-          <p:cNvPr id="28" name="Rounded Rectangle 27"/>
+              <a:rPr sz="1200" b="1">
+                <a:solidFill>
+                  <a:srgbClr val="8A5E35"/>
+                </a:solidFill>
+                <a:latin typeface="Readex Pro"/>
+                <a:cs typeface="Readex Pro"/>
+                <a:ea typeface="Readex Pro"/>
+              </a:rPr>
+              <a:t>v0.1 · copying wins: 65% unchanged</a:t>
+            </a:r>
+          </a:p>
+        </p:txBody>
+      </p:sp>
+      <p:sp>
+        <p:nvSpPr>
+          <p:cNvPr id="32" name="Rounded Rectangle 31"/>
           <p:cNvSpPr/>
           <p:nvPr/>
         </p:nvSpPr>
         <p:spPr>
           <a:xfrm>
-            <a:off x="3661155" y="5513832"/>
-            <a:ext cx="2026158" cy="330708"/>
+            <a:off x="3726942" y="4617720"/>
+            <a:ext cx="2869692" cy="347472"/>
           </a:xfrm>
           <a:prstGeom prst="roundRect">
             <a:avLst>
-              <a:gd name="adj" fmla="val 24884"/>
+              <a:gd name="adj" fmla="val 23684"/>
             </a:avLst>
           </a:prstGeom>
           <a:solidFill>
-            <a:srgbClr val="EFE9D9"/>
+            <a:srgbClr val="EEDDC7"/>
           </a:solidFill>
           <a:ln w="15875">
             <a:solidFill>
-              <a:srgbClr val="EFE9D9"/>
+              <a:srgbClr val="EEDDC7"/>
             </a:solidFill>
           </a:ln>
           <a:effectLst/>
@@ -14333,41 +15426,41 @@
           <a:p>
             <a:pPr algn="ctr"/>
             <a:r>
-              <a:rPr sz="1100" b="0">
-                <a:solidFill>
-                  <a:srgbClr val="6F6B5E"/>
-                </a:solidFill>
-                <a:latin typeface="Readex Pro"/>
-                <a:cs typeface="Readex Pro"/>
-                <a:ea typeface="Readex Pro"/>
-              </a:rPr>
-              <a:t>minimum-risk training</a:t>
-            </a:r>
-          </a:p>
-        </p:txBody>
-      </p:sp>
-      <p:sp>
-        <p:nvSpPr>
-          <p:cNvPr id="29" name="Rounded Rectangle 28"/>
+              <a:rPr sz="1200" b="1">
+                <a:solidFill>
+                  <a:srgbClr val="8A5E35"/>
+                </a:solidFill>
+                <a:latin typeface="Readex Pro"/>
+                <a:cs typeface="Readex Pro"/>
+                <a:ea typeface="Readex Pro"/>
+              </a:rPr>
+              <a:t>v0.2 · meaning kept 60% / 40%</a:t>
+            </a:r>
+          </a:p>
+        </p:txBody>
+      </p:sp>
+      <p:sp>
+        <p:nvSpPr>
+          <p:cNvPr id="33" name="Rounded Rectangle 32"/>
           <p:cNvSpPr/>
           <p:nvPr/>
         </p:nvSpPr>
         <p:spPr>
           <a:xfrm>
-            <a:off x="5897626" y="5513832"/>
-            <a:ext cx="1552574" cy="330708"/>
+            <a:off x="7126986" y="4617720"/>
+            <a:ext cx="2575560" cy="347472"/>
           </a:xfrm>
           <a:prstGeom prst="roundRect">
             <a:avLst>
-              <a:gd name="adj" fmla="val 24884"/>
+              <a:gd name="adj" fmla="val 23684"/>
             </a:avLst>
           </a:prstGeom>
           <a:solidFill>
-            <a:srgbClr val="EFE9D9"/>
+            <a:srgbClr val="EEDDC7"/>
           </a:solidFill>
           <a:ln w="15875">
             <a:solidFill>
-              <a:srgbClr val="EFE9D9"/>
+              <a:srgbClr val="EEDDC7"/>
             </a:solidFill>
           </a:ln>
           <a:effectLst/>
@@ -14392,15 +15485,52 @@
           <a:p>
             <a:pPr algn="ctr"/>
             <a:r>
-              <a:rPr sz="1100" b="0">
-                <a:solidFill>
-                  <a:srgbClr val="6F6B5E"/>
-                </a:solidFill>
-                <a:latin typeface="Readex Pro"/>
-                <a:cs typeface="Readex Pro"/>
-                <a:ea typeface="Readex Pro"/>
-              </a:rPr>
-              <a:t>fluency retrain</a:t>
+              <a:rPr sz="1200" b="1">
+                <a:solidFill>
+                  <a:srgbClr val="8A5E35"/>
+                </a:solidFill>
+                <a:latin typeface="Readex Pro"/>
+                <a:cs typeface="Readex Pro"/>
+                <a:ea typeface="Readex Pro"/>
+              </a:rPr>
+              <a:t>v0.3 · kept 82% (was 79%)</a:t>
+            </a:r>
+          </a:p>
+        </p:txBody>
+      </p:sp>
+      <p:sp>
+        <p:nvSpPr>
+          <p:cNvPr id="34" name="TextBox 33"/>
+          <p:cNvSpPr txBox="1"/>
+          <p:nvPr/>
+        </p:nvSpPr>
+        <p:spPr>
+          <a:xfrm>
+            <a:off x="566928" y="5349240"/>
+            <a:ext cx="8769096" cy="274320"/>
+          </a:xfrm>
+          <a:prstGeom prst="rect">
+            <a:avLst/>
+          </a:prstGeom>
+          <a:noFill/>
+        </p:spPr>
+        <p:txBody>
+          <a:bodyPr wrap="square" lIns="0" rIns="0" tIns="0" bIns="0" anchor="ctr">
+            <a:spAutoFit/>
+          </a:bodyPr>
+          <a:lstStyle/>
+          <a:p>
+            <a:pPr algn="ctr"/>
+            <a:r>
+              <a:rPr sz="1200" b="1">
+                <a:solidFill>
+                  <a:srgbClr val="8A5E35"/>
+                </a:solidFill>
+                <a:latin typeface="Readex Pro"/>
+                <a:cs typeface="Readex Pro"/>
+                <a:ea typeface="Readex Pro"/>
+              </a:rPr>
+              <a:t>learn · each finding became the next version's data</a:t>
             </a:r>
           </a:p>
         </p:txBody>
@@ -28989,7 +30119,7 @@
                 <a:cs typeface="Readex Pro"/>
                 <a:ea typeface="Readex Pro"/>
               </a:rPr>
-              <a:t>03 · THE PIPELINE</a:t>
+              <a:t>03 · BAYANSIMPLIFY MODELS</a:t>
             </a:r>
           </a:p>
         </p:txBody>
@@ -29026,7 +30156,7 @@
                 <a:cs typeface="Readex Pro"/>
                 <a:ea typeface="Readex Pro"/>
               </a:rPr>
-              <a:t>Build, measure, learn</a:t>
+              <a:t>Each version answered the last failure</a:t>
             </a:r>
           </a:p>
         </p:txBody>
@@ -29131,18 +30261,114 @@
       </p:sp>
       <p:sp>
         <p:nvSpPr>
-          <p:cNvPr id="9" name="Rounded Rectangle 8"/>
+          <p:cNvPr id="9" name="TextBox 8"/>
+          <p:cNvSpPr txBox="1"/>
+          <p:nvPr/>
+        </p:nvSpPr>
+        <p:spPr>
+          <a:xfrm>
+            <a:off x="265176" y="1874519"/>
+            <a:ext cx="2788920" cy="292608"/>
+          </a:xfrm>
+          <a:prstGeom prst="rect">
+            <a:avLst/>
+          </a:prstGeom>
+          <a:noFill/>
+        </p:spPr>
+        <p:txBody>
+          <a:bodyPr wrap="square" lIns="0" rIns="0" tIns="0" bIns="0" anchor="ctr">
+            <a:spAutoFit/>
+          </a:bodyPr>
+          <a:lstStyle/>
+          <a:p>
+            <a:pPr algn="ctr"/>
+            <a:r>
+              <a:rPr sz="1150" b="0">
+                <a:solidFill>
+                  <a:srgbClr val="6F6B5E"/>
+                </a:solidFill>
+                <a:latin typeface="Readex Pro"/>
+                <a:cs typeface="Readex Pro"/>
+                <a:ea typeface="Readex Pro"/>
+              </a:rPr>
+              <a:t>AraT5v2 on SAMER</a:t>
+            </a:r>
+          </a:p>
+        </p:txBody>
+      </p:sp>
+      <p:sp>
+        <p:nvSpPr>
+          <p:cNvPr id="10" name="Rounded Rectangle 9"/>
           <p:cNvSpPr/>
           <p:nvPr/>
         </p:nvSpPr>
         <p:spPr>
           <a:xfrm>
-            <a:off x="425196" y="2148840"/>
-            <a:ext cx="1481328" cy="1143000"/>
+            <a:off x="265176" y="2221991"/>
+            <a:ext cx="2788920" cy="475488"/>
           </a:xfrm>
           <a:prstGeom prst="roundRect">
             <a:avLst>
-              <a:gd name="adj" fmla="val 8000"/>
+              <a:gd name="adj" fmla="val 19230"/>
+            </a:avLst>
+          </a:prstGeom>
+          <a:solidFill>
+            <a:srgbClr val="E6DFCC"/>
+          </a:solidFill>
+          <a:ln w="15875">
+            <a:solidFill>
+              <a:srgbClr val="E6DFCC"/>
+            </a:solidFill>
+          </a:ln>
+          <a:effectLst/>
+        </p:spPr>
+        <p:style>
+          <a:lnRef idx="1">
+            <a:schemeClr val="accent1"/>
+          </a:lnRef>
+          <a:fillRef idx="3">
+            <a:schemeClr val="accent1"/>
+          </a:fillRef>
+          <a:effectRef idx="2">
+            <a:schemeClr val="accent1"/>
+          </a:effectRef>
+          <a:fontRef idx="minor">
+            <a:schemeClr val="lt1"/>
+          </a:fontRef>
+        </p:style>
+        <p:txBody>
+          <a:bodyPr rtlCol="0" anchor="ctr" wrap="square" lIns="109728" rIns="109728" tIns="0" bIns="0"/>
+          <a:lstStyle/>
+          <a:p>
+            <a:pPr algn="ctr"/>
+            <a:r>
+              <a:rPr sz="1700" b="1">
+                <a:solidFill>
+                  <a:srgbClr val="282824"/>
+                </a:solidFill>
+                <a:latin typeface="Readex Pro"/>
+                <a:cs typeface="Readex Pro"/>
+                <a:ea typeface="Readex Pro"/>
+              </a:rPr>
+              <a:t>v0.1</a:t>
+            </a:r>
+          </a:p>
+        </p:txBody>
+      </p:sp>
+      <p:sp>
+        <p:nvSpPr>
+          <p:cNvPr id="11" name="Rounded Rectangle 10"/>
+          <p:cNvSpPr/>
+          <p:nvPr/>
+        </p:nvSpPr>
+        <p:spPr>
+          <a:xfrm>
+            <a:off x="265176" y="2807208"/>
+            <a:ext cx="2788920" cy="1051560"/>
+          </a:xfrm>
+          <a:prstGeom prst="roundRect">
+            <a:avLst>
+              <a:gd name="adj" fmla="val 8695"/>
             </a:avLst>
           </a:prstGeom>
           <a:solidFill>
@@ -29170,79 +30396,26 @@
           </a:fontRef>
         </p:style>
         <p:txBody>
-          <a:bodyPr rtlCol="0" anchor="ctr"/>
+          <a:bodyPr rtlCol="0" anchor="ctr" wrap="square" lIns="109728" rIns="109728" tIns="0" bIns="0"/>
           <a:lstStyle/>
           <a:p>
             <a:pPr algn="ctr"/>
-          </a:p>
-        </p:txBody>
-      </p:sp>
-      <p:sp>
-        <p:nvSpPr>
-          <p:cNvPr id="10" name="TextBox 9"/>
-          <p:cNvSpPr txBox="1"/>
-          <p:nvPr/>
-        </p:nvSpPr>
-        <p:spPr>
-          <a:xfrm>
-            <a:off x="489204" y="2258568"/>
-            <a:ext cx="1353312" cy="274320"/>
-          </a:xfrm>
-          <a:prstGeom prst="rect">
-            <a:avLst/>
-          </a:prstGeom>
-          <a:noFill/>
-        </p:spPr>
-        <p:txBody>
-          <a:bodyPr wrap="square" lIns="0" rIns="0" tIns="0" bIns="0" anchor="ctr">
-            <a:spAutoFit/>
-          </a:bodyPr>
-          <a:lstStyle/>
+            <a:r>
+              <a:rPr sz="1200" b="0">
+                <a:solidFill>
+                  <a:srgbClr val="4A4842"/>
+                </a:solidFill>
+                <a:latin typeface="Readex Pro"/>
+                <a:cs typeface="Readex Pro"/>
+                <a:ea typeface="Readex Pro"/>
+              </a:rPr>
+              <a:t>SAMER level 5 → 3,</a:t>
+            </a:r>
+          </a:p>
           <a:p>
             <a:pPr algn="ctr"/>
             <a:r>
-              <a:rPr sz="1200" b="1">
-                <a:solidFill>
-                  <a:srgbClr val="282824"/>
-                </a:solidFill>
-                <a:latin typeface="Readex Pro"/>
-                <a:cs typeface="Readex Pro"/>
-                <a:ea typeface="Readex Pro"/>
-              </a:rPr>
-              <a:t>Source corpora</a:t>
-            </a:r>
-          </a:p>
-        </p:txBody>
-      </p:sp>
-      <p:sp>
-        <p:nvSpPr>
-          <p:cNvPr id="11" name="TextBox 10"/>
-          <p:cNvSpPr txBox="1"/>
-          <p:nvPr/>
-        </p:nvSpPr>
-        <p:spPr>
-          <a:xfrm>
-            <a:off x="489204" y="2606040"/>
-            <a:ext cx="1353312" cy="621792"/>
-          </a:xfrm>
-          <a:prstGeom prst="rect">
-            <a:avLst/>
-          </a:prstGeom>
-          <a:noFill/>
-        </p:spPr>
-        <p:txBody>
-          <a:bodyPr wrap="square" lIns="0" rIns="0" tIns="0" bIns="0" anchor="ctr">
-            <a:spAutoFit/>
-          </a:bodyPr>
-          <a:lstStyle/>
-          <a:p>
-            <a:pPr algn="ctr">
-              <a:lnSpc>
-                <a:spcPct val="112000"/>
-              </a:lnSpc>
-            </a:pPr>
-            <a:r>
-              <a:rPr sz="1050" b="0">
+              <a:rPr sz="1200" b="0">
                 <a:solidFill>
                   <a:srgbClr val="4A4842"/>
                 </a:solidFill>
@@ -29250,25 +30423,7 @@
                 <a:cs typeface="Readex Pro"/>
                 <a:ea typeface="Readex Pro"/>
               </a:rPr>
-              <a:t>SAMER · DAASI ·</a:t>
-            </a:r>
-          </a:p>
-          <a:p>
-            <a:pPr algn="ctr">
-              <a:lnSpc>
-                <a:spcPct val="112000"/>
-              </a:lnSpc>
-            </a:pPr>
-            <a:r>
-              <a:rPr sz="1050" b="0">
-                <a:solidFill>
-                  <a:srgbClr val="4A4842"/>
-                </a:solidFill>
-                <a:latin typeface="Readex Pro"/>
-                <a:cs typeface="Readex Pro"/>
-                <a:ea typeface="Readex Pro"/>
-              </a:rPr>
-              <a:t>other datasets · BAREC</a:t>
+              <a:t>14,343 pairs</a:t>
             </a:r>
           </a:p>
         </p:txBody>
@@ -29281,12 +30436,12 @@
         </p:nvSpPr>
         <p:spPr>
           <a:xfrm>
-            <a:off x="2318004" y="2148840"/>
-            <a:ext cx="1481328" cy="1143000"/>
+            <a:off x="265176" y="3959352"/>
+            <a:ext cx="2788920" cy="1417320"/>
           </a:xfrm>
           <a:prstGeom prst="roundRect">
             <a:avLst>
-              <a:gd name="adj" fmla="val 8000"/>
+              <a:gd name="adj" fmla="val 6451"/>
             </a:avLst>
           </a:prstGeom>
           <a:solidFill>
@@ -29294,7 +30449,7 @@
           </a:solidFill>
           <a:ln w="15875">
             <a:solidFill>
-              <a:srgbClr val="B5533C"/>
+              <a:srgbClr val="F3E2DA"/>
             </a:solidFill>
           </a:ln>
           <a:effectLst/>
@@ -29329,8 +30484,8 @@
         </p:nvSpPr>
         <p:spPr>
           <a:xfrm>
-            <a:off x="2382012" y="2258568"/>
-            <a:ext cx="1353312" cy="274320"/>
+            <a:off x="374904" y="4087368"/>
+            <a:ext cx="2569463" cy="1188720"/>
           </a:xfrm>
           <a:prstGeom prst="rect">
             <a:avLst/>
@@ -29343,189 +30498,31 @@
           </a:bodyPr>
           <a:lstStyle/>
           <a:p>
-            <a:pPr algn="ctr"/>
-            <a:r>
-              <a:rPr sz="1200" b="1">
-                <a:solidFill>
-                  <a:srgbClr val="B5533C"/>
-                </a:solidFill>
-                <a:latin typeface="Readex Pro"/>
-                <a:cs typeface="Readex Pro"/>
-                <a:ea typeface="Readex Pro"/>
-              </a:rPr>
-              <a:t>Leakage check</a:t>
-            </a:r>
-          </a:p>
-        </p:txBody>
-      </p:sp>
-      <p:sp>
-        <p:nvSpPr>
-          <p:cNvPr id="14" name="TextBox 13"/>
-          <p:cNvSpPr txBox="1"/>
-          <p:nvPr/>
-        </p:nvSpPr>
-        <p:spPr>
-          <a:xfrm>
-            <a:off x="2382012" y="2606040"/>
-            <a:ext cx="1353312" cy="621792"/>
-          </a:xfrm>
-          <a:prstGeom prst="rect">
-            <a:avLst/>
-          </a:prstGeom>
-          <a:noFill/>
-        </p:spPr>
-        <p:txBody>
-          <a:bodyPr wrap="square" lIns="0" rIns="0" tIns="0" bIns="0" anchor="ctr">
-            <a:spAutoFit/>
-          </a:bodyPr>
-          <a:lstStyle/>
-          <a:p>
             <a:pPr algn="ctr">
               <a:lnSpc>
-                <a:spcPct val="112000"/>
+                <a:spcPct val="108000"/>
               </a:lnSpc>
             </a:pPr>
             <a:r>
-              <a:rPr sz="1050" b="0">
-                <a:solidFill>
-                  <a:srgbClr val="4A4842"/>
-                </a:solidFill>
-                <a:latin typeface="Readex Pro"/>
-                <a:cs typeface="Readex Pro"/>
-                <a:ea typeface="Readex Pro"/>
-              </a:rPr>
-              <a:t>exact + 5-gram ·</a:t>
+              <a:rPr sz="1150" b="0">
+                <a:solidFill>
+                  <a:srgbClr val="B5533C"/>
+                </a:solidFill>
+                <a:latin typeface="Readex Pro"/>
+                <a:cs typeface="Readex Pro"/>
+                <a:ea typeface="Readex Pro"/>
+              </a:rPr>
+              <a:t>Returned 65% of rows unchanged</a:t>
             </a:r>
           </a:p>
           <a:p>
             <a:pPr algn="ctr">
               <a:lnSpc>
-                <a:spcPct val="112000"/>
+                <a:spcPct val="108000"/>
               </a:lnSpc>
             </a:pPr>
             <a:r>
-              <a:rPr sz="1050" b="0">
-                <a:solidFill>
-                  <a:srgbClr val="4A4842"/>
-                </a:solidFill>
-                <a:latin typeface="Readex Pro"/>
-                <a:cs typeface="Readex Pro"/>
-                <a:ea typeface="Readex Pro"/>
-              </a:rPr>
-              <a:t>grouped split</a:t>
-            </a:r>
-          </a:p>
-        </p:txBody>
-      </p:sp>
-      <p:cxnSp>
-        <p:nvCxnSpPr>
-          <p:cNvPr id="15" name="Connector 14"/>
-          <p:cNvCxnSpPr/>
-          <p:nvPr/>
-        </p:nvCxnSpPr>
-        <p:spPr>
-          <a:xfrm>
-            <a:off x="1952243" y="2715768"/>
-            <a:ext cx="320041" cy="0"/>
-          </a:xfrm>
-          <a:prstGeom prst="line">
-            <a:avLst/>
-          </a:prstGeom>
-          <a:ln w="31750">
-            <a:solidFill>
-              <a:srgbClr val="C6986B"/>
-            </a:solidFill>
-            <a:tailEnd type="triangle"/>
-          </a:ln>
-        </p:spPr>
-        <p:style>
-          <a:lnRef idx="2">
-            <a:schemeClr val="accent1"/>
-          </a:lnRef>
-          <a:fillRef idx="0">
-            <a:schemeClr val="accent1"/>
-          </a:fillRef>
-          <a:effectRef idx="1">
-            <a:schemeClr val="accent1"/>
-          </a:effectRef>
-          <a:fontRef idx="minor">
-            <a:schemeClr val="tx1"/>
-          </a:fontRef>
-        </p:style>
-      </p:cxnSp>
-      <p:sp>
-        <p:nvSpPr>
-          <p:cNvPr id="16" name="Rounded Rectangle 15"/>
-          <p:cNvSpPr/>
-          <p:nvPr/>
-        </p:nvSpPr>
-        <p:spPr>
-          <a:xfrm>
-            <a:off x="4210812" y="2148840"/>
-            <a:ext cx="1481328" cy="1143000"/>
-          </a:xfrm>
-          <a:prstGeom prst="roundRect">
-            <a:avLst>
-              <a:gd name="adj" fmla="val 8000"/>
-            </a:avLst>
-          </a:prstGeom>
-          <a:solidFill>
-            <a:srgbClr val="F3E2DA"/>
-          </a:solidFill>
-          <a:ln w="15875">
-            <a:solidFill>
-              <a:srgbClr val="B5533C"/>
-            </a:solidFill>
-          </a:ln>
-          <a:effectLst/>
-        </p:spPr>
-        <p:style>
-          <a:lnRef idx="1">
-            <a:schemeClr val="accent1"/>
-          </a:lnRef>
-          <a:fillRef idx="3">
-            <a:schemeClr val="accent1"/>
-          </a:fillRef>
-          <a:effectRef idx="2">
-            <a:schemeClr val="accent1"/>
-          </a:effectRef>
-          <a:fontRef idx="minor">
-            <a:schemeClr val="lt1"/>
-          </a:fontRef>
-        </p:style>
-        <p:txBody>
-          <a:bodyPr rtlCol="0" anchor="ctr"/>
-          <a:lstStyle/>
-          <a:p>
-            <a:pPr algn="ctr"/>
-          </a:p>
-        </p:txBody>
-      </p:sp>
-      <p:sp>
-        <p:nvSpPr>
-          <p:cNvPr id="17" name="TextBox 16"/>
-          <p:cNvSpPr txBox="1"/>
-          <p:nvPr/>
-        </p:nvSpPr>
-        <p:spPr>
-          <a:xfrm>
-            <a:off x="4274820" y="2258568"/>
-            <a:ext cx="1353312" cy="274320"/>
-          </a:xfrm>
-          <a:prstGeom prst="rect">
-            <a:avLst/>
-          </a:prstGeom>
-          <a:noFill/>
-        </p:spPr>
-        <p:txBody>
-          <a:bodyPr wrap="square" lIns="0" rIns="0" tIns="0" bIns="0" anchor="ctr">
-            <a:spAutoFit/>
-          </a:bodyPr>
-          <a:lstStyle/>
-          <a:p>
-            <a:pPr algn="ctr"/>
-            <a:r>
-              <a:rPr sz="1200" b="1">
+              <a:rPr sz="1150" b="0">
                 <a:solidFill>
                   <a:srgbClr val="B5533C"/>
                 </a:solidFill>
@@ -29533,466 +30530,29 @@
                 <a:cs typeface="Readex Pro"/>
                 <a:ea typeface="Readex Pro"/>
               </a:rPr>
-              <a:t>Meaning gate</a:t>
-            </a:r>
-          </a:p>
-        </p:txBody>
-      </p:sp>
-      <p:sp>
-        <p:nvSpPr>
-          <p:cNvPr id="18" name="TextBox 17"/>
-          <p:cNvSpPr txBox="1"/>
-          <p:nvPr/>
-        </p:nvSpPr>
-        <p:spPr>
-          <a:xfrm>
-            <a:off x="4274820" y="2606040"/>
-            <a:ext cx="1353312" cy="621792"/>
-          </a:xfrm>
-          <a:prstGeom prst="rect">
-            <a:avLst/>
-          </a:prstGeom>
-          <a:noFill/>
-        </p:spPr>
-        <p:txBody>
-          <a:bodyPr wrap="square" lIns="0" rIns="0" tIns="0" bIns="0" anchor="ctr">
-            <a:spAutoFit/>
-          </a:bodyPr>
-          <a:lstStyle/>
+              <a:t>(editors: 49%).</a:t>
+            </a:r>
+          </a:p>
           <a:p>
             <a:pPr algn="ctr">
               <a:lnSpc>
-                <a:spcPct val="112000"/>
+                <a:spcPct val="108000"/>
               </a:lnSpc>
             </a:pPr>
             <a:r>
-              <a:rPr sz="1050" b="0">
-                <a:solidFill>
-                  <a:srgbClr val="4A4842"/>
-                </a:solidFill>
-                <a:latin typeface="Readex Pro"/>
-                <a:cs typeface="Readex Pro"/>
-                <a:ea typeface="Readex Pro"/>
-              </a:rPr>
-              <a:t>Qwen judge ≥ 0.85</a:t>
-            </a:r>
-          </a:p>
-          <a:p>
-            <a:pPr algn="ctr">
-              <a:lnSpc>
-                <a:spcPct val="112000"/>
-              </a:lnSpc>
-            </a:pPr>
-            <a:r>
-              <a:rPr sz="1050" b="0">
-                <a:solidFill>
-                  <a:srgbClr val="4A4842"/>
-                </a:solidFill>
-                <a:latin typeface="Readex Pro"/>
-                <a:cs typeface="Readex Pro"/>
-                <a:ea typeface="Readex Pro"/>
-              </a:rPr>
-              <a:t>strength tags [S0]–[SA]</a:t>
-            </a:r>
-          </a:p>
-        </p:txBody>
-      </p:sp>
-      <p:cxnSp>
-        <p:nvCxnSpPr>
-          <p:cNvPr id="19" name="Connector 18"/>
-          <p:cNvCxnSpPr/>
-          <p:nvPr/>
-        </p:nvCxnSpPr>
-        <p:spPr>
-          <a:xfrm>
-            <a:off x="3845052" y="2715768"/>
-            <a:ext cx="320040" cy="0"/>
-          </a:xfrm>
-          <a:prstGeom prst="line">
-            <a:avLst/>
-          </a:prstGeom>
-          <a:ln w="31750">
-            <a:solidFill>
-              <a:srgbClr val="C6986B"/>
-            </a:solidFill>
-            <a:tailEnd type="triangle"/>
-          </a:ln>
-        </p:spPr>
-        <p:style>
-          <a:lnRef idx="2">
-            <a:schemeClr val="accent1"/>
-          </a:lnRef>
-          <a:fillRef idx="0">
-            <a:schemeClr val="accent1"/>
-          </a:fillRef>
-          <a:effectRef idx="1">
-            <a:schemeClr val="accent1"/>
-          </a:effectRef>
-          <a:fontRef idx="minor">
-            <a:schemeClr val="tx1"/>
-          </a:fontRef>
-        </p:style>
-      </p:cxnSp>
-      <p:sp>
-        <p:nvSpPr>
-          <p:cNvPr id="20" name="Rounded Rectangle 19"/>
-          <p:cNvSpPr/>
-          <p:nvPr/>
-        </p:nvSpPr>
-        <p:spPr>
-          <a:xfrm>
-            <a:off x="6103620" y="2148840"/>
-            <a:ext cx="1481328" cy="1143000"/>
-          </a:xfrm>
-          <a:prstGeom prst="roundRect">
-            <a:avLst>
-              <a:gd name="adj" fmla="val 8000"/>
-            </a:avLst>
-          </a:prstGeom>
-          <a:solidFill>
-            <a:srgbClr val="EFE9D9"/>
-          </a:solidFill>
-          <a:ln w="15875">
-            <a:solidFill>
-              <a:srgbClr val="E6DFCC"/>
-            </a:solidFill>
-          </a:ln>
-          <a:effectLst/>
-        </p:spPr>
-        <p:style>
-          <a:lnRef idx="1">
-            <a:schemeClr val="accent1"/>
-          </a:lnRef>
-          <a:fillRef idx="3">
-            <a:schemeClr val="accent1"/>
-          </a:fillRef>
-          <a:effectRef idx="2">
-            <a:schemeClr val="accent1"/>
-          </a:effectRef>
-          <a:fontRef idx="minor">
-            <a:schemeClr val="lt1"/>
-          </a:fontRef>
-        </p:style>
-        <p:txBody>
-          <a:bodyPr rtlCol="0" anchor="ctr"/>
-          <a:lstStyle/>
-          <a:p>
-            <a:pPr algn="ctr"/>
-          </a:p>
-        </p:txBody>
-      </p:sp>
-      <p:sp>
-        <p:nvSpPr>
-          <p:cNvPr id="21" name="TextBox 20"/>
-          <p:cNvSpPr txBox="1"/>
-          <p:nvPr/>
-        </p:nvSpPr>
-        <p:spPr>
-          <a:xfrm>
-            <a:off x="6167628" y="2258568"/>
-            <a:ext cx="1353312" cy="274320"/>
-          </a:xfrm>
-          <a:prstGeom prst="rect">
-            <a:avLst/>
-          </a:prstGeom>
-          <a:noFill/>
-        </p:spPr>
-        <p:txBody>
-          <a:bodyPr wrap="square" lIns="0" rIns="0" tIns="0" bIns="0" anchor="ctr">
-            <a:spAutoFit/>
-          </a:bodyPr>
-          <a:lstStyle/>
-          <a:p>
-            <a:pPr algn="ctr"/>
-            <a:r>
-              <a:rPr sz="1200" b="1">
-                <a:solidFill>
-                  <a:srgbClr val="282824"/>
-                </a:solidFill>
-                <a:latin typeface="Readex Pro"/>
-                <a:cs typeface="Readex Pro"/>
-                <a:ea typeface="Readex Pro"/>
-              </a:rPr>
-              <a:t>Fine-tune</a:t>
-            </a:r>
-          </a:p>
-        </p:txBody>
-      </p:sp>
-      <p:sp>
-        <p:nvSpPr>
-          <p:cNvPr id="22" name="TextBox 21"/>
-          <p:cNvSpPr txBox="1"/>
-          <p:nvPr/>
-        </p:nvSpPr>
-        <p:spPr>
-          <a:xfrm>
-            <a:off x="6167628" y="2606040"/>
-            <a:ext cx="1353312" cy="621792"/>
-          </a:xfrm>
-          <a:prstGeom prst="rect">
-            <a:avLst/>
-          </a:prstGeom>
-          <a:noFill/>
-        </p:spPr>
-        <p:txBody>
-          <a:bodyPr wrap="square" lIns="0" rIns="0" tIns="0" bIns="0" anchor="ctr">
-            <a:spAutoFit/>
-          </a:bodyPr>
-          <a:lstStyle/>
-          <a:p>
-            <a:pPr algn="ctr">
-              <a:lnSpc>
-                <a:spcPct val="112000"/>
-              </a:lnSpc>
-            </a:pPr>
-            <a:r>
-              <a:rPr sz="1050" b="0">
-                <a:solidFill>
-                  <a:srgbClr val="4A4842"/>
-                </a:solidFill>
-                <a:latin typeface="Readex Pro"/>
-                <a:cs typeface="Readex Pro"/>
-                <a:ea typeface="Readex Pro"/>
-              </a:rPr>
-              <a:t>AraT5v2 · AraBART ·</a:t>
-            </a:r>
-          </a:p>
-          <a:p>
-            <a:pPr algn="ctr">
-              <a:lnSpc>
-                <a:spcPct val="112000"/>
-              </a:lnSpc>
-            </a:pPr>
-            <a:r>
-              <a:rPr sz="1050" b="0">
-                <a:solidFill>
-                  <a:srgbClr val="4A4842"/>
-                </a:solidFill>
-                <a:latin typeface="Readex Pro"/>
-                <a:cs typeface="Readex Pro"/>
-                <a:ea typeface="Readex Pro"/>
-              </a:rPr>
-              <a:t>int8 bundle → the phone</a:t>
-            </a:r>
-          </a:p>
-        </p:txBody>
-      </p:sp>
-      <p:cxnSp>
-        <p:nvCxnSpPr>
-          <p:cNvPr id="23" name="Connector 22"/>
-          <p:cNvCxnSpPr/>
-          <p:nvPr/>
-        </p:nvCxnSpPr>
-        <p:spPr>
-          <a:xfrm>
-            <a:off x="5737860" y="2715768"/>
-            <a:ext cx="320040" cy="0"/>
-          </a:xfrm>
-          <a:prstGeom prst="line">
-            <a:avLst/>
-          </a:prstGeom>
-          <a:ln w="31750">
-            <a:solidFill>
-              <a:srgbClr val="C6986B"/>
-            </a:solidFill>
-            <a:tailEnd type="triangle"/>
-          </a:ln>
-        </p:spPr>
-        <p:style>
-          <a:lnRef idx="2">
-            <a:schemeClr val="accent1"/>
-          </a:lnRef>
-          <a:fillRef idx="0">
-            <a:schemeClr val="accent1"/>
-          </a:fillRef>
-          <a:effectRef idx="1">
-            <a:schemeClr val="accent1"/>
-          </a:effectRef>
-          <a:fontRef idx="minor">
-            <a:schemeClr val="tx1"/>
-          </a:fontRef>
-        </p:style>
-      </p:cxnSp>
-      <p:sp>
-        <p:nvSpPr>
-          <p:cNvPr id="24" name="Rounded Rectangle 23"/>
-          <p:cNvSpPr/>
-          <p:nvPr/>
-        </p:nvSpPr>
-        <p:spPr>
-          <a:xfrm>
-            <a:off x="7996428" y="2148840"/>
-            <a:ext cx="1481328" cy="1143000"/>
-          </a:xfrm>
-          <a:prstGeom prst="roundRect">
-            <a:avLst>
-              <a:gd name="adj" fmla="val 8000"/>
-            </a:avLst>
-          </a:prstGeom>
-          <a:solidFill>
-            <a:srgbClr val="EFE9D9"/>
-          </a:solidFill>
-          <a:ln w="15875">
-            <a:solidFill>
-              <a:srgbClr val="E6DFCC"/>
-            </a:solidFill>
-          </a:ln>
-          <a:effectLst/>
-        </p:spPr>
-        <p:style>
-          <a:lnRef idx="1">
-            <a:schemeClr val="accent1"/>
-          </a:lnRef>
-          <a:fillRef idx="3">
-            <a:schemeClr val="accent1"/>
-          </a:fillRef>
-          <a:effectRef idx="2">
-            <a:schemeClr val="accent1"/>
-          </a:effectRef>
-          <a:fontRef idx="minor">
-            <a:schemeClr val="lt1"/>
-          </a:fontRef>
-        </p:style>
-        <p:txBody>
-          <a:bodyPr rtlCol="0" anchor="ctr"/>
-          <a:lstStyle/>
-          <a:p>
-            <a:pPr algn="ctr"/>
-          </a:p>
-        </p:txBody>
-      </p:sp>
-      <p:sp>
-        <p:nvSpPr>
-          <p:cNvPr id="25" name="TextBox 24"/>
-          <p:cNvSpPr txBox="1"/>
-          <p:nvPr/>
-        </p:nvSpPr>
-        <p:spPr>
-          <a:xfrm>
-            <a:off x="8060436" y="2258568"/>
-            <a:ext cx="1353312" cy="274320"/>
-          </a:xfrm>
-          <a:prstGeom prst="rect">
-            <a:avLst/>
-          </a:prstGeom>
-          <a:noFill/>
-        </p:spPr>
-        <p:txBody>
-          <a:bodyPr wrap="square" lIns="0" rIns="0" tIns="0" bIns="0" anchor="ctr">
-            <a:spAutoFit/>
-          </a:bodyPr>
-          <a:lstStyle/>
-          <a:p>
-            <a:pPr algn="ctr"/>
-            <a:r>
-              <a:rPr sz="1200" b="1">
-                <a:solidFill>
-                  <a:srgbClr val="282824"/>
-                </a:solidFill>
-                <a:latin typeface="Readex Pro"/>
-                <a:cs typeface="Readex Pro"/>
-                <a:ea typeface="Readex Pro"/>
-              </a:rPr>
-              <a:t>Measure</a:t>
-            </a:r>
-          </a:p>
-        </p:txBody>
-      </p:sp>
-      <p:sp>
-        <p:nvSpPr>
-          <p:cNvPr id="26" name="TextBox 25"/>
-          <p:cNvSpPr txBox="1"/>
-          <p:nvPr/>
-        </p:nvSpPr>
-        <p:spPr>
-          <a:xfrm>
-            <a:off x="8060436" y="2606040"/>
-            <a:ext cx="1353312" cy="621792"/>
-          </a:xfrm>
-          <a:prstGeom prst="rect">
-            <a:avLst/>
-          </a:prstGeom>
-          <a:noFill/>
-        </p:spPr>
-        <p:txBody>
-          <a:bodyPr wrap="square" lIns="0" rIns="0" tIns="0" bIns="0" anchor="ctr">
-            <a:spAutoFit/>
-          </a:bodyPr>
-          <a:lstStyle/>
-          <a:p>
-            <a:pPr algn="ctr">
-              <a:lnSpc>
-                <a:spcPct val="112000"/>
-              </a:lnSpc>
-            </a:pPr>
-            <a:r>
-              <a:rPr sz="1050" b="0">
-                <a:solidFill>
-                  <a:srgbClr val="4A4842"/>
-                </a:solidFill>
-                <a:latin typeface="Readex Pro"/>
-                <a:cs typeface="Readex Pro"/>
-                <a:ea typeface="Readex Pro"/>
-              </a:rPr>
-              <a:t>BayanBench v2 ·</a:t>
-            </a:r>
-          </a:p>
-          <a:p>
-            <a:pPr algn="ctr">
-              <a:lnSpc>
-                <a:spcPct val="112000"/>
-              </a:lnSpc>
-            </a:pPr>
-            <a:r>
-              <a:rPr sz="1050" b="0">
-                <a:solidFill>
-                  <a:srgbClr val="4A4842"/>
-                </a:solidFill>
-                <a:latin typeface="Readex Pro"/>
-                <a:cs typeface="Readex Pro"/>
-                <a:ea typeface="Readex Pro"/>
-              </a:rPr>
-              <a:t>1,981 items, one scorer</a:t>
-            </a:r>
-          </a:p>
-        </p:txBody>
-      </p:sp>
-      <p:cxnSp>
-        <p:nvCxnSpPr>
-          <p:cNvPr id="27" name="Connector 26"/>
-          <p:cNvCxnSpPr/>
-          <p:nvPr/>
-        </p:nvCxnSpPr>
-        <p:spPr>
-          <a:xfrm>
-            <a:off x="7630668" y="2715768"/>
-            <a:ext cx="320040" cy="0"/>
-          </a:xfrm>
-          <a:prstGeom prst="line">
-            <a:avLst/>
-          </a:prstGeom>
-          <a:ln w="31750">
-            <a:solidFill>
-              <a:srgbClr val="C6986B"/>
-            </a:solidFill>
-            <a:tailEnd type="triangle"/>
-          </a:ln>
-        </p:spPr>
-        <p:style>
-          <a:lnRef idx="2">
-            <a:schemeClr val="accent1"/>
-          </a:lnRef>
-          <a:fillRef idx="0">
-            <a:schemeClr val="accent1"/>
-          </a:fillRef>
-          <a:effectRef idx="1">
-            <a:schemeClr val="accent1"/>
-          </a:effectRef>
-          <a:fontRef idx="minor">
-            <a:schemeClr val="tx1"/>
-          </a:fontRef>
-        </p:style>
-      </p:cxnSp>
+              <a:rPr sz="1150" b="0">
+                <a:solidFill>
+                  <a:srgbClr val="B5533C"/>
+                </a:solidFill>
+                <a:latin typeface="Readex Pro"/>
+                <a:cs typeface="Readex Pro"/>
+                <a:ea typeface="Readex Pro"/>
+              </a:rPr>
+              <a:t>Swapped words, never restructured.</a:t>
+            </a:r>
+          </a:p>
+        </p:txBody>
+      </p:sp>
     </p:spTree>
   </p:cSld>
   <p:clrMapOvr>
@@ -30131,7 +30691,7 @@
                 <a:cs typeface="Readex Pro"/>
                 <a:ea typeface="Readex Pro"/>
               </a:rPr>
-              <a:t>03 · THE PIPELINE</a:t>
+              <a:t>03 · BAYANSIMPLIFY MODELS</a:t>
             </a:r>
           </a:p>
         </p:txBody>
@@ -30168,7 +30728,7 @@
                 <a:cs typeface="Readex Pro"/>
                 <a:ea typeface="Readex Pro"/>
               </a:rPr>
-              <a:t>Build, measure, learn</a:t>
+              <a:t>Each version answered the last failure</a:t>
             </a:r>
           </a:p>
         </p:txBody>
@@ -30273,18 +30833,114 @@
       </p:sp>
       <p:sp>
         <p:nvSpPr>
-          <p:cNvPr id="9" name="Rounded Rectangle 8"/>
+          <p:cNvPr id="9" name="TextBox 8"/>
+          <p:cNvSpPr txBox="1"/>
+          <p:nvPr/>
+        </p:nvSpPr>
+        <p:spPr>
+          <a:xfrm>
+            <a:off x="265176" y="1874519"/>
+            <a:ext cx="2788920" cy="292608"/>
+          </a:xfrm>
+          <a:prstGeom prst="rect">
+            <a:avLst/>
+          </a:prstGeom>
+          <a:noFill/>
+        </p:spPr>
+        <p:txBody>
+          <a:bodyPr wrap="square" lIns="0" rIns="0" tIns="0" bIns="0" anchor="ctr">
+            <a:spAutoFit/>
+          </a:bodyPr>
+          <a:lstStyle/>
+          <a:p>
+            <a:pPr algn="ctr"/>
+            <a:r>
+              <a:rPr sz="1150" b="0">
+                <a:solidFill>
+                  <a:srgbClr val="6F6B5E"/>
+                </a:solidFill>
+                <a:latin typeface="Readex Pro"/>
+                <a:cs typeface="Readex Pro"/>
+                <a:ea typeface="Readex Pro"/>
+              </a:rPr>
+              <a:t>AraT5v2 on SAMER</a:t>
+            </a:r>
+          </a:p>
+        </p:txBody>
+      </p:sp>
+      <p:sp>
+        <p:nvSpPr>
+          <p:cNvPr id="10" name="Rounded Rectangle 9"/>
           <p:cNvSpPr/>
           <p:nvPr/>
         </p:nvSpPr>
         <p:spPr>
           <a:xfrm>
-            <a:off x="425196" y="2148840"/>
-            <a:ext cx="1481328" cy="1143000"/>
+            <a:off x="265176" y="2221991"/>
+            <a:ext cx="2788920" cy="475488"/>
           </a:xfrm>
           <a:prstGeom prst="roundRect">
             <a:avLst>
-              <a:gd name="adj" fmla="val 8000"/>
+              <a:gd name="adj" fmla="val 19230"/>
+            </a:avLst>
+          </a:prstGeom>
+          <a:solidFill>
+            <a:srgbClr val="E6DFCC"/>
+          </a:solidFill>
+          <a:ln w="15875">
+            <a:solidFill>
+              <a:srgbClr val="E6DFCC"/>
+            </a:solidFill>
+          </a:ln>
+          <a:effectLst/>
+        </p:spPr>
+        <p:style>
+          <a:lnRef idx="1">
+            <a:schemeClr val="accent1"/>
+          </a:lnRef>
+          <a:fillRef idx="3">
+            <a:schemeClr val="accent1"/>
+          </a:fillRef>
+          <a:effectRef idx="2">
+            <a:schemeClr val="accent1"/>
+          </a:effectRef>
+          <a:fontRef idx="minor">
+            <a:schemeClr val="lt1"/>
+          </a:fontRef>
+        </p:style>
+        <p:txBody>
+          <a:bodyPr rtlCol="0" anchor="ctr" wrap="square" lIns="109728" rIns="109728" tIns="0" bIns="0"/>
+          <a:lstStyle/>
+          <a:p>
+            <a:pPr algn="ctr"/>
+            <a:r>
+              <a:rPr sz="1700" b="1">
+                <a:solidFill>
+                  <a:srgbClr val="282824"/>
+                </a:solidFill>
+                <a:latin typeface="Readex Pro"/>
+                <a:cs typeface="Readex Pro"/>
+                <a:ea typeface="Readex Pro"/>
+              </a:rPr>
+              <a:t>v0.1</a:t>
+            </a:r>
+          </a:p>
+        </p:txBody>
+      </p:sp>
+      <p:sp>
+        <p:nvSpPr>
+          <p:cNvPr id="11" name="Rounded Rectangle 10"/>
+          <p:cNvSpPr/>
+          <p:nvPr/>
+        </p:nvSpPr>
+        <p:spPr>
+          <a:xfrm>
+            <a:off x="265176" y="2807208"/>
+            <a:ext cx="2788920" cy="1051560"/>
+          </a:xfrm>
+          <a:prstGeom prst="roundRect">
+            <a:avLst>
+              <a:gd name="adj" fmla="val 8695"/>
             </a:avLst>
           </a:prstGeom>
           <a:solidFill>
@@ -30312,79 +30968,26 @@
           </a:fontRef>
         </p:style>
         <p:txBody>
-          <a:bodyPr rtlCol="0" anchor="ctr"/>
+          <a:bodyPr rtlCol="0" anchor="ctr" wrap="square" lIns="109728" rIns="109728" tIns="0" bIns="0"/>
           <a:lstStyle/>
           <a:p>
             <a:pPr algn="ctr"/>
-          </a:p>
-        </p:txBody>
-      </p:sp>
-      <p:sp>
-        <p:nvSpPr>
-          <p:cNvPr id="10" name="TextBox 9"/>
-          <p:cNvSpPr txBox="1"/>
-          <p:nvPr/>
-        </p:nvSpPr>
-        <p:spPr>
-          <a:xfrm>
-            <a:off x="489204" y="2258568"/>
-            <a:ext cx="1353312" cy="274320"/>
-          </a:xfrm>
-          <a:prstGeom prst="rect">
-            <a:avLst/>
-          </a:prstGeom>
-          <a:noFill/>
-        </p:spPr>
-        <p:txBody>
-          <a:bodyPr wrap="square" lIns="0" rIns="0" tIns="0" bIns="0" anchor="ctr">
-            <a:spAutoFit/>
-          </a:bodyPr>
-          <a:lstStyle/>
+            <a:r>
+              <a:rPr sz="1200" b="0">
+                <a:solidFill>
+                  <a:srgbClr val="4A4842"/>
+                </a:solidFill>
+                <a:latin typeface="Readex Pro"/>
+                <a:cs typeface="Readex Pro"/>
+                <a:ea typeface="Readex Pro"/>
+              </a:rPr>
+              <a:t>SAMER level 5 → 3,</a:t>
+            </a:r>
+          </a:p>
           <a:p>
             <a:pPr algn="ctr"/>
             <a:r>
-              <a:rPr sz="1200" b="1">
-                <a:solidFill>
-                  <a:srgbClr val="282824"/>
-                </a:solidFill>
-                <a:latin typeface="Readex Pro"/>
-                <a:cs typeface="Readex Pro"/>
-                <a:ea typeface="Readex Pro"/>
-              </a:rPr>
-              <a:t>Source corpora</a:t>
-            </a:r>
-          </a:p>
-        </p:txBody>
-      </p:sp>
-      <p:sp>
-        <p:nvSpPr>
-          <p:cNvPr id="11" name="TextBox 10"/>
-          <p:cNvSpPr txBox="1"/>
-          <p:nvPr/>
-        </p:nvSpPr>
-        <p:spPr>
-          <a:xfrm>
-            <a:off x="489204" y="2606040"/>
-            <a:ext cx="1353312" cy="621792"/>
-          </a:xfrm>
-          <a:prstGeom prst="rect">
-            <a:avLst/>
-          </a:prstGeom>
-          <a:noFill/>
-        </p:spPr>
-        <p:txBody>
-          <a:bodyPr wrap="square" lIns="0" rIns="0" tIns="0" bIns="0" anchor="ctr">
-            <a:spAutoFit/>
-          </a:bodyPr>
-          <a:lstStyle/>
-          <a:p>
-            <a:pPr algn="ctr">
-              <a:lnSpc>
-                <a:spcPct val="112000"/>
-              </a:lnSpc>
-            </a:pPr>
-            <a:r>
-              <a:rPr sz="1050" b="0">
+              <a:rPr sz="1200" b="0">
                 <a:solidFill>
                   <a:srgbClr val="4A4842"/>
                 </a:solidFill>
@@ -30392,25 +30995,7 @@
                 <a:cs typeface="Readex Pro"/>
                 <a:ea typeface="Readex Pro"/>
               </a:rPr>
-              <a:t>SAMER · DAASI ·</a:t>
-            </a:r>
-          </a:p>
-          <a:p>
-            <a:pPr algn="ctr">
-              <a:lnSpc>
-                <a:spcPct val="112000"/>
-              </a:lnSpc>
-            </a:pPr>
-            <a:r>
-              <a:rPr sz="1050" b="0">
-                <a:solidFill>
-                  <a:srgbClr val="4A4842"/>
-                </a:solidFill>
-                <a:latin typeface="Readex Pro"/>
-                <a:cs typeface="Readex Pro"/>
-                <a:ea typeface="Readex Pro"/>
-              </a:rPr>
-              <a:t>other datasets · BAREC</a:t>
+              <a:t>14,343 pairs</a:t>
             </a:r>
           </a:p>
         </p:txBody>
@@ -30423,12 +31008,12 @@
         </p:nvSpPr>
         <p:spPr>
           <a:xfrm>
-            <a:off x="2318004" y="2148840"/>
-            <a:ext cx="1481328" cy="1143000"/>
+            <a:off x="265176" y="3959352"/>
+            <a:ext cx="2788920" cy="1417320"/>
           </a:xfrm>
           <a:prstGeom prst="roundRect">
             <a:avLst>
-              <a:gd name="adj" fmla="val 8000"/>
+              <a:gd name="adj" fmla="val 6451"/>
             </a:avLst>
           </a:prstGeom>
           <a:solidFill>
@@ -30436,7 +31021,7 @@
           </a:solidFill>
           <a:ln w="15875">
             <a:solidFill>
-              <a:srgbClr val="B5533C"/>
+              <a:srgbClr val="F3E2DA"/>
             </a:solidFill>
           </a:ln>
           <a:effectLst/>
@@ -30471,8 +31056,8 @@
         </p:nvSpPr>
         <p:spPr>
           <a:xfrm>
-            <a:off x="2382012" y="2258568"/>
-            <a:ext cx="1353312" cy="274320"/>
+            <a:off x="374904" y="4087368"/>
+            <a:ext cx="2569463" cy="1188720"/>
           </a:xfrm>
           <a:prstGeom prst="rect">
             <a:avLst/>
@@ -30485,90 +31070,71 @@
           </a:bodyPr>
           <a:lstStyle/>
           <a:p>
-            <a:pPr algn="ctr"/>
-            <a:r>
-              <a:rPr sz="1200" b="1">
-                <a:solidFill>
-                  <a:srgbClr val="B5533C"/>
-                </a:solidFill>
-                <a:latin typeface="Readex Pro"/>
-                <a:cs typeface="Readex Pro"/>
-                <a:ea typeface="Readex Pro"/>
-              </a:rPr>
-              <a:t>Leakage check</a:t>
-            </a:r>
-          </a:p>
-        </p:txBody>
-      </p:sp>
-      <p:sp>
-        <p:nvSpPr>
-          <p:cNvPr id="14" name="TextBox 13"/>
-          <p:cNvSpPr txBox="1"/>
-          <p:nvPr/>
-        </p:nvSpPr>
-        <p:spPr>
-          <a:xfrm>
-            <a:off x="2382012" y="2606040"/>
-            <a:ext cx="1353312" cy="621792"/>
-          </a:xfrm>
-          <a:prstGeom prst="rect">
-            <a:avLst/>
-          </a:prstGeom>
-          <a:noFill/>
-        </p:spPr>
-        <p:txBody>
-          <a:bodyPr wrap="square" lIns="0" rIns="0" tIns="0" bIns="0" anchor="ctr">
-            <a:spAutoFit/>
-          </a:bodyPr>
-          <a:lstStyle/>
-          <a:p>
             <a:pPr algn="ctr">
               <a:lnSpc>
-                <a:spcPct val="112000"/>
+                <a:spcPct val="108000"/>
               </a:lnSpc>
             </a:pPr>
             <a:r>
-              <a:rPr sz="1050" b="0">
-                <a:solidFill>
-                  <a:srgbClr val="4A4842"/>
-                </a:solidFill>
-                <a:latin typeface="Readex Pro"/>
-                <a:cs typeface="Readex Pro"/>
-                <a:ea typeface="Readex Pro"/>
-              </a:rPr>
-              <a:t>exact + 5-gram ·</a:t>
+              <a:rPr sz="1150" b="0">
+                <a:solidFill>
+                  <a:srgbClr val="B5533C"/>
+                </a:solidFill>
+                <a:latin typeface="Readex Pro"/>
+                <a:cs typeface="Readex Pro"/>
+                <a:ea typeface="Readex Pro"/>
+              </a:rPr>
+              <a:t>Returned 65% of rows unchanged</a:t>
             </a:r>
           </a:p>
           <a:p>
             <a:pPr algn="ctr">
               <a:lnSpc>
-                <a:spcPct val="112000"/>
+                <a:spcPct val="108000"/>
               </a:lnSpc>
             </a:pPr>
             <a:r>
-              <a:rPr sz="1050" b="0">
-                <a:solidFill>
-                  <a:srgbClr val="4A4842"/>
-                </a:solidFill>
-                <a:latin typeface="Readex Pro"/>
-                <a:cs typeface="Readex Pro"/>
-                <a:ea typeface="Readex Pro"/>
-              </a:rPr>
-              <a:t>grouped split</a:t>
+              <a:rPr sz="1150" b="0">
+                <a:solidFill>
+                  <a:srgbClr val="B5533C"/>
+                </a:solidFill>
+                <a:latin typeface="Readex Pro"/>
+                <a:cs typeface="Readex Pro"/>
+                <a:ea typeface="Readex Pro"/>
+              </a:rPr>
+              <a:t>(editors: 49%).</a:t>
+            </a:r>
+          </a:p>
+          <a:p>
+            <a:pPr algn="ctr">
+              <a:lnSpc>
+                <a:spcPct val="108000"/>
+              </a:lnSpc>
+            </a:pPr>
+            <a:r>
+              <a:rPr sz="1150" b="0">
+                <a:solidFill>
+                  <a:srgbClr val="B5533C"/>
+                </a:solidFill>
+                <a:latin typeface="Readex Pro"/>
+                <a:cs typeface="Readex Pro"/>
+                <a:ea typeface="Readex Pro"/>
+              </a:rPr>
+              <a:t>Swapped words, never restructured.</a:t>
             </a:r>
           </a:p>
         </p:txBody>
       </p:sp>
       <p:cxnSp>
         <p:nvCxnSpPr>
-          <p:cNvPr id="15" name="Connector 14"/>
+          <p:cNvPr id="14" name="Connector 13"/>
           <p:cNvCxnSpPr/>
           <p:nvPr/>
         </p:nvCxnSpPr>
         <p:spPr>
           <a:xfrm>
-            <a:off x="1952243" y="2715768"/>
-            <a:ext cx="320041" cy="0"/>
+            <a:off x="3108960" y="2880360"/>
+            <a:ext cx="393192" cy="0"/>
           </a:xfrm>
           <a:prstGeom prst="line">
             <a:avLst/>
@@ -30597,26 +31163,63 @@
       </p:cxnSp>
       <p:sp>
         <p:nvSpPr>
+          <p:cNvPr id="15" name="TextBox 14"/>
+          <p:cNvSpPr txBox="1"/>
+          <p:nvPr/>
+        </p:nvSpPr>
+        <p:spPr>
+          <a:xfrm>
+            <a:off x="3557016" y="1874519"/>
+            <a:ext cx="2788920" cy="292608"/>
+          </a:xfrm>
+          <a:prstGeom prst="rect">
+            <a:avLst/>
+          </a:prstGeom>
+          <a:noFill/>
+        </p:spPr>
+        <p:txBody>
+          <a:bodyPr wrap="square" lIns="0" rIns="0" tIns="0" bIns="0" anchor="ctr">
+            <a:spAutoFit/>
+          </a:bodyPr>
+          <a:lstStyle/>
+          <a:p>
+            <a:pPr algn="ctr"/>
+            <a:r>
+              <a:rPr sz="1150" b="1">
+                <a:solidFill>
+                  <a:srgbClr val="8A5E35"/>
+                </a:solidFill>
+                <a:latin typeface="Readex Pro"/>
+                <a:cs typeface="Readex Pro"/>
+                <a:ea typeface="Readex Pro"/>
+              </a:rPr>
+              <a:t>AraT5v2 + AraBART</a:t>
+            </a:r>
+          </a:p>
+        </p:txBody>
+      </p:sp>
+      <p:sp>
+        <p:nvSpPr>
           <p:cNvPr id="16" name="Rounded Rectangle 15"/>
           <p:cNvSpPr/>
           <p:nvPr/>
         </p:nvSpPr>
         <p:spPr>
           <a:xfrm>
-            <a:off x="4210812" y="2148840"/>
-            <a:ext cx="1481328" cy="1143000"/>
+            <a:off x="3557016" y="2221991"/>
+            <a:ext cx="2788920" cy="475488"/>
           </a:xfrm>
           <a:prstGeom prst="roundRect">
             <a:avLst>
-              <a:gd name="adj" fmla="val 8000"/>
+              <a:gd name="adj" fmla="val 19230"/>
             </a:avLst>
           </a:prstGeom>
           <a:solidFill>
-            <a:srgbClr val="F3E2DA"/>
+            <a:srgbClr val="E6DFCC"/>
           </a:solidFill>
           <a:ln w="15875">
             <a:solidFill>
-              <a:srgbClr val="B5533C"/>
+              <a:srgbClr val="E6DFCC"/>
             </a:solidFill>
           </a:ln>
           <a:effectLst/>
@@ -30636,159 +31239,38 @@
           </a:fontRef>
         </p:style>
         <p:txBody>
-          <a:bodyPr rtlCol="0" anchor="ctr"/>
+          <a:bodyPr rtlCol="0" anchor="ctr" wrap="square" lIns="109728" rIns="109728" tIns="0" bIns="0"/>
           <a:lstStyle/>
           <a:p>
             <a:pPr algn="ctr"/>
-          </a:p>
-        </p:txBody>
-      </p:sp>
-      <p:sp>
-        <p:nvSpPr>
-          <p:cNvPr id="17" name="TextBox 16"/>
-          <p:cNvSpPr txBox="1"/>
-          <p:nvPr/>
-        </p:nvSpPr>
-        <p:spPr>
-          <a:xfrm>
-            <a:off x="4274820" y="2258568"/>
-            <a:ext cx="1353312" cy="274320"/>
-          </a:xfrm>
-          <a:prstGeom prst="rect">
-            <a:avLst/>
-          </a:prstGeom>
-          <a:noFill/>
-        </p:spPr>
-        <p:txBody>
-          <a:bodyPr wrap="square" lIns="0" rIns="0" tIns="0" bIns="0" anchor="ctr">
-            <a:spAutoFit/>
-          </a:bodyPr>
-          <a:lstStyle/>
-          <a:p>
-            <a:pPr algn="ctr"/>
-            <a:r>
-              <a:rPr sz="1200" b="1">
-                <a:solidFill>
-                  <a:srgbClr val="B5533C"/>
-                </a:solidFill>
-                <a:latin typeface="Readex Pro"/>
-                <a:cs typeface="Readex Pro"/>
-                <a:ea typeface="Readex Pro"/>
-              </a:rPr>
-              <a:t>Meaning gate</a:t>
-            </a:r>
-          </a:p>
-        </p:txBody>
-      </p:sp>
-      <p:sp>
-        <p:nvSpPr>
-          <p:cNvPr id="18" name="TextBox 17"/>
-          <p:cNvSpPr txBox="1"/>
-          <p:nvPr/>
-        </p:nvSpPr>
-        <p:spPr>
-          <a:xfrm>
-            <a:off x="4274820" y="2606040"/>
-            <a:ext cx="1353312" cy="621792"/>
-          </a:xfrm>
-          <a:prstGeom prst="rect">
-            <a:avLst/>
-          </a:prstGeom>
-          <a:noFill/>
-        </p:spPr>
-        <p:txBody>
-          <a:bodyPr wrap="square" lIns="0" rIns="0" tIns="0" bIns="0" anchor="ctr">
-            <a:spAutoFit/>
-          </a:bodyPr>
-          <a:lstStyle/>
-          <a:p>
-            <a:pPr algn="ctr">
-              <a:lnSpc>
-                <a:spcPct val="112000"/>
-              </a:lnSpc>
-            </a:pPr>
-            <a:r>
-              <a:rPr sz="1050" b="0">
-                <a:solidFill>
-                  <a:srgbClr val="4A4842"/>
-                </a:solidFill>
-                <a:latin typeface="Readex Pro"/>
-                <a:cs typeface="Readex Pro"/>
-                <a:ea typeface="Readex Pro"/>
-              </a:rPr>
-              <a:t>Qwen judge ≥ 0.85</a:t>
-            </a:r>
-          </a:p>
-          <a:p>
-            <a:pPr algn="ctr">
-              <a:lnSpc>
-                <a:spcPct val="112000"/>
-              </a:lnSpc>
-            </a:pPr>
-            <a:r>
-              <a:rPr sz="1050" b="0">
-                <a:solidFill>
-                  <a:srgbClr val="4A4842"/>
-                </a:solidFill>
-                <a:latin typeface="Readex Pro"/>
-                <a:cs typeface="Readex Pro"/>
-                <a:ea typeface="Readex Pro"/>
-              </a:rPr>
-              <a:t>strength tags [S0]–[SA]</a:t>
-            </a:r>
-          </a:p>
-        </p:txBody>
-      </p:sp>
-      <p:cxnSp>
-        <p:nvCxnSpPr>
-          <p:cNvPr id="19" name="Connector 18"/>
-          <p:cNvCxnSpPr/>
-          <p:nvPr/>
-        </p:nvCxnSpPr>
-        <p:spPr>
-          <a:xfrm>
-            <a:off x="3845052" y="2715768"/>
-            <a:ext cx="320040" cy="0"/>
-          </a:xfrm>
-          <a:prstGeom prst="line">
-            <a:avLst/>
-          </a:prstGeom>
-          <a:ln w="31750">
-            <a:solidFill>
-              <a:srgbClr val="C6986B"/>
-            </a:solidFill>
-            <a:tailEnd type="triangle"/>
-          </a:ln>
-        </p:spPr>
-        <p:style>
-          <a:lnRef idx="2">
-            <a:schemeClr val="accent1"/>
-          </a:lnRef>
-          <a:fillRef idx="0">
-            <a:schemeClr val="accent1"/>
-          </a:fillRef>
-          <a:effectRef idx="1">
-            <a:schemeClr val="accent1"/>
-          </a:effectRef>
-          <a:fontRef idx="minor">
-            <a:schemeClr val="tx1"/>
-          </a:fontRef>
-        </p:style>
-      </p:cxnSp>
-      <p:sp>
-        <p:nvSpPr>
-          <p:cNvPr id="20" name="Rounded Rectangle 19"/>
+            <a:r>
+              <a:rPr sz="1700" b="1">
+                <a:solidFill>
+                  <a:srgbClr val="282824"/>
+                </a:solidFill>
+                <a:latin typeface="Readex Pro"/>
+                <a:cs typeface="Readex Pro"/>
+                <a:ea typeface="Readex Pro"/>
+              </a:rPr>
+              <a:t>v0.2</a:t>
+            </a:r>
+          </a:p>
+        </p:txBody>
+      </p:sp>
+      <p:sp>
+        <p:nvSpPr>
+          <p:cNvPr id="17" name="Rounded Rectangle 16"/>
           <p:cNvSpPr/>
           <p:nvPr/>
         </p:nvSpPr>
         <p:spPr>
           <a:xfrm>
-            <a:off x="6103620" y="2148840"/>
-            <a:ext cx="1481328" cy="1143000"/>
+            <a:off x="3557016" y="2807208"/>
+            <a:ext cx="2788920" cy="1051560"/>
           </a:xfrm>
           <a:prstGeom prst="roundRect">
             <a:avLst>
-              <a:gd name="adj" fmla="val 8000"/>
+              <a:gd name="adj" fmla="val 8695"/>
             </a:avLst>
           </a:prstGeom>
           <a:solidFill>
@@ -30816,79 +31298,26 @@
           </a:fontRef>
         </p:style>
         <p:txBody>
-          <a:bodyPr rtlCol="0" anchor="ctr"/>
+          <a:bodyPr rtlCol="0" anchor="ctr" wrap="square" lIns="109728" rIns="109728" tIns="0" bIns="0"/>
           <a:lstStyle/>
           <a:p>
             <a:pPr algn="ctr"/>
-          </a:p>
-        </p:txBody>
-      </p:sp>
-      <p:sp>
-        <p:nvSpPr>
-          <p:cNvPr id="21" name="TextBox 20"/>
-          <p:cNvSpPr txBox="1"/>
-          <p:nvPr/>
-        </p:nvSpPr>
-        <p:spPr>
-          <a:xfrm>
-            <a:off x="6167628" y="2258568"/>
-            <a:ext cx="1353312" cy="274320"/>
-          </a:xfrm>
-          <a:prstGeom prst="rect">
-            <a:avLst/>
-          </a:prstGeom>
-          <a:noFill/>
-        </p:spPr>
-        <p:txBody>
-          <a:bodyPr wrap="square" lIns="0" rIns="0" tIns="0" bIns="0" anchor="ctr">
-            <a:spAutoFit/>
-          </a:bodyPr>
-          <a:lstStyle/>
+            <a:r>
+              <a:rPr sz="1200" b="0">
+                <a:solidFill>
+                  <a:srgbClr val="4A4842"/>
+                </a:solidFill>
+                <a:latin typeface="Readex Pro"/>
+                <a:cs typeface="Readex Pro"/>
+                <a:ea typeface="Readex Pro"/>
+              </a:rPr>
+              <a:t>SAMER + everyday text +</a:t>
+            </a:r>
+          </a:p>
           <a:p>
             <a:pPr algn="ctr"/>
             <a:r>
-              <a:rPr sz="1200" b="1">
-                <a:solidFill>
-                  <a:srgbClr val="282824"/>
-                </a:solidFill>
-                <a:latin typeface="Readex Pro"/>
-                <a:cs typeface="Readex Pro"/>
-                <a:ea typeface="Readex Pro"/>
-              </a:rPr>
-              <a:t>Fine-tune</a:t>
-            </a:r>
-          </a:p>
-        </p:txBody>
-      </p:sp>
-      <p:sp>
-        <p:nvSpPr>
-          <p:cNvPr id="22" name="TextBox 21"/>
-          <p:cNvSpPr txBox="1"/>
-          <p:nvPr/>
-        </p:nvSpPr>
-        <p:spPr>
-          <a:xfrm>
-            <a:off x="6167628" y="2606040"/>
-            <a:ext cx="1353312" cy="621792"/>
-          </a:xfrm>
-          <a:prstGeom prst="rect">
-            <a:avLst/>
-          </a:prstGeom>
-          <a:noFill/>
-        </p:spPr>
-        <p:txBody>
-          <a:bodyPr wrap="square" lIns="0" rIns="0" tIns="0" bIns="0" anchor="ctr">
-            <a:spAutoFit/>
-          </a:bodyPr>
-          <a:lstStyle/>
-          <a:p>
-            <a:pPr algn="ctr">
-              <a:lnSpc>
-                <a:spcPct val="112000"/>
-              </a:lnSpc>
-            </a:pPr>
-            <a:r>
-              <a:rPr sz="1050" b="0">
+              <a:rPr sz="1200" b="0">
                 <a:solidFill>
                   <a:srgbClr val="4A4842"/>
                 </a:solidFill>
@@ -30896,87 +31325,33 @@
                 <a:cs typeface="Readex Pro"/>
                 <a:ea typeface="Readex Pro"/>
               </a:rPr>
-              <a:t>AraT5v2 · AraBART ·</a:t>
-            </a:r>
-          </a:p>
-          <a:p>
-            <a:pPr algn="ctr">
-              <a:lnSpc>
-                <a:spcPct val="112000"/>
-              </a:lnSpc>
-            </a:pPr>
-            <a:r>
-              <a:rPr sz="1050" b="0">
-                <a:solidFill>
-                  <a:srgbClr val="4A4842"/>
-                </a:solidFill>
-                <a:latin typeface="Readex Pro"/>
-                <a:cs typeface="Readex Pro"/>
-                <a:ea typeface="Readex Pro"/>
-              </a:rPr>
-              <a:t>int8 bundle → the phone</a:t>
-            </a:r>
-          </a:p>
-        </p:txBody>
-      </p:sp>
-      <p:cxnSp>
-        <p:nvCxnSpPr>
-          <p:cNvPr id="23" name="Connector 22"/>
-          <p:cNvCxnSpPr/>
-          <p:nvPr/>
-        </p:nvCxnSpPr>
-        <p:spPr>
-          <a:xfrm>
-            <a:off x="5737860" y="2715768"/>
-            <a:ext cx="320040" cy="0"/>
-          </a:xfrm>
-          <a:prstGeom prst="line">
-            <a:avLst/>
-          </a:prstGeom>
-          <a:ln w="31750">
-            <a:solidFill>
-              <a:srgbClr val="C6986B"/>
-            </a:solidFill>
-            <a:tailEnd type="triangle"/>
-          </a:ln>
-        </p:spPr>
-        <p:style>
-          <a:lnRef idx="2">
-            <a:schemeClr val="accent1"/>
-          </a:lnRef>
-          <a:fillRef idx="0">
-            <a:schemeClr val="accent1"/>
-          </a:fillRef>
-          <a:effectRef idx="1">
-            <a:schemeClr val="accent1"/>
-          </a:effectRef>
-          <a:fontRef idx="minor">
-            <a:schemeClr val="tx1"/>
-          </a:fontRef>
-        </p:style>
-      </p:cxnSp>
-      <p:sp>
-        <p:nvSpPr>
-          <p:cNvPr id="24" name="Rounded Rectangle 23"/>
+              <a:t>meaning-filtered pairs + tags</a:t>
+            </a:r>
+          </a:p>
+        </p:txBody>
+      </p:sp>
+      <p:sp>
+        <p:nvSpPr>
+          <p:cNvPr id="18" name="Rounded Rectangle 17"/>
           <p:cNvSpPr/>
           <p:nvPr/>
         </p:nvSpPr>
         <p:spPr>
           <a:xfrm>
-            <a:off x="7996428" y="2148840"/>
-            <a:ext cx="1481328" cy="1143000"/>
+            <a:off x="3557016" y="3959352"/>
+            <a:ext cx="2788920" cy="1417320"/>
           </a:xfrm>
           <a:prstGeom prst="roundRect">
             <a:avLst>
-              <a:gd name="adj" fmla="val 8000"/>
+              <a:gd name="adj" fmla="val 6451"/>
             </a:avLst>
           </a:prstGeom>
           <a:solidFill>
-            <a:srgbClr val="EFE9D9"/>
+            <a:srgbClr val="F3E2DA"/>
           </a:solidFill>
           <a:ln w="15875">
             <a:solidFill>
-              <a:srgbClr val="E6DFCC"/>
+              <a:srgbClr val="F3E2DA"/>
             </a:solidFill>
           </a:ln>
           <a:effectLst/>
@@ -31005,14 +31380,14 @@
       </p:sp>
       <p:sp>
         <p:nvSpPr>
-          <p:cNvPr id="25" name="TextBox 24"/>
+          <p:cNvPr id="19" name="TextBox 18"/>
           <p:cNvSpPr txBox="1"/>
           <p:nvPr/>
         </p:nvSpPr>
         <p:spPr>
           <a:xfrm>
-            <a:off x="8060436" y="2258568"/>
-            <a:ext cx="1353312" cy="274320"/>
+            <a:off x="3666744" y="4087368"/>
+            <a:ext cx="2569463" cy="1188720"/>
           </a:xfrm>
           <a:prstGeom prst="rect">
             <a:avLst/>
@@ -31025,432 +31400,57 @@
           </a:bodyPr>
           <a:lstStyle/>
           <a:p>
-            <a:pPr algn="ctr"/>
-            <a:r>
-              <a:rPr sz="1200" b="1">
-                <a:solidFill>
-                  <a:srgbClr val="282824"/>
-                </a:solidFill>
-                <a:latin typeface="Readex Pro"/>
-                <a:cs typeface="Readex Pro"/>
-                <a:ea typeface="Readex Pro"/>
-              </a:rPr>
-              <a:t>Measure</a:t>
-            </a:r>
-          </a:p>
-        </p:txBody>
-      </p:sp>
-      <p:sp>
-        <p:nvSpPr>
-          <p:cNvPr id="26" name="TextBox 25"/>
-          <p:cNvSpPr txBox="1"/>
-          <p:nvPr/>
-        </p:nvSpPr>
-        <p:spPr>
-          <a:xfrm>
-            <a:off x="8060436" y="2606040"/>
-            <a:ext cx="1353312" cy="621792"/>
-          </a:xfrm>
-          <a:prstGeom prst="rect">
-            <a:avLst/>
-          </a:prstGeom>
-          <a:noFill/>
-        </p:spPr>
-        <p:txBody>
-          <a:bodyPr wrap="square" lIns="0" rIns="0" tIns="0" bIns="0" anchor="ctr">
-            <a:spAutoFit/>
-          </a:bodyPr>
-          <a:lstStyle/>
-          <a:p>
             <a:pPr algn="ctr">
               <a:lnSpc>
-                <a:spcPct val="112000"/>
+                <a:spcPct val="108000"/>
               </a:lnSpc>
             </a:pPr>
             <a:r>
-              <a:rPr sz="1050" b="0">
-                <a:solidFill>
-                  <a:srgbClr val="4A4842"/>
-                </a:solidFill>
-                <a:latin typeface="Readex Pro"/>
-                <a:cs typeface="Readex Pro"/>
-                <a:ea typeface="Readex Pro"/>
-              </a:rPr>
-              <a:t>BayanBench v2 ·</a:t>
+              <a:rPr sz="1150" b="0">
+                <a:solidFill>
+                  <a:srgbClr val="B5533C"/>
+                </a:solidFill>
+                <a:latin typeface="Readex Pro"/>
+                <a:cs typeface="Readex Pro"/>
+                <a:ea typeface="Readex Pro"/>
+              </a:rPr>
+              <a:t>v0.2 keeps the meaning in 60%</a:t>
             </a:r>
           </a:p>
           <a:p>
             <a:pPr algn="ctr">
               <a:lnSpc>
-                <a:spcPct val="112000"/>
+                <a:spcPct val="108000"/>
               </a:lnSpc>
             </a:pPr>
             <a:r>
-              <a:rPr sz="1050" b="0">
-                <a:solidFill>
-                  <a:srgbClr val="4A4842"/>
-                </a:solidFill>
-                <a:latin typeface="Readex Pro"/>
-                <a:cs typeface="Readex Pro"/>
-                <a:ea typeface="Readex Pro"/>
-              </a:rPr>
-              <a:t>1,981 items, one scorer</a:t>
-            </a:r>
-          </a:p>
-        </p:txBody>
-      </p:sp>
-      <p:cxnSp>
-        <p:nvCxnSpPr>
-          <p:cNvPr id="27" name="Connector 26"/>
-          <p:cNvCxnSpPr/>
-          <p:nvPr/>
-        </p:nvCxnSpPr>
-        <p:spPr>
-          <a:xfrm>
-            <a:off x="7630668" y="2715768"/>
-            <a:ext cx="320040" cy="0"/>
-          </a:xfrm>
-          <a:prstGeom prst="line">
-            <a:avLst/>
-          </a:prstGeom>
-          <a:ln w="31750">
-            <a:solidFill>
-              <a:srgbClr val="C6986B"/>
-            </a:solidFill>
-            <a:tailEnd type="triangle"/>
-          </a:ln>
-        </p:spPr>
-        <p:style>
-          <a:lnRef idx="2">
-            <a:schemeClr val="accent1"/>
-          </a:lnRef>
-          <a:fillRef idx="0">
-            <a:schemeClr val="accent1"/>
-          </a:fillRef>
-          <a:effectRef idx="1">
-            <a:schemeClr val="accent1"/>
-          </a:effectRef>
-          <a:fontRef idx="minor">
-            <a:schemeClr val="tx1"/>
-          </a:fontRef>
-        </p:style>
-      </p:cxnSp>
-      <p:cxnSp>
-        <p:nvCxnSpPr>
-          <p:cNvPr id="28" name="Connector 27"/>
-          <p:cNvCxnSpPr/>
-          <p:nvPr/>
-        </p:nvCxnSpPr>
-        <p:spPr>
-          <a:xfrm>
-            <a:off x="8737092" y="3291840"/>
-            <a:ext cx="0" cy="1463040"/>
-          </a:xfrm>
-          <a:prstGeom prst="line">
-            <a:avLst/>
-          </a:prstGeom>
-          <a:ln w="31750">
-            <a:solidFill>
-              <a:srgbClr val="8A5E35"/>
-            </a:solidFill>
-          </a:ln>
-        </p:spPr>
-        <p:style>
-          <a:lnRef idx="2">
-            <a:schemeClr val="accent1"/>
-          </a:lnRef>
-          <a:fillRef idx="0">
-            <a:schemeClr val="accent1"/>
-          </a:fillRef>
-          <a:effectRef idx="1">
-            <a:schemeClr val="accent1"/>
-          </a:effectRef>
-          <a:fontRef idx="minor">
-            <a:schemeClr val="tx1"/>
-          </a:fontRef>
-        </p:style>
-      </p:cxnSp>
-      <p:cxnSp>
-        <p:nvCxnSpPr>
-          <p:cNvPr id="29" name="Connector 28"/>
-          <p:cNvCxnSpPr/>
-          <p:nvPr/>
-        </p:nvCxnSpPr>
-        <p:spPr>
-          <a:xfrm flipH="1">
-            <a:off x="1165860" y="4754880"/>
-            <a:ext cx="7571232" cy="0"/>
-          </a:xfrm>
-          <a:prstGeom prst="line">
-            <a:avLst/>
-          </a:prstGeom>
-          <a:ln w="31750">
-            <a:solidFill>
-              <a:srgbClr val="8A5E35"/>
-            </a:solidFill>
-          </a:ln>
-        </p:spPr>
-        <p:style>
-          <a:lnRef idx="2">
-            <a:schemeClr val="accent1"/>
-          </a:lnRef>
-          <a:fillRef idx="0">
-            <a:schemeClr val="accent1"/>
-          </a:fillRef>
-          <a:effectRef idx="1">
-            <a:schemeClr val="accent1"/>
-          </a:effectRef>
-          <a:fontRef idx="minor">
-            <a:schemeClr val="tx1"/>
-          </a:fontRef>
-        </p:style>
-      </p:cxnSp>
-      <p:cxnSp>
-        <p:nvCxnSpPr>
-          <p:cNvPr id="30" name="Connector 29"/>
-          <p:cNvCxnSpPr/>
-          <p:nvPr/>
-        </p:nvCxnSpPr>
-        <p:spPr>
-          <a:xfrm flipV="1">
-            <a:off x="1165860" y="3291840"/>
-            <a:ext cx="0" cy="1463040"/>
-          </a:xfrm>
-          <a:prstGeom prst="line">
-            <a:avLst/>
-          </a:prstGeom>
-          <a:ln w="31750">
-            <a:solidFill>
-              <a:srgbClr val="8A5E35"/>
-            </a:solidFill>
-            <a:tailEnd type="triangle"/>
-          </a:ln>
-        </p:spPr>
-        <p:style>
-          <a:lnRef idx="2">
-            <a:schemeClr val="accent1"/>
-          </a:lnRef>
-          <a:fillRef idx="0">
-            <a:schemeClr val="accent1"/>
-          </a:fillRef>
-          <a:effectRef idx="1">
-            <a:schemeClr val="accent1"/>
-          </a:effectRef>
-          <a:fontRef idx="minor">
-            <a:schemeClr val="tx1"/>
-          </a:fontRef>
-        </p:style>
-      </p:cxnSp>
-      <p:sp>
-        <p:nvSpPr>
-          <p:cNvPr id="31" name="Rounded Rectangle 30"/>
-          <p:cNvSpPr/>
-          <p:nvPr/>
-        </p:nvSpPr>
-        <p:spPr>
-          <a:xfrm>
-            <a:off x="-9906" y="4617720"/>
-            <a:ext cx="3206496" cy="347472"/>
-          </a:xfrm>
-          <a:prstGeom prst="roundRect">
-            <a:avLst>
-              <a:gd name="adj" fmla="val 23684"/>
-            </a:avLst>
-          </a:prstGeom>
-          <a:solidFill>
-            <a:srgbClr val="EEDDC7"/>
-          </a:solidFill>
-          <a:ln w="15875">
-            <a:solidFill>
-              <a:srgbClr val="EEDDC7"/>
-            </a:solidFill>
-          </a:ln>
-          <a:effectLst/>
-        </p:spPr>
-        <p:style>
-          <a:lnRef idx="1">
-            <a:schemeClr val="accent1"/>
-          </a:lnRef>
-          <a:fillRef idx="3">
-            <a:schemeClr val="accent1"/>
-          </a:fillRef>
-          <a:effectRef idx="2">
-            <a:schemeClr val="accent1"/>
-          </a:effectRef>
-          <a:fontRef idx="minor">
-            <a:schemeClr val="lt1"/>
-          </a:fontRef>
-        </p:style>
-        <p:txBody>
-          <a:bodyPr rtlCol="0" anchor="ctr" wrap="square" lIns="109728" rIns="109728" tIns="0" bIns="0"/>
-          <a:lstStyle/>
-          <a:p>
-            <a:pPr algn="ctr"/>
-            <a:r>
-              <a:rPr sz="1200" b="1">
-                <a:solidFill>
-                  <a:srgbClr val="8A5E35"/>
-                </a:solidFill>
-                <a:latin typeface="Readex Pro"/>
-                <a:cs typeface="Readex Pro"/>
-                <a:ea typeface="Readex Pro"/>
-              </a:rPr>
-              <a:t>v0.1 · copying wins: 65% unchanged</a:t>
-            </a:r>
-          </a:p>
-        </p:txBody>
-      </p:sp>
-      <p:sp>
-        <p:nvSpPr>
-          <p:cNvPr id="32" name="Rounded Rectangle 31"/>
-          <p:cNvSpPr/>
-          <p:nvPr/>
-        </p:nvSpPr>
-        <p:spPr>
-          <a:xfrm>
-            <a:off x="3726942" y="4617720"/>
-            <a:ext cx="2869692" cy="347472"/>
-          </a:xfrm>
-          <a:prstGeom prst="roundRect">
-            <a:avLst>
-              <a:gd name="adj" fmla="val 23684"/>
-            </a:avLst>
-          </a:prstGeom>
-          <a:solidFill>
-            <a:srgbClr val="EEDDC7"/>
-          </a:solidFill>
-          <a:ln w="15875">
-            <a:solidFill>
-              <a:srgbClr val="EEDDC7"/>
-            </a:solidFill>
-          </a:ln>
-          <a:effectLst/>
-        </p:spPr>
-        <p:style>
-          <a:lnRef idx="1">
-            <a:schemeClr val="accent1"/>
-          </a:lnRef>
-          <a:fillRef idx="3">
-            <a:schemeClr val="accent1"/>
-          </a:fillRef>
-          <a:effectRef idx="2">
-            <a:schemeClr val="accent1"/>
-          </a:effectRef>
-          <a:fontRef idx="minor">
-            <a:schemeClr val="lt1"/>
-          </a:fontRef>
-        </p:style>
-        <p:txBody>
-          <a:bodyPr rtlCol="0" anchor="ctr" wrap="square" lIns="109728" rIns="109728" tIns="0" bIns="0"/>
-          <a:lstStyle/>
-          <a:p>
-            <a:pPr algn="ctr"/>
-            <a:r>
-              <a:rPr sz="1200" b="1">
-                <a:solidFill>
-                  <a:srgbClr val="8A5E35"/>
-                </a:solidFill>
-                <a:latin typeface="Readex Pro"/>
-                <a:cs typeface="Readex Pro"/>
-                <a:ea typeface="Readex Pro"/>
-              </a:rPr>
-              <a:t>v0.2 · meaning kept 60% / 40%</a:t>
-            </a:r>
-          </a:p>
-        </p:txBody>
-      </p:sp>
-      <p:sp>
-        <p:nvSpPr>
-          <p:cNvPr id="33" name="Rounded Rectangle 32"/>
-          <p:cNvSpPr/>
-          <p:nvPr/>
-        </p:nvSpPr>
-        <p:spPr>
-          <a:xfrm>
-            <a:off x="7126986" y="4617720"/>
-            <a:ext cx="2575560" cy="347472"/>
-          </a:xfrm>
-          <a:prstGeom prst="roundRect">
-            <a:avLst>
-              <a:gd name="adj" fmla="val 23684"/>
-            </a:avLst>
-          </a:prstGeom>
-          <a:solidFill>
-            <a:srgbClr val="EEDDC7"/>
-          </a:solidFill>
-          <a:ln w="15875">
-            <a:solidFill>
-              <a:srgbClr val="EEDDC7"/>
-            </a:solidFill>
-          </a:ln>
-          <a:effectLst/>
-        </p:spPr>
-        <p:style>
-          <a:lnRef idx="1">
-            <a:schemeClr val="accent1"/>
-          </a:lnRef>
-          <a:fillRef idx="3">
-            <a:schemeClr val="accent1"/>
-          </a:fillRef>
-          <a:effectRef idx="2">
-            <a:schemeClr val="accent1"/>
-          </a:effectRef>
-          <a:fontRef idx="minor">
-            <a:schemeClr val="lt1"/>
-          </a:fontRef>
-        </p:style>
-        <p:txBody>
-          <a:bodyPr rtlCol="0" anchor="ctr" wrap="square" lIns="109728" rIns="109728" tIns="0" bIns="0"/>
-          <a:lstStyle/>
-          <a:p>
-            <a:pPr algn="ctr"/>
-            <a:r>
-              <a:rPr sz="1200" b="1">
-                <a:solidFill>
-                  <a:srgbClr val="8A5E35"/>
-                </a:solidFill>
-                <a:latin typeface="Readex Pro"/>
-                <a:cs typeface="Readex Pro"/>
-                <a:ea typeface="Readex Pro"/>
-              </a:rPr>
-              <a:t>v0.3 · kept 82% (was 79%)</a:t>
-            </a:r>
-          </a:p>
-        </p:txBody>
-      </p:sp>
-      <p:sp>
-        <p:nvSpPr>
-          <p:cNvPr id="34" name="TextBox 33"/>
-          <p:cNvSpPr txBox="1"/>
-          <p:nvPr/>
-        </p:nvSpPr>
-        <p:spPr>
-          <a:xfrm>
-            <a:off x="566928" y="5349240"/>
-            <a:ext cx="8769096" cy="274320"/>
-          </a:xfrm>
-          <a:prstGeom prst="rect">
-            <a:avLst/>
-          </a:prstGeom>
-          <a:noFill/>
-        </p:spPr>
-        <p:txBody>
-          <a:bodyPr wrap="square" lIns="0" rIns="0" tIns="0" bIns="0" anchor="ctr">
-            <a:spAutoFit/>
-          </a:bodyPr>
-          <a:lstStyle/>
-          <a:p>
-            <a:pPr algn="ctr"/>
-            <a:r>
-              <a:rPr sz="1200" b="1">
-                <a:solidFill>
-                  <a:srgbClr val="8A5E35"/>
-                </a:solidFill>
-                <a:latin typeface="Readex Pro"/>
-                <a:cs typeface="Readex Pro"/>
-                <a:ea typeface="Readex Pro"/>
-              </a:rPr>
-              <a:t>learn · each finding became the next version's data</a:t>
+              <a:rPr sz="1150" b="0">
+                <a:solidFill>
+                  <a:srgbClr val="B5533C"/>
+                </a:solidFill>
+                <a:latin typeface="Readex Pro"/>
+                <a:cs typeface="Readex Pro"/>
+                <a:ea typeface="Readex Pro"/>
+              </a:rPr>
+              <a:t>of outputs, v0.2-Fast in 40%.</a:t>
+            </a:r>
+          </a:p>
+          <a:p>
+            <a:pPr algn="ctr">
+              <a:lnSpc>
+                <a:spcPct val="108000"/>
+              </a:lnSpc>
+            </a:pPr>
+            <a:r>
+              <a:rPr sz="1150" b="0">
+                <a:solidFill>
+                  <a:srgbClr val="B5533C"/>
+                </a:solidFill>
+                <a:latin typeface="Readex Pro"/>
+                <a:cs typeface="Readex Pro"/>
+                <a:ea typeface="Readex Pro"/>
+              </a:rPr>
+              <a:t>The tag costs meaning.</a:t>
             </a:r>
           </a:p>
         </p:txBody>
